--- a/templates/09-dashboard-data-dashboard/09__takram.pptx
+++ b/templates/09-dashboard-data-dashboard/09__takram.pptx
@@ -20,6 +20,9 @@
     <p:sldId id="268" r:id="rId19"/>
     <p:sldId id="269" r:id="rId20"/>
     <p:sldId id="270" r:id="rId21"/>
+    <p:sldId id="271" r:id="rId22"/>
+    <p:sldId id="272" r:id="rId23"/>
+    <p:sldId id="273" r:id="rId24"/>
   </p:sldIdLst>
   <p:sldSz cx="12191695" cy="6858000" type="screen4x3"/>
   <p:notesSz cx="6858000" cy="9144000"/>
@@ -3194,13 +3197,57 @@
       </p:sp>
       <p:sp>
         <p:nvSpPr>
-          <p:cNvPr id="4" name="Rectangle 3"/>
+          <p:cNvPr id="4" name="TextBox 3"/>
+          <p:cNvSpPr txBox="1"/>
+          <p:nvPr/>
+        </p:nvSpPr>
+        <p:spPr>
+          <a:xfrm>
+            <a:off x="1097280" y="2377440"/>
+            <a:ext cx="9966960" cy="1463040"/>
+          </a:xfrm>
+          <a:prstGeom prst="rect">
+            <a:avLst/>
+          </a:prstGeom>
+          <a:noFill/>
+        </p:spPr>
+        <p:txBody>
+          <a:bodyPr wrap="square" anchor="t" lIns="0" rIns="0" tIns="0" bIns="0">
+            <a:spAutoFit/>
+          </a:bodyPr>
+          <a:lstStyle/>
+          <a:p>
+            <a:pPr algn="ctr">
+              <a:lnSpc>
+                <a:spcPct val="102000"/>
+              </a:lnSpc>
+              <a:spcAft>
+                <a:spcPts val="400"/>
+              </a:spcAft>
+            </a:pPr>
+            <a:r>
+              <a:rPr sz="4600" b="1" i="0">
+                <a:solidFill>
+                  <a:srgbClr val="2B2B2B"/>
+                </a:solidFill>
+                <a:latin typeface="Segoe UI"/>
+                <a:ea typeface="微软雅黑"/>
+                <a:cs typeface="微软雅黑"/>
+              </a:rPr>
+              <a:t>数据看板与指标</a:t>
+            </a:r>
+          </a:p>
+        </p:txBody>
+      </p:sp>
+      <p:sp>
+        <p:nvSpPr>
+          <p:cNvPr id="5" name="Rectangle 4"/>
           <p:cNvSpPr/>
           <p:nvPr/>
         </p:nvSpPr>
         <p:spPr>
           <a:xfrm>
-            <a:off x="822960" y="1874519"/>
+            <a:off x="5684367" y="3886200"/>
             <a:ext cx="822960" cy="91440"/>
           </a:xfrm>
           <a:prstGeom prst="rect">
@@ -3238,14 +3285,14 @@
       </p:sp>
       <p:sp>
         <p:nvSpPr>
-          <p:cNvPr id="5" name="TextBox 4"/>
+          <p:cNvPr id="6" name="TextBox 5"/>
           <p:cNvSpPr txBox="1"/>
           <p:nvPr/>
         </p:nvSpPr>
         <p:spPr>
           <a:xfrm>
-            <a:off x="822960" y="2194560"/>
-            <a:ext cx="9692640" cy="1463040"/>
+            <a:off x="1097280" y="4114800"/>
+            <a:ext cx="9966960" cy="548640"/>
           </a:xfrm>
           <a:prstGeom prst="rect">
             <a:avLst/>
@@ -3258,51 +3305,7 @@
           </a:bodyPr>
           <a:lstStyle/>
           <a:p>
-            <a:pPr algn="l">
-              <a:lnSpc>
-                <a:spcPct val="102000"/>
-              </a:lnSpc>
-              <a:spcAft>
-                <a:spcPts val="400"/>
-              </a:spcAft>
-            </a:pPr>
-            <a:r>
-              <a:rPr sz="4400" b="1" i="0">
-                <a:solidFill>
-                  <a:srgbClr val="2B2B2B"/>
-                </a:solidFill>
-                <a:latin typeface="Segoe UI"/>
-                <a:ea typeface="微软雅黑"/>
-                <a:cs typeface="微软雅黑"/>
-              </a:rPr>
-              <a:t>数据看板与指标</a:t>
-            </a:r>
-          </a:p>
-        </p:txBody>
-      </p:sp>
-      <p:sp>
-        <p:nvSpPr>
-          <p:cNvPr id="6" name="TextBox 5"/>
-          <p:cNvSpPr txBox="1"/>
-          <p:nvPr/>
-        </p:nvSpPr>
-        <p:spPr>
-          <a:xfrm>
-            <a:off x="822960" y="3794760"/>
-            <a:ext cx="9144000" cy="548640"/>
-          </a:xfrm>
-          <a:prstGeom prst="rect">
-            <a:avLst/>
-          </a:prstGeom>
-          <a:noFill/>
-        </p:spPr>
-        <p:txBody>
-          <a:bodyPr wrap="square" anchor="t" lIns="0" rIns="0" tIns="0" bIns="0">
-            <a:spAutoFit/>
-          </a:bodyPr>
-          <a:lstStyle/>
-          <a:p>
-            <a:pPr algn="l">
+            <a:pPr algn="ctr">
               <a:lnSpc>
                 <a:spcPct val="100000"/>
               </a:lnSpc>
@@ -3319,7 +3322,7 @@
                 <a:ea typeface="微软雅黑"/>
                 <a:cs typeface="微软雅黑"/>
               </a:rPr>
-              <a:t>数据看板 · 在此输入主题</a:t>
+              <a:t>数据看板与指标 · 在此输入副标题 / 项目名称</a:t>
             </a:r>
           </a:p>
         </p:txBody>
@@ -3332,8 +3335,8 @@
         </p:nvSpPr>
         <p:spPr>
           <a:xfrm>
-            <a:off x="822960" y="5394960"/>
-            <a:ext cx="7315200" cy="365760"/>
+            <a:off x="1097280" y="5669280"/>
+            <a:ext cx="9966960" cy="365760"/>
           </a:xfrm>
           <a:prstGeom prst="rect">
             <a:avLst/>
@@ -3346,7 +3349,7 @@
           </a:bodyPr>
           <a:lstStyle/>
           <a:p>
-            <a:pPr algn="l">
+            <a:pPr algn="ctr">
               <a:lnSpc>
                 <a:spcPct val="100000"/>
               </a:lnSpc>
@@ -3363,7 +3366,7 @@
                 <a:ea typeface="微软雅黑"/>
                 <a:cs typeface="微软雅黑"/>
               </a:rPr>
-              <a:t>周期  ·  YYYY-MM-DD</a:t>
+              <a:t>团队 / 姓名  ·  YYYY-MM-DD</a:t>
             </a:r>
           </a:p>
         </p:txBody>
@@ -3373,6 +3376,9 @@
   <p:clrMapOvr>
     <a:masterClrMapping/>
   </p:clrMapOvr>
+  <p:transition spd="med">
+    <p:fade/>
+  </p:transition>
 </p:sld>
 </file>
 
@@ -3469,7 +3475,7 @@
                 <a:ea typeface="微软雅黑"/>
                 <a:cs typeface="微软雅黑"/>
               </a:rPr>
-              <a:t>ACTIONS</a:t>
+              <a:t>DATA</a:t>
             </a:r>
           </a:p>
         </p:txBody>
@@ -3483,7 +3489,7 @@
         <p:spPr>
           <a:xfrm>
             <a:off x="822960" y="868680"/>
-            <a:ext cx="10515600" cy="548640"/>
+            <a:ext cx="10607040" cy="548640"/>
           </a:xfrm>
           <a:prstGeom prst="rect">
             <a:avLst/>
@@ -3645,7 +3651,7 @@
                 <a:ea typeface="微软雅黑"/>
                 <a:cs typeface="微软雅黑"/>
               </a:rPr>
-              <a:t>维度</a:t>
+              <a:t>项目</a:t>
             </a:r>
           </a:p>
         </p:txBody>
@@ -3689,7 +3695,7 @@
                 <a:ea typeface="微软雅黑"/>
                 <a:cs typeface="微软雅黑"/>
               </a:rPr>
-              <a:t>数值</a:t>
+              <a:t>内容</a:t>
             </a:r>
           </a:p>
         </p:txBody>
@@ -3733,7 +3739,7 @@
                 <a:ea typeface="微软雅黑"/>
                 <a:cs typeface="微软雅黑"/>
               </a:rPr>
-              <a:t>变化</a:t>
+              <a:t>备注</a:t>
             </a:r>
           </a:p>
         </p:txBody>
@@ -3857,7 +3863,7 @@
                 <a:ea typeface="微软雅黑"/>
                 <a:cs typeface="微软雅黑"/>
               </a:rPr>
-              <a:t>维度一</a:t>
+              <a:t>项一</a:t>
             </a:r>
           </a:p>
         </p:txBody>
@@ -3901,7 +3907,7 @@
                 <a:ea typeface="微软雅黑"/>
                 <a:cs typeface="微软雅黑"/>
               </a:rPr>
-              <a:t>在此填数值</a:t>
+              <a:t>在此填内容</a:t>
             </a:r>
           </a:p>
         </p:txBody>
@@ -3945,7 +3951,7 @@
                 <a:ea typeface="微软雅黑"/>
                 <a:cs typeface="微软雅黑"/>
               </a:rPr>
-              <a:t>在此填变化</a:t>
+              <a:t>在此填备注</a:t>
             </a:r>
           </a:p>
         </p:txBody>
@@ -4025,7 +4031,7 @@
                 <a:ea typeface="微软雅黑"/>
                 <a:cs typeface="微软雅黑"/>
               </a:rPr>
-              <a:t>维度二</a:t>
+              <a:t>项二</a:t>
             </a:r>
           </a:p>
         </p:txBody>
@@ -4069,7 +4075,7 @@
                 <a:ea typeface="微软雅黑"/>
                 <a:cs typeface="微软雅黑"/>
               </a:rPr>
-              <a:t>在此填数值</a:t>
+              <a:t>在此填内容</a:t>
             </a:r>
           </a:p>
         </p:txBody>
@@ -4113,7 +4119,7 @@
                 <a:ea typeface="微软雅黑"/>
                 <a:cs typeface="微软雅黑"/>
               </a:rPr>
-              <a:t>在此填变化</a:t>
+              <a:t>在此填备注</a:t>
             </a:r>
           </a:p>
         </p:txBody>
@@ -4237,7 +4243,7 @@
                 <a:ea typeface="微软雅黑"/>
                 <a:cs typeface="微软雅黑"/>
               </a:rPr>
-              <a:t>维度三</a:t>
+              <a:t>项三</a:t>
             </a:r>
           </a:p>
         </p:txBody>
@@ -4281,7 +4287,7 @@
                 <a:ea typeface="微软雅黑"/>
                 <a:cs typeface="微软雅黑"/>
               </a:rPr>
-              <a:t>在此填数值</a:t>
+              <a:t>在此填内容</a:t>
             </a:r>
           </a:p>
         </p:txBody>
@@ -4325,7 +4331,7 @@
                 <a:ea typeface="微软雅黑"/>
                 <a:cs typeface="微软雅黑"/>
               </a:rPr>
-              <a:t>在此填变化</a:t>
+              <a:t>在此填备注</a:t>
             </a:r>
           </a:p>
         </p:txBody>
@@ -4383,7 +4389,7 @@
         <p:spPr>
           <a:xfrm>
             <a:off x="822960" y="6355080"/>
-            <a:ext cx="6400800" cy="274320"/>
+            <a:ext cx="6583680" cy="274320"/>
           </a:xfrm>
           <a:prstGeom prst="rect">
             <a:avLst/>
@@ -4423,6 +4429,9 @@
   <p:clrMapOvr>
     <a:masterClrMapping/>
   </p:clrMapOvr>
+  <p:transition spd="med">
+    <p:fade/>
+  </p:transition>
 </p:sld>
 </file>
 
@@ -4519,7 +4528,7 @@
                 <a:ea typeface="微软雅黑"/>
                 <a:cs typeface="微软雅黑"/>
               </a:rPr>
-              <a:t>KPIS</a:t>
+              <a:t>KEY POINTS</a:t>
             </a:r>
           </a:p>
         </p:txBody>
@@ -4533,7 +4542,7 @@
         <p:spPr>
           <a:xfrm>
             <a:off x="822960" y="868680"/>
-            <a:ext cx="10515600" cy="548640"/>
+            <a:ext cx="10607040" cy="548640"/>
           </a:xfrm>
           <a:prstGeom prst="rect">
             <a:avLst/>
@@ -5211,7 +5220,7 @@
         <p:spPr>
           <a:xfrm>
             <a:off x="822960" y="6355080"/>
-            <a:ext cx="6400800" cy="274320"/>
+            <a:ext cx="6583680" cy="274320"/>
           </a:xfrm>
           <a:prstGeom prst="rect">
             <a:avLst/>
@@ -5251,6 +5260,9 @@
   <p:clrMapOvr>
     <a:masterClrMapping/>
   </p:clrMapOvr>
+  <p:transition spd="med">
+    <p:fade/>
+  </p:transition>
 </p:sld>
 </file>
 
@@ -5583,7 +5595,7 @@
         <p:spPr>
           <a:xfrm>
             <a:off x="822960" y="6355080"/>
-            <a:ext cx="6400800" cy="274320"/>
+            <a:ext cx="6583680" cy="274320"/>
           </a:xfrm>
           <a:prstGeom prst="rect">
             <a:avLst/>
@@ -5623,6 +5635,9 @@
   <p:clrMapOvr>
     <a:masterClrMapping/>
   </p:clrMapOvr>
+  <p:transition spd="med">
+    <p:fade/>
+  </p:transition>
 </p:sld>
 </file>
 
@@ -5897,7 +5912,7 @@
                 <a:ea typeface="微软雅黑"/>
                 <a:cs typeface="微软雅黑"/>
               </a:rPr>
-              <a:t>— 分析</a:t>
+              <a:t>— 署名 / 出处</a:t>
             </a:r>
           </a:p>
         </p:txBody>
@@ -5955,7 +5970,7 @@
         <p:spPr>
           <a:xfrm>
             <a:off x="822960" y="6355080"/>
-            <a:ext cx="6400800" cy="274320"/>
+            <a:ext cx="6583680" cy="274320"/>
           </a:xfrm>
           <a:prstGeom prst="rect">
             <a:avLst/>
@@ -5995,6 +6010,9 @@
   <p:clrMapOvr>
     <a:masterClrMapping/>
   </p:clrMapOvr>
+  <p:transition spd="med">
+    <p:fade/>
+  </p:transition>
 </p:sld>
 </file>
 
@@ -6091,7 +6109,7 @@
                 <a:ea typeface="微软雅黑"/>
                 <a:cs typeface="微软雅黑"/>
               </a:rPr>
-              <a:t>ACTIONS</a:t>
+              <a:t>TEAM</a:t>
             </a:r>
           </a:p>
         </p:txBody>
@@ -6105,7 +6123,7 @@
         <p:spPr>
           <a:xfrm>
             <a:off x="822960" y="868680"/>
-            <a:ext cx="10515600" cy="548640"/>
+            <a:ext cx="10607040" cy="548640"/>
           </a:xfrm>
           <a:prstGeom prst="rect">
             <a:avLst/>
@@ -6193,7 +6211,7 @@
         <p:spPr>
           <a:xfrm>
             <a:off x="822960" y="2286000"/>
-            <a:ext cx="5112867" cy="3291840"/>
+            <a:ext cx="3301898" cy="3291840"/>
           </a:xfrm>
           <a:prstGeom prst="roundRect">
             <a:avLst>
@@ -6240,7 +6258,7 @@
         </p:nvSpPr>
         <p:spPr>
           <a:xfrm>
-            <a:off x="2785033" y="2697480"/>
+            <a:off x="1879549" y="2697480"/>
             <a:ext cx="1188720" cy="1188720"/>
           </a:xfrm>
           <a:prstGeom prst="ellipse">
@@ -6284,7 +6302,7 @@
         </p:nvSpPr>
         <p:spPr>
           <a:xfrm>
-            <a:off x="2785033" y="2697480"/>
+            <a:off x="1879549" y="2697480"/>
             <a:ext cx="1188720" cy="1188720"/>
           </a:xfrm>
           <a:prstGeom prst="rect">
@@ -6329,7 +6347,7 @@
         <p:spPr>
           <a:xfrm>
             <a:off x="1005840" y="4114800"/>
-            <a:ext cx="4747107" cy="365760"/>
+            <a:ext cx="2936138" cy="365760"/>
           </a:xfrm>
           <a:prstGeom prst="rect">
             <a:avLst/>
@@ -6373,7 +6391,7 @@
         <p:spPr>
           <a:xfrm>
             <a:off x="1005840" y="4526280"/>
-            <a:ext cx="4747107" cy="365760"/>
+            <a:ext cx="2936138" cy="365760"/>
           </a:xfrm>
           <a:prstGeom prst="rect">
             <a:avLst/>
@@ -6403,7 +6421,7 @@
                 <a:ea typeface="微软雅黑"/>
                 <a:cs typeface="微软雅黑"/>
               </a:rPr>
-              <a:t>数据</a:t>
+              <a:t>角色一</a:t>
             </a:r>
           </a:p>
         </p:txBody>
@@ -6416,8 +6434,8 @@
         </p:nvSpPr>
         <p:spPr>
           <a:xfrm>
-            <a:off x="6255867" y="2286000"/>
-            <a:ext cx="5112867" cy="3291840"/>
+            <a:off x="4444898" y="2286000"/>
+            <a:ext cx="3301898" cy="3291840"/>
           </a:xfrm>
           <a:prstGeom prst="roundRect">
             <a:avLst>
@@ -6464,7 +6482,7 @@
         </p:nvSpPr>
         <p:spPr>
           <a:xfrm>
-            <a:off x="8217941" y="2697480"/>
+            <a:off x="5501487" y="2697480"/>
             <a:ext cx="1188720" cy="1188720"/>
           </a:xfrm>
           <a:prstGeom prst="ellipse">
@@ -6508,7 +6526,7 @@
         </p:nvSpPr>
         <p:spPr>
           <a:xfrm>
-            <a:off x="8217941" y="2697480"/>
+            <a:off x="5501487" y="2697480"/>
             <a:ext cx="1188720" cy="1188720"/>
           </a:xfrm>
           <a:prstGeom prst="rect">
@@ -6552,8 +6570,8 @@
         </p:nvSpPr>
         <p:spPr>
           <a:xfrm>
-            <a:off x="6438747" y="4114800"/>
-            <a:ext cx="4747107" cy="365760"/>
+            <a:off x="4627778" y="4114800"/>
+            <a:ext cx="2936138" cy="365760"/>
           </a:xfrm>
           <a:prstGeom prst="rect">
             <a:avLst/>
@@ -6596,8 +6614,8 @@
         </p:nvSpPr>
         <p:spPr>
           <a:xfrm>
-            <a:off x="6438747" y="4526280"/>
-            <a:ext cx="4747107" cy="365760"/>
+            <a:off x="4627778" y="4526280"/>
+            <a:ext cx="2936138" cy="365760"/>
           </a:xfrm>
           <a:prstGeom prst="rect">
             <a:avLst/>
@@ -6627,23 +6645,71 @@
                 <a:ea typeface="微软雅黑"/>
                 <a:cs typeface="微软雅黑"/>
               </a:rPr>
-              <a:t>业务</a:t>
-            </a:r>
-          </a:p>
-        </p:txBody>
-      </p:sp>
-      <p:sp>
-        <p:nvSpPr>
-          <p:cNvPr id="16" name="Rectangle 15"/>
+              <a:t>角色二</a:t>
+            </a:r>
+          </a:p>
+        </p:txBody>
+      </p:sp>
+      <p:sp>
+        <p:nvSpPr>
+          <p:cNvPr id="16" name="Rounded Rectangle 15"/>
           <p:cNvSpPr/>
           <p:nvPr/>
         </p:nvSpPr>
         <p:spPr>
           <a:xfrm>
-            <a:off x="822960" y="6291072"/>
-            <a:ext cx="10545775" cy="7315"/>
-          </a:xfrm>
-          <a:prstGeom prst="rect">
+            <a:off x="8066836" y="2286000"/>
+            <a:ext cx="3301898" cy="3291840"/>
+          </a:xfrm>
+          <a:prstGeom prst="roundRect">
+            <a:avLst>
+              <a:gd name="adj" fmla="val 24000"/>
+            </a:avLst>
+          </a:prstGeom>
+          <a:solidFill>
+            <a:srgbClr val="FFFFFF"/>
+          </a:solidFill>
+          <a:ln w="9525">
+            <a:solidFill>
+              <a:srgbClr val="E4E0D8"/>
+            </a:solidFill>
+          </a:ln>
+          <a:effectLst/>
+        </p:spPr>
+        <p:style>
+          <a:lnRef idx="1">
+            <a:schemeClr val="accent1"/>
+          </a:lnRef>
+          <a:fillRef idx="3">
+            <a:schemeClr val="accent1"/>
+          </a:fillRef>
+          <a:effectRef idx="2">
+            <a:schemeClr val="accent1"/>
+          </a:effectRef>
+          <a:fontRef idx="minor">
+            <a:schemeClr val="lt1"/>
+          </a:fontRef>
+        </p:style>
+        <p:txBody>
+          <a:bodyPr rtlCol="0" anchor="ctr"/>
+          <a:lstStyle/>
+          <a:p>
+            <a:pPr algn="ctr"/>
+          </a:p>
+        </p:txBody>
+      </p:sp>
+      <p:sp>
+        <p:nvSpPr>
+          <p:cNvPr id="17" name="Oval 16"/>
+          <p:cNvSpPr/>
+          <p:nvPr/>
+        </p:nvSpPr>
+        <p:spPr>
+          <a:xfrm>
+            <a:off x="9123426" y="2697480"/>
+            <a:ext cx="1188720" cy="1188720"/>
+          </a:xfrm>
+          <a:prstGeom prst="ellipse">
             <a:avLst/>
           </a:prstGeom>
           <a:solidFill>
@@ -6678,14 +6744,190 @@
       </p:sp>
       <p:sp>
         <p:nvSpPr>
-          <p:cNvPr id="17" name="TextBox 16"/>
+          <p:cNvPr id="18" name="TextBox 17"/>
           <p:cNvSpPr txBox="1"/>
           <p:nvPr/>
         </p:nvSpPr>
         <p:spPr>
           <a:xfrm>
+            <a:off x="9123426" y="2697480"/>
+            <a:ext cx="1188720" cy="1188720"/>
+          </a:xfrm>
+          <a:prstGeom prst="rect">
+            <a:avLst/>
+          </a:prstGeom>
+          <a:noFill/>
+        </p:spPr>
+        <p:txBody>
+          <a:bodyPr wrap="square" anchor="ctr" lIns="0" rIns="0" tIns="0" bIns="0">
+            <a:spAutoFit/>
+          </a:bodyPr>
+          <a:lstStyle/>
+          <a:p>
+            <a:pPr algn="ctr">
+              <a:lnSpc>
+                <a:spcPct val="100000"/>
+              </a:lnSpc>
+              <a:spcAft>
+                <a:spcPts val="400"/>
+              </a:spcAft>
+            </a:pPr>
+            <a:r>
+              <a:rPr sz="1100" b="0" i="0">
+                <a:solidFill>
+                  <a:srgbClr val="9A9A93"/>
+                </a:solidFill>
+                <a:latin typeface="Segoe UI"/>
+                <a:ea typeface="微软雅黑"/>
+                <a:cs typeface="微软雅黑"/>
+              </a:rPr>
+              <a:t>头像</a:t>
+            </a:r>
+          </a:p>
+        </p:txBody>
+      </p:sp>
+      <p:sp>
+        <p:nvSpPr>
+          <p:cNvPr id="19" name="TextBox 18"/>
+          <p:cNvSpPr txBox="1"/>
+          <p:nvPr/>
+        </p:nvSpPr>
+        <p:spPr>
+          <a:xfrm>
+            <a:off x="8249716" y="4114800"/>
+            <a:ext cx="2936138" cy="365760"/>
+          </a:xfrm>
+          <a:prstGeom prst="rect">
+            <a:avLst/>
+          </a:prstGeom>
+          <a:noFill/>
+        </p:spPr>
+        <p:txBody>
+          <a:bodyPr wrap="square" anchor="t" lIns="0" rIns="0" tIns="0" bIns="0">
+            <a:spAutoFit/>
+          </a:bodyPr>
+          <a:lstStyle/>
+          <a:p>
+            <a:pPr algn="ctr">
+              <a:lnSpc>
+                <a:spcPct val="100000"/>
+              </a:lnSpc>
+              <a:spcAft>
+                <a:spcPts val="400"/>
+              </a:spcAft>
+            </a:pPr>
+            <a:r>
+              <a:rPr sz="1500" b="1" i="0">
+                <a:solidFill>
+                  <a:srgbClr val="2B2B2B"/>
+                </a:solidFill>
+                <a:latin typeface="Segoe UI"/>
+                <a:ea typeface="微软雅黑"/>
+                <a:cs typeface="微软雅黑"/>
+              </a:rPr>
+              <a:t>姓名</a:t>
+            </a:r>
+          </a:p>
+        </p:txBody>
+      </p:sp>
+      <p:sp>
+        <p:nvSpPr>
+          <p:cNvPr id="20" name="TextBox 19"/>
+          <p:cNvSpPr txBox="1"/>
+          <p:nvPr/>
+        </p:nvSpPr>
+        <p:spPr>
+          <a:xfrm>
+            <a:off x="8249716" y="4526280"/>
+            <a:ext cx="2936138" cy="365760"/>
+          </a:xfrm>
+          <a:prstGeom prst="rect">
+            <a:avLst/>
+          </a:prstGeom>
+          <a:noFill/>
+        </p:spPr>
+        <p:txBody>
+          <a:bodyPr wrap="square" anchor="t" lIns="0" rIns="0" tIns="0" bIns="0">
+            <a:spAutoFit/>
+          </a:bodyPr>
+          <a:lstStyle/>
+          <a:p>
+            <a:pPr algn="ctr">
+              <a:lnSpc>
+                <a:spcPct val="100000"/>
+              </a:lnSpc>
+              <a:spcAft>
+                <a:spcPts val="400"/>
+              </a:spcAft>
+            </a:pPr>
+            <a:r>
+              <a:rPr sz="1200" b="0" i="0">
+                <a:solidFill>
+                  <a:srgbClr val="3FA88C"/>
+                </a:solidFill>
+                <a:latin typeface="Segoe UI"/>
+                <a:ea typeface="微软雅黑"/>
+                <a:cs typeface="微软雅黑"/>
+              </a:rPr>
+              <a:t>角色三</a:t>
+            </a:r>
+          </a:p>
+        </p:txBody>
+      </p:sp>
+      <p:sp>
+        <p:nvSpPr>
+          <p:cNvPr id="21" name="Rectangle 20"/>
+          <p:cNvSpPr/>
+          <p:nvPr/>
+        </p:nvSpPr>
+        <p:spPr>
+          <a:xfrm>
+            <a:off x="822960" y="6291072"/>
+            <a:ext cx="10545775" cy="7315"/>
+          </a:xfrm>
+          <a:prstGeom prst="rect">
+            <a:avLst/>
+          </a:prstGeom>
+          <a:solidFill>
+            <a:srgbClr val="E4E0D8"/>
+          </a:solidFill>
+          <a:ln>
+            <a:noFill/>
+          </a:ln>
+          <a:effectLst/>
+        </p:spPr>
+        <p:style>
+          <a:lnRef idx="1">
+            <a:schemeClr val="accent1"/>
+          </a:lnRef>
+          <a:fillRef idx="3">
+            <a:schemeClr val="accent1"/>
+          </a:fillRef>
+          <a:effectRef idx="2">
+            <a:schemeClr val="accent1"/>
+          </a:effectRef>
+          <a:fontRef idx="minor">
+            <a:schemeClr val="lt1"/>
+          </a:fontRef>
+        </p:style>
+        <p:txBody>
+          <a:bodyPr rtlCol="0" anchor="ctr"/>
+          <a:lstStyle/>
+          <a:p>
+            <a:pPr algn="ctr"/>
+          </a:p>
+        </p:txBody>
+      </p:sp>
+      <p:sp>
+        <p:nvSpPr>
+          <p:cNvPr id="22" name="TextBox 21"/>
+          <p:cNvSpPr txBox="1"/>
+          <p:nvPr/>
+        </p:nvSpPr>
+        <p:spPr>
+          <a:xfrm>
             <a:off x="822960" y="6355080"/>
-            <a:ext cx="6400800" cy="274320"/>
+            <a:ext cx="6583680" cy="274320"/>
           </a:xfrm>
           <a:prstGeom prst="rect">
             <a:avLst/>
@@ -6725,6 +6967,9 @@
   <p:clrMapOvr>
     <a:masterClrMapping/>
   </p:clrMapOvr>
+  <p:transition spd="med">
+    <p:fade/>
+  </p:transition>
 </p:sld>
 </file>
 
@@ -6784,6 +7029,2833 @@
       </p:sp>
       <p:sp>
         <p:nvSpPr>
+          <p:cNvPr id="3" name="TextBox 2"/>
+          <p:cNvSpPr txBox="1"/>
+          <p:nvPr/>
+        </p:nvSpPr>
+        <p:spPr>
+          <a:xfrm>
+            <a:off x="822960" y="566928"/>
+            <a:ext cx="7772400" cy="274320"/>
+          </a:xfrm>
+          <a:prstGeom prst="rect">
+            <a:avLst/>
+          </a:prstGeom>
+          <a:noFill/>
+        </p:spPr>
+        <p:txBody>
+          <a:bodyPr wrap="square" anchor="t" lIns="0" rIns="0" tIns="0" bIns="0">
+            <a:spAutoFit/>
+          </a:bodyPr>
+          <a:lstStyle/>
+          <a:p>
+            <a:pPr algn="l">
+              <a:lnSpc>
+                <a:spcPct val="100000"/>
+              </a:lnSpc>
+              <a:spcAft>
+                <a:spcPts val="400"/>
+              </a:spcAft>
+            </a:pPr>
+            <a:r>
+              <a:rPr sz="1150" b="1" i="0">
+                <a:solidFill>
+                  <a:srgbClr val="3FA88C"/>
+                </a:solidFill>
+                <a:latin typeface="Segoe UI"/>
+                <a:ea typeface="微软雅黑"/>
+                <a:cs typeface="微软雅黑"/>
+              </a:rPr>
+              <a:t>QUOTES</a:t>
+            </a:r>
+          </a:p>
+        </p:txBody>
+      </p:sp>
+      <p:sp>
+        <p:nvSpPr>
+          <p:cNvPr id="4" name="TextBox 3"/>
+          <p:cNvSpPr txBox="1"/>
+          <p:nvPr/>
+        </p:nvSpPr>
+        <p:spPr>
+          <a:xfrm>
+            <a:off x="822960" y="868680"/>
+            <a:ext cx="10607040" cy="548640"/>
+          </a:xfrm>
+          <a:prstGeom prst="rect">
+            <a:avLst/>
+          </a:prstGeom>
+          <a:noFill/>
+        </p:spPr>
+        <p:txBody>
+          <a:bodyPr wrap="square" anchor="t" lIns="0" rIns="0" tIns="0" bIns="0">
+            <a:spAutoFit/>
+          </a:bodyPr>
+          <a:lstStyle/>
+          <a:p>
+            <a:pPr algn="l">
+              <a:lnSpc>
+                <a:spcPct val="100000"/>
+              </a:lnSpc>
+              <a:spcAft>
+                <a:spcPts val="400"/>
+              </a:spcAft>
+            </a:pPr>
+            <a:r>
+              <a:rPr sz="2800" b="1" i="0">
+                <a:solidFill>
+                  <a:srgbClr val="2B2B2B"/>
+                </a:solidFill>
+                <a:latin typeface="Segoe UI"/>
+                <a:ea typeface="微软雅黑"/>
+                <a:cs typeface="微软雅黑"/>
+              </a:rPr>
+              <a:t>金句墙</a:t>
+            </a:r>
+          </a:p>
+        </p:txBody>
+      </p:sp>
+      <p:sp>
+        <p:nvSpPr>
+          <p:cNvPr id="5" name="Rectangle 4"/>
+          <p:cNvSpPr/>
+          <p:nvPr/>
+        </p:nvSpPr>
+        <p:spPr>
+          <a:xfrm>
+            <a:off x="822960" y="1572768"/>
+            <a:ext cx="566928" cy="50292"/>
+          </a:xfrm>
+          <a:prstGeom prst="rect">
+            <a:avLst/>
+          </a:prstGeom>
+          <a:solidFill>
+            <a:srgbClr val="3FA88C"/>
+          </a:solidFill>
+          <a:ln>
+            <a:noFill/>
+          </a:ln>
+          <a:effectLst/>
+        </p:spPr>
+        <p:style>
+          <a:lnRef idx="1">
+            <a:schemeClr val="accent1"/>
+          </a:lnRef>
+          <a:fillRef idx="3">
+            <a:schemeClr val="accent1"/>
+          </a:fillRef>
+          <a:effectRef idx="2">
+            <a:schemeClr val="accent1"/>
+          </a:effectRef>
+          <a:fontRef idx="minor">
+            <a:schemeClr val="lt1"/>
+          </a:fontRef>
+        </p:style>
+        <p:txBody>
+          <a:bodyPr rtlCol="0" anchor="ctr"/>
+          <a:lstStyle/>
+          <a:p>
+            <a:pPr algn="ctr"/>
+          </a:p>
+        </p:txBody>
+      </p:sp>
+      <p:sp>
+        <p:nvSpPr>
+          <p:cNvPr id="6" name="Rounded Rectangle 5"/>
+          <p:cNvSpPr/>
+          <p:nvPr/>
+        </p:nvSpPr>
+        <p:spPr>
+          <a:xfrm>
+            <a:off x="822960" y="2103120"/>
+            <a:ext cx="3344570" cy="1815084"/>
+          </a:xfrm>
+          <a:prstGeom prst="roundRect">
+            <a:avLst>
+              <a:gd name="adj" fmla="val 24000"/>
+            </a:avLst>
+          </a:prstGeom>
+          <a:solidFill>
+            <a:srgbClr val="FFFFFF"/>
+          </a:solidFill>
+          <a:ln w="9525">
+            <a:solidFill>
+              <a:srgbClr val="E4E0D8"/>
+            </a:solidFill>
+          </a:ln>
+          <a:effectLst/>
+        </p:spPr>
+        <p:style>
+          <a:lnRef idx="1">
+            <a:schemeClr val="accent1"/>
+          </a:lnRef>
+          <a:fillRef idx="3">
+            <a:schemeClr val="accent1"/>
+          </a:fillRef>
+          <a:effectRef idx="2">
+            <a:schemeClr val="accent1"/>
+          </a:effectRef>
+          <a:fontRef idx="minor">
+            <a:schemeClr val="lt1"/>
+          </a:fontRef>
+        </p:style>
+        <p:txBody>
+          <a:bodyPr rtlCol="0" anchor="ctr"/>
+          <a:lstStyle/>
+          <a:p>
+            <a:pPr algn="ctr"/>
+          </a:p>
+        </p:txBody>
+      </p:sp>
+      <p:sp>
+        <p:nvSpPr>
+          <p:cNvPr id="7" name="TextBox 6"/>
+          <p:cNvSpPr txBox="1"/>
+          <p:nvPr/>
+        </p:nvSpPr>
+        <p:spPr>
+          <a:xfrm>
+            <a:off x="1078992" y="2212848"/>
+            <a:ext cx="914400" cy="548640"/>
+          </a:xfrm>
+          <a:prstGeom prst="rect">
+            <a:avLst/>
+          </a:prstGeom>
+          <a:noFill/>
+        </p:spPr>
+        <p:txBody>
+          <a:bodyPr wrap="square" anchor="t" lIns="0" rIns="0" tIns="0" bIns="0">
+            <a:spAutoFit/>
+          </a:bodyPr>
+          <a:lstStyle/>
+          <a:p>
+            <a:pPr algn="l">
+              <a:lnSpc>
+                <a:spcPct val="100000"/>
+              </a:lnSpc>
+              <a:spcAft>
+                <a:spcPts val="400"/>
+              </a:spcAft>
+            </a:pPr>
+            <a:r>
+              <a:rPr sz="3400" b="1" i="0">
+                <a:solidFill>
+                  <a:srgbClr val="3FA88C"/>
+                </a:solidFill>
+                <a:latin typeface="Segoe UI"/>
+                <a:ea typeface="微软雅黑"/>
+                <a:cs typeface="微软雅黑"/>
+              </a:rPr>
+              <a:t>“</a:t>
+            </a:r>
+          </a:p>
+        </p:txBody>
+      </p:sp>
+      <p:sp>
+        <p:nvSpPr>
+          <p:cNvPr id="8" name="TextBox 7"/>
+          <p:cNvSpPr txBox="1"/>
+          <p:nvPr/>
+        </p:nvSpPr>
+        <p:spPr>
+          <a:xfrm>
+            <a:off x="1115568" y="2743200"/>
+            <a:ext cx="2759354" cy="900683"/>
+          </a:xfrm>
+          <a:prstGeom prst="rect">
+            <a:avLst/>
+          </a:prstGeom>
+          <a:noFill/>
+        </p:spPr>
+        <p:txBody>
+          <a:bodyPr wrap="square" anchor="t" lIns="0" rIns="0" tIns="0" bIns="0">
+            <a:spAutoFit/>
+          </a:bodyPr>
+          <a:lstStyle/>
+          <a:p>
+            <a:pPr algn="l">
+              <a:lnSpc>
+                <a:spcPct val="120000"/>
+              </a:lnSpc>
+              <a:spcAft>
+                <a:spcPts val="400"/>
+              </a:spcAft>
+            </a:pPr>
+            <a:r>
+              <a:rPr sz="1300" b="0" i="0">
+                <a:solidFill>
+                  <a:srgbClr val="2B2B2B"/>
+                </a:solidFill>
+                <a:latin typeface="Segoe UI"/>
+                <a:ea typeface="微软雅黑"/>
+                <a:cs typeface="微软雅黑"/>
+              </a:rPr>
+              <a:t>在此输入短句一</a:t>
+            </a:r>
+          </a:p>
+        </p:txBody>
+      </p:sp>
+      <p:sp>
+        <p:nvSpPr>
+          <p:cNvPr id="9" name="Rounded Rectangle 8"/>
+          <p:cNvSpPr/>
+          <p:nvPr/>
+        </p:nvSpPr>
+        <p:spPr>
+          <a:xfrm>
+            <a:off x="4423562" y="2103120"/>
+            <a:ext cx="3344570" cy="1815084"/>
+          </a:xfrm>
+          <a:prstGeom prst="roundRect">
+            <a:avLst>
+              <a:gd name="adj" fmla="val 24000"/>
+            </a:avLst>
+          </a:prstGeom>
+          <a:solidFill>
+            <a:srgbClr val="FFFFFF"/>
+          </a:solidFill>
+          <a:ln w="9525">
+            <a:solidFill>
+              <a:srgbClr val="E4E0D8"/>
+            </a:solidFill>
+          </a:ln>
+          <a:effectLst/>
+        </p:spPr>
+        <p:style>
+          <a:lnRef idx="1">
+            <a:schemeClr val="accent1"/>
+          </a:lnRef>
+          <a:fillRef idx="3">
+            <a:schemeClr val="accent1"/>
+          </a:fillRef>
+          <a:effectRef idx="2">
+            <a:schemeClr val="accent1"/>
+          </a:effectRef>
+          <a:fontRef idx="minor">
+            <a:schemeClr val="lt1"/>
+          </a:fontRef>
+        </p:style>
+        <p:txBody>
+          <a:bodyPr rtlCol="0" anchor="ctr"/>
+          <a:lstStyle/>
+          <a:p>
+            <a:pPr algn="ctr"/>
+          </a:p>
+        </p:txBody>
+      </p:sp>
+      <p:sp>
+        <p:nvSpPr>
+          <p:cNvPr id="10" name="TextBox 9"/>
+          <p:cNvSpPr txBox="1"/>
+          <p:nvPr/>
+        </p:nvSpPr>
+        <p:spPr>
+          <a:xfrm>
+            <a:off x="4679594" y="2212848"/>
+            <a:ext cx="914400" cy="548640"/>
+          </a:xfrm>
+          <a:prstGeom prst="rect">
+            <a:avLst/>
+          </a:prstGeom>
+          <a:noFill/>
+        </p:spPr>
+        <p:txBody>
+          <a:bodyPr wrap="square" anchor="t" lIns="0" rIns="0" tIns="0" bIns="0">
+            <a:spAutoFit/>
+          </a:bodyPr>
+          <a:lstStyle/>
+          <a:p>
+            <a:pPr algn="l">
+              <a:lnSpc>
+                <a:spcPct val="100000"/>
+              </a:lnSpc>
+              <a:spcAft>
+                <a:spcPts val="400"/>
+              </a:spcAft>
+            </a:pPr>
+            <a:r>
+              <a:rPr sz="3400" b="1" i="0">
+                <a:solidFill>
+                  <a:srgbClr val="3FA88C"/>
+                </a:solidFill>
+                <a:latin typeface="Segoe UI"/>
+                <a:ea typeface="微软雅黑"/>
+                <a:cs typeface="微软雅黑"/>
+              </a:rPr>
+              <a:t>“</a:t>
+            </a:r>
+          </a:p>
+        </p:txBody>
+      </p:sp>
+      <p:sp>
+        <p:nvSpPr>
+          <p:cNvPr id="11" name="TextBox 10"/>
+          <p:cNvSpPr txBox="1"/>
+          <p:nvPr/>
+        </p:nvSpPr>
+        <p:spPr>
+          <a:xfrm>
+            <a:off x="4716170" y="2743200"/>
+            <a:ext cx="2759354" cy="900683"/>
+          </a:xfrm>
+          <a:prstGeom prst="rect">
+            <a:avLst/>
+          </a:prstGeom>
+          <a:noFill/>
+        </p:spPr>
+        <p:txBody>
+          <a:bodyPr wrap="square" anchor="t" lIns="0" rIns="0" tIns="0" bIns="0">
+            <a:spAutoFit/>
+          </a:bodyPr>
+          <a:lstStyle/>
+          <a:p>
+            <a:pPr algn="l">
+              <a:lnSpc>
+                <a:spcPct val="120000"/>
+              </a:lnSpc>
+              <a:spcAft>
+                <a:spcPts val="400"/>
+              </a:spcAft>
+            </a:pPr>
+            <a:r>
+              <a:rPr sz="1300" b="0" i="0">
+                <a:solidFill>
+                  <a:srgbClr val="2B2B2B"/>
+                </a:solidFill>
+                <a:latin typeface="Segoe UI"/>
+                <a:ea typeface="微软雅黑"/>
+                <a:cs typeface="微软雅黑"/>
+              </a:rPr>
+              <a:t>在此输入短句二</a:t>
+            </a:r>
+          </a:p>
+        </p:txBody>
+      </p:sp>
+      <p:sp>
+        <p:nvSpPr>
+          <p:cNvPr id="12" name="Rounded Rectangle 11"/>
+          <p:cNvSpPr/>
+          <p:nvPr/>
+        </p:nvSpPr>
+        <p:spPr>
+          <a:xfrm>
+            <a:off x="8024164" y="2103120"/>
+            <a:ext cx="3344570" cy="1815084"/>
+          </a:xfrm>
+          <a:prstGeom prst="roundRect">
+            <a:avLst>
+              <a:gd name="adj" fmla="val 24000"/>
+            </a:avLst>
+          </a:prstGeom>
+          <a:solidFill>
+            <a:srgbClr val="FFFFFF"/>
+          </a:solidFill>
+          <a:ln w="9525">
+            <a:solidFill>
+              <a:srgbClr val="E4E0D8"/>
+            </a:solidFill>
+          </a:ln>
+          <a:effectLst/>
+        </p:spPr>
+        <p:style>
+          <a:lnRef idx="1">
+            <a:schemeClr val="accent1"/>
+          </a:lnRef>
+          <a:fillRef idx="3">
+            <a:schemeClr val="accent1"/>
+          </a:fillRef>
+          <a:effectRef idx="2">
+            <a:schemeClr val="accent1"/>
+          </a:effectRef>
+          <a:fontRef idx="minor">
+            <a:schemeClr val="lt1"/>
+          </a:fontRef>
+        </p:style>
+        <p:txBody>
+          <a:bodyPr rtlCol="0" anchor="ctr"/>
+          <a:lstStyle/>
+          <a:p>
+            <a:pPr algn="ctr"/>
+          </a:p>
+        </p:txBody>
+      </p:sp>
+      <p:sp>
+        <p:nvSpPr>
+          <p:cNvPr id="13" name="TextBox 12"/>
+          <p:cNvSpPr txBox="1"/>
+          <p:nvPr/>
+        </p:nvSpPr>
+        <p:spPr>
+          <a:xfrm>
+            <a:off x="8280196" y="2212848"/>
+            <a:ext cx="914400" cy="548640"/>
+          </a:xfrm>
+          <a:prstGeom prst="rect">
+            <a:avLst/>
+          </a:prstGeom>
+          <a:noFill/>
+        </p:spPr>
+        <p:txBody>
+          <a:bodyPr wrap="square" anchor="t" lIns="0" rIns="0" tIns="0" bIns="0">
+            <a:spAutoFit/>
+          </a:bodyPr>
+          <a:lstStyle/>
+          <a:p>
+            <a:pPr algn="l">
+              <a:lnSpc>
+                <a:spcPct val="100000"/>
+              </a:lnSpc>
+              <a:spcAft>
+                <a:spcPts val="400"/>
+              </a:spcAft>
+            </a:pPr>
+            <a:r>
+              <a:rPr sz="3400" b="1" i="0">
+                <a:solidFill>
+                  <a:srgbClr val="3FA88C"/>
+                </a:solidFill>
+                <a:latin typeface="Segoe UI"/>
+                <a:ea typeface="微软雅黑"/>
+                <a:cs typeface="微软雅黑"/>
+              </a:rPr>
+              <a:t>“</a:t>
+            </a:r>
+          </a:p>
+        </p:txBody>
+      </p:sp>
+      <p:sp>
+        <p:nvSpPr>
+          <p:cNvPr id="14" name="TextBox 13"/>
+          <p:cNvSpPr txBox="1"/>
+          <p:nvPr/>
+        </p:nvSpPr>
+        <p:spPr>
+          <a:xfrm>
+            <a:off x="8316772" y="2743200"/>
+            <a:ext cx="2759354" cy="900683"/>
+          </a:xfrm>
+          <a:prstGeom prst="rect">
+            <a:avLst/>
+          </a:prstGeom>
+          <a:noFill/>
+        </p:spPr>
+        <p:txBody>
+          <a:bodyPr wrap="square" anchor="t" lIns="0" rIns="0" tIns="0" bIns="0">
+            <a:spAutoFit/>
+          </a:bodyPr>
+          <a:lstStyle/>
+          <a:p>
+            <a:pPr algn="l">
+              <a:lnSpc>
+                <a:spcPct val="120000"/>
+              </a:lnSpc>
+              <a:spcAft>
+                <a:spcPts val="400"/>
+              </a:spcAft>
+            </a:pPr>
+            <a:r>
+              <a:rPr sz="1300" b="0" i="0">
+                <a:solidFill>
+                  <a:srgbClr val="2B2B2B"/>
+                </a:solidFill>
+                <a:latin typeface="Segoe UI"/>
+                <a:ea typeface="微软雅黑"/>
+                <a:cs typeface="微软雅黑"/>
+              </a:rPr>
+              <a:t>在此输入短句三</a:t>
+            </a:r>
+          </a:p>
+        </p:txBody>
+      </p:sp>
+      <p:sp>
+        <p:nvSpPr>
+          <p:cNvPr id="15" name="Rounded Rectangle 14"/>
+          <p:cNvSpPr/>
+          <p:nvPr/>
+        </p:nvSpPr>
+        <p:spPr>
+          <a:xfrm>
+            <a:off x="822960" y="4174235"/>
+            <a:ext cx="3344570" cy="1815084"/>
+          </a:xfrm>
+          <a:prstGeom prst="roundRect">
+            <a:avLst>
+              <a:gd name="adj" fmla="val 24000"/>
+            </a:avLst>
+          </a:prstGeom>
+          <a:solidFill>
+            <a:srgbClr val="FFFFFF"/>
+          </a:solidFill>
+          <a:ln w="9525">
+            <a:solidFill>
+              <a:srgbClr val="E4E0D8"/>
+            </a:solidFill>
+          </a:ln>
+          <a:effectLst/>
+        </p:spPr>
+        <p:style>
+          <a:lnRef idx="1">
+            <a:schemeClr val="accent1"/>
+          </a:lnRef>
+          <a:fillRef idx="3">
+            <a:schemeClr val="accent1"/>
+          </a:fillRef>
+          <a:effectRef idx="2">
+            <a:schemeClr val="accent1"/>
+          </a:effectRef>
+          <a:fontRef idx="minor">
+            <a:schemeClr val="lt1"/>
+          </a:fontRef>
+        </p:style>
+        <p:txBody>
+          <a:bodyPr rtlCol="0" anchor="ctr"/>
+          <a:lstStyle/>
+          <a:p>
+            <a:pPr algn="ctr"/>
+          </a:p>
+        </p:txBody>
+      </p:sp>
+      <p:sp>
+        <p:nvSpPr>
+          <p:cNvPr id="16" name="TextBox 15"/>
+          <p:cNvSpPr txBox="1"/>
+          <p:nvPr/>
+        </p:nvSpPr>
+        <p:spPr>
+          <a:xfrm>
+            <a:off x="1078992" y="4283964"/>
+            <a:ext cx="914400" cy="548640"/>
+          </a:xfrm>
+          <a:prstGeom prst="rect">
+            <a:avLst/>
+          </a:prstGeom>
+          <a:noFill/>
+        </p:spPr>
+        <p:txBody>
+          <a:bodyPr wrap="square" anchor="t" lIns="0" rIns="0" tIns="0" bIns="0">
+            <a:spAutoFit/>
+          </a:bodyPr>
+          <a:lstStyle/>
+          <a:p>
+            <a:pPr algn="l">
+              <a:lnSpc>
+                <a:spcPct val="100000"/>
+              </a:lnSpc>
+              <a:spcAft>
+                <a:spcPts val="400"/>
+              </a:spcAft>
+            </a:pPr>
+            <a:r>
+              <a:rPr sz="3400" b="1" i="0">
+                <a:solidFill>
+                  <a:srgbClr val="3FA88C"/>
+                </a:solidFill>
+                <a:latin typeface="Segoe UI"/>
+                <a:ea typeface="微软雅黑"/>
+                <a:cs typeface="微软雅黑"/>
+              </a:rPr>
+              <a:t>“</a:t>
+            </a:r>
+          </a:p>
+        </p:txBody>
+      </p:sp>
+      <p:sp>
+        <p:nvSpPr>
+          <p:cNvPr id="17" name="TextBox 16"/>
+          <p:cNvSpPr txBox="1"/>
+          <p:nvPr/>
+        </p:nvSpPr>
+        <p:spPr>
+          <a:xfrm>
+            <a:off x="1115568" y="4814316"/>
+            <a:ext cx="2759354" cy="900683"/>
+          </a:xfrm>
+          <a:prstGeom prst="rect">
+            <a:avLst/>
+          </a:prstGeom>
+          <a:noFill/>
+        </p:spPr>
+        <p:txBody>
+          <a:bodyPr wrap="square" anchor="t" lIns="0" rIns="0" tIns="0" bIns="0">
+            <a:spAutoFit/>
+          </a:bodyPr>
+          <a:lstStyle/>
+          <a:p>
+            <a:pPr algn="l">
+              <a:lnSpc>
+                <a:spcPct val="120000"/>
+              </a:lnSpc>
+              <a:spcAft>
+                <a:spcPts val="400"/>
+              </a:spcAft>
+            </a:pPr>
+            <a:r>
+              <a:rPr sz="1300" b="0" i="0">
+                <a:solidFill>
+                  <a:srgbClr val="2B2B2B"/>
+                </a:solidFill>
+                <a:latin typeface="Segoe UI"/>
+                <a:ea typeface="微软雅黑"/>
+                <a:cs typeface="微软雅黑"/>
+              </a:rPr>
+              <a:t>在此输入短句四</a:t>
+            </a:r>
+          </a:p>
+        </p:txBody>
+      </p:sp>
+      <p:sp>
+        <p:nvSpPr>
+          <p:cNvPr id="18" name="Rounded Rectangle 17"/>
+          <p:cNvSpPr/>
+          <p:nvPr/>
+        </p:nvSpPr>
+        <p:spPr>
+          <a:xfrm>
+            <a:off x="4423562" y="4174235"/>
+            <a:ext cx="3344570" cy="1815084"/>
+          </a:xfrm>
+          <a:prstGeom prst="roundRect">
+            <a:avLst>
+              <a:gd name="adj" fmla="val 24000"/>
+            </a:avLst>
+          </a:prstGeom>
+          <a:solidFill>
+            <a:srgbClr val="FFFFFF"/>
+          </a:solidFill>
+          <a:ln w="9525">
+            <a:solidFill>
+              <a:srgbClr val="E4E0D8"/>
+            </a:solidFill>
+          </a:ln>
+          <a:effectLst/>
+        </p:spPr>
+        <p:style>
+          <a:lnRef idx="1">
+            <a:schemeClr val="accent1"/>
+          </a:lnRef>
+          <a:fillRef idx="3">
+            <a:schemeClr val="accent1"/>
+          </a:fillRef>
+          <a:effectRef idx="2">
+            <a:schemeClr val="accent1"/>
+          </a:effectRef>
+          <a:fontRef idx="minor">
+            <a:schemeClr val="lt1"/>
+          </a:fontRef>
+        </p:style>
+        <p:txBody>
+          <a:bodyPr rtlCol="0" anchor="ctr"/>
+          <a:lstStyle/>
+          <a:p>
+            <a:pPr algn="ctr"/>
+          </a:p>
+        </p:txBody>
+      </p:sp>
+      <p:sp>
+        <p:nvSpPr>
+          <p:cNvPr id="19" name="TextBox 18"/>
+          <p:cNvSpPr txBox="1"/>
+          <p:nvPr/>
+        </p:nvSpPr>
+        <p:spPr>
+          <a:xfrm>
+            <a:off x="4679594" y="4283964"/>
+            <a:ext cx="914400" cy="548640"/>
+          </a:xfrm>
+          <a:prstGeom prst="rect">
+            <a:avLst/>
+          </a:prstGeom>
+          <a:noFill/>
+        </p:spPr>
+        <p:txBody>
+          <a:bodyPr wrap="square" anchor="t" lIns="0" rIns="0" tIns="0" bIns="0">
+            <a:spAutoFit/>
+          </a:bodyPr>
+          <a:lstStyle/>
+          <a:p>
+            <a:pPr algn="l">
+              <a:lnSpc>
+                <a:spcPct val="100000"/>
+              </a:lnSpc>
+              <a:spcAft>
+                <a:spcPts val="400"/>
+              </a:spcAft>
+            </a:pPr>
+            <a:r>
+              <a:rPr sz="3400" b="1" i="0">
+                <a:solidFill>
+                  <a:srgbClr val="3FA88C"/>
+                </a:solidFill>
+                <a:latin typeface="Segoe UI"/>
+                <a:ea typeface="微软雅黑"/>
+                <a:cs typeface="微软雅黑"/>
+              </a:rPr>
+              <a:t>“</a:t>
+            </a:r>
+          </a:p>
+        </p:txBody>
+      </p:sp>
+      <p:sp>
+        <p:nvSpPr>
+          <p:cNvPr id="20" name="TextBox 19"/>
+          <p:cNvSpPr txBox="1"/>
+          <p:nvPr/>
+        </p:nvSpPr>
+        <p:spPr>
+          <a:xfrm>
+            <a:off x="4716170" y="4814316"/>
+            <a:ext cx="2759354" cy="900683"/>
+          </a:xfrm>
+          <a:prstGeom prst="rect">
+            <a:avLst/>
+          </a:prstGeom>
+          <a:noFill/>
+        </p:spPr>
+        <p:txBody>
+          <a:bodyPr wrap="square" anchor="t" lIns="0" rIns="0" tIns="0" bIns="0">
+            <a:spAutoFit/>
+          </a:bodyPr>
+          <a:lstStyle/>
+          <a:p>
+            <a:pPr algn="l">
+              <a:lnSpc>
+                <a:spcPct val="120000"/>
+              </a:lnSpc>
+              <a:spcAft>
+                <a:spcPts val="400"/>
+              </a:spcAft>
+            </a:pPr>
+            <a:r>
+              <a:rPr sz="1300" b="0" i="0">
+                <a:solidFill>
+                  <a:srgbClr val="2B2B2B"/>
+                </a:solidFill>
+                <a:latin typeface="Segoe UI"/>
+                <a:ea typeface="微软雅黑"/>
+                <a:cs typeface="微软雅黑"/>
+              </a:rPr>
+              <a:t>在此输入短句五</a:t>
+            </a:r>
+          </a:p>
+        </p:txBody>
+      </p:sp>
+      <p:sp>
+        <p:nvSpPr>
+          <p:cNvPr id="21" name="Rectangle 20"/>
+          <p:cNvSpPr/>
+          <p:nvPr/>
+        </p:nvSpPr>
+        <p:spPr>
+          <a:xfrm>
+            <a:off x="822960" y="6291072"/>
+            <a:ext cx="10545775" cy="7315"/>
+          </a:xfrm>
+          <a:prstGeom prst="rect">
+            <a:avLst/>
+          </a:prstGeom>
+          <a:solidFill>
+            <a:srgbClr val="E4E0D8"/>
+          </a:solidFill>
+          <a:ln>
+            <a:noFill/>
+          </a:ln>
+          <a:effectLst/>
+        </p:spPr>
+        <p:style>
+          <a:lnRef idx="1">
+            <a:schemeClr val="accent1"/>
+          </a:lnRef>
+          <a:fillRef idx="3">
+            <a:schemeClr val="accent1"/>
+          </a:fillRef>
+          <a:effectRef idx="2">
+            <a:schemeClr val="accent1"/>
+          </a:effectRef>
+          <a:fontRef idx="minor">
+            <a:schemeClr val="lt1"/>
+          </a:fontRef>
+        </p:style>
+        <p:txBody>
+          <a:bodyPr rtlCol="0" anchor="ctr"/>
+          <a:lstStyle/>
+          <a:p>
+            <a:pPr algn="ctr"/>
+          </a:p>
+        </p:txBody>
+      </p:sp>
+      <p:sp>
+        <p:nvSpPr>
+          <p:cNvPr id="22" name="TextBox 21"/>
+          <p:cNvSpPr txBox="1"/>
+          <p:nvPr/>
+        </p:nvSpPr>
+        <p:spPr>
+          <a:xfrm>
+            <a:off x="822960" y="6355080"/>
+            <a:ext cx="6583680" cy="274320"/>
+          </a:xfrm>
+          <a:prstGeom prst="rect">
+            <a:avLst/>
+          </a:prstGeom>
+          <a:noFill/>
+        </p:spPr>
+        <p:txBody>
+          <a:bodyPr wrap="square" anchor="t" lIns="0" rIns="0" tIns="0" bIns="0">
+            <a:spAutoFit/>
+          </a:bodyPr>
+          <a:lstStyle/>
+          <a:p>
+            <a:pPr algn="l">
+              <a:lnSpc>
+                <a:spcPct val="100000"/>
+              </a:lnSpc>
+              <a:spcAft>
+                <a:spcPts val="400"/>
+              </a:spcAft>
+            </a:pPr>
+            <a:r>
+              <a:rPr sz="900" b="0" i="0">
+                <a:solidFill>
+                  <a:srgbClr val="9A9A93"/>
+                </a:solidFill>
+                <a:latin typeface="Segoe UI"/>
+                <a:ea typeface="微软雅黑"/>
+                <a:cs typeface="微软雅黑"/>
+              </a:rPr>
+              <a:t>柔和科技图表  ·  Soft Tech</a:t>
+            </a:r>
+          </a:p>
+        </p:txBody>
+      </p:sp>
+    </p:spTree>
+  </p:cSld>
+  <p:clrMapOvr>
+    <a:masterClrMapping/>
+  </p:clrMapOvr>
+  <p:transition spd="med">
+    <p:fade/>
+  </p:transition>
+</p:sld>
+</file>
+
+<file path=ppt/slides/slide16.xml><?xml version="1.0" encoding="utf-8"?>
+<p:sld xmlns:a="http://schemas.openxmlformats.org/drawingml/2006/main" xmlns:p="http://schemas.openxmlformats.org/presentationml/2006/main" xmlns:r="http://schemas.openxmlformats.org/officeDocument/2006/relationships">
+  <p:cSld>
+    <p:spTree>
+      <p:nvGrpSpPr>
+        <p:cNvPr id="1" name=""/>
+        <p:cNvGrpSpPr/>
+        <p:nvPr/>
+      </p:nvGrpSpPr>
+      <p:grpSpPr/>
+      <p:sp>
+        <p:nvSpPr>
+          <p:cNvPr id="2" name="Rectangle 1"/>
+          <p:cNvSpPr/>
+          <p:nvPr/>
+        </p:nvSpPr>
+        <p:spPr>
+          <a:xfrm>
+            <a:off x="0" y="0"/>
+            <a:ext cx="12191695" cy="6858000"/>
+          </a:xfrm>
+          <a:prstGeom prst="rect">
+            <a:avLst/>
+          </a:prstGeom>
+          <a:solidFill>
+            <a:srgbClr val="F5F3EF"/>
+          </a:solidFill>
+          <a:ln>
+            <a:noFill/>
+          </a:ln>
+          <a:effectLst/>
+        </p:spPr>
+        <p:style>
+          <a:lnRef idx="1">
+            <a:schemeClr val="accent1"/>
+          </a:lnRef>
+          <a:fillRef idx="3">
+            <a:schemeClr val="accent1"/>
+          </a:fillRef>
+          <a:effectRef idx="2">
+            <a:schemeClr val="accent1"/>
+          </a:effectRef>
+          <a:fontRef idx="minor">
+            <a:schemeClr val="lt1"/>
+          </a:fontRef>
+        </p:style>
+        <p:txBody>
+          <a:bodyPr rtlCol="0" anchor="ctr"/>
+          <a:lstStyle/>
+          <a:p>
+            <a:pPr algn="ctr"/>
+          </a:p>
+        </p:txBody>
+      </p:sp>
+      <p:sp>
+        <p:nvSpPr>
+          <p:cNvPr id="3" name="TextBox 2"/>
+          <p:cNvSpPr txBox="1"/>
+          <p:nvPr/>
+        </p:nvSpPr>
+        <p:spPr>
+          <a:xfrm>
+            <a:off x="822960" y="566928"/>
+            <a:ext cx="7772400" cy="274320"/>
+          </a:xfrm>
+          <a:prstGeom prst="rect">
+            <a:avLst/>
+          </a:prstGeom>
+          <a:noFill/>
+        </p:spPr>
+        <p:txBody>
+          <a:bodyPr wrap="square" anchor="t" lIns="0" rIns="0" tIns="0" bIns="0">
+            <a:spAutoFit/>
+          </a:bodyPr>
+          <a:lstStyle/>
+          <a:p>
+            <a:pPr algn="l">
+              <a:lnSpc>
+                <a:spcPct val="100000"/>
+              </a:lnSpc>
+              <a:spcAft>
+                <a:spcPts val="400"/>
+              </a:spcAft>
+            </a:pPr>
+            <a:r>
+              <a:rPr sz="1150" b="1" i="0">
+                <a:solidFill>
+                  <a:srgbClr val="3FA88C"/>
+                </a:solidFill>
+                <a:latin typeface="Segoe UI"/>
+                <a:ea typeface="微软雅黑"/>
+                <a:cs typeface="微软雅黑"/>
+              </a:rPr>
+              <a:t>FAQ</a:t>
+            </a:r>
+          </a:p>
+        </p:txBody>
+      </p:sp>
+      <p:sp>
+        <p:nvSpPr>
+          <p:cNvPr id="4" name="TextBox 3"/>
+          <p:cNvSpPr txBox="1"/>
+          <p:nvPr/>
+        </p:nvSpPr>
+        <p:spPr>
+          <a:xfrm>
+            <a:off x="822960" y="868680"/>
+            <a:ext cx="10607040" cy="548640"/>
+          </a:xfrm>
+          <a:prstGeom prst="rect">
+            <a:avLst/>
+          </a:prstGeom>
+          <a:noFill/>
+        </p:spPr>
+        <p:txBody>
+          <a:bodyPr wrap="square" anchor="t" lIns="0" rIns="0" tIns="0" bIns="0">
+            <a:spAutoFit/>
+          </a:bodyPr>
+          <a:lstStyle/>
+          <a:p>
+            <a:pPr algn="l">
+              <a:lnSpc>
+                <a:spcPct val="100000"/>
+              </a:lnSpc>
+              <a:spcAft>
+                <a:spcPts val="400"/>
+              </a:spcAft>
+            </a:pPr>
+            <a:r>
+              <a:rPr sz="2800" b="1" i="0">
+                <a:solidFill>
+                  <a:srgbClr val="2B2B2B"/>
+                </a:solidFill>
+                <a:latin typeface="Segoe UI"/>
+                <a:ea typeface="微软雅黑"/>
+                <a:cs typeface="微软雅黑"/>
+              </a:rPr>
+              <a:t>常见问题</a:t>
+            </a:r>
+          </a:p>
+        </p:txBody>
+      </p:sp>
+      <p:sp>
+        <p:nvSpPr>
+          <p:cNvPr id="5" name="Rectangle 4"/>
+          <p:cNvSpPr/>
+          <p:nvPr/>
+        </p:nvSpPr>
+        <p:spPr>
+          <a:xfrm>
+            <a:off x="822960" y="1572768"/>
+            <a:ext cx="566928" cy="50292"/>
+          </a:xfrm>
+          <a:prstGeom prst="rect">
+            <a:avLst/>
+          </a:prstGeom>
+          <a:solidFill>
+            <a:srgbClr val="3FA88C"/>
+          </a:solidFill>
+          <a:ln>
+            <a:noFill/>
+          </a:ln>
+          <a:effectLst/>
+        </p:spPr>
+        <p:style>
+          <a:lnRef idx="1">
+            <a:schemeClr val="accent1"/>
+          </a:lnRef>
+          <a:fillRef idx="3">
+            <a:schemeClr val="accent1"/>
+          </a:fillRef>
+          <a:effectRef idx="2">
+            <a:schemeClr val="accent1"/>
+          </a:effectRef>
+          <a:fontRef idx="minor">
+            <a:schemeClr val="lt1"/>
+          </a:fontRef>
+        </p:style>
+        <p:txBody>
+          <a:bodyPr rtlCol="0" anchor="ctr"/>
+          <a:lstStyle/>
+          <a:p>
+            <a:pPr algn="ctr"/>
+          </a:p>
+        </p:txBody>
+      </p:sp>
+      <p:sp>
+        <p:nvSpPr>
+          <p:cNvPr id="6" name="Rounded Rectangle 5"/>
+          <p:cNvSpPr/>
+          <p:nvPr/>
+        </p:nvSpPr>
+        <p:spPr>
+          <a:xfrm>
+            <a:off x="822960" y="2103120"/>
+            <a:ext cx="10424160" cy="841248"/>
+          </a:xfrm>
+          <a:prstGeom prst="roundRect">
+            <a:avLst>
+              <a:gd name="adj" fmla="val 24000"/>
+            </a:avLst>
+          </a:prstGeom>
+          <a:solidFill>
+            <a:srgbClr val="FFFFFF"/>
+          </a:solidFill>
+          <a:ln w="9525">
+            <a:solidFill>
+              <a:srgbClr val="E4E0D8"/>
+            </a:solidFill>
+          </a:ln>
+          <a:effectLst/>
+        </p:spPr>
+        <p:style>
+          <a:lnRef idx="1">
+            <a:schemeClr val="accent1"/>
+          </a:lnRef>
+          <a:fillRef idx="3">
+            <a:schemeClr val="accent1"/>
+          </a:fillRef>
+          <a:effectRef idx="2">
+            <a:schemeClr val="accent1"/>
+          </a:effectRef>
+          <a:fontRef idx="minor">
+            <a:schemeClr val="lt1"/>
+          </a:fontRef>
+        </p:style>
+        <p:txBody>
+          <a:bodyPr rtlCol="0" anchor="ctr"/>
+          <a:lstStyle/>
+          <a:p>
+            <a:pPr algn="ctr"/>
+          </a:p>
+        </p:txBody>
+      </p:sp>
+      <p:sp>
+        <p:nvSpPr>
+          <p:cNvPr id="7" name="Oval 6"/>
+          <p:cNvSpPr/>
+          <p:nvPr/>
+        </p:nvSpPr>
+        <p:spPr>
+          <a:xfrm>
+            <a:off x="1060704" y="2322576"/>
+            <a:ext cx="402336" cy="402336"/>
+          </a:xfrm>
+          <a:prstGeom prst="ellipse">
+            <a:avLst/>
+          </a:prstGeom>
+          <a:solidFill>
+            <a:srgbClr val="3FA88C"/>
+          </a:solidFill>
+          <a:ln>
+            <a:noFill/>
+          </a:ln>
+          <a:effectLst/>
+        </p:spPr>
+        <p:style>
+          <a:lnRef idx="1">
+            <a:schemeClr val="accent1"/>
+          </a:lnRef>
+          <a:fillRef idx="3">
+            <a:schemeClr val="accent1"/>
+          </a:fillRef>
+          <a:effectRef idx="2">
+            <a:schemeClr val="accent1"/>
+          </a:effectRef>
+          <a:fontRef idx="minor">
+            <a:schemeClr val="lt1"/>
+          </a:fontRef>
+        </p:style>
+        <p:txBody>
+          <a:bodyPr rtlCol="0" anchor="ctr"/>
+          <a:lstStyle/>
+          <a:p>
+            <a:pPr algn="ctr"/>
+          </a:p>
+        </p:txBody>
+      </p:sp>
+      <p:sp>
+        <p:nvSpPr>
+          <p:cNvPr id="8" name="TextBox 7"/>
+          <p:cNvSpPr txBox="1"/>
+          <p:nvPr/>
+        </p:nvSpPr>
+        <p:spPr>
+          <a:xfrm>
+            <a:off x="1060704" y="2322576"/>
+            <a:ext cx="402336" cy="402336"/>
+          </a:xfrm>
+          <a:prstGeom prst="rect">
+            <a:avLst/>
+          </a:prstGeom>
+          <a:noFill/>
+        </p:spPr>
+        <p:txBody>
+          <a:bodyPr wrap="square" anchor="ctr" lIns="0" rIns="0" tIns="0" bIns="0">
+            <a:spAutoFit/>
+          </a:bodyPr>
+          <a:lstStyle/>
+          <a:p>
+            <a:pPr algn="ctr">
+              <a:lnSpc>
+                <a:spcPct val="100000"/>
+              </a:lnSpc>
+              <a:spcAft>
+                <a:spcPts val="400"/>
+              </a:spcAft>
+            </a:pPr>
+            <a:r>
+              <a:rPr sz="1300" b="1" i="0">
+                <a:solidFill>
+                  <a:srgbClr val="FFFFFF"/>
+                </a:solidFill>
+                <a:latin typeface="Segoe UI"/>
+                <a:ea typeface="微软雅黑"/>
+                <a:cs typeface="微软雅黑"/>
+              </a:rPr>
+              <a:t>Q</a:t>
+            </a:r>
+          </a:p>
+        </p:txBody>
+      </p:sp>
+      <p:sp>
+        <p:nvSpPr>
+          <p:cNvPr id="9" name="TextBox 8"/>
+          <p:cNvSpPr txBox="1"/>
+          <p:nvPr/>
+        </p:nvSpPr>
+        <p:spPr>
+          <a:xfrm>
+            <a:off x="1691640" y="2249424"/>
+            <a:ext cx="9235440" cy="365760"/>
+          </a:xfrm>
+          <a:prstGeom prst="rect">
+            <a:avLst/>
+          </a:prstGeom>
+          <a:noFill/>
+        </p:spPr>
+        <p:txBody>
+          <a:bodyPr wrap="square" anchor="t" lIns="0" rIns="0" tIns="0" bIns="0">
+            <a:spAutoFit/>
+          </a:bodyPr>
+          <a:lstStyle/>
+          <a:p>
+            <a:pPr algn="l">
+              <a:lnSpc>
+                <a:spcPct val="100000"/>
+              </a:lnSpc>
+              <a:spcAft>
+                <a:spcPts val="400"/>
+              </a:spcAft>
+            </a:pPr>
+            <a:r>
+              <a:rPr sz="1400" b="1" i="0">
+                <a:solidFill>
+                  <a:srgbClr val="2B2B2B"/>
+                </a:solidFill>
+                <a:latin typeface="Segoe UI"/>
+                <a:ea typeface="微软雅黑"/>
+                <a:cs typeface="微软雅黑"/>
+              </a:rPr>
+              <a:t>在此输入问题一？</a:t>
+            </a:r>
+          </a:p>
+        </p:txBody>
+      </p:sp>
+      <p:sp>
+        <p:nvSpPr>
+          <p:cNvPr id="10" name="TextBox 9"/>
+          <p:cNvSpPr txBox="1"/>
+          <p:nvPr/>
+        </p:nvSpPr>
+        <p:spPr>
+          <a:xfrm>
+            <a:off x="1691640" y="2596896"/>
+            <a:ext cx="9235440" cy="310896"/>
+          </a:xfrm>
+          <a:prstGeom prst="rect">
+            <a:avLst/>
+          </a:prstGeom>
+          <a:noFill/>
+        </p:spPr>
+        <p:txBody>
+          <a:bodyPr wrap="square" anchor="t" lIns="0" rIns="0" tIns="0" bIns="0">
+            <a:spAutoFit/>
+          </a:bodyPr>
+          <a:lstStyle/>
+          <a:p>
+            <a:pPr algn="l">
+              <a:lnSpc>
+                <a:spcPct val="100000"/>
+              </a:lnSpc>
+              <a:spcAft>
+                <a:spcPts val="400"/>
+              </a:spcAft>
+            </a:pPr>
+            <a:r>
+              <a:rPr sz="1150" b="0" i="0">
+                <a:solidFill>
+                  <a:srgbClr val="9A9A93"/>
+                </a:solidFill>
+                <a:latin typeface="Segoe UI"/>
+                <a:ea typeface="微软雅黑"/>
+                <a:cs typeface="微软雅黑"/>
+              </a:rPr>
+              <a:t>在此输入回答（占位）</a:t>
+            </a:r>
+          </a:p>
+        </p:txBody>
+      </p:sp>
+      <p:sp>
+        <p:nvSpPr>
+          <p:cNvPr id="11" name="Rounded Rectangle 10"/>
+          <p:cNvSpPr/>
+          <p:nvPr/>
+        </p:nvSpPr>
+        <p:spPr>
+          <a:xfrm>
+            <a:off x="822960" y="3063239"/>
+            <a:ext cx="10424160" cy="841248"/>
+          </a:xfrm>
+          <a:prstGeom prst="roundRect">
+            <a:avLst>
+              <a:gd name="adj" fmla="val 24000"/>
+            </a:avLst>
+          </a:prstGeom>
+          <a:solidFill>
+            <a:srgbClr val="FFFFFF"/>
+          </a:solidFill>
+          <a:ln w="9525">
+            <a:solidFill>
+              <a:srgbClr val="E4E0D8"/>
+            </a:solidFill>
+          </a:ln>
+          <a:effectLst/>
+        </p:spPr>
+        <p:style>
+          <a:lnRef idx="1">
+            <a:schemeClr val="accent1"/>
+          </a:lnRef>
+          <a:fillRef idx="3">
+            <a:schemeClr val="accent1"/>
+          </a:fillRef>
+          <a:effectRef idx="2">
+            <a:schemeClr val="accent1"/>
+          </a:effectRef>
+          <a:fontRef idx="minor">
+            <a:schemeClr val="lt1"/>
+          </a:fontRef>
+        </p:style>
+        <p:txBody>
+          <a:bodyPr rtlCol="0" anchor="ctr"/>
+          <a:lstStyle/>
+          <a:p>
+            <a:pPr algn="ctr"/>
+          </a:p>
+        </p:txBody>
+      </p:sp>
+      <p:sp>
+        <p:nvSpPr>
+          <p:cNvPr id="12" name="Oval 11"/>
+          <p:cNvSpPr/>
+          <p:nvPr/>
+        </p:nvSpPr>
+        <p:spPr>
+          <a:xfrm>
+            <a:off x="1060704" y="3282696"/>
+            <a:ext cx="402336" cy="402336"/>
+          </a:xfrm>
+          <a:prstGeom prst="ellipse">
+            <a:avLst/>
+          </a:prstGeom>
+          <a:solidFill>
+            <a:srgbClr val="3FA88C"/>
+          </a:solidFill>
+          <a:ln>
+            <a:noFill/>
+          </a:ln>
+          <a:effectLst/>
+        </p:spPr>
+        <p:style>
+          <a:lnRef idx="1">
+            <a:schemeClr val="accent1"/>
+          </a:lnRef>
+          <a:fillRef idx="3">
+            <a:schemeClr val="accent1"/>
+          </a:fillRef>
+          <a:effectRef idx="2">
+            <a:schemeClr val="accent1"/>
+          </a:effectRef>
+          <a:fontRef idx="minor">
+            <a:schemeClr val="lt1"/>
+          </a:fontRef>
+        </p:style>
+        <p:txBody>
+          <a:bodyPr rtlCol="0" anchor="ctr"/>
+          <a:lstStyle/>
+          <a:p>
+            <a:pPr algn="ctr"/>
+          </a:p>
+        </p:txBody>
+      </p:sp>
+      <p:sp>
+        <p:nvSpPr>
+          <p:cNvPr id="13" name="TextBox 12"/>
+          <p:cNvSpPr txBox="1"/>
+          <p:nvPr/>
+        </p:nvSpPr>
+        <p:spPr>
+          <a:xfrm>
+            <a:off x="1060704" y="3282696"/>
+            <a:ext cx="402336" cy="402336"/>
+          </a:xfrm>
+          <a:prstGeom prst="rect">
+            <a:avLst/>
+          </a:prstGeom>
+          <a:noFill/>
+        </p:spPr>
+        <p:txBody>
+          <a:bodyPr wrap="square" anchor="ctr" lIns="0" rIns="0" tIns="0" bIns="0">
+            <a:spAutoFit/>
+          </a:bodyPr>
+          <a:lstStyle/>
+          <a:p>
+            <a:pPr algn="ctr">
+              <a:lnSpc>
+                <a:spcPct val="100000"/>
+              </a:lnSpc>
+              <a:spcAft>
+                <a:spcPts val="400"/>
+              </a:spcAft>
+            </a:pPr>
+            <a:r>
+              <a:rPr sz="1300" b="1" i="0">
+                <a:solidFill>
+                  <a:srgbClr val="FFFFFF"/>
+                </a:solidFill>
+                <a:latin typeface="Segoe UI"/>
+                <a:ea typeface="微软雅黑"/>
+                <a:cs typeface="微软雅黑"/>
+              </a:rPr>
+              <a:t>Q</a:t>
+            </a:r>
+          </a:p>
+        </p:txBody>
+      </p:sp>
+      <p:sp>
+        <p:nvSpPr>
+          <p:cNvPr id="14" name="TextBox 13"/>
+          <p:cNvSpPr txBox="1"/>
+          <p:nvPr/>
+        </p:nvSpPr>
+        <p:spPr>
+          <a:xfrm>
+            <a:off x="1691640" y="3209544"/>
+            <a:ext cx="9235440" cy="365760"/>
+          </a:xfrm>
+          <a:prstGeom prst="rect">
+            <a:avLst/>
+          </a:prstGeom>
+          <a:noFill/>
+        </p:spPr>
+        <p:txBody>
+          <a:bodyPr wrap="square" anchor="t" lIns="0" rIns="0" tIns="0" bIns="0">
+            <a:spAutoFit/>
+          </a:bodyPr>
+          <a:lstStyle/>
+          <a:p>
+            <a:pPr algn="l">
+              <a:lnSpc>
+                <a:spcPct val="100000"/>
+              </a:lnSpc>
+              <a:spcAft>
+                <a:spcPts val="400"/>
+              </a:spcAft>
+            </a:pPr>
+            <a:r>
+              <a:rPr sz="1400" b="1" i="0">
+                <a:solidFill>
+                  <a:srgbClr val="2B2B2B"/>
+                </a:solidFill>
+                <a:latin typeface="Segoe UI"/>
+                <a:ea typeface="微软雅黑"/>
+                <a:cs typeface="微软雅黑"/>
+              </a:rPr>
+              <a:t>在此输入问题二？</a:t>
+            </a:r>
+          </a:p>
+        </p:txBody>
+      </p:sp>
+      <p:sp>
+        <p:nvSpPr>
+          <p:cNvPr id="15" name="TextBox 14"/>
+          <p:cNvSpPr txBox="1"/>
+          <p:nvPr/>
+        </p:nvSpPr>
+        <p:spPr>
+          <a:xfrm>
+            <a:off x="1691640" y="3557015"/>
+            <a:ext cx="9235440" cy="310896"/>
+          </a:xfrm>
+          <a:prstGeom prst="rect">
+            <a:avLst/>
+          </a:prstGeom>
+          <a:noFill/>
+        </p:spPr>
+        <p:txBody>
+          <a:bodyPr wrap="square" anchor="t" lIns="0" rIns="0" tIns="0" bIns="0">
+            <a:spAutoFit/>
+          </a:bodyPr>
+          <a:lstStyle/>
+          <a:p>
+            <a:pPr algn="l">
+              <a:lnSpc>
+                <a:spcPct val="100000"/>
+              </a:lnSpc>
+              <a:spcAft>
+                <a:spcPts val="400"/>
+              </a:spcAft>
+            </a:pPr>
+            <a:r>
+              <a:rPr sz="1150" b="0" i="0">
+                <a:solidFill>
+                  <a:srgbClr val="9A9A93"/>
+                </a:solidFill>
+                <a:latin typeface="Segoe UI"/>
+                <a:ea typeface="微软雅黑"/>
+                <a:cs typeface="微软雅黑"/>
+              </a:rPr>
+              <a:t>在此输入回答（占位）</a:t>
+            </a:r>
+          </a:p>
+        </p:txBody>
+      </p:sp>
+      <p:sp>
+        <p:nvSpPr>
+          <p:cNvPr id="16" name="Rounded Rectangle 15"/>
+          <p:cNvSpPr/>
+          <p:nvPr/>
+        </p:nvSpPr>
+        <p:spPr>
+          <a:xfrm>
+            <a:off x="822960" y="4023360"/>
+            <a:ext cx="10424160" cy="841248"/>
+          </a:xfrm>
+          <a:prstGeom prst="roundRect">
+            <a:avLst>
+              <a:gd name="adj" fmla="val 24000"/>
+            </a:avLst>
+          </a:prstGeom>
+          <a:solidFill>
+            <a:srgbClr val="FFFFFF"/>
+          </a:solidFill>
+          <a:ln w="9525">
+            <a:solidFill>
+              <a:srgbClr val="E4E0D8"/>
+            </a:solidFill>
+          </a:ln>
+          <a:effectLst/>
+        </p:spPr>
+        <p:style>
+          <a:lnRef idx="1">
+            <a:schemeClr val="accent1"/>
+          </a:lnRef>
+          <a:fillRef idx="3">
+            <a:schemeClr val="accent1"/>
+          </a:fillRef>
+          <a:effectRef idx="2">
+            <a:schemeClr val="accent1"/>
+          </a:effectRef>
+          <a:fontRef idx="minor">
+            <a:schemeClr val="lt1"/>
+          </a:fontRef>
+        </p:style>
+        <p:txBody>
+          <a:bodyPr rtlCol="0" anchor="ctr"/>
+          <a:lstStyle/>
+          <a:p>
+            <a:pPr algn="ctr"/>
+          </a:p>
+        </p:txBody>
+      </p:sp>
+      <p:sp>
+        <p:nvSpPr>
+          <p:cNvPr id="17" name="Oval 16"/>
+          <p:cNvSpPr/>
+          <p:nvPr/>
+        </p:nvSpPr>
+        <p:spPr>
+          <a:xfrm>
+            <a:off x="1060704" y="4242816"/>
+            <a:ext cx="402336" cy="402336"/>
+          </a:xfrm>
+          <a:prstGeom prst="ellipse">
+            <a:avLst/>
+          </a:prstGeom>
+          <a:solidFill>
+            <a:srgbClr val="3FA88C"/>
+          </a:solidFill>
+          <a:ln>
+            <a:noFill/>
+          </a:ln>
+          <a:effectLst/>
+        </p:spPr>
+        <p:style>
+          <a:lnRef idx="1">
+            <a:schemeClr val="accent1"/>
+          </a:lnRef>
+          <a:fillRef idx="3">
+            <a:schemeClr val="accent1"/>
+          </a:fillRef>
+          <a:effectRef idx="2">
+            <a:schemeClr val="accent1"/>
+          </a:effectRef>
+          <a:fontRef idx="minor">
+            <a:schemeClr val="lt1"/>
+          </a:fontRef>
+        </p:style>
+        <p:txBody>
+          <a:bodyPr rtlCol="0" anchor="ctr"/>
+          <a:lstStyle/>
+          <a:p>
+            <a:pPr algn="ctr"/>
+          </a:p>
+        </p:txBody>
+      </p:sp>
+      <p:sp>
+        <p:nvSpPr>
+          <p:cNvPr id="18" name="TextBox 17"/>
+          <p:cNvSpPr txBox="1"/>
+          <p:nvPr/>
+        </p:nvSpPr>
+        <p:spPr>
+          <a:xfrm>
+            <a:off x="1060704" y="4242816"/>
+            <a:ext cx="402336" cy="402336"/>
+          </a:xfrm>
+          <a:prstGeom prst="rect">
+            <a:avLst/>
+          </a:prstGeom>
+          <a:noFill/>
+        </p:spPr>
+        <p:txBody>
+          <a:bodyPr wrap="square" anchor="ctr" lIns="0" rIns="0" tIns="0" bIns="0">
+            <a:spAutoFit/>
+          </a:bodyPr>
+          <a:lstStyle/>
+          <a:p>
+            <a:pPr algn="ctr">
+              <a:lnSpc>
+                <a:spcPct val="100000"/>
+              </a:lnSpc>
+              <a:spcAft>
+                <a:spcPts val="400"/>
+              </a:spcAft>
+            </a:pPr>
+            <a:r>
+              <a:rPr sz="1300" b="1" i="0">
+                <a:solidFill>
+                  <a:srgbClr val="FFFFFF"/>
+                </a:solidFill>
+                <a:latin typeface="Segoe UI"/>
+                <a:ea typeface="微软雅黑"/>
+                <a:cs typeface="微软雅黑"/>
+              </a:rPr>
+              <a:t>Q</a:t>
+            </a:r>
+          </a:p>
+        </p:txBody>
+      </p:sp>
+      <p:sp>
+        <p:nvSpPr>
+          <p:cNvPr id="19" name="TextBox 18"/>
+          <p:cNvSpPr txBox="1"/>
+          <p:nvPr/>
+        </p:nvSpPr>
+        <p:spPr>
+          <a:xfrm>
+            <a:off x="1691640" y="4169664"/>
+            <a:ext cx="9235440" cy="365760"/>
+          </a:xfrm>
+          <a:prstGeom prst="rect">
+            <a:avLst/>
+          </a:prstGeom>
+          <a:noFill/>
+        </p:spPr>
+        <p:txBody>
+          <a:bodyPr wrap="square" anchor="t" lIns="0" rIns="0" tIns="0" bIns="0">
+            <a:spAutoFit/>
+          </a:bodyPr>
+          <a:lstStyle/>
+          <a:p>
+            <a:pPr algn="l">
+              <a:lnSpc>
+                <a:spcPct val="100000"/>
+              </a:lnSpc>
+              <a:spcAft>
+                <a:spcPts val="400"/>
+              </a:spcAft>
+            </a:pPr>
+            <a:r>
+              <a:rPr sz="1400" b="1" i="0">
+                <a:solidFill>
+                  <a:srgbClr val="2B2B2B"/>
+                </a:solidFill>
+                <a:latin typeface="Segoe UI"/>
+                <a:ea typeface="微软雅黑"/>
+                <a:cs typeface="微软雅黑"/>
+              </a:rPr>
+              <a:t>在此输入问题三？</a:t>
+            </a:r>
+          </a:p>
+        </p:txBody>
+      </p:sp>
+      <p:sp>
+        <p:nvSpPr>
+          <p:cNvPr id="20" name="TextBox 19"/>
+          <p:cNvSpPr txBox="1"/>
+          <p:nvPr/>
+        </p:nvSpPr>
+        <p:spPr>
+          <a:xfrm>
+            <a:off x="1691640" y="4517136"/>
+            <a:ext cx="9235440" cy="310896"/>
+          </a:xfrm>
+          <a:prstGeom prst="rect">
+            <a:avLst/>
+          </a:prstGeom>
+          <a:noFill/>
+        </p:spPr>
+        <p:txBody>
+          <a:bodyPr wrap="square" anchor="t" lIns="0" rIns="0" tIns="0" bIns="0">
+            <a:spAutoFit/>
+          </a:bodyPr>
+          <a:lstStyle/>
+          <a:p>
+            <a:pPr algn="l">
+              <a:lnSpc>
+                <a:spcPct val="100000"/>
+              </a:lnSpc>
+              <a:spcAft>
+                <a:spcPts val="400"/>
+              </a:spcAft>
+            </a:pPr>
+            <a:r>
+              <a:rPr sz="1150" b="0" i="0">
+                <a:solidFill>
+                  <a:srgbClr val="9A9A93"/>
+                </a:solidFill>
+                <a:latin typeface="Segoe UI"/>
+                <a:ea typeface="微软雅黑"/>
+                <a:cs typeface="微软雅黑"/>
+              </a:rPr>
+              <a:t>在此输入回答（占位）</a:t>
+            </a:r>
+          </a:p>
+        </p:txBody>
+      </p:sp>
+      <p:sp>
+        <p:nvSpPr>
+          <p:cNvPr id="21" name="Rectangle 20"/>
+          <p:cNvSpPr/>
+          <p:nvPr/>
+        </p:nvSpPr>
+        <p:spPr>
+          <a:xfrm>
+            <a:off x="822960" y="6291072"/>
+            <a:ext cx="10545775" cy="7315"/>
+          </a:xfrm>
+          <a:prstGeom prst="rect">
+            <a:avLst/>
+          </a:prstGeom>
+          <a:solidFill>
+            <a:srgbClr val="E4E0D8"/>
+          </a:solidFill>
+          <a:ln>
+            <a:noFill/>
+          </a:ln>
+          <a:effectLst/>
+        </p:spPr>
+        <p:style>
+          <a:lnRef idx="1">
+            <a:schemeClr val="accent1"/>
+          </a:lnRef>
+          <a:fillRef idx="3">
+            <a:schemeClr val="accent1"/>
+          </a:fillRef>
+          <a:effectRef idx="2">
+            <a:schemeClr val="accent1"/>
+          </a:effectRef>
+          <a:fontRef idx="minor">
+            <a:schemeClr val="lt1"/>
+          </a:fontRef>
+        </p:style>
+        <p:txBody>
+          <a:bodyPr rtlCol="0" anchor="ctr"/>
+          <a:lstStyle/>
+          <a:p>
+            <a:pPr algn="ctr"/>
+          </a:p>
+        </p:txBody>
+      </p:sp>
+      <p:sp>
+        <p:nvSpPr>
+          <p:cNvPr id="22" name="TextBox 21"/>
+          <p:cNvSpPr txBox="1"/>
+          <p:nvPr/>
+        </p:nvSpPr>
+        <p:spPr>
+          <a:xfrm>
+            <a:off x="822960" y="6355080"/>
+            <a:ext cx="6583680" cy="274320"/>
+          </a:xfrm>
+          <a:prstGeom prst="rect">
+            <a:avLst/>
+          </a:prstGeom>
+          <a:noFill/>
+        </p:spPr>
+        <p:txBody>
+          <a:bodyPr wrap="square" anchor="t" lIns="0" rIns="0" tIns="0" bIns="0">
+            <a:spAutoFit/>
+          </a:bodyPr>
+          <a:lstStyle/>
+          <a:p>
+            <a:pPr algn="l">
+              <a:lnSpc>
+                <a:spcPct val="100000"/>
+              </a:lnSpc>
+              <a:spcAft>
+                <a:spcPts val="400"/>
+              </a:spcAft>
+            </a:pPr>
+            <a:r>
+              <a:rPr sz="900" b="0" i="0">
+                <a:solidFill>
+                  <a:srgbClr val="9A9A93"/>
+                </a:solidFill>
+                <a:latin typeface="Segoe UI"/>
+                <a:ea typeface="微软雅黑"/>
+                <a:cs typeface="微软雅黑"/>
+              </a:rPr>
+              <a:t>柔和科技图表  ·  Soft Tech</a:t>
+            </a:r>
+          </a:p>
+        </p:txBody>
+      </p:sp>
+    </p:spTree>
+  </p:cSld>
+  <p:clrMapOvr>
+    <a:masterClrMapping/>
+  </p:clrMapOvr>
+  <p:transition spd="med">
+    <p:fade/>
+  </p:transition>
+</p:sld>
+</file>
+
+<file path=ppt/slides/slide17.xml><?xml version="1.0" encoding="utf-8"?>
+<p:sld xmlns:a="http://schemas.openxmlformats.org/drawingml/2006/main" xmlns:p="http://schemas.openxmlformats.org/presentationml/2006/main" xmlns:r="http://schemas.openxmlformats.org/officeDocument/2006/relationships">
+  <p:cSld>
+    <p:spTree>
+      <p:nvGrpSpPr>
+        <p:cNvPr id="1" name=""/>
+        <p:cNvGrpSpPr/>
+        <p:nvPr/>
+      </p:nvGrpSpPr>
+      <p:grpSpPr/>
+      <p:sp>
+        <p:nvSpPr>
+          <p:cNvPr id="2" name="Rectangle 1"/>
+          <p:cNvSpPr/>
+          <p:nvPr/>
+        </p:nvSpPr>
+        <p:spPr>
+          <a:xfrm>
+            <a:off x="0" y="0"/>
+            <a:ext cx="12191695" cy="6858000"/>
+          </a:xfrm>
+          <a:prstGeom prst="rect">
+            <a:avLst/>
+          </a:prstGeom>
+          <a:solidFill>
+            <a:srgbClr val="F5F3EF"/>
+          </a:solidFill>
+          <a:ln>
+            <a:noFill/>
+          </a:ln>
+          <a:effectLst/>
+        </p:spPr>
+        <p:style>
+          <a:lnRef idx="1">
+            <a:schemeClr val="accent1"/>
+          </a:lnRef>
+          <a:fillRef idx="3">
+            <a:schemeClr val="accent1"/>
+          </a:fillRef>
+          <a:effectRef idx="2">
+            <a:schemeClr val="accent1"/>
+          </a:effectRef>
+          <a:fontRef idx="minor">
+            <a:schemeClr val="lt1"/>
+          </a:fontRef>
+        </p:style>
+        <p:txBody>
+          <a:bodyPr rtlCol="0" anchor="ctr"/>
+          <a:lstStyle/>
+          <a:p>
+            <a:pPr algn="ctr"/>
+          </a:p>
+        </p:txBody>
+      </p:sp>
+      <p:sp>
+        <p:nvSpPr>
+          <p:cNvPr id="3" name="TextBox 2"/>
+          <p:cNvSpPr txBox="1"/>
+          <p:nvPr/>
+        </p:nvSpPr>
+        <p:spPr>
+          <a:xfrm>
+            <a:off x="822960" y="566928"/>
+            <a:ext cx="7772400" cy="274320"/>
+          </a:xfrm>
+          <a:prstGeom prst="rect">
+            <a:avLst/>
+          </a:prstGeom>
+          <a:noFill/>
+        </p:spPr>
+        <p:txBody>
+          <a:bodyPr wrap="square" anchor="t" lIns="0" rIns="0" tIns="0" bIns="0">
+            <a:spAutoFit/>
+          </a:bodyPr>
+          <a:lstStyle/>
+          <a:p>
+            <a:pPr algn="l">
+              <a:lnSpc>
+                <a:spcPct val="100000"/>
+              </a:lnSpc>
+              <a:spcAft>
+                <a:spcPts val="400"/>
+              </a:spcAft>
+            </a:pPr>
+            <a:r>
+              <a:rPr sz="1150" b="1" i="0">
+                <a:solidFill>
+                  <a:srgbClr val="3FA88C"/>
+                </a:solidFill>
+                <a:latin typeface="Segoe UI"/>
+                <a:ea typeface="微软雅黑"/>
+                <a:cs typeface="微软雅黑"/>
+              </a:rPr>
+              <a:t>ROADMAP</a:t>
+            </a:r>
+          </a:p>
+        </p:txBody>
+      </p:sp>
+      <p:sp>
+        <p:nvSpPr>
+          <p:cNvPr id="4" name="TextBox 3"/>
+          <p:cNvSpPr txBox="1"/>
+          <p:nvPr/>
+        </p:nvSpPr>
+        <p:spPr>
+          <a:xfrm>
+            <a:off x="822960" y="868680"/>
+            <a:ext cx="10607040" cy="548640"/>
+          </a:xfrm>
+          <a:prstGeom prst="rect">
+            <a:avLst/>
+          </a:prstGeom>
+          <a:noFill/>
+        </p:spPr>
+        <p:txBody>
+          <a:bodyPr wrap="square" anchor="t" lIns="0" rIns="0" tIns="0" bIns="0">
+            <a:spAutoFit/>
+          </a:bodyPr>
+          <a:lstStyle/>
+          <a:p>
+            <a:pPr algn="l">
+              <a:lnSpc>
+                <a:spcPct val="100000"/>
+              </a:lnSpc>
+              <a:spcAft>
+                <a:spcPts val="400"/>
+              </a:spcAft>
+            </a:pPr>
+            <a:r>
+              <a:rPr sz="2800" b="1" i="0">
+                <a:solidFill>
+                  <a:srgbClr val="2B2B2B"/>
+                </a:solidFill>
+                <a:latin typeface="Segoe UI"/>
+                <a:ea typeface="微软雅黑"/>
+                <a:cs typeface="微软雅黑"/>
+              </a:rPr>
+              <a:t>多线路线图</a:t>
+            </a:r>
+          </a:p>
+        </p:txBody>
+      </p:sp>
+      <p:sp>
+        <p:nvSpPr>
+          <p:cNvPr id="5" name="Rectangle 4"/>
+          <p:cNvSpPr/>
+          <p:nvPr/>
+        </p:nvSpPr>
+        <p:spPr>
+          <a:xfrm>
+            <a:off x="822960" y="1572768"/>
+            <a:ext cx="566928" cy="50292"/>
+          </a:xfrm>
+          <a:prstGeom prst="rect">
+            <a:avLst/>
+          </a:prstGeom>
+          <a:solidFill>
+            <a:srgbClr val="3FA88C"/>
+          </a:solidFill>
+          <a:ln>
+            <a:noFill/>
+          </a:ln>
+          <a:effectLst/>
+        </p:spPr>
+        <p:style>
+          <a:lnRef idx="1">
+            <a:schemeClr val="accent1"/>
+          </a:lnRef>
+          <a:fillRef idx="3">
+            <a:schemeClr val="accent1"/>
+          </a:fillRef>
+          <a:effectRef idx="2">
+            <a:schemeClr val="accent1"/>
+          </a:effectRef>
+          <a:fontRef idx="minor">
+            <a:schemeClr val="lt1"/>
+          </a:fontRef>
+        </p:style>
+        <p:txBody>
+          <a:bodyPr rtlCol="0" anchor="ctr"/>
+          <a:lstStyle/>
+          <a:p>
+            <a:pPr algn="ctr"/>
+          </a:p>
+        </p:txBody>
+      </p:sp>
+      <p:sp>
+        <p:nvSpPr>
+          <p:cNvPr id="6" name="TextBox 5"/>
+          <p:cNvSpPr txBox="1"/>
+          <p:nvPr/>
+        </p:nvSpPr>
+        <p:spPr>
+          <a:xfrm>
+            <a:off x="822960" y="2368296"/>
+            <a:ext cx="1371600" cy="365760"/>
+          </a:xfrm>
+          <a:prstGeom prst="rect">
+            <a:avLst/>
+          </a:prstGeom>
+          <a:noFill/>
+        </p:spPr>
+        <p:txBody>
+          <a:bodyPr wrap="square" anchor="t" lIns="0" rIns="0" tIns="0" bIns="0">
+            <a:spAutoFit/>
+          </a:bodyPr>
+          <a:lstStyle/>
+          <a:p>
+            <a:pPr algn="l">
+              <a:lnSpc>
+                <a:spcPct val="100000"/>
+              </a:lnSpc>
+              <a:spcAft>
+                <a:spcPts val="400"/>
+              </a:spcAft>
+            </a:pPr>
+            <a:r>
+              <a:rPr sz="1300" b="1" i="0">
+                <a:solidFill>
+                  <a:srgbClr val="2B2B2B"/>
+                </a:solidFill>
+                <a:latin typeface="Segoe UI"/>
+                <a:ea typeface="微软雅黑"/>
+                <a:cs typeface="微软雅黑"/>
+              </a:rPr>
+              <a:t>线一</a:t>
+            </a:r>
+          </a:p>
+        </p:txBody>
+      </p:sp>
+      <p:cxnSp>
+        <p:nvCxnSpPr>
+          <p:cNvPr id="7" name="Connector 6"/>
+          <p:cNvCxnSpPr/>
+          <p:nvPr/>
+        </p:nvCxnSpPr>
+        <p:spPr>
+          <a:xfrm>
+            <a:off x="2286000" y="2971800"/>
+            <a:ext cx="9052560" cy="0"/>
+          </a:xfrm>
+          <a:prstGeom prst="line">
+            <a:avLst/>
+          </a:prstGeom>
+          <a:ln w="12700">
+            <a:solidFill>
+              <a:srgbClr val="E4E0D8"/>
+            </a:solidFill>
+          </a:ln>
+          <a:effectLst/>
+        </p:spPr>
+        <p:style>
+          <a:lnRef idx="2">
+            <a:schemeClr val="accent1"/>
+          </a:lnRef>
+          <a:fillRef idx="0">
+            <a:schemeClr val="accent1"/>
+          </a:fillRef>
+          <a:effectRef idx="1">
+            <a:schemeClr val="accent1"/>
+          </a:effectRef>
+          <a:fontRef idx="minor">
+            <a:schemeClr val="tx1"/>
+          </a:fontRef>
+        </p:style>
+      </p:cxnSp>
+      <p:sp>
+        <p:nvSpPr>
+          <p:cNvPr id="8" name="Rounded Rectangle 7"/>
+          <p:cNvSpPr/>
+          <p:nvPr/>
+        </p:nvSpPr>
+        <p:spPr>
+          <a:xfrm>
+            <a:off x="2377440" y="2258568"/>
+            <a:ext cx="1042415" cy="1335024"/>
+          </a:xfrm>
+          <a:prstGeom prst="roundRect">
+            <a:avLst>
+              <a:gd name="adj" fmla="val 30000"/>
+            </a:avLst>
+          </a:prstGeom>
+          <a:solidFill>
+            <a:srgbClr val="3FA88C">
+              <a:alpha val="90000"/>
+            </a:srgbClr>
+          </a:solidFill>
+          <a:ln>
+            <a:noFill/>
+          </a:ln>
+          <a:effectLst/>
+        </p:spPr>
+        <p:style>
+          <a:lnRef idx="1">
+            <a:schemeClr val="accent1"/>
+          </a:lnRef>
+          <a:fillRef idx="3">
+            <a:schemeClr val="accent1"/>
+          </a:fillRef>
+          <a:effectRef idx="2">
+            <a:schemeClr val="accent1"/>
+          </a:effectRef>
+          <a:fontRef idx="minor">
+            <a:schemeClr val="lt1"/>
+          </a:fontRef>
+        </p:style>
+        <p:txBody>
+          <a:bodyPr rtlCol="0" anchor="ctr"/>
+          <a:lstStyle/>
+          <a:p>
+            <a:pPr algn="ctr"/>
+          </a:p>
+        </p:txBody>
+      </p:sp>
+      <p:sp>
+        <p:nvSpPr>
+          <p:cNvPr id="9" name="TextBox 8"/>
+          <p:cNvSpPr txBox="1"/>
+          <p:nvPr/>
+        </p:nvSpPr>
+        <p:spPr>
+          <a:xfrm>
+            <a:off x="2487168" y="2295144"/>
+            <a:ext cx="822959" cy="1261872"/>
+          </a:xfrm>
+          <a:prstGeom prst="rect">
+            <a:avLst/>
+          </a:prstGeom>
+          <a:noFill/>
+        </p:spPr>
+        <p:txBody>
+          <a:bodyPr wrap="square" anchor="ctr" lIns="0" rIns="0" tIns="0" bIns="0">
+            <a:spAutoFit/>
+          </a:bodyPr>
+          <a:lstStyle/>
+          <a:p>
+            <a:pPr algn="l">
+              <a:lnSpc>
+                <a:spcPct val="100000"/>
+              </a:lnSpc>
+              <a:spcAft>
+                <a:spcPts val="400"/>
+              </a:spcAft>
+            </a:pPr>
+            <a:r>
+              <a:rPr sz="1050" b="1" i="0">
+                <a:solidFill>
+                  <a:srgbClr val="FFFFFF"/>
+                </a:solidFill>
+                <a:latin typeface="Segoe UI"/>
+                <a:ea typeface="微软雅黑"/>
+                <a:cs typeface="微软雅黑"/>
+              </a:rPr>
+              <a:t>任务</a:t>
+            </a:r>
+          </a:p>
+        </p:txBody>
+      </p:sp>
+      <p:sp>
+        <p:nvSpPr>
+          <p:cNvPr id="10" name="Rounded Rectangle 9"/>
+          <p:cNvSpPr/>
+          <p:nvPr/>
+        </p:nvSpPr>
+        <p:spPr>
+          <a:xfrm>
+            <a:off x="4572000" y="2258568"/>
+            <a:ext cx="1042415" cy="1335024"/>
+          </a:xfrm>
+          <a:prstGeom prst="roundRect">
+            <a:avLst>
+              <a:gd name="adj" fmla="val 30000"/>
+            </a:avLst>
+          </a:prstGeom>
+          <a:solidFill>
+            <a:srgbClr val="3FA88C">
+              <a:alpha val="90000"/>
+            </a:srgbClr>
+          </a:solidFill>
+          <a:ln>
+            <a:noFill/>
+          </a:ln>
+          <a:effectLst/>
+        </p:spPr>
+        <p:style>
+          <a:lnRef idx="1">
+            <a:schemeClr val="accent1"/>
+          </a:lnRef>
+          <a:fillRef idx="3">
+            <a:schemeClr val="accent1"/>
+          </a:fillRef>
+          <a:effectRef idx="2">
+            <a:schemeClr val="accent1"/>
+          </a:effectRef>
+          <a:fontRef idx="minor">
+            <a:schemeClr val="lt1"/>
+          </a:fontRef>
+        </p:style>
+        <p:txBody>
+          <a:bodyPr rtlCol="0" anchor="ctr"/>
+          <a:lstStyle/>
+          <a:p>
+            <a:pPr algn="ctr"/>
+          </a:p>
+        </p:txBody>
+      </p:sp>
+      <p:sp>
+        <p:nvSpPr>
+          <p:cNvPr id="11" name="TextBox 10"/>
+          <p:cNvSpPr txBox="1"/>
+          <p:nvPr/>
+        </p:nvSpPr>
+        <p:spPr>
+          <a:xfrm>
+            <a:off x="4681728" y="2295144"/>
+            <a:ext cx="822959" cy="1261872"/>
+          </a:xfrm>
+          <a:prstGeom prst="rect">
+            <a:avLst/>
+          </a:prstGeom>
+          <a:noFill/>
+        </p:spPr>
+        <p:txBody>
+          <a:bodyPr wrap="square" anchor="ctr" lIns="0" rIns="0" tIns="0" bIns="0">
+            <a:spAutoFit/>
+          </a:bodyPr>
+          <a:lstStyle/>
+          <a:p>
+            <a:pPr algn="l">
+              <a:lnSpc>
+                <a:spcPct val="100000"/>
+              </a:lnSpc>
+              <a:spcAft>
+                <a:spcPts val="400"/>
+              </a:spcAft>
+            </a:pPr>
+            <a:r>
+              <a:rPr sz="1050" b="1" i="0">
+                <a:solidFill>
+                  <a:srgbClr val="FFFFFF"/>
+                </a:solidFill>
+                <a:latin typeface="Segoe UI"/>
+                <a:ea typeface="微软雅黑"/>
+                <a:cs typeface="微软雅黑"/>
+              </a:rPr>
+              <a:t>任务</a:t>
+            </a:r>
+          </a:p>
+        </p:txBody>
+      </p:sp>
+      <p:sp>
+        <p:nvSpPr>
+          <p:cNvPr id="12" name="Rounded Rectangle 11"/>
+          <p:cNvSpPr/>
+          <p:nvPr/>
+        </p:nvSpPr>
+        <p:spPr>
+          <a:xfrm>
+            <a:off x="6766560" y="2258568"/>
+            <a:ext cx="1042415" cy="1335024"/>
+          </a:xfrm>
+          <a:prstGeom prst="roundRect">
+            <a:avLst>
+              <a:gd name="adj" fmla="val 30000"/>
+            </a:avLst>
+          </a:prstGeom>
+          <a:solidFill>
+            <a:srgbClr val="3FA88C">
+              <a:alpha val="90000"/>
+            </a:srgbClr>
+          </a:solidFill>
+          <a:ln>
+            <a:noFill/>
+          </a:ln>
+          <a:effectLst/>
+        </p:spPr>
+        <p:style>
+          <a:lnRef idx="1">
+            <a:schemeClr val="accent1"/>
+          </a:lnRef>
+          <a:fillRef idx="3">
+            <a:schemeClr val="accent1"/>
+          </a:fillRef>
+          <a:effectRef idx="2">
+            <a:schemeClr val="accent1"/>
+          </a:effectRef>
+          <a:fontRef idx="minor">
+            <a:schemeClr val="lt1"/>
+          </a:fontRef>
+        </p:style>
+        <p:txBody>
+          <a:bodyPr rtlCol="0" anchor="ctr"/>
+          <a:lstStyle/>
+          <a:p>
+            <a:pPr algn="ctr"/>
+          </a:p>
+        </p:txBody>
+      </p:sp>
+      <p:sp>
+        <p:nvSpPr>
+          <p:cNvPr id="13" name="TextBox 12"/>
+          <p:cNvSpPr txBox="1"/>
+          <p:nvPr/>
+        </p:nvSpPr>
+        <p:spPr>
+          <a:xfrm>
+            <a:off x="6876288" y="2295144"/>
+            <a:ext cx="822959" cy="1261872"/>
+          </a:xfrm>
+          <a:prstGeom prst="rect">
+            <a:avLst/>
+          </a:prstGeom>
+          <a:noFill/>
+        </p:spPr>
+        <p:txBody>
+          <a:bodyPr wrap="square" anchor="ctr" lIns="0" rIns="0" tIns="0" bIns="0">
+            <a:spAutoFit/>
+          </a:bodyPr>
+          <a:lstStyle/>
+          <a:p>
+            <a:pPr algn="l">
+              <a:lnSpc>
+                <a:spcPct val="100000"/>
+              </a:lnSpc>
+              <a:spcAft>
+                <a:spcPts val="400"/>
+              </a:spcAft>
+            </a:pPr>
+            <a:r>
+              <a:rPr sz="1050" b="1" i="0">
+                <a:solidFill>
+                  <a:srgbClr val="FFFFFF"/>
+                </a:solidFill>
+                <a:latin typeface="Segoe UI"/>
+                <a:ea typeface="微软雅黑"/>
+                <a:cs typeface="微软雅黑"/>
+              </a:rPr>
+              <a:t>任务</a:t>
+            </a:r>
+          </a:p>
+        </p:txBody>
+      </p:sp>
+      <p:sp>
+        <p:nvSpPr>
+          <p:cNvPr id="14" name="TextBox 13"/>
+          <p:cNvSpPr txBox="1"/>
+          <p:nvPr/>
+        </p:nvSpPr>
+        <p:spPr>
+          <a:xfrm>
+            <a:off x="822960" y="4014216"/>
+            <a:ext cx="1371600" cy="365760"/>
+          </a:xfrm>
+          <a:prstGeom prst="rect">
+            <a:avLst/>
+          </a:prstGeom>
+          <a:noFill/>
+        </p:spPr>
+        <p:txBody>
+          <a:bodyPr wrap="square" anchor="t" lIns="0" rIns="0" tIns="0" bIns="0">
+            <a:spAutoFit/>
+          </a:bodyPr>
+          <a:lstStyle/>
+          <a:p>
+            <a:pPr algn="l">
+              <a:lnSpc>
+                <a:spcPct val="100000"/>
+              </a:lnSpc>
+              <a:spcAft>
+                <a:spcPts val="400"/>
+              </a:spcAft>
+            </a:pPr>
+            <a:r>
+              <a:rPr sz="1300" b="1" i="0">
+                <a:solidFill>
+                  <a:srgbClr val="2B2B2B"/>
+                </a:solidFill>
+                <a:latin typeface="Segoe UI"/>
+                <a:ea typeface="微软雅黑"/>
+                <a:cs typeface="微软雅黑"/>
+              </a:rPr>
+              <a:t>线二</a:t>
+            </a:r>
+          </a:p>
+        </p:txBody>
+      </p:sp>
+      <p:cxnSp>
+        <p:nvCxnSpPr>
+          <p:cNvPr id="15" name="Connector 14"/>
+          <p:cNvCxnSpPr/>
+          <p:nvPr/>
+        </p:nvCxnSpPr>
+        <p:spPr>
+          <a:xfrm>
+            <a:off x="2286000" y="4617720"/>
+            <a:ext cx="9052560" cy="0"/>
+          </a:xfrm>
+          <a:prstGeom prst="line">
+            <a:avLst/>
+          </a:prstGeom>
+          <a:ln w="12700">
+            <a:solidFill>
+              <a:srgbClr val="E4E0D8"/>
+            </a:solidFill>
+          </a:ln>
+          <a:effectLst/>
+        </p:spPr>
+        <p:style>
+          <a:lnRef idx="2">
+            <a:schemeClr val="accent1"/>
+          </a:lnRef>
+          <a:fillRef idx="0">
+            <a:schemeClr val="accent1"/>
+          </a:fillRef>
+          <a:effectRef idx="1">
+            <a:schemeClr val="accent1"/>
+          </a:effectRef>
+          <a:fontRef idx="minor">
+            <a:schemeClr val="tx1"/>
+          </a:fontRef>
+        </p:style>
+      </p:cxnSp>
+      <p:sp>
+        <p:nvSpPr>
+          <p:cNvPr id="16" name="Rounded Rectangle 15"/>
+          <p:cNvSpPr/>
+          <p:nvPr/>
+        </p:nvSpPr>
+        <p:spPr>
+          <a:xfrm>
+            <a:off x="2377440" y="3904488"/>
+            <a:ext cx="1042415" cy="1335024"/>
+          </a:xfrm>
+          <a:prstGeom prst="roundRect">
+            <a:avLst>
+              <a:gd name="adj" fmla="val 30000"/>
+            </a:avLst>
+          </a:prstGeom>
+          <a:solidFill>
+            <a:srgbClr val="E2A03F">
+              <a:alpha val="90000"/>
+            </a:srgbClr>
+          </a:solidFill>
+          <a:ln>
+            <a:noFill/>
+          </a:ln>
+          <a:effectLst/>
+        </p:spPr>
+        <p:style>
+          <a:lnRef idx="1">
+            <a:schemeClr val="accent1"/>
+          </a:lnRef>
+          <a:fillRef idx="3">
+            <a:schemeClr val="accent1"/>
+          </a:fillRef>
+          <a:effectRef idx="2">
+            <a:schemeClr val="accent1"/>
+          </a:effectRef>
+          <a:fontRef idx="minor">
+            <a:schemeClr val="lt1"/>
+          </a:fontRef>
+        </p:style>
+        <p:txBody>
+          <a:bodyPr rtlCol="0" anchor="ctr"/>
+          <a:lstStyle/>
+          <a:p>
+            <a:pPr algn="ctr"/>
+          </a:p>
+        </p:txBody>
+      </p:sp>
+      <p:sp>
+        <p:nvSpPr>
+          <p:cNvPr id="17" name="TextBox 16"/>
+          <p:cNvSpPr txBox="1"/>
+          <p:nvPr/>
+        </p:nvSpPr>
+        <p:spPr>
+          <a:xfrm>
+            <a:off x="2487168" y="3941064"/>
+            <a:ext cx="822959" cy="1261872"/>
+          </a:xfrm>
+          <a:prstGeom prst="rect">
+            <a:avLst/>
+          </a:prstGeom>
+          <a:noFill/>
+        </p:spPr>
+        <p:txBody>
+          <a:bodyPr wrap="square" anchor="ctr" lIns="0" rIns="0" tIns="0" bIns="0">
+            <a:spAutoFit/>
+          </a:bodyPr>
+          <a:lstStyle/>
+          <a:p>
+            <a:pPr algn="l">
+              <a:lnSpc>
+                <a:spcPct val="100000"/>
+              </a:lnSpc>
+              <a:spcAft>
+                <a:spcPts val="400"/>
+              </a:spcAft>
+            </a:pPr>
+            <a:r>
+              <a:rPr sz="1050" b="1" i="0">
+                <a:solidFill>
+                  <a:srgbClr val="FFFFFF"/>
+                </a:solidFill>
+                <a:latin typeface="Segoe UI"/>
+                <a:ea typeface="微软雅黑"/>
+                <a:cs typeface="微软雅黑"/>
+              </a:rPr>
+              <a:t>任务</a:t>
+            </a:r>
+          </a:p>
+        </p:txBody>
+      </p:sp>
+      <p:sp>
+        <p:nvSpPr>
+          <p:cNvPr id="18" name="Rounded Rectangle 17"/>
+          <p:cNvSpPr/>
+          <p:nvPr/>
+        </p:nvSpPr>
+        <p:spPr>
+          <a:xfrm>
+            <a:off x="4572000" y="3904488"/>
+            <a:ext cx="1042415" cy="1335024"/>
+          </a:xfrm>
+          <a:prstGeom prst="roundRect">
+            <a:avLst>
+              <a:gd name="adj" fmla="val 30000"/>
+            </a:avLst>
+          </a:prstGeom>
+          <a:solidFill>
+            <a:srgbClr val="E2A03F">
+              <a:alpha val="90000"/>
+            </a:srgbClr>
+          </a:solidFill>
+          <a:ln>
+            <a:noFill/>
+          </a:ln>
+          <a:effectLst/>
+        </p:spPr>
+        <p:style>
+          <a:lnRef idx="1">
+            <a:schemeClr val="accent1"/>
+          </a:lnRef>
+          <a:fillRef idx="3">
+            <a:schemeClr val="accent1"/>
+          </a:fillRef>
+          <a:effectRef idx="2">
+            <a:schemeClr val="accent1"/>
+          </a:effectRef>
+          <a:fontRef idx="minor">
+            <a:schemeClr val="lt1"/>
+          </a:fontRef>
+        </p:style>
+        <p:txBody>
+          <a:bodyPr rtlCol="0" anchor="ctr"/>
+          <a:lstStyle/>
+          <a:p>
+            <a:pPr algn="ctr"/>
+          </a:p>
+        </p:txBody>
+      </p:sp>
+      <p:sp>
+        <p:nvSpPr>
+          <p:cNvPr id="19" name="TextBox 18"/>
+          <p:cNvSpPr txBox="1"/>
+          <p:nvPr/>
+        </p:nvSpPr>
+        <p:spPr>
+          <a:xfrm>
+            <a:off x="4681728" y="3941064"/>
+            <a:ext cx="822959" cy="1261872"/>
+          </a:xfrm>
+          <a:prstGeom prst="rect">
+            <a:avLst/>
+          </a:prstGeom>
+          <a:noFill/>
+        </p:spPr>
+        <p:txBody>
+          <a:bodyPr wrap="square" anchor="ctr" lIns="0" rIns="0" tIns="0" bIns="0">
+            <a:spAutoFit/>
+          </a:bodyPr>
+          <a:lstStyle/>
+          <a:p>
+            <a:pPr algn="l">
+              <a:lnSpc>
+                <a:spcPct val="100000"/>
+              </a:lnSpc>
+              <a:spcAft>
+                <a:spcPts val="400"/>
+              </a:spcAft>
+            </a:pPr>
+            <a:r>
+              <a:rPr sz="1050" b="1" i="0">
+                <a:solidFill>
+                  <a:srgbClr val="FFFFFF"/>
+                </a:solidFill>
+                <a:latin typeface="Segoe UI"/>
+                <a:ea typeface="微软雅黑"/>
+                <a:cs typeface="微软雅黑"/>
+              </a:rPr>
+              <a:t>任务</a:t>
+            </a:r>
+          </a:p>
+        </p:txBody>
+      </p:sp>
+      <p:sp>
+        <p:nvSpPr>
+          <p:cNvPr id="20" name="Rectangle 19"/>
+          <p:cNvSpPr/>
+          <p:nvPr/>
+        </p:nvSpPr>
+        <p:spPr>
+          <a:xfrm>
+            <a:off x="822960" y="6291072"/>
+            <a:ext cx="10545775" cy="7315"/>
+          </a:xfrm>
+          <a:prstGeom prst="rect">
+            <a:avLst/>
+          </a:prstGeom>
+          <a:solidFill>
+            <a:srgbClr val="E4E0D8"/>
+          </a:solidFill>
+          <a:ln>
+            <a:noFill/>
+          </a:ln>
+          <a:effectLst/>
+        </p:spPr>
+        <p:style>
+          <a:lnRef idx="1">
+            <a:schemeClr val="accent1"/>
+          </a:lnRef>
+          <a:fillRef idx="3">
+            <a:schemeClr val="accent1"/>
+          </a:fillRef>
+          <a:effectRef idx="2">
+            <a:schemeClr val="accent1"/>
+          </a:effectRef>
+          <a:fontRef idx="minor">
+            <a:schemeClr val="lt1"/>
+          </a:fontRef>
+        </p:style>
+        <p:txBody>
+          <a:bodyPr rtlCol="0" anchor="ctr"/>
+          <a:lstStyle/>
+          <a:p>
+            <a:pPr algn="ctr"/>
+          </a:p>
+        </p:txBody>
+      </p:sp>
+      <p:sp>
+        <p:nvSpPr>
+          <p:cNvPr id="21" name="TextBox 20"/>
+          <p:cNvSpPr txBox="1"/>
+          <p:nvPr/>
+        </p:nvSpPr>
+        <p:spPr>
+          <a:xfrm>
+            <a:off x="822960" y="6355080"/>
+            <a:ext cx="6583680" cy="274320"/>
+          </a:xfrm>
+          <a:prstGeom prst="rect">
+            <a:avLst/>
+          </a:prstGeom>
+          <a:noFill/>
+        </p:spPr>
+        <p:txBody>
+          <a:bodyPr wrap="square" anchor="t" lIns="0" rIns="0" tIns="0" bIns="0">
+            <a:spAutoFit/>
+          </a:bodyPr>
+          <a:lstStyle/>
+          <a:p>
+            <a:pPr algn="l">
+              <a:lnSpc>
+                <a:spcPct val="100000"/>
+              </a:lnSpc>
+              <a:spcAft>
+                <a:spcPts val="400"/>
+              </a:spcAft>
+            </a:pPr>
+            <a:r>
+              <a:rPr sz="900" b="0" i="0">
+                <a:solidFill>
+                  <a:srgbClr val="9A9A93"/>
+                </a:solidFill>
+                <a:latin typeface="Segoe UI"/>
+                <a:ea typeface="微软雅黑"/>
+                <a:cs typeface="微软雅黑"/>
+              </a:rPr>
+              <a:t>柔和科技图表  ·  Soft Tech</a:t>
+            </a:r>
+          </a:p>
+        </p:txBody>
+      </p:sp>
+    </p:spTree>
+  </p:cSld>
+  <p:clrMapOvr>
+    <a:masterClrMapping/>
+  </p:clrMapOvr>
+  <p:transition spd="med">
+    <p:fade/>
+  </p:transition>
+</p:sld>
+</file>
+
+<file path=ppt/slides/slide18.xml><?xml version="1.0" encoding="utf-8"?>
+<p:sld xmlns:a="http://schemas.openxmlformats.org/drawingml/2006/main" xmlns:p="http://schemas.openxmlformats.org/presentationml/2006/main" xmlns:r="http://schemas.openxmlformats.org/officeDocument/2006/relationships">
+  <p:cSld>
+    <p:spTree>
+      <p:nvGrpSpPr>
+        <p:cNvPr id="1" name=""/>
+        <p:cNvGrpSpPr/>
+        <p:nvPr/>
+      </p:nvGrpSpPr>
+      <p:grpSpPr/>
+      <p:sp>
+        <p:nvSpPr>
+          <p:cNvPr id="2" name="Rectangle 1"/>
+          <p:cNvSpPr/>
+          <p:nvPr/>
+        </p:nvSpPr>
+        <p:spPr>
+          <a:xfrm>
+            <a:off x="0" y="0"/>
+            <a:ext cx="12191695" cy="6858000"/>
+          </a:xfrm>
+          <a:prstGeom prst="rect">
+            <a:avLst/>
+          </a:prstGeom>
+          <a:solidFill>
+            <a:srgbClr val="F5F3EF"/>
+          </a:solidFill>
+          <a:ln>
+            <a:noFill/>
+          </a:ln>
+          <a:effectLst/>
+        </p:spPr>
+        <p:style>
+          <a:lnRef idx="1">
+            <a:schemeClr val="accent1"/>
+          </a:lnRef>
+          <a:fillRef idx="3">
+            <a:schemeClr val="accent1"/>
+          </a:fillRef>
+          <a:effectRef idx="2">
+            <a:schemeClr val="accent1"/>
+          </a:effectRef>
+          <a:fontRef idx="minor">
+            <a:schemeClr val="lt1"/>
+          </a:fontRef>
+        </p:style>
+        <p:txBody>
+          <a:bodyPr rtlCol="0" anchor="ctr"/>
+          <a:lstStyle/>
+          <a:p>
+            <a:pPr algn="ctr"/>
+          </a:p>
+        </p:txBody>
+      </p:sp>
+      <p:sp>
+        <p:nvSpPr>
           <p:cNvPr id="3" name="Oval 2"/>
           <p:cNvSpPr/>
           <p:nvPr/>
@@ -7013,7 +10085,7 @@
         <p:spPr>
           <a:xfrm>
             <a:off x="822960" y="6355080"/>
-            <a:ext cx="6400800" cy="274320"/>
+            <a:ext cx="6583680" cy="274320"/>
           </a:xfrm>
           <a:prstGeom prst="rect">
             <a:avLst/>
@@ -7053,6 +10125,9 @@
   <p:clrMapOvr>
     <a:masterClrMapping/>
   </p:clrMapOvr>
+  <p:transition spd="med">
+    <p:fade/>
+  </p:transition>
 </p:sld>
 </file>
 
@@ -7163,7 +10238,7 @@
         <p:spPr>
           <a:xfrm>
             <a:off x="822960" y="868680"/>
-            <a:ext cx="10515600" cy="548640"/>
+            <a:ext cx="10607040" cy="548640"/>
           </a:xfrm>
           <a:prstGeom prst="rect">
             <a:avLst/>
@@ -7791,7 +10866,7 @@
         <p:spPr>
           <a:xfrm>
             <a:off x="822960" y="6355080"/>
-            <a:ext cx="6400800" cy="274320"/>
+            <a:ext cx="6583680" cy="274320"/>
           </a:xfrm>
           <a:prstGeom prst="rect">
             <a:avLst/>
@@ -7831,6 +10906,9 @@
   <p:clrMapOvr>
     <a:masterClrMapping/>
   </p:clrMapOvr>
+  <p:transition spd="med">
+    <p:fade/>
+  </p:transition>
 </p:sld>
 </file>
 
@@ -8163,7 +11241,7 @@
         <p:spPr>
           <a:xfrm>
             <a:off x="822960" y="6355080"/>
-            <a:ext cx="6400800" cy="274320"/>
+            <a:ext cx="6583680" cy="274320"/>
           </a:xfrm>
           <a:prstGeom prst="rect">
             <a:avLst/>
@@ -8203,6 +11281,9 @@
   <p:clrMapOvr>
     <a:masterClrMapping/>
   </p:clrMapOvr>
+  <p:transition spd="med">
+    <p:fade/>
+  </p:transition>
 </p:sld>
 </file>
 
@@ -8313,7 +11394,7 @@
         <p:spPr>
           <a:xfrm>
             <a:off x="822960" y="868680"/>
-            <a:ext cx="10515600" cy="548640"/>
+            <a:ext cx="10607040" cy="548640"/>
           </a:xfrm>
           <a:prstGeom prst="rect">
             <a:avLst/>
@@ -8394,174 +11475,27 @@
       </p:sp>
       <p:sp>
         <p:nvSpPr>
-          <p:cNvPr id="6" name="TextBox 5"/>
-          <p:cNvSpPr txBox="1"/>
-          <p:nvPr/>
-        </p:nvSpPr>
-        <p:spPr>
-          <a:xfrm>
-            <a:off x="822960" y="2148840"/>
-            <a:ext cx="10424160" cy="3840480"/>
-          </a:xfrm>
-          <a:prstGeom prst="rect">
-            <a:avLst/>
-          </a:prstGeom>
-          <a:noFill/>
-        </p:spPr>
-        <p:txBody>
-          <a:bodyPr wrap="square">
-            <a:spAutoFit/>
-          </a:bodyPr>
-          <a:lstStyle/>
-          <a:p>
-            <a:pPr>
-              <a:lnSpc>
-                <a:spcPct val="115000"/>
-              </a:lnSpc>
-              <a:spcAft>
-                <a:spcPts val="1400"/>
-              </a:spcAft>
-            </a:pPr>
-            <a:r>
-              <a:rPr sz="1189">
-                <a:solidFill>
-                  <a:srgbClr val="3FA88C"/>
-                </a:solidFill>
-                <a:latin typeface="Segoe UI"/>
-                <a:ea typeface="微软雅黑"/>
-                <a:cs typeface="微软雅黑"/>
-              </a:rPr>
-              <a:t>●  </a:t>
-            </a:r>
-            <a:r>
-              <a:rPr sz="1700">
-                <a:solidFill>
-                  <a:srgbClr val="9A9A93"/>
-                </a:solidFill>
-                <a:latin typeface="Segoe UI"/>
-                <a:ea typeface="微软雅黑"/>
-                <a:cs typeface="微软雅黑"/>
-              </a:rPr>
-              <a:t>在此输入指标解读一</a:t>
-            </a:r>
-          </a:p>
-          <a:p>
-            <a:pPr>
-              <a:lnSpc>
-                <a:spcPct val="115000"/>
-              </a:lnSpc>
-              <a:spcAft>
-                <a:spcPts val="1400"/>
-              </a:spcAft>
-            </a:pPr>
-            <a:r>
-              <a:rPr sz="1189">
-                <a:solidFill>
-                  <a:srgbClr val="3FA88C"/>
-                </a:solidFill>
-                <a:latin typeface="Segoe UI"/>
-                <a:ea typeface="微软雅黑"/>
-                <a:cs typeface="微软雅黑"/>
-              </a:rPr>
-              <a:t>●  </a:t>
-            </a:r>
-            <a:r>
-              <a:rPr sz="1700">
-                <a:solidFill>
-                  <a:srgbClr val="9A9A93"/>
-                </a:solidFill>
-                <a:latin typeface="Segoe UI"/>
-                <a:ea typeface="微软雅黑"/>
-                <a:cs typeface="微软雅黑"/>
-              </a:rPr>
-              <a:t>在此输入指标解读二</a:t>
-            </a:r>
-          </a:p>
-          <a:p>
-            <a:pPr>
-              <a:lnSpc>
-                <a:spcPct val="115000"/>
-              </a:lnSpc>
-              <a:spcAft>
-                <a:spcPts val="1400"/>
-              </a:spcAft>
-            </a:pPr>
-            <a:r>
-              <a:rPr sz="1189">
-                <a:solidFill>
-                  <a:srgbClr val="3FA88C"/>
-                </a:solidFill>
-                <a:latin typeface="Segoe UI"/>
-                <a:ea typeface="微软雅黑"/>
-                <a:cs typeface="微软雅黑"/>
-              </a:rPr>
-              <a:t>●  </a:t>
-            </a:r>
-            <a:r>
-              <a:rPr sz="1700">
-                <a:solidFill>
-                  <a:srgbClr val="9A9A93"/>
-                </a:solidFill>
-                <a:latin typeface="Segoe UI"/>
-                <a:ea typeface="微软雅黑"/>
-                <a:cs typeface="微软雅黑"/>
-              </a:rPr>
-              <a:t>在此输入指标解读三</a:t>
-            </a:r>
-          </a:p>
-          <a:p>
-            <a:pPr>
-              <a:lnSpc>
-                <a:spcPct val="115000"/>
-              </a:lnSpc>
-              <a:spcAft>
-                <a:spcPts val="1400"/>
-              </a:spcAft>
-            </a:pPr>
-            <a:r>
-              <a:rPr sz="1189">
-                <a:solidFill>
-                  <a:srgbClr val="3FA88C"/>
-                </a:solidFill>
-                <a:latin typeface="Segoe UI"/>
-                <a:ea typeface="微软雅黑"/>
-                <a:cs typeface="微软雅黑"/>
-              </a:rPr>
-              <a:t>●  </a:t>
-            </a:r>
-            <a:r>
-              <a:rPr sz="1700">
-                <a:solidFill>
-                  <a:srgbClr val="9A9A93"/>
-                </a:solidFill>
-                <a:latin typeface="Segoe UI"/>
-                <a:ea typeface="微软雅黑"/>
-                <a:cs typeface="微软雅黑"/>
-              </a:rPr>
-              <a:t>在此输入指标解读四</a:t>
-            </a:r>
-          </a:p>
-        </p:txBody>
-      </p:sp>
-      <p:sp>
-        <p:nvSpPr>
-          <p:cNvPr id="7" name="Rectangle 6"/>
+          <p:cNvPr id="6" name="Rounded Rectangle 5"/>
           <p:cNvSpPr/>
           <p:nvPr/>
         </p:nvSpPr>
         <p:spPr>
           <a:xfrm>
-            <a:off x="822960" y="6291072"/>
-            <a:ext cx="10545775" cy="7315"/>
-          </a:xfrm>
-          <a:prstGeom prst="rect">
-            <a:avLst/>
+            <a:off x="822960" y="2103120"/>
+            <a:ext cx="10424160" cy="640080"/>
+          </a:xfrm>
+          <a:prstGeom prst="roundRect">
+            <a:avLst>
+              <a:gd name="adj" fmla="val 24000"/>
+            </a:avLst>
           </a:prstGeom>
           <a:solidFill>
-            <a:srgbClr val="E4E0D8"/>
+            <a:srgbClr val="FFFFFF"/>
           </a:solidFill>
-          <a:ln>
-            <a:noFill/>
+          <a:ln w="9525">
+            <a:solidFill>
+              <a:srgbClr val="E4E0D8"/>
+            </a:solidFill>
           </a:ln>
           <a:effectLst/>
         </p:spPr>
@@ -8589,14 +11523,14 @@
       </p:sp>
       <p:sp>
         <p:nvSpPr>
-          <p:cNvPr id="8" name="TextBox 7"/>
+          <p:cNvPr id="7" name="TextBox 6"/>
           <p:cNvSpPr txBox="1"/>
           <p:nvPr/>
         </p:nvSpPr>
         <p:spPr>
           <a:xfrm>
-            <a:off x="822960" y="6355080"/>
-            <a:ext cx="6400800" cy="274320"/>
+            <a:off x="1051560" y="2249424"/>
+            <a:ext cx="640080" cy="365760"/>
           </a:xfrm>
           <a:prstGeom prst="rect">
             <a:avLst/>
@@ -8618,6 +11552,546 @@
               </a:spcAft>
             </a:pPr>
             <a:r>
+              <a:rPr sz="1300" b="1" i="0">
+                <a:solidFill>
+                  <a:srgbClr val="3FA88C"/>
+                </a:solidFill>
+                <a:latin typeface="Segoe UI"/>
+                <a:ea typeface="微软雅黑"/>
+                <a:cs typeface="微软雅黑"/>
+              </a:rPr>
+              <a:t>01</a:t>
+            </a:r>
+          </a:p>
+        </p:txBody>
+      </p:sp>
+      <p:sp>
+        <p:nvSpPr>
+          <p:cNvPr id="8" name="TextBox 7"/>
+          <p:cNvSpPr txBox="1"/>
+          <p:nvPr/>
+        </p:nvSpPr>
+        <p:spPr>
+          <a:xfrm>
+            <a:off x="1828800" y="2231136"/>
+            <a:ext cx="9144000" cy="411480"/>
+          </a:xfrm>
+          <a:prstGeom prst="rect">
+            <a:avLst/>
+          </a:prstGeom>
+          <a:noFill/>
+        </p:spPr>
+        <p:txBody>
+          <a:bodyPr wrap="square" anchor="t" lIns="0" rIns="0" tIns="0" bIns="0">
+            <a:spAutoFit/>
+          </a:bodyPr>
+          <a:lstStyle/>
+          <a:p>
+            <a:pPr algn="l">
+              <a:lnSpc>
+                <a:spcPct val="100000"/>
+              </a:lnSpc>
+              <a:spcAft>
+                <a:spcPts val="400"/>
+              </a:spcAft>
+            </a:pPr>
+            <a:r>
+              <a:rPr sz="1500" b="0" i="0">
+                <a:solidFill>
+                  <a:srgbClr val="2B2B2B"/>
+                </a:solidFill>
+                <a:latin typeface="Segoe UI"/>
+                <a:ea typeface="微软雅黑"/>
+                <a:cs typeface="微软雅黑"/>
+              </a:rPr>
+              <a:t>在此输入「总体概览」的要点一</a:t>
+            </a:r>
+          </a:p>
+        </p:txBody>
+      </p:sp>
+      <p:sp>
+        <p:nvSpPr>
+          <p:cNvPr id="9" name="Rounded Rectangle 8"/>
+          <p:cNvSpPr/>
+          <p:nvPr/>
+        </p:nvSpPr>
+        <p:spPr>
+          <a:xfrm>
+            <a:off x="822960" y="2889503"/>
+            <a:ext cx="10424160" cy="640080"/>
+          </a:xfrm>
+          <a:prstGeom prst="roundRect">
+            <a:avLst>
+              <a:gd name="adj" fmla="val 24000"/>
+            </a:avLst>
+          </a:prstGeom>
+          <a:solidFill>
+            <a:srgbClr val="FFFFFF"/>
+          </a:solidFill>
+          <a:ln w="9525">
+            <a:solidFill>
+              <a:srgbClr val="E4E0D8"/>
+            </a:solidFill>
+          </a:ln>
+          <a:effectLst/>
+        </p:spPr>
+        <p:style>
+          <a:lnRef idx="1">
+            <a:schemeClr val="accent1"/>
+          </a:lnRef>
+          <a:fillRef idx="3">
+            <a:schemeClr val="accent1"/>
+          </a:fillRef>
+          <a:effectRef idx="2">
+            <a:schemeClr val="accent1"/>
+          </a:effectRef>
+          <a:fontRef idx="minor">
+            <a:schemeClr val="lt1"/>
+          </a:fontRef>
+        </p:style>
+        <p:txBody>
+          <a:bodyPr rtlCol="0" anchor="ctr"/>
+          <a:lstStyle/>
+          <a:p>
+            <a:pPr algn="ctr"/>
+          </a:p>
+        </p:txBody>
+      </p:sp>
+      <p:sp>
+        <p:nvSpPr>
+          <p:cNvPr id="10" name="TextBox 9"/>
+          <p:cNvSpPr txBox="1"/>
+          <p:nvPr/>
+        </p:nvSpPr>
+        <p:spPr>
+          <a:xfrm>
+            <a:off x="1051560" y="3035808"/>
+            <a:ext cx="640080" cy="365760"/>
+          </a:xfrm>
+          <a:prstGeom prst="rect">
+            <a:avLst/>
+          </a:prstGeom>
+          <a:noFill/>
+        </p:spPr>
+        <p:txBody>
+          <a:bodyPr wrap="square" anchor="t" lIns="0" rIns="0" tIns="0" bIns="0">
+            <a:spAutoFit/>
+          </a:bodyPr>
+          <a:lstStyle/>
+          <a:p>
+            <a:pPr algn="l">
+              <a:lnSpc>
+                <a:spcPct val="100000"/>
+              </a:lnSpc>
+              <a:spcAft>
+                <a:spcPts val="400"/>
+              </a:spcAft>
+            </a:pPr>
+            <a:r>
+              <a:rPr sz="1300" b="1" i="0">
+                <a:solidFill>
+                  <a:srgbClr val="3FA88C"/>
+                </a:solidFill>
+                <a:latin typeface="Segoe UI"/>
+                <a:ea typeface="微软雅黑"/>
+                <a:cs typeface="微软雅黑"/>
+              </a:rPr>
+              <a:t>02</a:t>
+            </a:r>
+          </a:p>
+        </p:txBody>
+      </p:sp>
+      <p:sp>
+        <p:nvSpPr>
+          <p:cNvPr id="11" name="TextBox 10"/>
+          <p:cNvSpPr txBox="1"/>
+          <p:nvPr/>
+        </p:nvSpPr>
+        <p:spPr>
+          <a:xfrm>
+            <a:off x="1828800" y="3017520"/>
+            <a:ext cx="9144000" cy="411480"/>
+          </a:xfrm>
+          <a:prstGeom prst="rect">
+            <a:avLst/>
+          </a:prstGeom>
+          <a:noFill/>
+        </p:spPr>
+        <p:txBody>
+          <a:bodyPr wrap="square" anchor="t" lIns="0" rIns="0" tIns="0" bIns="0">
+            <a:spAutoFit/>
+          </a:bodyPr>
+          <a:lstStyle/>
+          <a:p>
+            <a:pPr algn="l">
+              <a:lnSpc>
+                <a:spcPct val="100000"/>
+              </a:lnSpc>
+              <a:spcAft>
+                <a:spcPts val="400"/>
+              </a:spcAft>
+            </a:pPr>
+            <a:r>
+              <a:rPr sz="1500" b="0" i="0">
+                <a:solidFill>
+                  <a:srgbClr val="2B2B2B"/>
+                </a:solidFill>
+                <a:latin typeface="Segoe UI"/>
+                <a:ea typeface="微软雅黑"/>
+                <a:cs typeface="微软雅黑"/>
+              </a:rPr>
+              <a:t>在此输入「总体概览」的要点二</a:t>
+            </a:r>
+          </a:p>
+        </p:txBody>
+      </p:sp>
+      <p:sp>
+        <p:nvSpPr>
+          <p:cNvPr id="12" name="Rounded Rectangle 11"/>
+          <p:cNvSpPr/>
+          <p:nvPr/>
+        </p:nvSpPr>
+        <p:spPr>
+          <a:xfrm>
+            <a:off x="822960" y="3675887"/>
+            <a:ext cx="10424160" cy="640080"/>
+          </a:xfrm>
+          <a:prstGeom prst="roundRect">
+            <a:avLst>
+              <a:gd name="adj" fmla="val 24000"/>
+            </a:avLst>
+          </a:prstGeom>
+          <a:solidFill>
+            <a:srgbClr val="FFFFFF"/>
+          </a:solidFill>
+          <a:ln w="9525">
+            <a:solidFill>
+              <a:srgbClr val="E4E0D8"/>
+            </a:solidFill>
+          </a:ln>
+          <a:effectLst/>
+        </p:spPr>
+        <p:style>
+          <a:lnRef idx="1">
+            <a:schemeClr val="accent1"/>
+          </a:lnRef>
+          <a:fillRef idx="3">
+            <a:schemeClr val="accent1"/>
+          </a:fillRef>
+          <a:effectRef idx="2">
+            <a:schemeClr val="accent1"/>
+          </a:effectRef>
+          <a:fontRef idx="minor">
+            <a:schemeClr val="lt1"/>
+          </a:fontRef>
+        </p:style>
+        <p:txBody>
+          <a:bodyPr rtlCol="0" anchor="ctr"/>
+          <a:lstStyle/>
+          <a:p>
+            <a:pPr algn="ctr"/>
+          </a:p>
+        </p:txBody>
+      </p:sp>
+      <p:sp>
+        <p:nvSpPr>
+          <p:cNvPr id="13" name="TextBox 12"/>
+          <p:cNvSpPr txBox="1"/>
+          <p:nvPr/>
+        </p:nvSpPr>
+        <p:spPr>
+          <a:xfrm>
+            <a:off x="1051560" y="3822191"/>
+            <a:ext cx="640080" cy="365760"/>
+          </a:xfrm>
+          <a:prstGeom prst="rect">
+            <a:avLst/>
+          </a:prstGeom>
+          <a:noFill/>
+        </p:spPr>
+        <p:txBody>
+          <a:bodyPr wrap="square" anchor="t" lIns="0" rIns="0" tIns="0" bIns="0">
+            <a:spAutoFit/>
+          </a:bodyPr>
+          <a:lstStyle/>
+          <a:p>
+            <a:pPr algn="l">
+              <a:lnSpc>
+                <a:spcPct val="100000"/>
+              </a:lnSpc>
+              <a:spcAft>
+                <a:spcPts val="400"/>
+              </a:spcAft>
+            </a:pPr>
+            <a:r>
+              <a:rPr sz="1300" b="1" i="0">
+                <a:solidFill>
+                  <a:srgbClr val="3FA88C"/>
+                </a:solidFill>
+                <a:latin typeface="Segoe UI"/>
+                <a:ea typeface="微软雅黑"/>
+                <a:cs typeface="微软雅黑"/>
+              </a:rPr>
+              <a:t>03</a:t>
+            </a:r>
+          </a:p>
+        </p:txBody>
+      </p:sp>
+      <p:sp>
+        <p:nvSpPr>
+          <p:cNvPr id="14" name="TextBox 13"/>
+          <p:cNvSpPr txBox="1"/>
+          <p:nvPr/>
+        </p:nvSpPr>
+        <p:spPr>
+          <a:xfrm>
+            <a:off x="1828800" y="3803903"/>
+            <a:ext cx="9144000" cy="411480"/>
+          </a:xfrm>
+          <a:prstGeom prst="rect">
+            <a:avLst/>
+          </a:prstGeom>
+          <a:noFill/>
+        </p:spPr>
+        <p:txBody>
+          <a:bodyPr wrap="square" anchor="t" lIns="0" rIns="0" tIns="0" bIns="0">
+            <a:spAutoFit/>
+          </a:bodyPr>
+          <a:lstStyle/>
+          <a:p>
+            <a:pPr algn="l">
+              <a:lnSpc>
+                <a:spcPct val="100000"/>
+              </a:lnSpc>
+              <a:spcAft>
+                <a:spcPts val="400"/>
+              </a:spcAft>
+            </a:pPr>
+            <a:r>
+              <a:rPr sz="1500" b="0" i="0">
+                <a:solidFill>
+                  <a:srgbClr val="2B2B2B"/>
+                </a:solidFill>
+                <a:latin typeface="Segoe UI"/>
+                <a:ea typeface="微软雅黑"/>
+                <a:cs typeface="微软雅黑"/>
+              </a:rPr>
+              <a:t>在此输入「总体概览」的要点三</a:t>
+            </a:r>
+          </a:p>
+        </p:txBody>
+      </p:sp>
+      <p:sp>
+        <p:nvSpPr>
+          <p:cNvPr id="15" name="Rounded Rectangle 14"/>
+          <p:cNvSpPr/>
+          <p:nvPr/>
+        </p:nvSpPr>
+        <p:spPr>
+          <a:xfrm>
+            <a:off x="822960" y="4462272"/>
+            <a:ext cx="10424160" cy="640080"/>
+          </a:xfrm>
+          <a:prstGeom prst="roundRect">
+            <a:avLst>
+              <a:gd name="adj" fmla="val 24000"/>
+            </a:avLst>
+          </a:prstGeom>
+          <a:solidFill>
+            <a:srgbClr val="FFFFFF"/>
+          </a:solidFill>
+          <a:ln w="9525">
+            <a:solidFill>
+              <a:srgbClr val="E4E0D8"/>
+            </a:solidFill>
+          </a:ln>
+          <a:effectLst/>
+        </p:spPr>
+        <p:style>
+          <a:lnRef idx="1">
+            <a:schemeClr val="accent1"/>
+          </a:lnRef>
+          <a:fillRef idx="3">
+            <a:schemeClr val="accent1"/>
+          </a:fillRef>
+          <a:effectRef idx="2">
+            <a:schemeClr val="accent1"/>
+          </a:effectRef>
+          <a:fontRef idx="minor">
+            <a:schemeClr val="lt1"/>
+          </a:fontRef>
+        </p:style>
+        <p:txBody>
+          <a:bodyPr rtlCol="0" anchor="ctr"/>
+          <a:lstStyle/>
+          <a:p>
+            <a:pPr algn="ctr"/>
+          </a:p>
+        </p:txBody>
+      </p:sp>
+      <p:sp>
+        <p:nvSpPr>
+          <p:cNvPr id="16" name="TextBox 15"/>
+          <p:cNvSpPr txBox="1"/>
+          <p:nvPr/>
+        </p:nvSpPr>
+        <p:spPr>
+          <a:xfrm>
+            <a:off x="1051560" y="4608576"/>
+            <a:ext cx="640080" cy="365760"/>
+          </a:xfrm>
+          <a:prstGeom prst="rect">
+            <a:avLst/>
+          </a:prstGeom>
+          <a:noFill/>
+        </p:spPr>
+        <p:txBody>
+          <a:bodyPr wrap="square" anchor="t" lIns="0" rIns="0" tIns="0" bIns="0">
+            <a:spAutoFit/>
+          </a:bodyPr>
+          <a:lstStyle/>
+          <a:p>
+            <a:pPr algn="l">
+              <a:lnSpc>
+                <a:spcPct val="100000"/>
+              </a:lnSpc>
+              <a:spcAft>
+                <a:spcPts val="400"/>
+              </a:spcAft>
+            </a:pPr>
+            <a:r>
+              <a:rPr sz="1300" b="1" i="0">
+                <a:solidFill>
+                  <a:srgbClr val="3FA88C"/>
+                </a:solidFill>
+                <a:latin typeface="Segoe UI"/>
+                <a:ea typeface="微软雅黑"/>
+                <a:cs typeface="微软雅黑"/>
+              </a:rPr>
+              <a:t>04</a:t>
+            </a:r>
+          </a:p>
+        </p:txBody>
+      </p:sp>
+      <p:sp>
+        <p:nvSpPr>
+          <p:cNvPr id="17" name="TextBox 16"/>
+          <p:cNvSpPr txBox="1"/>
+          <p:nvPr/>
+        </p:nvSpPr>
+        <p:spPr>
+          <a:xfrm>
+            <a:off x="1828800" y="4590288"/>
+            <a:ext cx="9144000" cy="411480"/>
+          </a:xfrm>
+          <a:prstGeom prst="rect">
+            <a:avLst/>
+          </a:prstGeom>
+          <a:noFill/>
+        </p:spPr>
+        <p:txBody>
+          <a:bodyPr wrap="square" anchor="t" lIns="0" rIns="0" tIns="0" bIns="0">
+            <a:spAutoFit/>
+          </a:bodyPr>
+          <a:lstStyle/>
+          <a:p>
+            <a:pPr algn="l">
+              <a:lnSpc>
+                <a:spcPct val="100000"/>
+              </a:lnSpc>
+              <a:spcAft>
+                <a:spcPts val="400"/>
+              </a:spcAft>
+            </a:pPr>
+            <a:r>
+              <a:rPr sz="1500" b="0" i="0">
+                <a:solidFill>
+                  <a:srgbClr val="2B2B2B"/>
+                </a:solidFill>
+                <a:latin typeface="Segoe UI"/>
+                <a:ea typeface="微软雅黑"/>
+                <a:cs typeface="微软雅黑"/>
+              </a:rPr>
+              <a:t>在此输入「总体概览」的要点四</a:t>
+            </a:r>
+          </a:p>
+        </p:txBody>
+      </p:sp>
+      <p:sp>
+        <p:nvSpPr>
+          <p:cNvPr id="18" name="Rectangle 17"/>
+          <p:cNvSpPr/>
+          <p:nvPr/>
+        </p:nvSpPr>
+        <p:spPr>
+          <a:xfrm>
+            <a:off x="822960" y="6291072"/>
+            <a:ext cx="10545775" cy="7315"/>
+          </a:xfrm>
+          <a:prstGeom prst="rect">
+            <a:avLst/>
+          </a:prstGeom>
+          <a:solidFill>
+            <a:srgbClr val="E4E0D8"/>
+          </a:solidFill>
+          <a:ln>
+            <a:noFill/>
+          </a:ln>
+          <a:effectLst/>
+        </p:spPr>
+        <p:style>
+          <a:lnRef idx="1">
+            <a:schemeClr val="accent1"/>
+          </a:lnRef>
+          <a:fillRef idx="3">
+            <a:schemeClr val="accent1"/>
+          </a:fillRef>
+          <a:effectRef idx="2">
+            <a:schemeClr val="accent1"/>
+          </a:effectRef>
+          <a:fontRef idx="minor">
+            <a:schemeClr val="lt1"/>
+          </a:fontRef>
+        </p:style>
+        <p:txBody>
+          <a:bodyPr rtlCol="0" anchor="ctr"/>
+          <a:lstStyle/>
+          <a:p>
+            <a:pPr algn="ctr"/>
+          </a:p>
+        </p:txBody>
+      </p:sp>
+      <p:sp>
+        <p:nvSpPr>
+          <p:cNvPr id="19" name="TextBox 18"/>
+          <p:cNvSpPr txBox="1"/>
+          <p:nvPr/>
+        </p:nvSpPr>
+        <p:spPr>
+          <a:xfrm>
+            <a:off x="822960" y="6355080"/>
+            <a:ext cx="6583680" cy="274320"/>
+          </a:xfrm>
+          <a:prstGeom prst="rect">
+            <a:avLst/>
+          </a:prstGeom>
+          <a:noFill/>
+        </p:spPr>
+        <p:txBody>
+          <a:bodyPr wrap="square" anchor="t" lIns="0" rIns="0" tIns="0" bIns="0">
+            <a:spAutoFit/>
+          </a:bodyPr>
+          <a:lstStyle/>
+          <a:p>
+            <a:pPr algn="l">
+              <a:lnSpc>
+                <a:spcPct val="100000"/>
+              </a:lnSpc>
+              <a:spcAft>
+                <a:spcPts val="400"/>
+              </a:spcAft>
+            </a:pPr>
+            <a:r>
               <a:rPr sz="900" b="0" i="0">
                 <a:solidFill>
                   <a:srgbClr val="9A9A93"/>
@@ -8636,6 +12110,9 @@
   <p:clrMapOvr>
     <a:masterClrMapping/>
   </p:clrMapOvr>
+  <p:transition spd="med">
+    <p:fade/>
+  </p:transition>
 </p:sld>
 </file>
 
@@ -8732,7 +12209,7 @@
                 <a:ea typeface="微软雅黑"/>
                 <a:cs typeface="微软雅黑"/>
               </a:rPr>
-              <a:t>OVERVIEW</a:t>
+              <a:t>KEY POINTS</a:t>
             </a:r>
           </a:p>
         </p:txBody>
@@ -8746,7 +12223,7 @@
         <p:spPr>
           <a:xfrm>
             <a:off x="822960" y="868680"/>
-            <a:ext cx="10515600" cy="548640"/>
+            <a:ext cx="10607040" cy="548640"/>
           </a:xfrm>
           <a:prstGeom prst="rect">
             <a:avLst/>
@@ -8776,7 +12253,7 @@
                 <a:ea typeface="微软雅黑"/>
                 <a:cs typeface="微软雅黑"/>
               </a:rPr>
-              <a:t>同比 / 环比</a:t>
+              <a:t>关键指标</a:t>
             </a:r>
           </a:p>
         </p:txBody>
@@ -8956,7 +12433,7 @@
                 <a:ea typeface="微软雅黑"/>
                 <a:cs typeface="微软雅黑"/>
               </a:rPr>
-              <a:t>A · 同比</a:t>
+              <a:t>A · 总体概览</a:t>
             </a:r>
           </a:p>
         </p:txBody>
@@ -9211,7 +12688,7 @@
                 <a:ea typeface="微软雅黑"/>
                 <a:cs typeface="微软雅黑"/>
               </a:rPr>
-              <a:t>B · 环比</a:t>
+              <a:t>B · 关键指标</a:t>
             </a:r>
           </a:p>
         </p:txBody>
@@ -9337,95 +12814,7 @@
       </p:sp>
       <p:sp>
         <p:nvSpPr>
-          <p:cNvPr id="14" name="Oval 13"/>
-          <p:cNvSpPr/>
-          <p:nvPr/>
-        </p:nvSpPr>
-        <p:spPr>
-          <a:xfrm>
-            <a:off x="5711799" y="3703320"/>
-            <a:ext cx="768096" cy="768096"/>
-          </a:xfrm>
-          <a:prstGeom prst="ellipse">
-            <a:avLst/>
-          </a:prstGeom>
-          <a:solidFill>
-            <a:srgbClr val="2B2B2B"/>
-          </a:solidFill>
-          <a:ln>
-            <a:noFill/>
-          </a:ln>
-          <a:effectLst/>
-        </p:spPr>
-        <p:style>
-          <a:lnRef idx="1">
-            <a:schemeClr val="accent1"/>
-          </a:lnRef>
-          <a:fillRef idx="3">
-            <a:schemeClr val="accent1"/>
-          </a:fillRef>
-          <a:effectRef idx="2">
-            <a:schemeClr val="accent1"/>
-          </a:effectRef>
-          <a:fontRef idx="minor">
-            <a:schemeClr val="lt1"/>
-          </a:fontRef>
-        </p:style>
-        <p:txBody>
-          <a:bodyPr rtlCol="0" anchor="ctr"/>
-          <a:lstStyle/>
-          <a:p>
-            <a:pPr algn="ctr"/>
-          </a:p>
-        </p:txBody>
-      </p:sp>
-      <p:sp>
-        <p:nvSpPr>
-          <p:cNvPr id="15" name="TextBox 14"/>
-          <p:cNvSpPr txBox="1"/>
-          <p:nvPr/>
-        </p:nvSpPr>
-        <p:spPr>
-          <a:xfrm>
-            <a:off x="5711799" y="3703320"/>
-            <a:ext cx="768096" cy="768096"/>
-          </a:xfrm>
-          <a:prstGeom prst="rect">
-            <a:avLst/>
-          </a:prstGeom>
-          <a:noFill/>
-        </p:spPr>
-        <p:txBody>
-          <a:bodyPr wrap="square" anchor="ctr" lIns="0" rIns="0" tIns="0" bIns="0">
-            <a:spAutoFit/>
-          </a:bodyPr>
-          <a:lstStyle/>
-          <a:p>
-            <a:pPr algn="ctr">
-              <a:lnSpc>
-                <a:spcPct val="100000"/>
-              </a:lnSpc>
-              <a:spcAft>
-                <a:spcPts val="400"/>
-              </a:spcAft>
-            </a:pPr>
-            <a:r>
-              <a:rPr sz="1400" b="1" i="0">
-                <a:solidFill>
-                  <a:srgbClr val="F5F3EF"/>
-                </a:solidFill>
-                <a:latin typeface="Segoe UI"/>
-                <a:ea typeface="微软雅黑"/>
-                <a:cs typeface="微软雅黑"/>
-              </a:rPr>
-              <a:t>VS</a:t>
-            </a:r>
-          </a:p>
-        </p:txBody>
-      </p:sp>
-      <p:sp>
-        <p:nvSpPr>
-          <p:cNvPr id="16" name="Rectangle 15"/>
+          <p:cNvPr id="14" name="Rectangle 13"/>
           <p:cNvSpPr/>
           <p:nvPr/>
         </p:nvSpPr>
@@ -9469,14 +12858,14 @@
       </p:sp>
       <p:sp>
         <p:nvSpPr>
-          <p:cNvPr id="17" name="TextBox 16"/>
+          <p:cNvPr id="15" name="TextBox 14"/>
           <p:cNvSpPr txBox="1"/>
           <p:nvPr/>
         </p:nvSpPr>
         <p:spPr>
           <a:xfrm>
             <a:off x="822960" y="6355080"/>
-            <a:ext cx="6400800" cy="274320"/>
+            <a:ext cx="6583680" cy="274320"/>
           </a:xfrm>
           <a:prstGeom prst="rect">
             <a:avLst/>
@@ -9516,6 +12905,9 @@
   <p:clrMapOvr>
     <a:masterClrMapping/>
   </p:clrMapOvr>
+  <p:transition spd="med">
+    <p:fade/>
+  </p:transition>
 </p:sld>
 </file>
 
@@ -9626,7 +13018,7 @@
         <p:spPr>
           <a:xfrm>
             <a:off x="822960" y="868680"/>
-            <a:ext cx="10515600" cy="548640"/>
+            <a:ext cx="10607040" cy="548640"/>
           </a:xfrm>
           <a:prstGeom prst="rect">
             <a:avLst/>
@@ -9805,8 +13197,8 @@
         </p:nvSpPr>
         <p:spPr>
           <a:xfrm>
-            <a:off x="1143000" y="2670048"/>
-            <a:ext cx="1790623" cy="1632204"/>
+            <a:off x="1143000" y="2651760"/>
+            <a:ext cx="1790623" cy="1554480"/>
           </a:xfrm>
           <a:prstGeom prst="rect">
             <a:avLst/>
@@ -9828,7 +13220,7 @@
               </a:spcAft>
             </a:pPr>
             <a:r>
-              <a:rPr sz="3000" b="1" i="0">
+              <a:rPr sz="2800" b="1" i="0">
                 <a:solidFill>
                   <a:srgbClr val="3FA88C"/>
                 </a:solidFill>
@@ -9836,7 +13228,7 @@
                 <a:ea typeface="微软雅黑"/>
                 <a:cs typeface="微软雅黑"/>
               </a:rPr>
-              <a:t>00.0%</a:t>
+              <a:t>00</a:t>
             </a:r>
           </a:p>
         </p:txBody>
@@ -9849,7 +13241,7 @@
         </p:nvSpPr>
         <p:spPr>
           <a:xfrm>
-            <a:off x="1143000" y="4668012"/>
+            <a:off x="1143000" y="4590288"/>
             <a:ext cx="1790623" cy="365760"/>
           </a:xfrm>
           <a:prstGeom prst="rect">
@@ -9893,7 +13285,7 @@
         </p:nvSpPr>
         <p:spPr>
           <a:xfrm>
-            <a:off x="1143000" y="5289804"/>
+            <a:off x="1143000" y="5212080"/>
             <a:ext cx="1790623" cy="1165860"/>
           </a:xfrm>
           <a:prstGeom prst="rect">
@@ -10029,8 +13421,8 @@
         </p:nvSpPr>
         <p:spPr>
           <a:xfrm>
-            <a:off x="3848023" y="2670048"/>
-            <a:ext cx="1790623" cy="1632204"/>
+            <a:off x="3848023" y="2651760"/>
+            <a:ext cx="1790623" cy="1554480"/>
           </a:xfrm>
           <a:prstGeom prst="rect">
             <a:avLst/>
@@ -10052,7 +13444,7 @@
               </a:spcAft>
             </a:pPr>
             <a:r>
-              <a:rPr sz="3000" b="1" i="0">
+              <a:rPr sz="2800" b="1" i="0">
                 <a:solidFill>
                   <a:srgbClr val="3FA88C"/>
                 </a:solidFill>
@@ -10060,7 +13452,7 @@
                 <a:ea typeface="微软雅黑"/>
                 <a:cs typeface="微软雅黑"/>
               </a:rPr>
-              <a:t>000</a:t>
+              <a:t>00</a:t>
             </a:r>
           </a:p>
         </p:txBody>
@@ -10073,7 +13465,7 @@
         </p:nvSpPr>
         <p:spPr>
           <a:xfrm>
-            <a:off x="3848023" y="4668012"/>
+            <a:off x="3848023" y="4590288"/>
             <a:ext cx="1790623" cy="365760"/>
           </a:xfrm>
           <a:prstGeom prst="rect">
@@ -10117,7 +13509,7 @@
         </p:nvSpPr>
         <p:spPr>
           <a:xfrm>
-            <a:off x="3848023" y="5289804"/>
+            <a:off x="3848023" y="5212080"/>
             <a:ext cx="1790623" cy="1165860"/>
           </a:xfrm>
           <a:prstGeom prst="rect">
@@ -10253,8 +13645,8 @@
         </p:nvSpPr>
         <p:spPr>
           <a:xfrm>
-            <a:off x="6553047" y="2670048"/>
-            <a:ext cx="1790623" cy="1632204"/>
+            <a:off x="6553047" y="2651760"/>
+            <a:ext cx="1790623" cy="1554480"/>
           </a:xfrm>
           <a:prstGeom prst="rect">
             <a:avLst/>
@@ -10276,7 +13668,7 @@
               </a:spcAft>
             </a:pPr>
             <a:r>
-              <a:rPr sz="3000" b="1" i="0">
+              <a:rPr sz="2800" b="1" i="0">
                 <a:solidFill>
                   <a:srgbClr val="3FA88C"/>
                 </a:solidFill>
@@ -10284,7 +13676,7 @@
                 <a:ea typeface="微软雅黑"/>
                 <a:cs typeface="微软雅黑"/>
               </a:rPr>
-              <a:t>0.00</a:t>
+              <a:t>00</a:t>
             </a:r>
           </a:p>
         </p:txBody>
@@ -10297,7 +13689,7 @@
         </p:nvSpPr>
         <p:spPr>
           <a:xfrm>
-            <a:off x="6553047" y="4668012"/>
+            <a:off x="6553047" y="4590288"/>
             <a:ext cx="1790623" cy="365760"/>
           </a:xfrm>
           <a:prstGeom prst="rect">
@@ -10341,7 +13733,7 @@
         </p:nvSpPr>
         <p:spPr>
           <a:xfrm>
-            <a:off x="6553047" y="5289804"/>
+            <a:off x="6553047" y="5212080"/>
             <a:ext cx="1790623" cy="1165860"/>
           </a:xfrm>
           <a:prstGeom prst="rect">
@@ -10477,8 +13869,8 @@
         </p:nvSpPr>
         <p:spPr>
           <a:xfrm>
-            <a:off x="9258071" y="2670048"/>
-            <a:ext cx="1790623" cy="1632204"/>
+            <a:off x="9258071" y="2651760"/>
+            <a:ext cx="1790623" cy="1554480"/>
           </a:xfrm>
           <a:prstGeom prst="rect">
             <a:avLst/>
@@ -10500,7 +13892,7 @@
               </a:spcAft>
             </a:pPr>
             <a:r>
-              <a:rPr sz="3000" b="1" i="0">
+              <a:rPr sz="2800" b="1" i="0">
                 <a:solidFill>
                   <a:srgbClr val="3FA88C"/>
                 </a:solidFill>
@@ -10521,7 +13913,7 @@
         </p:nvSpPr>
         <p:spPr>
           <a:xfrm>
-            <a:off x="9258071" y="4668012"/>
+            <a:off x="9258071" y="4590288"/>
             <a:ext cx="1790623" cy="365760"/>
           </a:xfrm>
           <a:prstGeom prst="rect">
@@ -10565,7 +13957,7 @@
         </p:nvSpPr>
         <p:spPr>
           <a:xfrm>
-            <a:off x="9258071" y="5289804"/>
+            <a:off x="9258071" y="5212080"/>
             <a:ext cx="1790623" cy="1165860"/>
           </a:xfrm>
           <a:prstGeom prst="rect">
@@ -10654,7 +14046,7 @@
         <p:spPr>
           <a:xfrm>
             <a:off x="822960" y="6355080"/>
-            <a:ext cx="6400800" cy="274320"/>
+            <a:ext cx="6583680" cy="274320"/>
           </a:xfrm>
           <a:prstGeom prst="rect">
             <a:avLst/>
@@ -10694,6 +14086,9 @@
   <p:clrMapOvr>
     <a:masterClrMapping/>
   </p:clrMapOvr>
+  <p:transition spd="med">
+    <p:fade/>
+  </p:transition>
 </p:sld>
 </file>
 
@@ -10790,7 +14185,7 @@
                 <a:ea typeface="微软雅黑"/>
                 <a:cs typeface="微软雅黑"/>
               </a:rPr>
-              <a:t>TRENDS</a:t>
+              <a:t>PROCESS</a:t>
             </a:r>
           </a:p>
         </p:txBody>
@@ -10804,7 +14199,7 @@
         <p:spPr>
           <a:xfrm>
             <a:off x="822960" y="868680"/>
-            <a:ext cx="10515600" cy="548640"/>
+            <a:ext cx="10607040" cy="548640"/>
           </a:xfrm>
           <a:prstGeom prst="rect">
             <a:avLst/>
@@ -11046,7 +14441,7 @@
                 <a:ea typeface="微软雅黑"/>
                 <a:cs typeface="微软雅黑"/>
               </a:rPr>
-              <a:t>Q1</a:t>
+              <a:t>总体概览</a:t>
             </a:r>
           </a:p>
         </p:txBody>
@@ -11222,7 +14617,7 @@
                 <a:ea typeface="微软雅黑"/>
                 <a:cs typeface="微软雅黑"/>
               </a:rPr>
-              <a:t>Q2</a:t>
+              <a:t>关键指标</a:t>
             </a:r>
           </a:p>
         </p:txBody>
@@ -11398,7 +14793,7 @@
                 <a:ea typeface="微软雅黑"/>
                 <a:cs typeface="微软雅黑"/>
               </a:rPr>
-              <a:t>Q3</a:t>
+              <a:t>趋势分析</a:t>
             </a:r>
           </a:p>
         </p:txBody>
@@ -11574,7 +14969,7 @@
                 <a:ea typeface="微软雅黑"/>
                 <a:cs typeface="微软雅黑"/>
               </a:rPr>
-              <a:t>Q4</a:t>
+              <a:t>结论与行动</a:t>
             </a:r>
           </a:p>
         </p:txBody>
@@ -11676,7 +15071,7 @@
         <p:spPr>
           <a:xfrm>
             <a:off x="822960" y="6355080"/>
-            <a:ext cx="6400800" cy="274320"/>
+            <a:ext cx="6583680" cy="274320"/>
           </a:xfrm>
           <a:prstGeom prst="rect">
             <a:avLst/>
@@ -11716,6 +15111,9 @@
   <p:clrMapOvr>
     <a:masterClrMapping/>
   </p:clrMapOvr>
+  <p:transition spd="med">
+    <p:fade/>
+  </p:transition>
 </p:sld>
 </file>
 
@@ -11812,7 +15210,7 @@
                 <a:ea typeface="微软雅黑"/>
                 <a:cs typeface="微软雅黑"/>
               </a:rPr>
-              <a:t>TRENDS</a:t>
+              <a:t>PROCESS</a:t>
             </a:r>
           </a:p>
         </p:txBody>
@@ -11826,7 +15224,7 @@
         <p:spPr>
           <a:xfrm>
             <a:off x="822960" y="868680"/>
-            <a:ext cx="10515600" cy="548640"/>
+            <a:ext cx="10607040" cy="548640"/>
           </a:xfrm>
           <a:prstGeom prst="rect">
             <a:avLst/>
@@ -11959,8 +15357,8 @@
         </p:nvSpPr>
         <p:spPr>
           <a:xfrm>
-            <a:off x="1051560" y="3246120"/>
-            <a:ext cx="2007793" cy="457200"/>
+            <a:off x="1024128" y="3246120"/>
+            <a:ext cx="2062657" cy="457200"/>
           </a:xfrm>
           <a:prstGeom prst="rect">
             <a:avLst/>
@@ -11982,7 +15380,7 @@
               </a:spcAft>
             </a:pPr>
             <a:r>
-              <a:rPr sz="1450" b="1" i="0">
+              <a:rPr sz="1400" b="1" i="0">
                 <a:solidFill>
                   <a:srgbClr val="FFFFFF"/>
                 </a:solidFill>
@@ -12093,8 +15491,8 @@
         </p:nvSpPr>
         <p:spPr>
           <a:xfrm>
-            <a:off x="3745153" y="3246120"/>
-            <a:ext cx="2007793" cy="457200"/>
+            <a:off x="3717721" y="3246120"/>
+            <a:ext cx="2062657" cy="457200"/>
           </a:xfrm>
           <a:prstGeom prst="rect">
             <a:avLst/>
@@ -12116,7 +15514,7 @@
               </a:spcAft>
             </a:pPr>
             <a:r>
-              <a:rPr sz="1450" b="1" i="0">
+              <a:rPr sz="1400" b="1" i="0">
                 <a:solidFill>
                   <a:srgbClr val="2B2B2B"/>
                 </a:solidFill>
@@ -12227,8 +15625,8 @@
         </p:nvSpPr>
         <p:spPr>
           <a:xfrm>
-            <a:off x="6438747" y="3246120"/>
-            <a:ext cx="2007793" cy="457200"/>
+            <a:off x="6411315" y="3246120"/>
+            <a:ext cx="2062657" cy="457200"/>
           </a:xfrm>
           <a:prstGeom prst="rect">
             <a:avLst/>
@@ -12250,7 +15648,7 @@
               </a:spcAft>
             </a:pPr>
             <a:r>
-              <a:rPr sz="1450" b="1" i="0">
+              <a:rPr sz="1400" b="1" i="0">
                 <a:solidFill>
                   <a:srgbClr val="FFFFFF"/>
                 </a:solidFill>
@@ -12361,8 +15759,8 @@
         </p:nvSpPr>
         <p:spPr>
           <a:xfrm>
-            <a:off x="9132341" y="3246120"/>
-            <a:ext cx="2007793" cy="457200"/>
+            <a:off x="9104909" y="3246120"/>
+            <a:ext cx="2062657" cy="457200"/>
           </a:xfrm>
           <a:prstGeom prst="rect">
             <a:avLst/>
@@ -12384,7 +15782,7 @@
               </a:spcAft>
             </a:pPr>
             <a:r>
-              <a:rPr sz="1450" b="1" i="0">
+              <a:rPr sz="1400" b="1" i="0">
                 <a:solidFill>
                   <a:srgbClr val="2B2B2B"/>
                 </a:solidFill>
@@ -12450,7 +15848,7 @@
         <p:spPr>
           <a:xfrm>
             <a:off x="822960" y="6355080"/>
-            <a:ext cx="6400800" cy="274320"/>
+            <a:ext cx="6583680" cy="274320"/>
           </a:xfrm>
           <a:prstGeom prst="rect">
             <a:avLst/>
@@ -12490,6 +15888,9 @@
   <p:clrMapOvr>
     <a:masterClrMapping/>
   </p:clrMapOvr>
+  <p:transition spd="med">
+    <p:fade/>
+  </p:transition>
 </p:sld>
 </file>
 
@@ -12586,7 +15987,7 @@
                 <a:ea typeface="微软雅黑"/>
                 <a:cs typeface="微软雅黑"/>
               </a:rPr>
-              <a:t>TRENDS</a:t>
+              <a:t>DATA</a:t>
             </a:r>
           </a:p>
         </p:txBody>
@@ -12600,7 +16001,7 @@
         <p:spPr>
           <a:xfrm>
             <a:off x="822960" y="868680"/>
-            <a:ext cx="10515600" cy="548640"/>
+            <a:ext cx="10607040" cy="548640"/>
           </a:xfrm>
           <a:prstGeom prst="rect">
             <a:avLst/>
@@ -12727,24 +16128,202 @@
           </a:p>
         </p:txBody>
       </p:sp>
-      <p:sp>
-        <p:nvSpPr>
-          <p:cNvPr id="7" name="Rectangle 6"/>
+      <p:cxnSp>
+        <p:nvCxnSpPr>
+          <p:cNvPr id="7" name="Connector 6"/>
+          <p:cNvCxnSpPr/>
+          <p:nvPr/>
+        </p:nvCxnSpPr>
+        <p:spPr>
+          <a:xfrm flipV="1">
+            <a:off x="1463040" y="3840480"/>
+            <a:ext cx="1280160" cy="914400"/>
+          </a:xfrm>
+          <a:prstGeom prst="line">
+            <a:avLst/>
+          </a:prstGeom>
+          <a:ln w="31750">
+            <a:solidFill>
+              <a:srgbClr val="3FA88C"/>
+            </a:solidFill>
+          </a:ln>
+          <a:effectLst/>
+        </p:spPr>
+        <p:style>
+          <a:lnRef idx="2">
+            <a:schemeClr val="accent1"/>
+          </a:lnRef>
+          <a:fillRef idx="0">
+            <a:schemeClr val="accent1"/>
+          </a:fillRef>
+          <a:effectRef idx="1">
+            <a:schemeClr val="accent1"/>
+          </a:effectRef>
+          <a:fontRef idx="minor">
+            <a:schemeClr val="tx1"/>
+          </a:fontRef>
+        </p:style>
+      </p:cxnSp>
+      <p:cxnSp>
+        <p:nvCxnSpPr>
+          <p:cNvPr id="8" name="Connector 7"/>
+          <p:cNvCxnSpPr/>
+          <p:nvPr/>
+        </p:nvCxnSpPr>
+        <p:spPr>
+          <a:xfrm>
+            <a:off x="2743200" y="3840480"/>
+            <a:ext cx="1280160" cy="457200"/>
+          </a:xfrm>
+          <a:prstGeom prst="line">
+            <a:avLst/>
+          </a:prstGeom>
+          <a:ln w="31750">
+            <a:solidFill>
+              <a:srgbClr val="3FA88C"/>
+            </a:solidFill>
+          </a:ln>
+          <a:effectLst/>
+        </p:spPr>
+        <p:style>
+          <a:lnRef idx="2">
+            <a:schemeClr val="accent1"/>
+          </a:lnRef>
+          <a:fillRef idx="0">
+            <a:schemeClr val="accent1"/>
+          </a:fillRef>
+          <a:effectRef idx="1">
+            <a:schemeClr val="accent1"/>
+          </a:effectRef>
+          <a:fontRef idx="minor">
+            <a:schemeClr val="tx1"/>
+          </a:fontRef>
+        </p:style>
+      </p:cxnSp>
+      <p:cxnSp>
+        <p:nvCxnSpPr>
+          <p:cNvPr id="9" name="Connector 8"/>
+          <p:cNvCxnSpPr/>
+          <p:nvPr/>
+        </p:nvCxnSpPr>
+        <p:spPr>
+          <a:xfrm flipV="1">
+            <a:off x="4023360" y="3108960"/>
+            <a:ext cx="1280160" cy="1188720"/>
+          </a:xfrm>
+          <a:prstGeom prst="line">
+            <a:avLst/>
+          </a:prstGeom>
+          <a:ln w="31750">
+            <a:solidFill>
+              <a:srgbClr val="3FA88C"/>
+            </a:solidFill>
+          </a:ln>
+          <a:effectLst/>
+        </p:spPr>
+        <p:style>
+          <a:lnRef idx="2">
+            <a:schemeClr val="accent1"/>
+          </a:lnRef>
+          <a:fillRef idx="0">
+            <a:schemeClr val="accent1"/>
+          </a:fillRef>
+          <a:effectRef idx="1">
+            <a:schemeClr val="accent1"/>
+          </a:effectRef>
+          <a:fontRef idx="minor">
+            <a:schemeClr val="tx1"/>
+          </a:fontRef>
+        </p:style>
+      </p:cxnSp>
+      <p:cxnSp>
+        <p:nvCxnSpPr>
+          <p:cNvPr id="10" name="Connector 9"/>
+          <p:cNvCxnSpPr/>
+          <p:nvPr/>
+        </p:nvCxnSpPr>
+        <p:spPr>
+          <a:xfrm>
+            <a:off x="5303520" y="3108960"/>
+            <a:ext cx="1280160" cy="457200"/>
+          </a:xfrm>
+          <a:prstGeom prst="line">
+            <a:avLst/>
+          </a:prstGeom>
+          <a:ln w="31750">
+            <a:solidFill>
+              <a:srgbClr val="3FA88C"/>
+            </a:solidFill>
+          </a:ln>
+          <a:effectLst/>
+        </p:spPr>
+        <p:style>
+          <a:lnRef idx="2">
+            <a:schemeClr val="accent1"/>
+          </a:lnRef>
+          <a:fillRef idx="0">
+            <a:schemeClr val="accent1"/>
+          </a:fillRef>
+          <a:effectRef idx="1">
+            <a:schemeClr val="accent1"/>
+          </a:effectRef>
+          <a:fontRef idx="minor">
+            <a:schemeClr val="tx1"/>
+          </a:fontRef>
+        </p:style>
+      </p:cxnSp>
+      <p:cxnSp>
+        <p:nvCxnSpPr>
+          <p:cNvPr id="11" name="Connector 10"/>
+          <p:cNvCxnSpPr/>
+          <p:nvPr/>
+        </p:nvCxnSpPr>
+        <p:spPr>
+          <a:xfrm flipV="1">
+            <a:off x="6583680" y="2743200"/>
+            <a:ext cx="1280160" cy="822960"/>
+          </a:xfrm>
+          <a:prstGeom prst="line">
+            <a:avLst/>
+          </a:prstGeom>
+          <a:ln w="31750">
+            <a:solidFill>
+              <a:srgbClr val="3FA88C"/>
+            </a:solidFill>
+          </a:ln>
+          <a:effectLst/>
+        </p:spPr>
+        <p:style>
+          <a:lnRef idx="2">
+            <a:schemeClr val="accent1"/>
+          </a:lnRef>
+          <a:fillRef idx="0">
+            <a:schemeClr val="accent1"/>
+          </a:fillRef>
+          <a:effectRef idx="1">
+            <a:schemeClr val="accent1"/>
+          </a:effectRef>
+          <a:fontRef idx="minor">
+            <a:schemeClr val="tx1"/>
+          </a:fontRef>
+        </p:style>
+      </p:cxnSp>
+      <p:sp>
+        <p:nvSpPr>
+          <p:cNvPr id="12" name="Oval 11"/>
           <p:cNvSpPr/>
           <p:nvPr/>
         </p:nvSpPr>
         <p:spPr>
           <a:xfrm>
-            <a:off x="1371600" y="3877056"/>
-            <a:ext cx="685800" cy="1609344"/>
-          </a:xfrm>
-          <a:prstGeom prst="rect">
+            <a:off x="1399032" y="4690872"/>
+            <a:ext cx="128016" cy="128016"/>
+          </a:xfrm>
+          <a:prstGeom prst="ellipse">
             <a:avLst/>
           </a:prstGeom>
           <a:solidFill>
-            <a:srgbClr val="3FA88C">
-              <a:alpha val="90000"/>
-            </a:srgbClr>
+            <a:srgbClr val="3FA88C"/>
           </a:solidFill>
           <a:ln>
             <a:noFill/>
@@ -12775,22 +16354,20 @@
       </p:sp>
       <p:sp>
         <p:nvSpPr>
-          <p:cNvPr id="8" name="Rectangle 7"/>
+          <p:cNvPr id="13" name="Oval 12"/>
           <p:cNvSpPr/>
           <p:nvPr/>
         </p:nvSpPr>
         <p:spPr>
           <a:xfrm>
-            <a:off x="2514600" y="3145535"/>
-            <a:ext cx="685800" cy="2340864"/>
-          </a:xfrm>
-          <a:prstGeom prst="rect">
+            <a:off x="2679192" y="3776472"/>
+            <a:ext cx="128016" cy="128016"/>
+          </a:xfrm>
+          <a:prstGeom prst="ellipse">
             <a:avLst/>
           </a:prstGeom>
           <a:solidFill>
-            <a:srgbClr val="E2A03F">
-              <a:alpha val="90000"/>
-            </a:srgbClr>
+            <a:srgbClr val="3FA88C"/>
           </a:solidFill>
           <a:ln>
             <a:noFill/>
@@ -12821,22 +16398,20 @@
       </p:sp>
       <p:sp>
         <p:nvSpPr>
-          <p:cNvPr id="9" name="Rectangle 8"/>
+          <p:cNvPr id="14" name="Oval 13"/>
           <p:cNvSpPr/>
           <p:nvPr/>
         </p:nvSpPr>
         <p:spPr>
           <a:xfrm>
-            <a:off x="3657600" y="4169663"/>
-            <a:ext cx="685800" cy="1316736"/>
-          </a:xfrm>
-          <a:prstGeom prst="rect">
+            <a:off x="3959352" y="4233672"/>
+            <a:ext cx="128016" cy="128016"/>
+          </a:xfrm>
+          <a:prstGeom prst="ellipse">
             <a:avLst/>
           </a:prstGeom>
           <a:solidFill>
-            <a:srgbClr val="3FA88C">
-              <a:alpha val="90000"/>
-            </a:srgbClr>
+            <a:srgbClr val="3FA88C"/>
           </a:solidFill>
           <a:ln>
             <a:noFill/>
@@ -12867,22 +16442,20 @@
       </p:sp>
       <p:sp>
         <p:nvSpPr>
-          <p:cNvPr id="10" name="Rectangle 9"/>
+          <p:cNvPr id="15" name="Oval 14"/>
           <p:cNvSpPr/>
           <p:nvPr/>
         </p:nvSpPr>
         <p:spPr>
           <a:xfrm>
-            <a:off x="4800600" y="2706624"/>
-            <a:ext cx="685800" cy="2779776"/>
-          </a:xfrm>
-          <a:prstGeom prst="rect">
+            <a:off x="5239512" y="3044952"/>
+            <a:ext cx="128016" cy="128016"/>
+          </a:xfrm>
+          <a:prstGeom prst="ellipse">
             <a:avLst/>
           </a:prstGeom>
           <a:solidFill>
-            <a:srgbClr val="E2A03F">
-              <a:alpha val="90000"/>
-            </a:srgbClr>
+            <a:srgbClr val="3FA88C"/>
           </a:solidFill>
           <a:ln>
             <a:noFill/>
@@ -12913,22 +16486,20 @@
       </p:sp>
       <p:sp>
         <p:nvSpPr>
-          <p:cNvPr id="11" name="Rectangle 10"/>
+          <p:cNvPr id="16" name="Oval 15"/>
           <p:cNvSpPr/>
           <p:nvPr/>
         </p:nvSpPr>
         <p:spPr>
           <a:xfrm>
-            <a:off x="5943600" y="3438144"/>
-            <a:ext cx="685800" cy="2048255"/>
-          </a:xfrm>
-          <a:prstGeom prst="rect">
+            <a:off x="6519672" y="3502152"/>
+            <a:ext cx="128016" cy="128016"/>
+          </a:xfrm>
+          <a:prstGeom prst="ellipse">
             <a:avLst/>
           </a:prstGeom>
           <a:solidFill>
-            <a:srgbClr val="3FA88C">
-              <a:alpha val="90000"/>
-            </a:srgbClr>
+            <a:srgbClr val="3FA88C"/>
           </a:solidFill>
           <a:ln>
             <a:noFill/>
@@ -12959,22 +16530,20 @@
       </p:sp>
       <p:sp>
         <p:nvSpPr>
-          <p:cNvPr id="12" name="Rectangle 11"/>
+          <p:cNvPr id="17" name="Oval 16"/>
           <p:cNvSpPr/>
           <p:nvPr/>
         </p:nvSpPr>
         <p:spPr>
           <a:xfrm>
-            <a:off x="7086600" y="3730752"/>
-            <a:ext cx="685800" cy="1755648"/>
-          </a:xfrm>
-          <a:prstGeom prst="rect">
+            <a:off x="7799831" y="2679192"/>
+            <a:ext cx="128016" cy="128016"/>
+          </a:xfrm>
+          <a:prstGeom prst="ellipse">
             <a:avLst/>
           </a:prstGeom>
           <a:solidFill>
-            <a:srgbClr val="E2A03F">
-              <a:alpha val="90000"/>
-            </a:srgbClr>
+            <a:srgbClr val="3FA88C"/>
           </a:solidFill>
           <a:ln>
             <a:noFill/>
@@ -13005,14 +16574,14 @@
       </p:sp>
       <p:sp>
         <p:nvSpPr>
-          <p:cNvPr id="13" name="TextBox 12"/>
+          <p:cNvPr id="18" name="TextBox 17"/>
           <p:cNvSpPr txBox="1"/>
           <p:nvPr/>
         </p:nvSpPr>
         <p:spPr>
           <a:xfrm>
             <a:off x="1280160" y="5623560"/>
-            <a:ext cx="5486400" cy="274320"/>
+            <a:ext cx="5852160" cy="274320"/>
           </a:xfrm>
           <a:prstGeom prst="rect">
             <a:avLst/>
@@ -13049,7 +16618,7 @@
       </p:sp>
       <p:sp>
         <p:nvSpPr>
-          <p:cNvPr id="14" name="TextBox 13"/>
+          <p:cNvPr id="19" name="TextBox 18"/>
           <p:cNvSpPr txBox="1"/>
           <p:nvPr/>
         </p:nvSpPr>
@@ -13093,7 +16662,7 @@
       </p:sp>
       <p:sp>
         <p:nvSpPr>
-          <p:cNvPr id="15" name="TextBox 14"/>
+          <p:cNvPr id="20" name="TextBox 19"/>
           <p:cNvSpPr txBox="1"/>
           <p:nvPr/>
         </p:nvSpPr>
@@ -13212,7 +16781,7 @@
       </p:sp>
       <p:sp>
         <p:nvSpPr>
-          <p:cNvPr id="16" name="Rectangle 15"/>
+          <p:cNvPr id="21" name="Rectangle 20"/>
           <p:cNvSpPr/>
           <p:nvPr/>
         </p:nvSpPr>
@@ -13256,14 +16825,14 @@
       </p:sp>
       <p:sp>
         <p:nvSpPr>
-          <p:cNvPr id="17" name="TextBox 16"/>
+          <p:cNvPr id="22" name="TextBox 21"/>
           <p:cNvSpPr txBox="1"/>
           <p:nvPr/>
         </p:nvSpPr>
         <p:spPr>
           <a:xfrm>
             <a:off x="822960" y="6355080"/>
-            <a:ext cx="6400800" cy="274320"/>
+            <a:ext cx="6583680" cy="274320"/>
           </a:xfrm>
           <a:prstGeom prst="rect">
             <a:avLst/>
@@ -13303,6 +16872,9 @@
   <p:clrMapOvr>
     <a:masterClrMapping/>
   </p:clrMapOvr>
+  <p:transition spd="med">
+    <p:fade/>
+  </p:transition>
 </p:sld>
 </file>
 

--- a/templates/09-dashboard-data-dashboard/09__takram.pptx
+++ b/templates/09-dashboard-data-dashboard/09__takram.pptx
@@ -3377,8 +3377,222 @@
     <a:masterClrMapping/>
   </p:clrMapOvr>
   <p:transition spd="med">
-    <p:fade/>
+    <p:wipe dir="u"/>
   </p:transition>
+  <p:timing>
+    <p:tnLst>
+      <p:par>
+        <p:cTn id="1" dur="indefinite" restart="never" nodeType="tmRoot">
+          <p:childTnLst>
+            <p:seq concurrent="1" nextAc="seek">
+              <p:cTn id="2" dur="indefinite" nodeType="mainSeq">
+                <p:childTnLst>
+                  <p:par>
+                    <p:cTn id="3" fill="hold">
+                      <p:stCondLst>
+                        <p:cond delay="indefinite"/>
+                      </p:stCondLst>
+                      <p:childTnLst>
+                        <p:par>
+                          <p:cTn id="5" dur="690" fill="hold" nodeType="clickEffect" grpId="0" presetID="21" presetClass="entr" presetSubtype="1">
+                            <p:stCondLst>
+                              <p:cond delay="0"/>
+                            </p:stCondLst>
+                            <p:childTnLst>
+                              <p:set>
+                                <p:cBhvr>
+                                  <p:cTn id="6" dur="1" fill="hold">
+                                    <p:stCondLst>
+                                      <p:cond delay="0"/>
+                                    </p:stCondLst>
+                                  </p:cTn>
+                                  <p:tgtEl>
+                                    <p:spTgt spid="3"/>
+                                  </p:tgtEl>
+                                  <p:attrNameLst>
+                                    <p:attrName>style.visibility</p:attrName>
+                                  </p:attrNameLst>
+                                </p:cBhvr>
+                                <p:to>
+                                  <p:strVal val="visible"/>
+                                </p:to>
+                              </p:set>
+                              <p:animEffect transition="in" filter="wheel(1)">
+                                <p:cBhvr>
+                                  <p:cTn id="51" dur="690"/>
+                                  <p:tgtEl>
+                                    <p:spTgt spid="3"/>
+                                  </p:tgtEl>
+                                </p:cBhvr>
+                              </p:animEffect>
+                            </p:childTnLst>
+                          </p:cTn>
+                        </p:par>
+                        <p:par>
+                          <p:cTn id="7" dur="810" fill="hold" nodeType="afterEffect" grpId="0" presetID="22" presetClass="entr" presetSubtype="4">
+                            <p:stCondLst>
+                              <p:cond delay="130"/>
+                            </p:stCondLst>
+                            <p:childTnLst>
+                              <p:set>
+                                <p:cBhvr>
+                                  <p:cTn id="8" dur="1" fill="hold">
+                                    <p:stCondLst>
+                                      <p:cond delay="0"/>
+                                    </p:stCondLst>
+                                  </p:cTn>
+                                  <p:tgtEl>
+                                    <p:spTgt spid="4"/>
+                                  </p:tgtEl>
+                                  <p:attrNameLst>
+                                    <p:attrName>style.visibility</p:attrName>
+                                  </p:attrNameLst>
+                                </p:cBhvr>
+                                <p:to>
+                                  <p:strVal val="visible"/>
+                                </p:to>
+                              </p:set>
+                              <p:animEffect transition="in" filter="wipe(down)">
+                                <p:cBhvr>
+                                  <p:cTn id="71" dur="810"/>
+                                  <p:tgtEl>
+                                    <p:spTgt spid="4"/>
+                                  </p:tgtEl>
+                                </p:cBhvr>
+                              </p:animEffect>
+                            </p:childTnLst>
+                          </p:cTn>
+                        </p:par>
+                        <p:par>
+                          <p:cTn id="9" dur="450" fill="hold" nodeType="afterEffect" grpId="0" presetID="9" presetClass="entr" presetSubtype="0">
+                            <p:stCondLst>
+                              <p:cond delay="260"/>
+                            </p:stCondLst>
+                            <p:childTnLst>
+                              <p:set>
+                                <p:cBhvr>
+                                  <p:cTn id="10" dur="1" fill="hold">
+                                    <p:stCondLst>
+                                      <p:cond delay="0"/>
+                                    </p:stCondLst>
+                                  </p:cTn>
+                                  <p:tgtEl>
+                                    <p:spTgt spid="5"/>
+                                  </p:tgtEl>
+                                  <p:attrNameLst>
+                                    <p:attrName>style.visibility</p:attrName>
+                                  </p:attrNameLst>
+                                </p:cBhvr>
+                                <p:to>
+                                  <p:strVal val="visible"/>
+                                </p:to>
+                              </p:set>
+                              <p:animEffect transition="in" filter="fade">
+                                <p:cBhvr>
+                                  <p:cTn id="91" dur="450"/>
+                                  <p:tgtEl>
+                                    <p:spTgt spid="5"/>
+                                  </p:tgtEl>
+                                </p:cBhvr>
+                              </p:animEffect>
+                            </p:childTnLst>
+                          </p:cTn>
+                        </p:par>
+                        <p:par>
+                          <p:cTn id="11" dur="570" fill="hold" nodeType="afterEffect" grpId="0" presetID="22" presetClass="entr" presetSubtype="2">
+                            <p:stCondLst>
+                              <p:cond delay="390"/>
+                            </p:stCondLst>
+                            <p:childTnLst>
+                              <p:set>
+                                <p:cBhvr>
+                                  <p:cTn id="12" dur="1" fill="hold">
+                                    <p:stCondLst>
+                                      <p:cond delay="0"/>
+                                    </p:stCondLst>
+                                  </p:cTn>
+                                  <p:tgtEl>
+                                    <p:spTgt spid="6"/>
+                                  </p:tgtEl>
+                                  <p:attrNameLst>
+                                    <p:attrName>style.visibility</p:attrName>
+                                  </p:attrNameLst>
+                                </p:cBhvr>
+                                <p:to>
+                                  <p:strVal val="visible"/>
+                                </p:to>
+                              </p:set>
+                              <p:animEffect transition="in" filter="wipe(right)">
+                                <p:cBhvr>
+                                  <p:cTn id="111" dur="570"/>
+                                  <p:tgtEl>
+                                    <p:spTgt spid="6"/>
+                                  </p:tgtEl>
+                                </p:cBhvr>
+                              </p:animEffect>
+                            </p:childTnLst>
+                          </p:cTn>
+                        </p:par>
+                        <p:par>
+                          <p:cTn id="13" dur="690" fill="hold" nodeType="afterEffect" grpId="0" presetID="18" presetClass="entr" presetSubtype="12">
+                            <p:stCondLst>
+                              <p:cond delay="520"/>
+                            </p:stCondLst>
+                            <p:childTnLst>
+                              <p:set>
+                                <p:cBhvr>
+                                  <p:cTn id="14" dur="1" fill="hold">
+                                    <p:stCondLst>
+                                      <p:cond delay="0"/>
+                                    </p:stCondLst>
+                                  </p:cTn>
+                                  <p:tgtEl>
+                                    <p:spTgt spid="7"/>
+                                  </p:tgtEl>
+                                  <p:attrNameLst>
+                                    <p:attrName>style.visibility</p:attrName>
+                                  </p:attrNameLst>
+                                </p:cBhvr>
+                                <p:to>
+                                  <p:strVal val="visible"/>
+                                </p:to>
+                              </p:set>
+                              <p:animEffect transition="in" filter="circle(in)">
+                                <p:cBhvr>
+                                  <p:cTn id="131" dur="690"/>
+                                  <p:tgtEl>
+                                    <p:spTgt spid="7"/>
+                                  </p:tgtEl>
+                                </p:cBhvr>
+                              </p:animEffect>
+                            </p:childTnLst>
+                          </p:cTn>
+                        </p:par>
+                      </p:childTnLst>
+                    </p:cTn>
+                  </p:par>
+                </p:childTnLst>
+              </p:cTn>
+              <p:prevCondLst>
+                <p:cond evt="onPrev" delay="0">
+                  <p:tgtEl>
+                    <p:sldTgt/>
+                  </p:tgtEl>
+                </p:cond>
+              </p:prevCondLst>
+              <p:nextCondLst>
+                <p:cond evt="onNext" delay="0">
+                  <p:tgtEl>
+                    <p:sldTgt/>
+                  </p:tgtEl>
+                </p:cond>
+              </p:nextCondLst>
+            </p:seq>
+          </p:childTnLst>
+        </p:cTn>
+      </p:par>
+    </p:tnLst>
+  </p:timing>
 </p:sld>
 </file>
 
@@ -4430,8 +4644,537 @@
     <a:masterClrMapping/>
   </p:clrMapOvr>
   <p:transition spd="med">
-    <p:fade/>
+    <p:newsflash/>
   </p:transition>
+  <p:timing>
+    <p:tnLst>
+      <p:par>
+        <p:cTn id="1" dur="indefinite" restart="never" nodeType="tmRoot">
+          <p:childTnLst>
+            <p:seq concurrent="1" nextAc="seek">
+              <p:cTn id="2" dur="indefinite" nodeType="mainSeq">
+                <p:childTnLst>
+                  <p:par>
+                    <p:cTn id="3" fill="hold">
+                      <p:stCondLst>
+                        <p:cond delay="indefinite"/>
+                      </p:stCondLst>
+                      <p:childTnLst>
+                        <p:par>
+                          <p:cTn id="5" dur="810" fill="hold" nodeType="clickEffect" grpId="0" presetID="10" presetClass="entr" presetSubtype="0">
+                            <p:stCondLst>
+                              <p:cond delay="0"/>
+                            </p:stCondLst>
+                            <p:childTnLst>
+                              <p:set>
+                                <p:cBhvr>
+                                  <p:cTn id="6" dur="1" fill="hold">
+                                    <p:stCondLst>
+                                      <p:cond delay="0"/>
+                                    </p:stCondLst>
+                                  </p:cTn>
+                                  <p:tgtEl>
+                                    <p:spTgt spid="3"/>
+                                  </p:tgtEl>
+                                  <p:attrNameLst>
+                                    <p:attrName>style.visibility</p:attrName>
+                                  </p:attrNameLst>
+                                </p:cBhvr>
+                                <p:to>
+                                  <p:strVal val="visible"/>
+                                </p:to>
+                              </p:set>
+                              <p:animEffect transition="in" filter="dissolve">
+                                <p:cBhvr>
+                                  <p:cTn id="51" dur="810"/>
+                                  <p:tgtEl>
+                                    <p:spTgt spid="3"/>
+                                  </p:tgtEl>
+                                </p:cBhvr>
+                              </p:animEffect>
+                            </p:childTnLst>
+                          </p:cTn>
+                        </p:par>
+                        <p:par>
+                          <p:cTn id="7" dur="450" fill="hold" nodeType="afterEffect" grpId="0" presetID="25" presetClass="entr" presetSubtype="1">
+                            <p:stCondLst>
+                              <p:cond delay="130"/>
+                            </p:stCondLst>
+                            <p:childTnLst>
+                              <p:set>
+                                <p:cBhvr>
+                                  <p:cTn id="8" dur="1" fill="hold">
+                                    <p:stCondLst>
+                                      <p:cond delay="0"/>
+                                    </p:stCondLst>
+                                  </p:cTn>
+                                  <p:tgtEl>
+                                    <p:spTgt spid="4"/>
+                                  </p:tgtEl>
+                                  <p:attrNameLst>
+                                    <p:attrName>style.visibility</p:attrName>
+                                  </p:attrNameLst>
+                                </p:cBhvr>
+                                <p:to>
+                                  <p:strVal val="visible"/>
+                                </p:to>
+                              </p:set>
+                              <p:animEffect transition="in" filter="strips(downRight)">
+                                <p:cBhvr>
+                                  <p:cTn id="71" dur="450"/>
+                                  <p:tgtEl>
+                                    <p:spTgt spid="4"/>
+                                  </p:tgtEl>
+                                </p:cBhvr>
+                              </p:animEffect>
+                            </p:childTnLst>
+                          </p:cTn>
+                        </p:par>
+                        <p:par>
+                          <p:cTn id="9" dur="570" fill="hold" nodeType="afterEffect" grpId="0" presetID="45" presetClass="entr" presetSubtype="1">
+                            <p:stCondLst>
+                              <p:cond delay="260"/>
+                            </p:stCondLst>
+                            <p:childTnLst>
+                              <p:set>
+                                <p:cBhvr>
+                                  <p:cTn id="10" dur="1" fill="hold">
+                                    <p:stCondLst>
+                                      <p:cond delay="0"/>
+                                    </p:stCondLst>
+                                  </p:cTn>
+                                  <p:tgtEl>
+                                    <p:spTgt spid="5"/>
+                                  </p:tgtEl>
+                                  <p:attrNameLst>
+                                    <p:attrName>style.visibility</p:attrName>
+                                  </p:attrNameLst>
+                                </p:cBhvr>
+                                <p:to>
+                                  <p:strVal val="visible"/>
+                                </p:to>
+                              </p:set>
+                              <p:animEffect transition="in" filter="barn(inHorizontal)">
+                                <p:cBhvr>
+                                  <p:cTn id="91" dur="570"/>
+                                  <p:tgtEl>
+                                    <p:spTgt spid="5"/>
+                                  </p:tgtEl>
+                                </p:cBhvr>
+                              </p:animEffect>
+                            </p:childTnLst>
+                          </p:cTn>
+                        </p:par>
+                        <p:par>
+                          <p:cTn id="11" dur="690" fill="hold" nodeType="afterEffect" grpId="0" presetID="22" presetClass="entr" presetSubtype="8">
+                            <p:stCondLst>
+                              <p:cond delay="390"/>
+                            </p:stCondLst>
+                            <p:childTnLst>
+                              <p:set>
+                                <p:cBhvr>
+                                  <p:cTn id="12" dur="1" fill="hold">
+                                    <p:stCondLst>
+                                      <p:cond delay="0"/>
+                                    </p:stCondLst>
+                                  </p:cTn>
+                                  <p:tgtEl>
+                                    <p:spTgt spid="6"/>
+                                  </p:tgtEl>
+                                  <p:attrNameLst>
+                                    <p:attrName>style.visibility</p:attrName>
+                                  </p:attrNameLst>
+                                </p:cBhvr>
+                                <p:to>
+                                  <p:strVal val="visible"/>
+                                </p:to>
+                              </p:set>
+                              <p:animEffect transition="in" filter="wipe(left)">
+                                <p:cBhvr>
+                                  <p:cTn id="111" dur="690"/>
+                                  <p:tgtEl>
+                                    <p:spTgt spid="6"/>
+                                  </p:tgtEl>
+                                </p:cBhvr>
+                              </p:animEffect>
+                            </p:childTnLst>
+                          </p:cTn>
+                        </p:par>
+                        <p:par>
+                          <p:cTn id="13" dur="810" fill="hold" nodeType="afterEffect" grpId="0" presetID="37" presetClass="entr" presetSubtype="0">
+                            <p:stCondLst>
+                              <p:cond delay="520"/>
+                            </p:stCondLst>
+                            <p:childTnLst>
+                              <p:set>
+                                <p:cBhvr>
+                                  <p:cTn id="14" dur="1" fill="hold">
+                                    <p:stCondLst>
+                                      <p:cond delay="0"/>
+                                    </p:stCondLst>
+                                  </p:cTn>
+                                  <p:tgtEl>
+                                    <p:spTgt spid="7"/>
+                                  </p:tgtEl>
+                                  <p:attrNameLst>
+                                    <p:attrName>style.visibility</p:attrName>
+                                  </p:attrNameLst>
+                                </p:cBhvr>
+                                <p:to>
+                                  <p:strVal val="visible"/>
+                                </p:to>
+                              </p:set>
+                              <p:animEffect transition="in" filter="wedge">
+                                <p:cBhvr>
+                                  <p:cTn id="131" dur="810"/>
+                                  <p:tgtEl>
+                                    <p:spTgt spid="7"/>
+                                  </p:tgtEl>
+                                </p:cBhvr>
+                              </p:animEffect>
+                            </p:childTnLst>
+                          </p:cTn>
+                        </p:par>
+                        <p:par>
+                          <p:cTn id="15" dur="450" fill="hold" nodeType="afterEffect" grpId="0" presetID="52" presetClass="entr" presetSubtype="0">
+                            <p:stCondLst>
+                              <p:cond delay="650"/>
+                            </p:stCondLst>
+                            <p:childTnLst>
+                              <p:set>
+                                <p:cBhvr>
+                                  <p:cTn id="16" dur="1" fill="hold">
+                                    <p:stCondLst>
+                                      <p:cond delay="0"/>
+                                    </p:stCondLst>
+                                  </p:cTn>
+                                  <p:tgtEl>
+                                    <p:spTgt spid="8"/>
+                                  </p:tgtEl>
+                                  <p:attrNameLst>
+                                    <p:attrName>style.visibility</p:attrName>
+                                  </p:attrNameLst>
+                                </p:cBhvr>
+                                <p:to>
+                                  <p:strVal val="visible"/>
+                                </p:to>
+                              </p:set>
+                              <p:animEffect transition="in" filter="randombar(horizontal)">
+                                <p:cBhvr>
+                                  <p:cTn id="151" dur="450"/>
+                                  <p:tgtEl>
+                                    <p:spTgt spid="8"/>
+                                  </p:tgtEl>
+                                </p:cBhvr>
+                              </p:animEffect>
+                            </p:childTnLst>
+                          </p:cTn>
+                        </p:par>
+                        <p:par>
+                          <p:cTn id="17" dur="570" fill="hold" nodeType="afterEffect" grpId="0" presetID="21" presetClass="entr" presetSubtype="1">
+                            <p:stCondLst>
+                              <p:cond delay="780"/>
+                            </p:stCondLst>
+                            <p:childTnLst>
+                              <p:set>
+                                <p:cBhvr>
+                                  <p:cTn id="18" dur="1" fill="hold">
+                                    <p:stCondLst>
+                                      <p:cond delay="0"/>
+                                    </p:stCondLst>
+                                  </p:cTn>
+                                  <p:tgtEl>
+                                    <p:spTgt spid="9"/>
+                                  </p:tgtEl>
+                                  <p:attrNameLst>
+                                    <p:attrName>style.visibility</p:attrName>
+                                  </p:attrNameLst>
+                                </p:cBhvr>
+                                <p:to>
+                                  <p:strVal val="visible"/>
+                                </p:to>
+                              </p:set>
+                              <p:animEffect transition="in" filter="wheel(1)">
+                                <p:cBhvr>
+                                  <p:cTn id="171" dur="570"/>
+                                  <p:tgtEl>
+                                    <p:spTgt spid="9"/>
+                                  </p:tgtEl>
+                                </p:cBhvr>
+                              </p:animEffect>
+                            </p:childTnLst>
+                          </p:cTn>
+                        </p:par>
+                        <p:par>
+                          <p:cTn id="19" dur="690" fill="hold" nodeType="afterEffect" grpId="0" presetID="22" presetClass="entr" presetSubtype="4">
+                            <p:stCondLst>
+                              <p:cond delay="910"/>
+                            </p:stCondLst>
+                            <p:childTnLst>
+                              <p:set>
+                                <p:cBhvr>
+                                  <p:cTn id="20" dur="1" fill="hold">
+                                    <p:stCondLst>
+                                      <p:cond delay="0"/>
+                                    </p:stCondLst>
+                                  </p:cTn>
+                                  <p:tgtEl>
+                                    <p:spTgt spid="10"/>
+                                  </p:tgtEl>
+                                  <p:attrNameLst>
+                                    <p:attrName>style.visibility</p:attrName>
+                                  </p:attrNameLst>
+                                </p:cBhvr>
+                                <p:to>
+                                  <p:strVal val="visible"/>
+                                </p:to>
+                              </p:set>
+                              <p:animEffect transition="in" filter="wipe(down)">
+                                <p:cBhvr>
+                                  <p:cTn id="191" dur="690"/>
+                                  <p:tgtEl>
+                                    <p:spTgt spid="10"/>
+                                  </p:tgtEl>
+                                </p:cBhvr>
+                              </p:animEffect>
+                            </p:childTnLst>
+                          </p:cTn>
+                        </p:par>
+                        <p:par>
+                          <p:cTn id="21" dur="810" fill="hold" nodeType="afterEffect" grpId="0" presetID="9" presetClass="entr" presetSubtype="0">
+                            <p:stCondLst>
+                              <p:cond delay="1040"/>
+                            </p:stCondLst>
+                            <p:childTnLst>
+                              <p:set>
+                                <p:cBhvr>
+                                  <p:cTn id="22" dur="1" fill="hold">
+                                    <p:stCondLst>
+                                      <p:cond delay="0"/>
+                                    </p:stCondLst>
+                                  </p:cTn>
+                                  <p:tgtEl>
+                                    <p:spTgt spid="11"/>
+                                  </p:tgtEl>
+                                  <p:attrNameLst>
+                                    <p:attrName>style.visibility</p:attrName>
+                                  </p:attrNameLst>
+                                </p:cBhvr>
+                                <p:to>
+                                  <p:strVal val="visible"/>
+                                </p:to>
+                              </p:set>
+                              <p:animEffect transition="in" filter="fade">
+                                <p:cBhvr>
+                                  <p:cTn id="211" dur="810"/>
+                                  <p:tgtEl>
+                                    <p:spTgt spid="11"/>
+                                  </p:tgtEl>
+                                </p:cBhvr>
+                              </p:animEffect>
+                            </p:childTnLst>
+                          </p:cTn>
+                        </p:par>
+                        <p:par>
+                          <p:cTn id="23" dur="450" fill="hold" nodeType="afterEffect" grpId="0" presetID="22" presetClass="entr" presetSubtype="2">
+                            <p:stCondLst>
+                              <p:cond delay="1170"/>
+                            </p:stCondLst>
+                            <p:childTnLst>
+                              <p:set>
+                                <p:cBhvr>
+                                  <p:cTn id="24" dur="1" fill="hold">
+                                    <p:stCondLst>
+                                      <p:cond delay="0"/>
+                                    </p:stCondLst>
+                                  </p:cTn>
+                                  <p:tgtEl>
+                                    <p:spTgt spid="12"/>
+                                  </p:tgtEl>
+                                  <p:attrNameLst>
+                                    <p:attrName>style.visibility</p:attrName>
+                                  </p:attrNameLst>
+                                </p:cBhvr>
+                                <p:to>
+                                  <p:strVal val="visible"/>
+                                </p:to>
+                              </p:set>
+                              <p:animEffect transition="in" filter="wipe(right)">
+                                <p:cBhvr>
+                                  <p:cTn id="231" dur="450"/>
+                                  <p:tgtEl>
+                                    <p:spTgt spid="12"/>
+                                  </p:tgtEl>
+                                </p:cBhvr>
+                              </p:animEffect>
+                            </p:childTnLst>
+                          </p:cTn>
+                        </p:par>
+                        <p:par>
+                          <p:cTn id="25" dur="570" fill="hold" nodeType="afterEffect" grpId="0" presetID="18" presetClass="entr" presetSubtype="12">
+                            <p:stCondLst>
+                              <p:cond delay="1300"/>
+                            </p:stCondLst>
+                            <p:childTnLst>
+                              <p:set>
+                                <p:cBhvr>
+                                  <p:cTn id="26" dur="1" fill="hold">
+                                    <p:stCondLst>
+                                      <p:cond delay="0"/>
+                                    </p:stCondLst>
+                                  </p:cTn>
+                                  <p:tgtEl>
+                                    <p:spTgt spid="13"/>
+                                  </p:tgtEl>
+                                  <p:attrNameLst>
+                                    <p:attrName>style.visibility</p:attrName>
+                                  </p:attrNameLst>
+                                </p:cBhvr>
+                                <p:to>
+                                  <p:strVal val="visible"/>
+                                </p:to>
+                              </p:set>
+                              <p:animEffect transition="in" filter="circle(in)">
+                                <p:cBhvr>
+                                  <p:cTn id="251" dur="570"/>
+                                  <p:tgtEl>
+                                    <p:spTgt spid="13"/>
+                                  </p:tgtEl>
+                                </p:cBhvr>
+                              </p:animEffect>
+                            </p:childTnLst>
+                          </p:cTn>
+                        </p:par>
+                        <p:par>
+                          <p:cTn id="27" dur="690" fill="hold" nodeType="afterEffect" grpId="0" presetID="22" presetClass="entr" presetSubtype="1">
+                            <p:stCondLst>
+                              <p:cond delay="1430"/>
+                            </p:stCondLst>
+                            <p:childTnLst>
+                              <p:set>
+                                <p:cBhvr>
+                                  <p:cTn id="28" dur="1" fill="hold">
+                                    <p:stCondLst>
+                                      <p:cond delay="0"/>
+                                    </p:stCondLst>
+                                  </p:cTn>
+                                  <p:tgtEl>
+                                    <p:spTgt spid="14"/>
+                                  </p:tgtEl>
+                                  <p:attrNameLst>
+                                    <p:attrName>style.visibility</p:attrName>
+                                  </p:attrNameLst>
+                                </p:cBhvr>
+                                <p:to>
+                                  <p:strVal val="visible"/>
+                                </p:to>
+                              </p:set>
+                              <p:animEffect transition="in" filter="wipe(up)">
+                                <p:cBhvr>
+                                  <p:cTn id="271" dur="690"/>
+                                  <p:tgtEl>
+                                    <p:spTgt spid="14"/>
+                                  </p:tgtEl>
+                                </p:cBhvr>
+                              </p:animEffect>
+                            </p:childTnLst>
+                          </p:cTn>
+                        </p:par>
+                        <p:par>
+                          <p:cTn id="29" dur="810" fill="hold" nodeType="afterEffect" grpId="0" presetID="42" presetClass="entr" presetSubtype="10">
+                            <p:stCondLst>
+                              <p:cond delay="1560"/>
+                            </p:stCondLst>
+                            <p:childTnLst>
+                              <p:set>
+                                <p:cBhvr>
+                                  <p:cTn id="30" dur="1" fill="hold">
+                                    <p:stCondLst>
+                                      <p:cond delay="0"/>
+                                    </p:stCondLst>
+                                  </p:cTn>
+                                  <p:tgtEl>
+                                    <p:spTgt spid="15"/>
+                                  </p:tgtEl>
+                                  <p:attrNameLst>
+                                    <p:attrName>style.visibility</p:attrName>
+                                  </p:attrNameLst>
+                                </p:cBhvr>
+                                <p:to>
+                                  <p:strVal val="visible"/>
+                                </p:to>
+                              </p:set>
+                              <p:animEffect transition="in" filter="blinds(horizontal)">
+                                <p:cBhvr>
+                                  <p:cTn id="291" dur="810"/>
+                                  <p:tgtEl>
+                                    <p:spTgt spid="15"/>
+                                  </p:tgtEl>
+                                </p:cBhvr>
+                              </p:animEffect>
+                            </p:childTnLst>
+                          </p:cTn>
+                        </p:par>
+                        <p:par>
+                          <p:cTn id="31" dur="450" fill="hold" nodeType="afterEffect" grpId="0" presetID="43" presetClass="entr" presetSubtype="0">
+                            <p:stCondLst>
+                              <p:cond delay="1690"/>
+                            </p:stCondLst>
+                            <p:childTnLst>
+                              <p:set>
+                                <p:cBhvr>
+                                  <p:cTn id="32" dur="1" fill="hold">
+                                    <p:stCondLst>
+                                      <p:cond delay="0"/>
+                                    </p:stCondLst>
+                                  </p:cTn>
+                                  <p:tgtEl>
+                                    <p:spTgt spid="16"/>
+                                  </p:tgtEl>
+                                  <p:attrNameLst>
+                                    <p:attrName>style.visibility</p:attrName>
+                                  </p:attrNameLst>
+                                </p:cBhvr>
+                                <p:to>
+                                  <p:strVal val="visible"/>
+                                </p:to>
+                              </p:set>
+                              <p:animEffect transition="in" filter="checkerboard(across)">
+                                <p:cBhvr>
+                                  <p:cTn id="311" dur="450"/>
+                                  <p:tgtEl>
+                                    <p:spTgt spid="16"/>
+                                  </p:tgtEl>
+                                </p:cBhvr>
+                              </p:animEffect>
+                            </p:childTnLst>
+                          </p:cTn>
+                        </p:par>
+                      </p:childTnLst>
+                    </p:cTn>
+                  </p:par>
+                </p:childTnLst>
+              </p:cTn>
+              <p:prevCondLst>
+                <p:cond evt="onPrev" delay="0">
+                  <p:tgtEl>
+                    <p:sldTgt/>
+                  </p:tgtEl>
+                </p:cond>
+              </p:prevCondLst>
+              <p:nextCondLst>
+                <p:cond evt="onNext" delay="0">
+                  <p:tgtEl>
+                    <p:sldTgt/>
+                  </p:tgtEl>
+                </p:cond>
+              </p:nextCondLst>
+            </p:seq>
+          </p:childTnLst>
+        </p:cTn>
+      </p:par>
+    </p:tnLst>
+  </p:timing>
 </p:sld>
 </file>
 
@@ -5261,8 +6004,537 @@
     <a:masterClrMapping/>
   </p:clrMapOvr>
   <p:transition spd="med">
-    <p:fade/>
+    <p:push dir="u"/>
   </p:transition>
+  <p:timing>
+    <p:tnLst>
+      <p:par>
+        <p:cTn id="1" dur="indefinite" restart="never" nodeType="tmRoot">
+          <p:childTnLst>
+            <p:seq concurrent="1" nextAc="seek">
+              <p:cTn id="2" dur="indefinite" nodeType="mainSeq">
+                <p:childTnLst>
+                  <p:par>
+                    <p:cTn id="3" fill="hold">
+                      <p:stCondLst>
+                        <p:cond delay="indefinite"/>
+                      </p:stCondLst>
+                      <p:childTnLst>
+                        <p:par>
+                          <p:cTn id="5" dur="450" fill="hold" nodeType="clickEffect" grpId="0" presetID="25" presetClass="entr" presetSubtype="1">
+                            <p:stCondLst>
+                              <p:cond delay="0"/>
+                            </p:stCondLst>
+                            <p:childTnLst>
+                              <p:set>
+                                <p:cBhvr>
+                                  <p:cTn id="6" dur="1" fill="hold">
+                                    <p:stCondLst>
+                                      <p:cond delay="0"/>
+                                    </p:stCondLst>
+                                  </p:cTn>
+                                  <p:tgtEl>
+                                    <p:spTgt spid="3"/>
+                                  </p:tgtEl>
+                                  <p:attrNameLst>
+                                    <p:attrName>style.visibility</p:attrName>
+                                  </p:attrNameLst>
+                                </p:cBhvr>
+                                <p:to>
+                                  <p:strVal val="visible"/>
+                                </p:to>
+                              </p:set>
+                              <p:animEffect transition="in" filter="strips(downRight)">
+                                <p:cBhvr>
+                                  <p:cTn id="51" dur="450"/>
+                                  <p:tgtEl>
+                                    <p:spTgt spid="3"/>
+                                  </p:tgtEl>
+                                </p:cBhvr>
+                              </p:animEffect>
+                            </p:childTnLst>
+                          </p:cTn>
+                        </p:par>
+                        <p:par>
+                          <p:cTn id="7" dur="570" fill="hold" nodeType="afterEffect" grpId="0" presetID="45" presetClass="entr" presetSubtype="1">
+                            <p:stCondLst>
+                              <p:cond delay="130"/>
+                            </p:stCondLst>
+                            <p:childTnLst>
+                              <p:set>
+                                <p:cBhvr>
+                                  <p:cTn id="8" dur="1" fill="hold">
+                                    <p:stCondLst>
+                                      <p:cond delay="0"/>
+                                    </p:stCondLst>
+                                  </p:cTn>
+                                  <p:tgtEl>
+                                    <p:spTgt spid="4"/>
+                                  </p:tgtEl>
+                                  <p:attrNameLst>
+                                    <p:attrName>style.visibility</p:attrName>
+                                  </p:attrNameLst>
+                                </p:cBhvr>
+                                <p:to>
+                                  <p:strVal val="visible"/>
+                                </p:to>
+                              </p:set>
+                              <p:animEffect transition="in" filter="barn(inHorizontal)">
+                                <p:cBhvr>
+                                  <p:cTn id="71" dur="570"/>
+                                  <p:tgtEl>
+                                    <p:spTgt spid="4"/>
+                                  </p:tgtEl>
+                                </p:cBhvr>
+                              </p:animEffect>
+                            </p:childTnLst>
+                          </p:cTn>
+                        </p:par>
+                        <p:par>
+                          <p:cTn id="9" dur="690" fill="hold" nodeType="afterEffect" grpId="0" presetID="22" presetClass="entr" presetSubtype="8">
+                            <p:stCondLst>
+                              <p:cond delay="260"/>
+                            </p:stCondLst>
+                            <p:childTnLst>
+                              <p:set>
+                                <p:cBhvr>
+                                  <p:cTn id="10" dur="1" fill="hold">
+                                    <p:stCondLst>
+                                      <p:cond delay="0"/>
+                                    </p:stCondLst>
+                                  </p:cTn>
+                                  <p:tgtEl>
+                                    <p:spTgt spid="5"/>
+                                  </p:tgtEl>
+                                  <p:attrNameLst>
+                                    <p:attrName>style.visibility</p:attrName>
+                                  </p:attrNameLst>
+                                </p:cBhvr>
+                                <p:to>
+                                  <p:strVal val="visible"/>
+                                </p:to>
+                              </p:set>
+                              <p:animEffect transition="in" filter="wipe(left)">
+                                <p:cBhvr>
+                                  <p:cTn id="91" dur="690"/>
+                                  <p:tgtEl>
+                                    <p:spTgt spid="5"/>
+                                  </p:tgtEl>
+                                </p:cBhvr>
+                              </p:animEffect>
+                            </p:childTnLst>
+                          </p:cTn>
+                        </p:par>
+                        <p:par>
+                          <p:cTn id="11" dur="810" fill="hold" nodeType="afterEffect" grpId="0" presetID="37" presetClass="entr" presetSubtype="0">
+                            <p:stCondLst>
+                              <p:cond delay="390"/>
+                            </p:stCondLst>
+                            <p:childTnLst>
+                              <p:set>
+                                <p:cBhvr>
+                                  <p:cTn id="12" dur="1" fill="hold">
+                                    <p:stCondLst>
+                                      <p:cond delay="0"/>
+                                    </p:stCondLst>
+                                  </p:cTn>
+                                  <p:tgtEl>
+                                    <p:spTgt spid="6"/>
+                                  </p:tgtEl>
+                                  <p:attrNameLst>
+                                    <p:attrName>style.visibility</p:attrName>
+                                  </p:attrNameLst>
+                                </p:cBhvr>
+                                <p:to>
+                                  <p:strVal val="visible"/>
+                                </p:to>
+                              </p:set>
+                              <p:animEffect transition="in" filter="wedge">
+                                <p:cBhvr>
+                                  <p:cTn id="111" dur="810"/>
+                                  <p:tgtEl>
+                                    <p:spTgt spid="6"/>
+                                  </p:tgtEl>
+                                </p:cBhvr>
+                              </p:animEffect>
+                            </p:childTnLst>
+                          </p:cTn>
+                        </p:par>
+                        <p:par>
+                          <p:cTn id="13" dur="450" fill="hold" nodeType="afterEffect" grpId="0" presetID="52" presetClass="entr" presetSubtype="0">
+                            <p:stCondLst>
+                              <p:cond delay="520"/>
+                            </p:stCondLst>
+                            <p:childTnLst>
+                              <p:set>
+                                <p:cBhvr>
+                                  <p:cTn id="14" dur="1" fill="hold">
+                                    <p:stCondLst>
+                                      <p:cond delay="0"/>
+                                    </p:stCondLst>
+                                  </p:cTn>
+                                  <p:tgtEl>
+                                    <p:spTgt spid="8"/>
+                                  </p:tgtEl>
+                                  <p:attrNameLst>
+                                    <p:attrName>style.visibility</p:attrName>
+                                  </p:attrNameLst>
+                                </p:cBhvr>
+                                <p:to>
+                                  <p:strVal val="visible"/>
+                                </p:to>
+                              </p:set>
+                              <p:animEffect transition="in" filter="randombar(horizontal)">
+                                <p:cBhvr>
+                                  <p:cTn id="131" dur="450"/>
+                                  <p:tgtEl>
+                                    <p:spTgt spid="8"/>
+                                  </p:tgtEl>
+                                </p:cBhvr>
+                              </p:animEffect>
+                            </p:childTnLst>
+                          </p:cTn>
+                        </p:par>
+                        <p:par>
+                          <p:cTn id="15" dur="570" fill="hold" nodeType="afterEffect" grpId="0" presetID="21" presetClass="entr" presetSubtype="1">
+                            <p:stCondLst>
+                              <p:cond delay="650"/>
+                            </p:stCondLst>
+                            <p:childTnLst>
+                              <p:set>
+                                <p:cBhvr>
+                                  <p:cTn id="16" dur="1" fill="hold">
+                                    <p:stCondLst>
+                                      <p:cond delay="0"/>
+                                    </p:stCondLst>
+                                  </p:cTn>
+                                  <p:tgtEl>
+                                    <p:spTgt spid="10"/>
+                                  </p:tgtEl>
+                                  <p:attrNameLst>
+                                    <p:attrName>style.visibility</p:attrName>
+                                  </p:attrNameLst>
+                                </p:cBhvr>
+                                <p:to>
+                                  <p:strVal val="visible"/>
+                                </p:to>
+                              </p:set>
+                              <p:animEffect transition="in" filter="wheel(1)">
+                                <p:cBhvr>
+                                  <p:cTn id="151" dur="570"/>
+                                  <p:tgtEl>
+                                    <p:spTgt spid="10"/>
+                                  </p:tgtEl>
+                                </p:cBhvr>
+                              </p:animEffect>
+                            </p:childTnLst>
+                          </p:cTn>
+                        </p:par>
+                        <p:par>
+                          <p:cTn id="17" dur="690" fill="hold" nodeType="afterEffect" grpId="0" presetID="22" presetClass="entr" presetSubtype="4">
+                            <p:stCondLst>
+                              <p:cond delay="780"/>
+                            </p:stCondLst>
+                            <p:childTnLst>
+                              <p:set>
+                                <p:cBhvr>
+                                  <p:cTn id="18" dur="1" fill="hold">
+                                    <p:stCondLst>
+                                      <p:cond delay="0"/>
+                                    </p:stCondLst>
+                                  </p:cTn>
+                                  <p:tgtEl>
+                                    <p:spTgt spid="7"/>
+                                  </p:tgtEl>
+                                  <p:attrNameLst>
+                                    <p:attrName>style.visibility</p:attrName>
+                                  </p:attrNameLst>
+                                </p:cBhvr>
+                                <p:to>
+                                  <p:strVal val="visible"/>
+                                </p:to>
+                              </p:set>
+                              <p:animEffect transition="in" filter="wipe(down)">
+                                <p:cBhvr>
+                                  <p:cTn id="171" dur="690"/>
+                                  <p:tgtEl>
+                                    <p:spTgt spid="7"/>
+                                  </p:tgtEl>
+                                </p:cBhvr>
+                              </p:animEffect>
+                            </p:childTnLst>
+                          </p:cTn>
+                        </p:par>
+                        <p:par>
+                          <p:cTn id="19" dur="810" fill="hold" nodeType="afterEffect" grpId="0" presetID="9" presetClass="entr" presetSubtype="0">
+                            <p:stCondLst>
+                              <p:cond delay="910"/>
+                            </p:stCondLst>
+                            <p:childTnLst>
+                              <p:set>
+                                <p:cBhvr>
+                                  <p:cTn id="20" dur="1" fill="hold">
+                                    <p:stCondLst>
+                                      <p:cond delay="0"/>
+                                    </p:stCondLst>
+                                  </p:cTn>
+                                  <p:tgtEl>
+                                    <p:spTgt spid="9"/>
+                                  </p:tgtEl>
+                                  <p:attrNameLst>
+                                    <p:attrName>style.visibility</p:attrName>
+                                  </p:attrNameLst>
+                                </p:cBhvr>
+                                <p:to>
+                                  <p:strVal val="visible"/>
+                                </p:to>
+                              </p:set>
+                              <p:animEffect transition="in" filter="fade">
+                                <p:cBhvr>
+                                  <p:cTn id="191" dur="810"/>
+                                  <p:tgtEl>
+                                    <p:spTgt spid="9"/>
+                                  </p:tgtEl>
+                                </p:cBhvr>
+                              </p:animEffect>
+                            </p:childTnLst>
+                          </p:cTn>
+                        </p:par>
+                        <p:par>
+                          <p:cTn id="21" dur="450" fill="hold" nodeType="afterEffect" grpId="0" presetID="22" presetClass="entr" presetSubtype="2">
+                            <p:stCondLst>
+                              <p:cond delay="1040"/>
+                            </p:stCondLst>
+                            <p:childTnLst>
+                              <p:set>
+                                <p:cBhvr>
+                                  <p:cTn id="22" dur="1" fill="hold">
+                                    <p:stCondLst>
+                                      <p:cond delay="0"/>
+                                    </p:stCondLst>
+                                  </p:cTn>
+                                  <p:tgtEl>
+                                    <p:spTgt spid="11"/>
+                                  </p:tgtEl>
+                                  <p:attrNameLst>
+                                    <p:attrName>style.visibility</p:attrName>
+                                  </p:attrNameLst>
+                                </p:cBhvr>
+                                <p:to>
+                                  <p:strVal val="visible"/>
+                                </p:to>
+                              </p:set>
+                              <p:animEffect transition="in" filter="wipe(right)">
+                                <p:cBhvr>
+                                  <p:cTn id="211" dur="450"/>
+                                  <p:tgtEl>
+                                    <p:spTgt spid="11"/>
+                                  </p:tgtEl>
+                                </p:cBhvr>
+                              </p:animEffect>
+                            </p:childTnLst>
+                          </p:cTn>
+                        </p:par>
+                        <p:par>
+                          <p:cTn id="23" dur="570" fill="hold" nodeType="afterEffect" grpId="0" presetID="18" presetClass="entr" presetSubtype="12">
+                            <p:stCondLst>
+                              <p:cond delay="1170"/>
+                            </p:stCondLst>
+                            <p:childTnLst>
+                              <p:set>
+                                <p:cBhvr>
+                                  <p:cTn id="24" dur="1" fill="hold">
+                                    <p:stCondLst>
+                                      <p:cond delay="0"/>
+                                    </p:stCondLst>
+                                  </p:cTn>
+                                  <p:tgtEl>
+                                    <p:spTgt spid="12"/>
+                                  </p:tgtEl>
+                                  <p:attrNameLst>
+                                    <p:attrName>style.visibility</p:attrName>
+                                  </p:attrNameLst>
+                                </p:cBhvr>
+                                <p:to>
+                                  <p:strVal val="visible"/>
+                                </p:to>
+                              </p:set>
+                              <p:animEffect transition="in" filter="circle(in)">
+                                <p:cBhvr>
+                                  <p:cTn id="231" dur="570"/>
+                                  <p:tgtEl>
+                                    <p:spTgt spid="12"/>
+                                  </p:tgtEl>
+                                </p:cBhvr>
+                              </p:animEffect>
+                            </p:childTnLst>
+                          </p:cTn>
+                        </p:par>
+                        <p:par>
+                          <p:cTn id="25" dur="690" fill="hold" nodeType="afterEffect" grpId="0" presetID="22" presetClass="entr" presetSubtype="1">
+                            <p:stCondLst>
+                              <p:cond delay="1300"/>
+                            </p:stCondLst>
+                            <p:childTnLst>
+                              <p:set>
+                                <p:cBhvr>
+                                  <p:cTn id="26" dur="1" fill="hold">
+                                    <p:stCondLst>
+                                      <p:cond delay="0"/>
+                                    </p:stCondLst>
+                                  </p:cTn>
+                                  <p:tgtEl>
+                                    <p:spTgt spid="14"/>
+                                  </p:tgtEl>
+                                  <p:attrNameLst>
+                                    <p:attrName>style.visibility</p:attrName>
+                                  </p:attrNameLst>
+                                </p:cBhvr>
+                                <p:to>
+                                  <p:strVal val="visible"/>
+                                </p:to>
+                              </p:set>
+                              <p:animEffect transition="in" filter="wipe(up)">
+                                <p:cBhvr>
+                                  <p:cTn id="251" dur="690"/>
+                                  <p:tgtEl>
+                                    <p:spTgt spid="14"/>
+                                  </p:tgtEl>
+                                </p:cBhvr>
+                              </p:animEffect>
+                            </p:childTnLst>
+                          </p:cTn>
+                        </p:par>
+                        <p:par>
+                          <p:cTn id="27" dur="810" fill="hold" nodeType="afterEffect" grpId="0" presetID="42" presetClass="entr" presetSubtype="10">
+                            <p:stCondLst>
+                              <p:cond delay="1430"/>
+                            </p:stCondLst>
+                            <p:childTnLst>
+                              <p:set>
+                                <p:cBhvr>
+                                  <p:cTn id="28" dur="1" fill="hold">
+                                    <p:stCondLst>
+                                      <p:cond delay="0"/>
+                                    </p:stCondLst>
+                                  </p:cTn>
+                                  <p:tgtEl>
+                                    <p:spTgt spid="16"/>
+                                  </p:tgtEl>
+                                  <p:attrNameLst>
+                                    <p:attrName>style.visibility</p:attrName>
+                                  </p:attrNameLst>
+                                </p:cBhvr>
+                                <p:to>
+                                  <p:strVal val="visible"/>
+                                </p:to>
+                              </p:set>
+                              <p:animEffect transition="in" filter="blinds(horizontal)">
+                                <p:cBhvr>
+                                  <p:cTn id="271" dur="810"/>
+                                  <p:tgtEl>
+                                    <p:spTgt spid="16"/>
+                                  </p:tgtEl>
+                                </p:cBhvr>
+                              </p:animEffect>
+                            </p:childTnLst>
+                          </p:cTn>
+                        </p:par>
+                        <p:par>
+                          <p:cTn id="29" dur="450" fill="hold" nodeType="afterEffect" grpId="0" presetID="43" presetClass="entr" presetSubtype="0">
+                            <p:stCondLst>
+                              <p:cond delay="1560"/>
+                            </p:stCondLst>
+                            <p:childTnLst>
+                              <p:set>
+                                <p:cBhvr>
+                                  <p:cTn id="30" dur="1" fill="hold">
+                                    <p:stCondLst>
+                                      <p:cond delay="0"/>
+                                    </p:stCondLst>
+                                  </p:cTn>
+                                  <p:tgtEl>
+                                    <p:spTgt spid="13"/>
+                                  </p:tgtEl>
+                                  <p:attrNameLst>
+                                    <p:attrName>style.visibility</p:attrName>
+                                  </p:attrNameLst>
+                                </p:cBhvr>
+                                <p:to>
+                                  <p:strVal val="visible"/>
+                                </p:to>
+                              </p:set>
+                              <p:animEffect transition="in" filter="checkerboard(across)">
+                                <p:cBhvr>
+                                  <p:cTn id="291" dur="450"/>
+                                  <p:tgtEl>
+                                    <p:spTgt spid="13"/>
+                                  </p:tgtEl>
+                                </p:cBhvr>
+                              </p:animEffect>
+                            </p:childTnLst>
+                          </p:cTn>
+                        </p:par>
+                        <p:par>
+                          <p:cTn id="31" dur="570" fill="hold" nodeType="afterEffect" grpId="0" presetID="21" presetClass="entr" presetSubtype="2">
+                            <p:stCondLst>
+                              <p:cond delay="1690"/>
+                            </p:stCondLst>
+                            <p:childTnLst>
+                              <p:set>
+                                <p:cBhvr>
+                                  <p:cTn id="32" dur="1" fill="hold">
+                                    <p:stCondLst>
+                                      <p:cond delay="0"/>
+                                    </p:stCondLst>
+                                  </p:cTn>
+                                  <p:tgtEl>
+                                    <p:spTgt spid="15"/>
+                                  </p:tgtEl>
+                                  <p:attrNameLst>
+                                    <p:attrName>style.visibility</p:attrName>
+                                  </p:attrNameLst>
+                                </p:cBhvr>
+                                <p:to>
+                                  <p:strVal val="visible"/>
+                                </p:to>
+                              </p:set>
+                              <p:animEffect transition="in" filter="wheel(2)">
+                                <p:cBhvr>
+                                  <p:cTn id="311" dur="570"/>
+                                  <p:tgtEl>
+                                    <p:spTgt spid="15"/>
+                                  </p:tgtEl>
+                                </p:cBhvr>
+                              </p:animEffect>
+                            </p:childTnLst>
+                          </p:cTn>
+                        </p:par>
+                      </p:childTnLst>
+                    </p:cTn>
+                  </p:par>
+                </p:childTnLst>
+              </p:cTn>
+              <p:prevCondLst>
+                <p:cond evt="onPrev" delay="0">
+                  <p:tgtEl>
+                    <p:sldTgt/>
+                  </p:tgtEl>
+                </p:cond>
+              </p:prevCondLst>
+              <p:nextCondLst>
+                <p:cond evt="onNext" delay="0">
+                  <p:tgtEl>
+                    <p:sldTgt/>
+                  </p:tgtEl>
+                </p:cond>
+              </p:nextCondLst>
+            </p:seq>
+          </p:childTnLst>
+        </p:cTn>
+      </p:par>
+    </p:tnLst>
+  </p:timing>
 </p:sld>
 </file>
 
@@ -5636,8 +6908,292 @@
     <a:masterClrMapping/>
   </p:clrMapOvr>
   <p:transition spd="med">
-    <p:fade/>
+    <p:wipe dir="d"/>
   </p:transition>
+  <p:timing>
+    <p:tnLst>
+      <p:par>
+        <p:cTn id="1" dur="indefinite" restart="never" nodeType="tmRoot">
+          <p:childTnLst>
+            <p:seq concurrent="1" nextAc="seek">
+              <p:cTn id="2" dur="indefinite" nodeType="mainSeq">
+                <p:childTnLst>
+                  <p:par>
+                    <p:cTn id="3" fill="hold">
+                      <p:stCondLst>
+                        <p:cond delay="indefinite"/>
+                      </p:stCondLst>
+                      <p:childTnLst>
+                        <p:par>
+                          <p:cTn id="5" dur="570" fill="hold" nodeType="clickEffect" grpId="0" presetID="45" presetClass="entr" presetSubtype="1">
+                            <p:stCondLst>
+                              <p:cond delay="0"/>
+                            </p:stCondLst>
+                            <p:childTnLst>
+                              <p:set>
+                                <p:cBhvr>
+                                  <p:cTn id="6" dur="1" fill="hold">
+                                    <p:stCondLst>
+                                      <p:cond delay="0"/>
+                                    </p:stCondLst>
+                                  </p:cTn>
+                                  <p:tgtEl>
+                                    <p:spTgt spid="3"/>
+                                  </p:tgtEl>
+                                  <p:attrNameLst>
+                                    <p:attrName>style.visibility</p:attrName>
+                                  </p:attrNameLst>
+                                </p:cBhvr>
+                                <p:to>
+                                  <p:strVal val="visible"/>
+                                </p:to>
+                              </p:set>
+                              <p:animEffect transition="in" filter="barn(inHorizontal)">
+                                <p:cBhvr>
+                                  <p:cTn id="51" dur="570"/>
+                                  <p:tgtEl>
+                                    <p:spTgt spid="3"/>
+                                  </p:tgtEl>
+                                </p:cBhvr>
+                              </p:animEffect>
+                            </p:childTnLst>
+                          </p:cTn>
+                        </p:par>
+                        <p:par>
+                          <p:cTn id="7" dur="690" fill="hold" nodeType="afterEffect" grpId="0" presetID="22" presetClass="entr" presetSubtype="8">
+                            <p:stCondLst>
+                              <p:cond delay="130"/>
+                            </p:stCondLst>
+                            <p:childTnLst>
+                              <p:set>
+                                <p:cBhvr>
+                                  <p:cTn id="8" dur="1" fill="hold">
+                                    <p:stCondLst>
+                                      <p:cond delay="0"/>
+                                    </p:stCondLst>
+                                  </p:cTn>
+                                  <p:tgtEl>
+                                    <p:spTgt spid="4"/>
+                                  </p:tgtEl>
+                                  <p:attrNameLst>
+                                    <p:attrName>style.visibility</p:attrName>
+                                  </p:attrNameLst>
+                                </p:cBhvr>
+                                <p:to>
+                                  <p:strVal val="visible"/>
+                                </p:to>
+                              </p:set>
+                              <p:animEffect transition="in" filter="wipe(left)">
+                                <p:cBhvr>
+                                  <p:cTn id="71" dur="690"/>
+                                  <p:tgtEl>
+                                    <p:spTgt spid="4"/>
+                                  </p:tgtEl>
+                                </p:cBhvr>
+                              </p:animEffect>
+                            </p:childTnLst>
+                          </p:cTn>
+                        </p:par>
+                        <p:par>
+                          <p:cTn id="9" dur="810" fill="hold" nodeType="afterEffect" grpId="0" presetID="37" presetClass="entr" presetSubtype="0">
+                            <p:stCondLst>
+                              <p:cond delay="260"/>
+                            </p:stCondLst>
+                            <p:childTnLst>
+                              <p:set>
+                                <p:cBhvr>
+                                  <p:cTn id="10" dur="1" fill="hold">
+                                    <p:stCondLst>
+                                      <p:cond delay="0"/>
+                                    </p:stCondLst>
+                                  </p:cTn>
+                                  <p:tgtEl>
+                                    <p:spTgt spid="5"/>
+                                  </p:tgtEl>
+                                  <p:attrNameLst>
+                                    <p:attrName>style.visibility</p:attrName>
+                                  </p:attrNameLst>
+                                </p:cBhvr>
+                                <p:to>
+                                  <p:strVal val="visible"/>
+                                </p:to>
+                              </p:set>
+                              <p:animEffect transition="in" filter="wedge">
+                                <p:cBhvr>
+                                  <p:cTn id="91" dur="810"/>
+                                  <p:tgtEl>
+                                    <p:spTgt spid="5"/>
+                                  </p:tgtEl>
+                                </p:cBhvr>
+                              </p:animEffect>
+                            </p:childTnLst>
+                          </p:cTn>
+                        </p:par>
+                        <p:par>
+                          <p:cTn id="11" dur="450" fill="hold" nodeType="afterEffect" grpId="0" presetID="52" presetClass="entr" presetSubtype="0">
+                            <p:stCondLst>
+                              <p:cond delay="390"/>
+                            </p:stCondLst>
+                            <p:childTnLst>
+                              <p:set>
+                                <p:cBhvr>
+                                  <p:cTn id="12" dur="1" fill="hold">
+                                    <p:stCondLst>
+                                      <p:cond delay="0"/>
+                                    </p:stCondLst>
+                                  </p:cTn>
+                                  <p:tgtEl>
+                                    <p:spTgt spid="6"/>
+                                  </p:tgtEl>
+                                  <p:attrNameLst>
+                                    <p:attrName>style.visibility</p:attrName>
+                                  </p:attrNameLst>
+                                </p:cBhvr>
+                                <p:to>
+                                  <p:strVal val="visible"/>
+                                </p:to>
+                              </p:set>
+                              <p:animEffect transition="in" filter="randombar(horizontal)">
+                                <p:cBhvr>
+                                  <p:cTn id="111" dur="450"/>
+                                  <p:tgtEl>
+                                    <p:spTgt spid="6"/>
+                                  </p:tgtEl>
+                                </p:cBhvr>
+                              </p:animEffect>
+                            </p:childTnLst>
+                          </p:cTn>
+                        </p:par>
+                        <p:par>
+                          <p:cTn id="13" dur="570" fill="hold" nodeType="afterEffect" grpId="0" presetID="21" presetClass="entr" presetSubtype="1">
+                            <p:stCondLst>
+                              <p:cond delay="520"/>
+                            </p:stCondLst>
+                            <p:childTnLst>
+                              <p:set>
+                                <p:cBhvr>
+                                  <p:cTn id="14" dur="1" fill="hold">
+                                    <p:stCondLst>
+                                      <p:cond delay="0"/>
+                                    </p:stCondLst>
+                                  </p:cTn>
+                                  <p:tgtEl>
+                                    <p:spTgt spid="7"/>
+                                  </p:tgtEl>
+                                  <p:attrNameLst>
+                                    <p:attrName>style.visibility</p:attrName>
+                                  </p:attrNameLst>
+                                </p:cBhvr>
+                                <p:to>
+                                  <p:strVal val="visible"/>
+                                </p:to>
+                              </p:set>
+                              <p:animEffect transition="in" filter="wheel(1)">
+                                <p:cBhvr>
+                                  <p:cTn id="131" dur="570"/>
+                                  <p:tgtEl>
+                                    <p:spTgt spid="7"/>
+                                  </p:tgtEl>
+                                </p:cBhvr>
+                              </p:animEffect>
+                            </p:childTnLst>
+                          </p:cTn>
+                        </p:par>
+                        <p:par>
+                          <p:cTn id="15" dur="690" fill="hold" nodeType="afterEffect" grpId="0" presetID="22" presetClass="entr" presetSubtype="4">
+                            <p:stCondLst>
+                              <p:cond delay="650"/>
+                            </p:stCondLst>
+                            <p:childTnLst>
+                              <p:set>
+                                <p:cBhvr>
+                                  <p:cTn id="16" dur="1" fill="hold">
+                                    <p:stCondLst>
+                                      <p:cond delay="0"/>
+                                    </p:stCondLst>
+                                  </p:cTn>
+                                  <p:tgtEl>
+                                    <p:spTgt spid="8"/>
+                                  </p:tgtEl>
+                                  <p:attrNameLst>
+                                    <p:attrName>style.visibility</p:attrName>
+                                  </p:attrNameLst>
+                                </p:cBhvr>
+                                <p:to>
+                                  <p:strVal val="visible"/>
+                                </p:to>
+                              </p:set>
+                              <p:animEffect transition="in" filter="wipe(down)">
+                                <p:cBhvr>
+                                  <p:cTn id="151" dur="690"/>
+                                  <p:tgtEl>
+                                    <p:spTgt spid="8"/>
+                                  </p:tgtEl>
+                                </p:cBhvr>
+                              </p:animEffect>
+                            </p:childTnLst>
+                          </p:cTn>
+                        </p:par>
+                        <p:par>
+                          <p:cTn id="17" dur="810" fill="hold" nodeType="afterEffect" grpId="0" presetID="9" presetClass="entr" presetSubtype="0">
+                            <p:stCondLst>
+                              <p:cond delay="780"/>
+                            </p:stCondLst>
+                            <p:childTnLst>
+                              <p:set>
+                                <p:cBhvr>
+                                  <p:cTn id="18" dur="1" fill="hold">
+                                    <p:stCondLst>
+                                      <p:cond delay="0"/>
+                                    </p:stCondLst>
+                                  </p:cTn>
+                                  <p:tgtEl>
+                                    <p:spTgt spid="9"/>
+                                  </p:tgtEl>
+                                  <p:attrNameLst>
+                                    <p:attrName>style.visibility</p:attrName>
+                                  </p:attrNameLst>
+                                </p:cBhvr>
+                                <p:to>
+                                  <p:strVal val="visible"/>
+                                </p:to>
+                              </p:set>
+                              <p:animEffect transition="in" filter="fade">
+                                <p:cBhvr>
+                                  <p:cTn id="171" dur="810"/>
+                                  <p:tgtEl>
+                                    <p:spTgt spid="9"/>
+                                  </p:tgtEl>
+                                </p:cBhvr>
+                              </p:animEffect>
+                            </p:childTnLst>
+                          </p:cTn>
+                        </p:par>
+                      </p:childTnLst>
+                    </p:cTn>
+                  </p:par>
+                </p:childTnLst>
+              </p:cTn>
+              <p:prevCondLst>
+                <p:cond evt="onPrev" delay="0">
+                  <p:tgtEl>
+                    <p:sldTgt/>
+                  </p:tgtEl>
+                </p:cond>
+              </p:prevCondLst>
+              <p:nextCondLst>
+                <p:cond evt="onNext" delay="0">
+                  <p:tgtEl>
+                    <p:sldTgt/>
+                  </p:tgtEl>
+                </p:cond>
+              </p:nextCondLst>
+            </p:seq>
+          </p:childTnLst>
+        </p:cTn>
+      </p:par>
+    </p:tnLst>
+  </p:timing>
 </p:sld>
 </file>
 
@@ -6013,6 +7569,290 @@
   <p:transition spd="med">
     <p:fade/>
   </p:transition>
+  <p:timing>
+    <p:tnLst>
+      <p:par>
+        <p:cTn id="1" dur="indefinite" restart="never" nodeType="tmRoot">
+          <p:childTnLst>
+            <p:seq concurrent="1" nextAc="seek">
+              <p:cTn id="2" dur="indefinite" nodeType="mainSeq">
+                <p:childTnLst>
+                  <p:par>
+                    <p:cTn id="3" fill="hold">
+                      <p:stCondLst>
+                        <p:cond delay="indefinite"/>
+                      </p:stCondLst>
+                      <p:childTnLst>
+                        <p:par>
+                          <p:cTn id="5" dur="690" fill="hold" nodeType="clickEffect" grpId="0" presetID="22" presetClass="entr" presetSubtype="8">
+                            <p:stCondLst>
+                              <p:cond delay="0"/>
+                            </p:stCondLst>
+                            <p:childTnLst>
+                              <p:set>
+                                <p:cBhvr>
+                                  <p:cTn id="6" dur="1" fill="hold">
+                                    <p:stCondLst>
+                                      <p:cond delay="0"/>
+                                    </p:stCondLst>
+                                  </p:cTn>
+                                  <p:tgtEl>
+                                    <p:spTgt spid="3"/>
+                                  </p:tgtEl>
+                                  <p:attrNameLst>
+                                    <p:attrName>style.visibility</p:attrName>
+                                  </p:attrNameLst>
+                                </p:cBhvr>
+                                <p:to>
+                                  <p:strVal val="visible"/>
+                                </p:to>
+                              </p:set>
+                              <p:animEffect transition="in" filter="wipe(left)">
+                                <p:cBhvr>
+                                  <p:cTn id="51" dur="690"/>
+                                  <p:tgtEl>
+                                    <p:spTgt spid="3"/>
+                                  </p:tgtEl>
+                                </p:cBhvr>
+                              </p:animEffect>
+                            </p:childTnLst>
+                          </p:cTn>
+                        </p:par>
+                        <p:par>
+                          <p:cTn id="7" dur="810" fill="hold" nodeType="afterEffect" grpId="0" presetID="37" presetClass="entr" presetSubtype="0">
+                            <p:stCondLst>
+                              <p:cond delay="130"/>
+                            </p:stCondLst>
+                            <p:childTnLst>
+                              <p:set>
+                                <p:cBhvr>
+                                  <p:cTn id="8" dur="1" fill="hold">
+                                    <p:stCondLst>
+                                      <p:cond delay="0"/>
+                                    </p:stCondLst>
+                                  </p:cTn>
+                                  <p:tgtEl>
+                                    <p:spTgt spid="4"/>
+                                  </p:tgtEl>
+                                  <p:attrNameLst>
+                                    <p:attrName>style.visibility</p:attrName>
+                                  </p:attrNameLst>
+                                </p:cBhvr>
+                                <p:to>
+                                  <p:strVal val="visible"/>
+                                </p:to>
+                              </p:set>
+                              <p:animEffect transition="in" filter="wedge">
+                                <p:cBhvr>
+                                  <p:cTn id="71" dur="810"/>
+                                  <p:tgtEl>
+                                    <p:spTgt spid="4"/>
+                                  </p:tgtEl>
+                                </p:cBhvr>
+                              </p:animEffect>
+                            </p:childTnLst>
+                          </p:cTn>
+                        </p:par>
+                        <p:par>
+                          <p:cTn id="9" dur="450" fill="hold" nodeType="afterEffect" grpId="0" presetID="52" presetClass="entr" presetSubtype="0">
+                            <p:stCondLst>
+                              <p:cond delay="260"/>
+                            </p:stCondLst>
+                            <p:childTnLst>
+                              <p:set>
+                                <p:cBhvr>
+                                  <p:cTn id="10" dur="1" fill="hold">
+                                    <p:stCondLst>
+                                      <p:cond delay="0"/>
+                                    </p:stCondLst>
+                                  </p:cTn>
+                                  <p:tgtEl>
+                                    <p:spTgt spid="5"/>
+                                  </p:tgtEl>
+                                  <p:attrNameLst>
+                                    <p:attrName>style.visibility</p:attrName>
+                                  </p:attrNameLst>
+                                </p:cBhvr>
+                                <p:to>
+                                  <p:strVal val="visible"/>
+                                </p:to>
+                              </p:set>
+                              <p:animEffect transition="in" filter="randombar(horizontal)">
+                                <p:cBhvr>
+                                  <p:cTn id="91" dur="450"/>
+                                  <p:tgtEl>
+                                    <p:spTgt spid="5"/>
+                                  </p:tgtEl>
+                                </p:cBhvr>
+                              </p:animEffect>
+                            </p:childTnLst>
+                          </p:cTn>
+                        </p:par>
+                        <p:par>
+                          <p:cTn id="11" dur="570" fill="hold" nodeType="afterEffect" grpId="0" presetID="21" presetClass="entr" presetSubtype="1">
+                            <p:stCondLst>
+                              <p:cond delay="390"/>
+                            </p:stCondLst>
+                            <p:childTnLst>
+                              <p:set>
+                                <p:cBhvr>
+                                  <p:cTn id="12" dur="1" fill="hold">
+                                    <p:stCondLst>
+                                      <p:cond delay="0"/>
+                                    </p:stCondLst>
+                                  </p:cTn>
+                                  <p:tgtEl>
+                                    <p:spTgt spid="6"/>
+                                  </p:tgtEl>
+                                  <p:attrNameLst>
+                                    <p:attrName>style.visibility</p:attrName>
+                                  </p:attrNameLst>
+                                </p:cBhvr>
+                                <p:to>
+                                  <p:strVal val="visible"/>
+                                </p:to>
+                              </p:set>
+                              <p:animEffect transition="in" filter="wheel(1)">
+                                <p:cBhvr>
+                                  <p:cTn id="111" dur="570"/>
+                                  <p:tgtEl>
+                                    <p:spTgt spid="6"/>
+                                  </p:tgtEl>
+                                </p:cBhvr>
+                              </p:animEffect>
+                            </p:childTnLst>
+                          </p:cTn>
+                        </p:par>
+                        <p:par>
+                          <p:cTn id="13" dur="690" fill="hold" nodeType="afterEffect" grpId="0" presetID="22" presetClass="entr" presetSubtype="4">
+                            <p:stCondLst>
+                              <p:cond delay="520"/>
+                            </p:stCondLst>
+                            <p:childTnLst>
+                              <p:set>
+                                <p:cBhvr>
+                                  <p:cTn id="14" dur="1" fill="hold">
+                                    <p:stCondLst>
+                                      <p:cond delay="0"/>
+                                    </p:stCondLst>
+                                  </p:cTn>
+                                  <p:tgtEl>
+                                    <p:spTgt spid="7"/>
+                                  </p:tgtEl>
+                                  <p:attrNameLst>
+                                    <p:attrName>style.visibility</p:attrName>
+                                  </p:attrNameLst>
+                                </p:cBhvr>
+                                <p:to>
+                                  <p:strVal val="visible"/>
+                                </p:to>
+                              </p:set>
+                              <p:animEffect transition="in" filter="wipe(down)">
+                                <p:cBhvr>
+                                  <p:cTn id="131" dur="690"/>
+                                  <p:tgtEl>
+                                    <p:spTgt spid="7"/>
+                                  </p:tgtEl>
+                                </p:cBhvr>
+                              </p:animEffect>
+                            </p:childTnLst>
+                          </p:cTn>
+                        </p:par>
+                        <p:par>
+                          <p:cTn id="15" dur="810" fill="hold" nodeType="afterEffect" grpId="0" presetID="9" presetClass="entr" presetSubtype="0">
+                            <p:stCondLst>
+                              <p:cond delay="650"/>
+                            </p:stCondLst>
+                            <p:childTnLst>
+                              <p:set>
+                                <p:cBhvr>
+                                  <p:cTn id="16" dur="1" fill="hold">
+                                    <p:stCondLst>
+                                      <p:cond delay="0"/>
+                                    </p:stCondLst>
+                                  </p:cTn>
+                                  <p:tgtEl>
+                                    <p:spTgt spid="8"/>
+                                  </p:tgtEl>
+                                  <p:attrNameLst>
+                                    <p:attrName>style.visibility</p:attrName>
+                                  </p:attrNameLst>
+                                </p:cBhvr>
+                                <p:to>
+                                  <p:strVal val="visible"/>
+                                </p:to>
+                              </p:set>
+                              <p:animEffect transition="in" filter="fade">
+                                <p:cBhvr>
+                                  <p:cTn id="151" dur="810"/>
+                                  <p:tgtEl>
+                                    <p:spTgt spid="8"/>
+                                  </p:tgtEl>
+                                </p:cBhvr>
+                              </p:animEffect>
+                            </p:childTnLst>
+                          </p:cTn>
+                        </p:par>
+                        <p:par>
+                          <p:cTn id="17" dur="450" fill="hold" nodeType="afterEffect" grpId="0" presetID="22" presetClass="entr" presetSubtype="2">
+                            <p:stCondLst>
+                              <p:cond delay="780"/>
+                            </p:stCondLst>
+                            <p:childTnLst>
+                              <p:set>
+                                <p:cBhvr>
+                                  <p:cTn id="18" dur="1" fill="hold">
+                                    <p:stCondLst>
+                                      <p:cond delay="0"/>
+                                    </p:stCondLst>
+                                  </p:cTn>
+                                  <p:tgtEl>
+                                    <p:spTgt spid="9"/>
+                                  </p:tgtEl>
+                                  <p:attrNameLst>
+                                    <p:attrName>style.visibility</p:attrName>
+                                  </p:attrNameLst>
+                                </p:cBhvr>
+                                <p:to>
+                                  <p:strVal val="visible"/>
+                                </p:to>
+                              </p:set>
+                              <p:animEffect transition="in" filter="wipe(right)">
+                                <p:cBhvr>
+                                  <p:cTn id="171" dur="450"/>
+                                  <p:tgtEl>
+                                    <p:spTgt spid="9"/>
+                                  </p:tgtEl>
+                                </p:cBhvr>
+                              </p:animEffect>
+                            </p:childTnLst>
+                          </p:cTn>
+                        </p:par>
+                      </p:childTnLst>
+                    </p:cTn>
+                  </p:par>
+                </p:childTnLst>
+              </p:cTn>
+              <p:prevCondLst>
+                <p:cond evt="onPrev" delay="0">
+                  <p:tgtEl>
+                    <p:sldTgt/>
+                  </p:tgtEl>
+                </p:cond>
+              </p:prevCondLst>
+              <p:nextCondLst>
+                <p:cond evt="onNext" delay="0">
+                  <p:tgtEl>
+                    <p:sldTgt/>
+                  </p:tgtEl>
+                </p:cond>
+              </p:nextCondLst>
+            </p:seq>
+          </p:childTnLst>
+        </p:cTn>
+      </p:par>
+    </p:tnLst>
+  </p:timing>
 </p:sld>
 </file>
 
@@ -6968,8 +8808,537 @@
     <a:masterClrMapping/>
   </p:clrMapOvr>
   <p:transition spd="med">
-    <p:fade/>
+    <p:push dir="l"/>
   </p:transition>
+  <p:timing>
+    <p:tnLst>
+      <p:par>
+        <p:cTn id="1" dur="indefinite" restart="never" nodeType="tmRoot">
+          <p:childTnLst>
+            <p:seq concurrent="1" nextAc="seek">
+              <p:cTn id="2" dur="indefinite" nodeType="mainSeq">
+                <p:childTnLst>
+                  <p:par>
+                    <p:cTn id="3" fill="hold">
+                      <p:stCondLst>
+                        <p:cond delay="indefinite"/>
+                      </p:stCondLst>
+                      <p:childTnLst>
+                        <p:par>
+                          <p:cTn id="5" dur="810" fill="hold" nodeType="clickEffect" grpId="0" presetID="37" presetClass="entr" presetSubtype="0">
+                            <p:stCondLst>
+                              <p:cond delay="0"/>
+                            </p:stCondLst>
+                            <p:childTnLst>
+                              <p:set>
+                                <p:cBhvr>
+                                  <p:cTn id="6" dur="1" fill="hold">
+                                    <p:stCondLst>
+                                      <p:cond delay="0"/>
+                                    </p:stCondLst>
+                                  </p:cTn>
+                                  <p:tgtEl>
+                                    <p:spTgt spid="3"/>
+                                  </p:tgtEl>
+                                  <p:attrNameLst>
+                                    <p:attrName>style.visibility</p:attrName>
+                                  </p:attrNameLst>
+                                </p:cBhvr>
+                                <p:to>
+                                  <p:strVal val="visible"/>
+                                </p:to>
+                              </p:set>
+                              <p:animEffect transition="in" filter="wedge">
+                                <p:cBhvr>
+                                  <p:cTn id="51" dur="810"/>
+                                  <p:tgtEl>
+                                    <p:spTgt spid="3"/>
+                                  </p:tgtEl>
+                                </p:cBhvr>
+                              </p:animEffect>
+                            </p:childTnLst>
+                          </p:cTn>
+                        </p:par>
+                        <p:par>
+                          <p:cTn id="7" dur="450" fill="hold" nodeType="afterEffect" grpId="0" presetID="52" presetClass="entr" presetSubtype="0">
+                            <p:stCondLst>
+                              <p:cond delay="130"/>
+                            </p:stCondLst>
+                            <p:childTnLst>
+                              <p:set>
+                                <p:cBhvr>
+                                  <p:cTn id="8" dur="1" fill="hold">
+                                    <p:stCondLst>
+                                      <p:cond delay="0"/>
+                                    </p:stCondLst>
+                                  </p:cTn>
+                                  <p:tgtEl>
+                                    <p:spTgt spid="4"/>
+                                  </p:tgtEl>
+                                  <p:attrNameLst>
+                                    <p:attrName>style.visibility</p:attrName>
+                                  </p:attrNameLst>
+                                </p:cBhvr>
+                                <p:to>
+                                  <p:strVal val="visible"/>
+                                </p:to>
+                              </p:set>
+                              <p:animEffect transition="in" filter="randombar(horizontal)">
+                                <p:cBhvr>
+                                  <p:cTn id="71" dur="450"/>
+                                  <p:tgtEl>
+                                    <p:spTgt spid="4"/>
+                                  </p:tgtEl>
+                                </p:cBhvr>
+                              </p:animEffect>
+                            </p:childTnLst>
+                          </p:cTn>
+                        </p:par>
+                        <p:par>
+                          <p:cTn id="9" dur="570" fill="hold" nodeType="afterEffect" grpId="0" presetID="21" presetClass="entr" presetSubtype="1">
+                            <p:stCondLst>
+                              <p:cond delay="260"/>
+                            </p:stCondLst>
+                            <p:childTnLst>
+                              <p:set>
+                                <p:cBhvr>
+                                  <p:cTn id="10" dur="1" fill="hold">
+                                    <p:stCondLst>
+                                      <p:cond delay="0"/>
+                                    </p:stCondLst>
+                                  </p:cTn>
+                                  <p:tgtEl>
+                                    <p:spTgt spid="5"/>
+                                  </p:tgtEl>
+                                  <p:attrNameLst>
+                                    <p:attrName>style.visibility</p:attrName>
+                                  </p:attrNameLst>
+                                </p:cBhvr>
+                                <p:to>
+                                  <p:strVal val="visible"/>
+                                </p:to>
+                              </p:set>
+                              <p:animEffect transition="in" filter="wheel(1)">
+                                <p:cBhvr>
+                                  <p:cTn id="91" dur="570"/>
+                                  <p:tgtEl>
+                                    <p:spTgt spid="5"/>
+                                  </p:tgtEl>
+                                </p:cBhvr>
+                              </p:animEffect>
+                            </p:childTnLst>
+                          </p:cTn>
+                        </p:par>
+                        <p:par>
+                          <p:cTn id="11" dur="690" fill="hold" nodeType="afterEffect" grpId="0" presetID="22" presetClass="entr" presetSubtype="4">
+                            <p:stCondLst>
+                              <p:cond delay="390"/>
+                            </p:stCondLst>
+                            <p:childTnLst>
+                              <p:set>
+                                <p:cBhvr>
+                                  <p:cTn id="12" dur="1" fill="hold">
+                                    <p:stCondLst>
+                                      <p:cond delay="0"/>
+                                    </p:stCondLst>
+                                  </p:cTn>
+                                  <p:tgtEl>
+                                    <p:spTgt spid="6"/>
+                                  </p:tgtEl>
+                                  <p:attrNameLst>
+                                    <p:attrName>style.visibility</p:attrName>
+                                  </p:attrNameLst>
+                                </p:cBhvr>
+                                <p:to>
+                                  <p:strVal val="visible"/>
+                                </p:to>
+                              </p:set>
+                              <p:animEffect transition="in" filter="wipe(down)">
+                                <p:cBhvr>
+                                  <p:cTn id="111" dur="690"/>
+                                  <p:tgtEl>
+                                    <p:spTgt spid="6"/>
+                                  </p:tgtEl>
+                                </p:cBhvr>
+                              </p:animEffect>
+                            </p:childTnLst>
+                          </p:cTn>
+                        </p:par>
+                        <p:par>
+                          <p:cTn id="13" dur="810" fill="hold" nodeType="afterEffect" grpId="0" presetID="9" presetClass="entr" presetSubtype="0">
+                            <p:stCondLst>
+                              <p:cond delay="520"/>
+                            </p:stCondLst>
+                            <p:childTnLst>
+                              <p:set>
+                                <p:cBhvr>
+                                  <p:cTn id="14" dur="1" fill="hold">
+                                    <p:stCondLst>
+                                      <p:cond delay="0"/>
+                                    </p:stCondLst>
+                                  </p:cTn>
+                                  <p:tgtEl>
+                                    <p:spTgt spid="11"/>
+                                  </p:tgtEl>
+                                  <p:attrNameLst>
+                                    <p:attrName>style.visibility</p:attrName>
+                                  </p:attrNameLst>
+                                </p:cBhvr>
+                                <p:to>
+                                  <p:strVal val="visible"/>
+                                </p:to>
+                              </p:set>
+                              <p:animEffect transition="in" filter="fade">
+                                <p:cBhvr>
+                                  <p:cTn id="131" dur="810"/>
+                                  <p:tgtEl>
+                                    <p:spTgt spid="11"/>
+                                  </p:tgtEl>
+                                </p:cBhvr>
+                              </p:animEffect>
+                            </p:childTnLst>
+                          </p:cTn>
+                        </p:par>
+                        <p:par>
+                          <p:cTn id="15" dur="450" fill="hold" nodeType="afterEffect" grpId="0" presetID="22" presetClass="entr" presetSubtype="2">
+                            <p:stCondLst>
+                              <p:cond delay="650"/>
+                            </p:stCondLst>
+                            <p:childTnLst>
+                              <p:set>
+                                <p:cBhvr>
+                                  <p:cTn id="16" dur="1" fill="hold">
+                                    <p:stCondLst>
+                                      <p:cond delay="0"/>
+                                    </p:stCondLst>
+                                  </p:cTn>
+                                  <p:tgtEl>
+                                    <p:spTgt spid="16"/>
+                                  </p:tgtEl>
+                                  <p:attrNameLst>
+                                    <p:attrName>style.visibility</p:attrName>
+                                  </p:attrNameLst>
+                                </p:cBhvr>
+                                <p:to>
+                                  <p:strVal val="visible"/>
+                                </p:to>
+                              </p:set>
+                              <p:animEffect transition="in" filter="wipe(right)">
+                                <p:cBhvr>
+                                  <p:cTn id="151" dur="450"/>
+                                  <p:tgtEl>
+                                    <p:spTgt spid="16"/>
+                                  </p:tgtEl>
+                                </p:cBhvr>
+                              </p:animEffect>
+                            </p:childTnLst>
+                          </p:cTn>
+                        </p:par>
+                        <p:par>
+                          <p:cTn id="17" dur="570" fill="hold" nodeType="afterEffect" grpId="0" presetID="18" presetClass="entr" presetSubtype="12">
+                            <p:stCondLst>
+                              <p:cond delay="780"/>
+                            </p:stCondLst>
+                            <p:childTnLst>
+                              <p:set>
+                                <p:cBhvr>
+                                  <p:cTn id="18" dur="1" fill="hold">
+                                    <p:stCondLst>
+                                      <p:cond delay="0"/>
+                                    </p:stCondLst>
+                                  </p:cTn>
+                                  <p:tgtEl>
+                                    <p:spTgt spid="7"/>
+                                  </p:tgtEl>
+                                  <p:attrNameLst>
+                                    <p:attrName>style.visibility</p:attrName>
+                                  </p:attrNameLst>
+                                </p:cBhvr>
+                                <p:to>
+                                  <p:strVal val="visible"/>
+                                </p:to>
+                              </p:set>
+                              <p:animEffect transition="in" filter="circle(in)">
+                                <p:cBhvr>
+                                  <p:cTn id="171" dur="570"/>
+                                  <p:tgtEl>
+                                    <p:spTgt spid="7"/>
+                                  </p:tgtEl>
+                                </p:cBhvr>
+                              </p:animEffect>
+                            </p:childTnLst>
+                          </p:cTn>
+                        </p:par>
+                        <p:par>
+                          <p:cTn id="19" dur="690" fill="hold" nodeType="afterEffect" grpId="0" presetID="22" presetClass="entr" presetSubtype="1">
+                            <p:stCondLst>
+                              <p:cond delay="910"/>
+                            </p:stCondLst>
+                            <p:childTnLst>
+                              <p:set>
+                                <p:cBhvr>
+                                  <p:cTn id="20" dur="1" fill="hold">
+                                    <p:stCondLst>
+                                      <p:cond delay="0"/>
+                                    </p:stCondLst>
+                                  </p:cTn>
+                                  <p:tgtEl>
+                                    <p:spTgt spid="8"/>
+                                  </p:tgtEl>
+                                  <p:attrNameLst>
+                                    <p:attrName>style.visibility</p:attrName>
+                                  </p:attrNameLst>
+                                </p:cBhvr>
+                                <p:to>
+                                  <p:strVal val="visible"/>
+                                </p:to>
+                              </p:set>
+                              <p:animEffect transition="in" filter="wipe(up)">
+                                <p:cBhvr>
+                                  <p:cTn id="191" dur="690"/>
+                                  <p:tgtEl>
+                                    <p:spTgt spid="8"/>
+                                  </p:tgtEl>
+                                </p:cBhvr>
+                              </p:animEffect>
+                            </p:childTnLst>
+                          </p:cTn>
+                        </p:par>
+                        <p:par>
+                          <p:cTn id="21" dur="810" fill="hold" nodeType="afterEffect" grpId="0" presetID="42" presetClass="entr" presetSubtype="10">
+                            <p:stCondLst>
+                              <p:cond delay="1040"/>
+                            </p:stCondLst>
+                            <p:childTnLst>
+                              <p:set>
+                                <p:cBhvr>
+                                  <p:cTn id="22" dur="1" fill="hold">
+                                    <p:stCondLst>
+                                      <p:cond delay="0"/>
+                                    </p:stCondLst>
+                                  </p:cTn>
+                                  <p:tgtEl>
+                                    <p:spTgt spid="12"/>
+                                  </p:tgtEl>
+                                  <p:attrNameLst>
+                                    <p:attrName>style.visibility</p:attrName>
+                                  </p:attrNameLst>
+                                </p:cBhvr>
+                                <p:to>
+                                  <p:strVal val="visible"/>
+                                </p:to>
+                              </p:set>
+                              <p:animEffect transition="in" filter="blinds(horizontal)">
+                                <p:cBhvr>
+                                  <p:cTn id="211" dur="810"/>
+                                  <p:tgtEl>
+                                    <p:spTgt spid="12"/>
+                                  </p:tgtEl>
+                                </p:cBhvr>
+                              </p:animEffect>
+                            </p:childTnLst>
+                          </p:cTn>
+                        </p:par>
+                        <p:par>
+                          <p:cTn id="23" dur="450" fill="hold" nodeType="afterEffect" grpId="0" presetID="43" presetClass="entr" presetSubtype="0">
+                            <p:stCondLst>
+                              <p:cond delay="1170"/>
+                            </p:stCondLst>
+                            <p:childTnLst>
+                              <p:set>
+                                <p:cBhvr>
+                                  <p:cTn id="24" dur="1" fill="hold">
+                                    <p:stCondLst>
+                                      <p:cond delay="0"/>
+                                    </p:stCondLst>
+                                  </p:cTn>
+                                  <p:tgtEl>
+                                    <p:spTgt spid="13"/>
+                                  </p:tgtEl>
+                                  <p:attrNameLst>
+                                    <p:attrName>style.visibility</p:attrName>
+                                  </p:attrNameLst>
+                                </p:cBhvr>
+                                <p:to>
+                                  <p:strVal val="visible"/>
+                                </p:to>
+                              </p:set>
+                              <p:animEffect transition="in" filter="checkerboard(across)">
+                                <p:cBhvr>
+                                  <p:cTn id="231" dur="450"/>
+                                  <p:tgtEl>
+                                    <p:spTgt spid="13"/>
+                                  </p:tgtEl>
+                                </p:cBhvr>
+                              </p:animEffect>
+                            </p:childTnLst>
+                          </p:cTn>
+                        </p:par>
+                        <p:par>
+                          <p:cTn id="25" dur="570" fill="hold" nodeType="afterEffect" grpId="0" presetID="21" presetClass="entr" presetSubtype="2">
+                            <p:stCondLst>
+                              <p:cond delay="1300"/>
+                            </p:stCondLst>
+                            <p:childTnLst>
+                              <p:set>
+                                <p:cBhvr>
+                                  <p:cTn id="26" dur="1" fill="hold">
+                                    <p:stCondLst>
+                                      <p:cond delay="0"/>
+                                    </p:stCondLst>
+                                  </p:cTn>
+                                  <p:tgtEl>
+                                    <p:spTgt spid="17"/>
+                                  </p:tgtEl>
+                                  <p:attrNameLst>
+                                    <p:attrName>style.visibility</p:attrName>
+                                  </p:attrNameLst>
+                                </p:cBhvr>
+                                <p:to>
+                                  <p:strVal val="visible"/>
+                                </p:to>
+                              </p:set>
+                              <p:animEffect transition="in" filter="wheel(2)">
+                                <p:cBhvr>
+                                  <p:cTn id="251" dur="570"/>
+                                  <p:tgtEl>
+                                    <p:spTgt spid="17"/>
+                                  </p:tgtEl>
+                                </p:cBhvr>
+                              </p:animEffect>
+                            </p:childTnLst>
+                          </p:cTn>
+                        </p:par>
+                        <p:par>
+                          <p:cTn id="27" dur="690" fill="hold" nodeType="afterEffect" grpId="0" presetID="10" presetClass="entr" presetSubtype="0">
+                            <p:stCondLst>
+                              <p:cond delay="1430"/>
+                            </p:stCondLst>
+                            <p:childTnLst>
+                              <p:set>
+                                <p:cBhvr>
+                                  <p:cTn id="28" dur="1" fill="hold">
+                                    <p:stCondLst>
+                                      <p:cond delay="0"/>
+                                    </p:stCondLst>
+                                  </p:cTn>
+                                  <p:tgtEl>
+                                    <p:spTgt spid="18"/>
+                                  </p:tgtEl>
+                                  <p:attrNameLst>
+                                    <p:attrName>style.visibility</p:attrName>
+                                  </p:attrNameLst>
+                                </p:cBhvr>
+                                <p:to>
+                                  <p:strVal val="visible"/>
+                                </p:to>
+                              </p:set>
+                              <p:animEffect transition="in" filter="dissolve">
+                                <p:cBhvr>
+                                  <p:cTn id="271" dur="690"/>
+                                  <p:tgtEl>
+                                    <p:spTgt spid="18"/>
+                                  </p:tgtEl>
+                                </p:cBhvr>
+                              </p:animEffect>
+                            </p:childTnLst>
+                          </p:cTn>
+                        </p:par>
+                        <p:par>
+                          <p:cTn id="29" dur="810" fill="hold" nodeType="afterEffect" grpId="0" presetID="25" presetClass="entr" presetSubtype="1">
+                            <p:stCondLst>
+                              <p:cond delay="1560"/>
+                            </p:stCondLst>
+                            <p:childTnLst>
+                              <p:set>
+                                <p:cBhvr>
+                                  <p:cTn id="30" dur="1" fill="hold">
+                                    <p:stCondLst>
+                                      <p:cond delay="0"/>
+                                    </p:stCondLst>
+                                  </p:cTn>
+                                  <p:tgtEl>
+                                    <p:spTgt spid="9"/>
+                                  </p:tgtEl>
+                                  <p:attrNameLst>
+                                    <p:attrName>style.visibility</p:attrName>
+                                  </p:attrNameLst>
+                                </p:cBhvr>
+                                <p:to>
+                                  <p:strVal val="visible"/>
+                                </p:to>
+                              </p:set>
+                              <p:animEffect transition="in" filter="strips(downRight)">
+                                <p:cBhvr>
+                                  <p:cTn id="291" dur="810"/>
+                                  <p:tgtEl>
+                                    <p:spTgt spid="9"/>
+                                  </p:tgtEl>
+                                </p:cBhvr>
+                              </p:animEffect>
+                            </p:childTnLst>
+                          </p:cTn>
+                        </p:par>
+                        <p:par>
+                          <p:cTn id="31" dur="450" fill="hold" nodeType="afterEffect" grpId="0" presetID="45" presetClass="entr" presetSubtype="1">
+                            <p:stCondLst>
+                              <p:cond delay="1690"/>
+                            </p:stCondLst>
+                            <p:childTnLst>
+                              <p:set>
+                                <p:cBhvr>
+                                  <p:cTn id="32" dur="1" fill="hold">
+                                    <p:stCondLst>
+                                      <p:cond delay="0"/>
+                                    </p:stCondLst>
+                                  </p:cTn>
+                                  <p:tgtEl>
+                                    <p:spTgt spid="14"/>
+                                  </p:tgtEl>
+                                  <p:attrNameLst>
+                                    <p:attrName>style.visibility</p:attrName>
+                                  </p:attrNameLst>
+                                </p:cBhvr>
+                                <p:to>
+                                  <p:strVal val="visible"/>
+                                </p:to>
+                              </p:set>
+                              <p:animEffect transition="in" filter="barn(inHorizontal)">
+                                <p:cBhvr>
+                                  <p:cTn id="311" dur="450"/>
+                                  <p:tgtEl>
+                                    <p:spTgt spid="14"/>
+                                  </p:tgtEl>
+                                </p:cBhvr>
+                              </p:animEffect>
+                            </p:childTnLst>
+                          </p:cTn>
+                        </p:par>
+                      </p:childTnLst>
+                    </p:cTn>
+                  </p:par>
+                </p:childTnLst>
+              </p:cTn>
+              <p:prevCondLst>
+                <p:cond evt="onPrev" delay="0">
+                  <p:tgtEl>
+                    <p:sldTgt/>
+                  </p:tgtEl>
+                </p:cond>
+              </p:prevCondLst>
+              <p:nextCondLst>
+                <p:cond evt="onNext" delay="0">
+                  <p:tgtEl>
+                    <p:sldTgt/>
+                  </p:tgtEl>
+                </p:cond>
+              </p:nextCondLst>
+            </p:seq>
+          </p:childTnLst>
+        </p:cTn>
+      </p:par>
+    </p:tnLst>
+  </p:timing>
 </p:sld>
 </file>
 
@@ -7933,8 +10302,537 @@
     <a:masterClrMapping/>
   </p:clrMapOvr>
   <p:transition spd="med">
-    <p:fade/>
+    <p:wipe dir="u"/>
   </p:transition>
+  <p:timing>
+    <p:tnLst>
+      <p:par>
+        <p:cTn id="1" dur="indefinite" restart="never" nodeType="tmRoot">
+          <p:childTnLst>
+            <p:seq concurrent="1" nextAc="seek">
+              <p:cTn id="2" dur="indefinite" nodeType="mainSeq">
+                <p:childTnLst>
+                  <p:par>
+                    <p:cTn id="3" fill="hold">
+                      <p:stCondLst>
+                        <p:cond delay="indefinite"/>
+                      </p:stCondLst>
+                      <p:childTnLst>
+                        <p:par>
+                          <p:cTn id="5" dur="450" fill="hold" nodeType="clickEffect" grpId="0" presetID="52" presetClass="entr" presetSubtype="0">
+                            <p:stCondLst>
+                              <p:cond delay="0"/>
+                            </p:stCondLst>
+                            <p:childTnLst>
+                              <p:set>
+                                <p:cBhvr>
+                                  <p:cTn id="6" dur="1" fill="hold">
+                                    <p:stCondLst>
+                                      <p:cond delay="0"/>
+                                    </p:stCondLst>
+                                  </p:cTn>
+                                  <p:tgtEl>
+                                    <p:spTgt spid="3"/>
+                                  </p:tgtEl>
+                                  <p:attrNameLst>
+                                    <p:attrName>style.visibility</p:attrName>
+                                  </p:attrNameLst>
+                                </p:cBhvr>
+                                <p:to>
+                                  <p:strVal val="visible"/>
+                                </p:to>
+                              </p:set>
+                              <p:animEffect transition="in" filter="randombar(horizontal)">
+                                <p:cBhvr>
+                                  <p:cTn id="51" dur="450"/>
+                                  <p:tgtEl>
+                                    <p:spTgt spid="3"/>
+                                  </p:tgtEl>
+                                </p:cBhvr>
+                              </p:animEffect>
+                            </p:childTnLst>
+                          </p:cTn>
+                        </p:par>
+                        <p:par>
+                          <p:cTn id="7" dur="570" fill="hold" nodeType="afterEffect" grpId="0" presetID="21" presetClass="entr" presetSubtype="1">
+                            <p:stCondLst>
+                              <p:cond delay="130"/>
+                            </p:stCondLst>
+                            <p:childTnLst>
+                              <p:set>
+                                <p:cBhvr>
+                                  <p:cTn id="8" dur="1" fill="hold">
+                                    <p:stCondLst>
+                                      <p:cond delay="0"/>
+                                    </p:stCondLst>
+                                  </p:cTn>
+                                  <p:tgtEl>
+                                    <p:spTgt spid="4"/>
+                                  </p:tgtEl>
+                                  <p:attrNameLst>
+                                    <p:attrName>style.visibility</p:attrName>
+                                  </p:attrNameLst>
+                                </p:cBhvr>
+                                <p:to>
+                                  <p:strVal val="visible"/>
+                                </p:to>
+                              </p:set>
+                              <p:animEffect transition="in" filter="wheel(1)">
+                                <p:cBhvr>
+                                  <p:cTn id="71" dur="570"/>
+                                  <p:tgtEl>
+                                    <p:spTgt spid="4"/>
+                                  </p:tgtEl>
+                                </p:cBhvr>
+                              </p:animEffect>
+                            </p:childTnLst>
+                          </p:cTn>
+                        </p:par>
+                        <p:par>
+                          <p:cTn id="9" dur="690" fill="hold" nodeType="afterEffect" grpId="0" presetID="22" presetClass="entr" presetSubtype="4">
+                            <p:stCondLst>
+                              <p:cond delay="260"/>
+                            </p:stCondLst>
+                            <p:childTnLst>
+                              <p:set>
+                                <p:cBhvr>
+                                  <p:cTn id="10" dur="1" fill="hold">
+                                    <p:stCondLst>
+                                      <p:cond delay="0"/>
+                                    </p:stCondLst>
+                                  </p:cTn>
+                                  <p:tgtEl>
+                                    <p:spTgt spid="5"/>
+                                  </p:tgtEl>
+                                  <p:attrNameLst>
+                                    <p:attrName>style.visibility</p:attrName>
+                                  </p:attrNameLst>
+                                </p:cBhvr>
+                                <p:to>
+                                  <p:strVal val="visible"/>
+                                </p:to>
+                              </p:set>
+                              <p:animEffect transition="in" filter="wipe(down)">
+                                <p:cBhvr>
+                                  <p:cTn id="91" dur="690"/>
+                                  <p:tgtEl>
+                                    <p:spTgt spid="5"/>
+                                  </p:tgtEl>
+                                </p:cBhvr>
+                              </p:animEffect>
+                            </p:childTnLst>
+                          </p:cTn>
+                        </p:par>
+                        <p:par>
+                          <p:cTn id="11" dur="810" fill="hold" nodeType="afterEffect" grpId="0" presetID="9" presetClass="entr" presetSubtype="0">
+                            <p:stCondLst>
+                              <p:cond delay="390"/>
+                            </p:stCondLst>
+                            <p:childTnLst>
+                              <p:set>
+                                <p:cBhvr>
+                                  <p:cTn id="12" dur="1" fill="hold">
+                                    <p:stCondLst>
+                                      <p:cond delay="0"/>
+                                    </p:stCondLst>
+                                  </p:cTn>
+                                  <p:tgtEl>
+                                    <p:spTgt spid="6"/>
+                                  </p:tgtEl>
+                                  <p:attrNameLst>
+                                    <p:attrName>style.visibility</p:attrName>
+                                  </p:attrNameLst>
+                                </p:cBhvr>
+                                <p:to>
+                                  <p:strVal val="visible"/>
+                                </p:to>
+                              </p:set>
+                              <p:animEffect transition="in" filter="fade">
+                                <p:cBhvr>
+                                  <p:cTn id="111" dur="810"/>
+                                  <p:tgtEl>
+                                    <p:spTgt spid="6"/>
+                                  </p:tgtEl>
+                                </p:cBhvr>
+                              </p:animEffect>
+                            </p:childTnLst>
+                          </p:cTn>
+                        </p:par>
+                        <p:par>
+                          <p:cTn id="13" dur="450" fill="hold" nodeType="afterEffect" grpId="0" presetID="22" presetClass="entr" presetSubtype="2">
+                            <p:stCondLst>
+                              <p:cond delay="520"/>
+                            </p:stCondLst>
+                            <p:childTnLst>
+                              <p:set>
+                                <p:cBhvr>
+                                  <p:cTn id="14" dur="1" fill="hold">
+                                    <p:stCondLst>
+                                      <p:cond delay="0"/>
+                                    </p:stCondLst>
+                                  </p:cTn>
+                                  <p:tgtEl>
+                                    <p:spTgt spid="9"/>
+                                  </p:tgtEl>
+                                  <p:attrNameLst>
+                                    <p:attrName>style.visibility</p:attrName>
+                                  </p:attrNameLst>
+                                </p:cBhvr>
+                                <p:to>
+                                  <p:strVal val="visible"/>
+                                </p:to>
+                              </p:set>
+                              <p:animEffect transition="in" filter="wipe(right)">
+                                <p:cBhvr>
+                                  <p:cTn id="131" dur="450"/>
+                                  <p:tgtEl>
+                                    <p:spTgt spid="9"/>
+                                  </p:tgtEl>
+                                </p:cBhvr>
+                              </p:animEffect>
+                            </p:childTnLst>
+                          </p:cTn>
+                        </p:par>
+                        <p:par>
+                          <p:cTn id="15" dur="570" fill="hold" nodeType="afterEffect" grpId="0" presetID="18" presetClass="entr" presetSubtype="12">
+                            <p:stCondLst>
+                              <p:cond delay="650"/>
+                            </p:stCondLst>
+                            <p:childTnLst>
+                              <p:set>
+                                <p:cBhvr>
+                                  <p:cTn id="16" dur="1" fill="hold">
+                                    <p:stCondLst>
+                                      <p:cond delay="0"/>
+                                    </p:stCondLst>
+                                  </p:cTn>
+                                  <p:tgtEl>
+                                    <p:spTgt spid="12"/>
+                                  </p:tgtEl>
+                                  <p:attrNameLst>
+                                    <p:attrName>style.visibility</p:attrName>
+                                  </p:attrNameLst>
+                                </p:cBhvr>
+                                <p:to>
+                                  <p:strVal val="visible"/>
+                                </p:to>
+                              </p:set>
+                              <p:animEffect transition="in" filter="circle(in)">
+                                <p:cBhvr>
+                                  <p:cTn id="151" dur="570"/>
+                                  <p:tgtEl>
+                                    <p:spTgt spid="12"/>
+                                  </p:tgtEl>
+                                </p:cBhvr>
+                              </p:animEffect>
+                            </p:childTnLst>
+                          </p:cTn>
+                        </p:par>
+                        <p:par>
+                          <p:cTn id="17" dur="690" fill="hold" nodeType="afterEffect" grpId="0" presetID="22" presetClass="entr" presetSubtype="1">
+                            <p:stCondLst>
+                              <p:cond delay="780"/>
+                            </p:stCondLst>
+                            <p:childTnLst>
+                              <p:set>
+                                <p:cBhvr>
+                                  <p:cTn id="18" dur="1" fill="hold">
+                                    <p:stCondLst>
+                                      <p:cond delay="0"/>
+                                    </p:stCondLst>
+                                  </p:cTn>
+                                  <p:tgtEl>
+                                    <p:spTgt spid="7"/>
+                                  </p:tgtEl>
+                                  <p:attrNameLst>
+                                    <p:attrName>style.visibility</p:attrName>
+                                  </p:attrNameLst>
+                                </p:cBhvr>
+                                <p:to>
+                                  <p:strVal val="visible"/>
+                                </p:to>
+                              </p:set>
+                              <p:animEffect transition="in" filter="wipe(up)">
+                                <p:cBhvr>
+                                  <p:cTn id="171" dur="690"/>
+                                  <p:tgtEl>
+                                    <p:spTgt spid="7"/>
+                                  </p:tgtEl>
+                                </p:cBhvr>
+                              </p:animEffect>
+                            </p:childTnLst>
+                          </p:cTn>
+                        </p:par>
+                        <p:par>
+                          <p:cTn id="19" dur="810" fill="hold" nodeType="afterEffect" grpId="0" presetID="42" presetClass="entr" presetSubtype="10">
+                            <p:stCondLst>
+                              <p:cond delay="910"/>
+                            </p:stCondLst>
+                            <p:childTnLst>
+                              <p:set>
+                                <p:cBhvr>
+                                  <p:cTn id="20" dur="1" fill="hold">
+                                    <p:stCondLst>
+                                      <p:cond delay="0"/>
+                                    </p:stCondLst>
+                                  </p:cTn>
+                                  <p:tgtEl>
+                                    <p:spTgt spid="10"/>
+                                  </p:tgtEl>
+                                  <p:attrNameLst>
+                                    <p:attrName>style.visibility</p:attrName>
+                                  </p:attrNameLst>
+                                </p:cBhvr>
+                                <p:to>
+                                  <p:strVal val="visible"/>
+                                </p:to>
+                              </p:set>
+                              <p:animEffect transition="in" filter="blinds(horizontal)">
+                                <p:cBhvr>
+                                  <p:cTn id="191" dur="810"/>
+                                  <p:tgtEl>
+                                    <p:spTgt spid="10"/>
+                                  </p:tgtEl>
+                                </p:cBhvr>
+                              </p:animEffect>
+                            </p:childTnLst>
+                          </p:cTn>
+                        </p:par>
+                        <p:par>
+                          <p:cTn id="21" dur="450" fill="hold" nodeType="afterEffect" grpId="0" presetID="43" presetClass="entr" presetSubtype="0">
+                            <p:stCondLst>
+                              <p:cond delay="1040"/>
+                            </p:stCondLst>
+                            <p:childTnLst>
+                              <p:set>
+                                <p:cBhvr>
+                                  <p:cTn id="22" dur="1" fill="hold">
+                                    <p:stCondLst>
+                                      <p:cond delay="0"/>
+                                    </p:stCondLst>
+                                  </p:cTn>
+                                  <p:tgtEl>
+                                    <p:spTgt spid="13"/>
+                                  </p:tgtEl>
+                                  <p:attrNameLst>
+                                    <p:attrName>style.visibility</p:attrName>
+                                  </p:attrNameLst>
+                                </p:cBhvr>
+                                <p:to>
+                                  <p:strVal val="visible"/>
+                                </p:to>
+                              </p:set>
+                              <p:animEffect transition="in" filter="checkerboard(across)">
+                                <p:cBhvr>
+                                  <p:cTn id="211" dur="450"/>
+                                  <p:tgtEl>
+                                    <p:spTgt spid="13"/>
+                                  </p:tgtEl>
+                                </p:cBhvr>
+                              </p:animEffect>
+                            </p:childTnLst>
+                          </p:cTn>
+                        </p:par>
+                        <p:par>
+                          <p:cTn id="23" dur="570" fill="hold" nodeType="afterEffect" grpId="0" presetID="21" presetClass="entr" presetSubtype="2">
+                            <p:stCondLst>
+                              <p:cond delay="1170"/>
+                            </p:stCondLst>
+                            <p:childTnLst>
+                              <p:set>
+                                <p:cBhvr>
+                                  <p:cTn id="24" dur="1" fill="hold">
+                                    <p:stCondLst>
+                                      <p:cond delay="0"/>
+                                    </p:stCondLst>
+                                  </p:cTn>
+                                  <p:tgtEl>
+                                    <p:spTgt spid="8"/>
+                                  </p:tgtEl>
+                                  <p:attrNameLst>
+                                    <p:attrName>style.visibility</p:attrName>
+                                  </p:attrNameLst>
+                                </p:cBhvr>
+                                <p:to>
+                                  <p:strVal val="visible"/>
+                                </p:to>
+                              </p:set>
+                              <p:animEffect transition="in" filter="wheel(2)">
+                                <p:cBhvr>
+                                  <p:cTn id="231" dur="570"/>
+                                  <p:tgtEl>
+                                    <p:spTgt spid="8"/>
+                                  </p:tgtEl>
+                                </p:cBhvr>
+                              </p:animEffect>
+                            </p:childTnLst>
+                          </p:cTn>
+                        </p:par>
+                        <p:par>
+                          <p:cTn id="25" dur="690" fill="hold" nodeType="afterEffect" grpId="0" presetID="10" presetClass="entr" presetSubtype="0">
+                            <p:stCondLst>
+                              <p:cond delay="1300"/>
+                            </p:stCondLst>
+                            <p:childTnLst>
+                              <p:set>
+                                <p:cBhvr>
+                                  <p:cTn id="26" dur="1" fill="hold">
+                                    <p:stCondLst>
+                                      <p:cond delay="0"/>
+                                    </p:stCondLst>
+                                  </p:cTn>
+                                  <p:tgtEl>
+                                    <p:spTgt spid="11"/>
+                                  </p:tgtEl>
+                                  <p:attrNameLst>
+                                    <p:attrName>style.visibility</p:attrName>
+                                  </p:attrNameLst>
+                                </p:cBhvr>
+                                <p:to>
+                                  <p:strVal val="visible"/>
+                                </p:to>
+                              </p:set>
+                              <p:animEffect transition="in" filter="dissolve">
+                                <p:cBhvr>
+                                  <p:cTn id="251" dur="690"/>
+                                  <p:tgtEl>
+                                    <p:spTgt spid="11"/>
+                                  </p:tgtEl>
+                                </p:cBhvr>
+                              </p:animEffect>
+                            </p:childTnLst>
+                          </p:cTn>
+                        </p:par>
+                        <p:par>
+                          <p:cTn id="27" dur="810" fill="hold" nodeType="afterEffect" grpId="0" presetID="25" presetClass="entr" presetSubtype="1">
+                            <p:stCondLst>
+                              <p:cond delay="1430"/>
+                            </p:stCondLst>
+                            <p:childTnLst>
+                              <p:set>
+                                <p:cBhvr>
+                                  <p:cTn id="28" dur="1" fill="hold">
+                                    <p:stCondLst>
+                                      <p:cond delay="0"/>
+                                    </p:stCondLst>
+                                  </p:cTn>
+                                  <p:tgtEl>
+                                    <p:spTgt spid="14"/>
+                                  </p:tgtEl>
+                                  <p:attrNameLst>
+                                    <p:attrName>style.visibility</p:attrName>
+                                  </p:attrNameLst>
+                                </p:cBhvr>
+                                <p:to>
+                                  <p:strVal val="visible"/>
+                                </p:to>
+                              </p:set>
+                              <p:animEffect transition="in" filter="strips(downRight)">
+                                <p:cBhvr>
+                                  <p:cTn id="271" dur="810"/>
+                                  <p:tgtEl>
+                                    <p:spTgt spid="14"/>
+                                  </p:tgtEl>
+                                </p:cBhvr>
+                              </p:animEffect>
+                            </p:childTnLst>
+                          </p:cTn>
+                        </p:par>
+                        <p:par>
+                          <p:cTn id="29" dur="450" fill="hold" nodeType="afterEffect" grpId="0" presetID="45" presetClass="entr" presetSubtype="1">
+                            <p:stCondLst>
+                              <p:cond delay="1560"/>
+                            </p:stCondLst>
+                            <p:childTnLst>
+                              <p:set>
+                                <p:cBhvr>
+                                  <p:cTn id="30" dur="1" fill="hold">
+                                    <p:stCondLst>
+                                      <p:cond delay="0"/>
+                                    </p:stCondLst>
+                                  </p:cTn>
+                                  <p:tgtEl>
+                                    <p:spTgt spid="15"/>
+                                  </p:tgtEl>
+                                  <p:attrNameLst>
+                                    <p:attrName>style.visibility</p:attrName>
+                                  </p:attrNameLst>
+                                </p:cBhvr>
+                                <p:to>
+                                  <p:strVal val="visible"/>
+                                </p:to>
+                              </p:set>
+                              <p:animEffect transition="in" filter="barn(inHorizontal)">
+                                <p:cBhvr>
+                                  <p:cTn id="291" dur="450"/>
+                                  <p:tgtEl>
+                                    <p:spTgt spid="15"/>
+                                  </p:tgtEl>
+                                </p:cBhvr>
+                              </p:animEffect>
+                            </p:childTnLst>
+                          </p:cTn>
+                        </p:par>
+                        <p:par>
+                          <p:cTn id="31" dur="570" fill="hold" nodeType="afterEffect" grpId="0" presetID="22" presetClass="entr" presetSubtype="8">
+                            <p:stCondLst>
+                              <p:cond delay="1690"/>
+                            </p:stCondLst>
+                            <p:childTnLst>
+                              <p:set>
+                                <p:cBhvr>
+                                  <p:cTn id="32" dur="1" fill="hold">
+                                    <p:stCondLst>
+                                      <p:cond delay="0"/>
+                                    </p:stCondLst>
+                                  </p:cTn>
+                                  <p:tgtEl>
+                                    <p:spTgt spid="18"/>
+                                  </p:tgtEl>
+                                  <p:attrNameLst>
+                                    <p:attrName>style.visibility</p:attrName>
+                                  </p:attrNameLst>
+                                </p:cBhvr>
+                                <p:to>
+                                  <p:strVal val="visible"/>
+                                </p:to>
+                              </p:set>
+                              <p:animEffect transition="in" filter="wipe(left)">
+                                <p:cBhvr>
+                                  <p:cTn id="311" dur="570"/>
+                                  <p:tgtEl>
+                                    <p:spTgt spid="18"/>
+                                  </p:tgtEl>
+                                </p:cBhvr>
+                              </p:animEffect>
+                            </p:childTnLst>
+                          </p:cTn>
+                        </p:par>
+                      </p:childTnLst>
+                    </p:cTn>
+                  </p:par>
+                </p:childTnLst>
+              </p:cTn>
+              <p:prevCondLst>
+                <p:cond evt="onPrev" delay="0">
+                  <p:tgtEl>
+                    <p:sldTgt/>
+                  </p:tgtEl>
+                </p:cond>
+              </p:prevCondLst>
+              <p:nextCondLst>
+                <p:cond evt="onNext" delay="0">
+                  <p:tgtEl>
+                    <p:sldTgt/>
+                  </p:tgtEl>
+                </p:cond>
+              </p:nextCondLst>
+            </p:seq>
+          </p:childTnLst>
+        </p:cTn>
+      </p:par>
+    </p:tnLst>
+  </p:timing>
 </p:sld>
 </file>
 
@@ -8890,8 +11788,537 @@
     <a:masterClrMapping/>
   </p:clrMapOvr>
   <p:transition spd="med">
-    <p:fade/>
+    <p:split orient="horz"/>
   </p:transition>
+  <p:timing>
+    <p:tnLst>
+      <p:par>
+        <p:cTn id="1" dur="indefinite" restart="never" nodeType="tmRoot">
+          <p:childTnLst>
+            <p:seq concurrent="1" nextAc="seek">
+              <p:cTn id="2" dur="indefinite" nodeType="mainSeq">
+                <p:childTnLst>
+                  <p:par>
+                    <p:cTn id="3" fill="hold">
+                      <p:stCondLst>
+                        <p:cond delay="indefinite"/>
+                      </p:stCondLst>
+                      <p:childTnLst>
+                        <p:par>
+                          <p:cTn id="5" dur="570" fill="hold" nodeType="clickEffect" grpId="0" presetID="21" presetClass="entr" presetSubtype="1">
+                            <p:stCondLst>
+                              <p:cond delay="0"/>
+                            </p:stCondLst>
+                            <p:childTnLst>
+                              <p:set>
+                                <p:cBhvr>
+                                  <p:cTn id="6" dur="1" fill="hold">
+                                    <p:stCondLst>
+                                      <p:cond delay="0"/>
+                                    </p:stCondLst>
+                                  </p:cTn>
+                                  <p:tgtEl>
+                                    <p:spTgt spid="3"/>
+                                  </p:tgtEl>
+                                  <p:attrNameLst>
+                                    <p:attrName>style.visibility</p:attrName>
+                                  </p:attrNameLst>
+                                </p:cBhvr>
+                                <p:to>
+                                  <p:strVal val="visible"/>
+                                </p:to>
+                              </p:set>
+                              <p:animEffect transition="in" filter="wheel(1)">
+                                <p:cBhvr>
+                                  <p:cTn id="51" dur="570"/>
+                                  <p:tgtEl>
+                                    <p:spTgt spid="3"/>
+                                  </p:tgtEl>
+                                </p:cBhvr>
+                              </p:animEffect>
+                            </p:childTnLst>
+                          </p:cTn>
+                        </p:par>
+                        <p:par>
+                          <p:cTn id="7" dur="690" fill="hold" nodeType="afterEffect" grpId="0" presetID="22" presetClass="entr" presetSubtype="4">
+                            <p:stCondLst>
+                              <p:cond delay="130"/>
+                            </p:stCondLst>
+                            <p:childTnLst>
+                              <p:set>
+                                <p:cBhvr>
+                                  <p:cTn id="8" dur="1" fill="hold">
+                                    <p:stCondLst>
+                                      <p:cond delay="0"/>
+                                    </p:stCondLst>
+                                  </p:cTn>
+                                  <p:tgtEl>
+                                    <p:spTgt spid="4"/>
+                                  </p:tgtEl>
+                                  <p:attrNameLst>
+                                    <p:attrName>style.visibility</p:attrName>
+                                  </p:attrNameLst>
+                                </p:cBhvr>
+                                <p:to>
+                                  <p:strVal val="visible"/>
+                                </p:to>
+                              </p:set>
+                              <p:animEffect transition="in" filter="wipe(down)">
+                                <p:cBhvr>
+                                  <p:cTn id="71" dur="690"/>
+                                  <p:tgtEl>
+                                    <p:spTgt spid="4"/>
+                                  </p:tgtEl>
+                                </p:cBhvr>
+                              </p:animEffect>
+                            </p:childTnLst>
+                          </p:cTn>
+                        </p:par>
+                        <p:par>
+                          <p:cTn id="9" dur="810" fill="hold" nodeType="afterEffect" grpId="0" presetID="9" presetClass="entr" presetSubtype="0">
+                            <p:stCondLst>
+                              <p:cond delay="260"/>
+                            </p:stCondLst>
+                            <p:childTnLst>
+                              <p:set>
+                                <p:cBhvr>
+                                  <p:cTn id="10" dur="1" fill="hold">
+                                    <p:stCondLst>
+                                      <p:cond delay="0"/>
+                                    </p:stCondLst>
+                                  </p:cTn>
+                                  <p:tgtEl>
+                                    <p:spTgt spid="5"/>
+                                  </p:tgtEl>
+                                  <p:attrNameLst>
+                                    <p:attrName>style.visibility</p:attrName>
+                                  </p:attrNameLst>
+                                </p:cBhvr>
+                                <p:to>
+                                  <p:strVal val="visible"/>
+                                </p:to>
+                              </p:set>
+                              <p:animEffect transition="in" filter="fade">
+                                <p:cBhvr>
+                                  <p:cTn id="91" dur="810"/>
+                                  <p:tgtEl>
+                                    <p:spTgt spid="5"/>
+                                  </p:tgtEl>
+                                </p:cBhvr>
+                              </p:animEffect>
+                            </p:childTnLst>
+                          </p:cTn>
+                        </p:par>
+                        <p:par>
+                          <p:cTn id="11" dur="450" fill="hold" nodeType="afterEffect" grpId="0" presetID="22" presetClass="entr" presetSubtype="2">
+                            <p:stCondLst>
+                              <p:cond delay="390"/>
+                            </p:stCondLst>
+                            <p:childTnLst>
+                              <p:set>
+                                <p:cBhvr>
+                                  <p:cTn id="12" dur="1" fill="hold">
+                                    <p:stCondLst>
+                                      <p:cond delay="0"/>
+                                    </p:stCondLst>
+                                  </p:cTn>
+                                  <p:tgtEl>
+                                    <p:spTgt spid="6"/>
+                                  </p:tgtEl>
+                                  <p:attrNameLst>
+                                    <p:attrName>style.visibility</p:attrName>
+                                  </p:attrNameLst>
+                                </p:cBhvr>
+                                <p:to>
+                                  <p:strVal val="visible"/>
+                                </p:to>
+                              </p:set>
+                              <p:animEffect transition="in" filter="wipe(right)">
+                                <p:cBhvr>
+                                  <p:cTn id="111" dur="450"/>
+                                  <p:tgtEl>
+                                    <p:spTgt spid="6"/>
+                                  </p:tgtEl>
+                                </p:cBhvr>
+                              </p:animEffect>
+                            </p:childTnLst>
+                          </p:cTn>
+                        </p:par>
+                        <p:par>
+                          <p:cTn id="13" dur="570" fill="hold" nodeType="afterEffect" grpId="0" presetID="18" presetClass="entr" presetSubtype="12">
+                            <p:stCondLst>
+                              <p:cond delay="520"/>
+                            </p:stCondLst>
+                            <p:childTnLst>
+                              <p:set>
+                                <p:cBhvr>
+                                  <p:cTn id="14" dur="1" fill="hold">
+                                    <p:stCondLst>
+                                      <p:cond delay="0"/>
+                                    </p:stCondLst>
+                                  </p:cTn>
+                                  <p:tgtEl>
+                                    <p:spTgt spid="9"/>
+                                  </p:tgtEl>
+                                  <p:attrNameLst>
+                                    <p:attrName>style.visibility</p:attrName>
+                                  </p:attrNameLst>
+                                </p:cBhvr>
+                                <p:to>
+                                  <p:strVal val="visible"/>
+                                </p:to>
+                              </p:set>
+                              <p:animEffect transition="in" filter="circle(in)">
+                                <p:cBhvr>
+                                  <p:cTn id="131" dur="570"/>
+                                  <p:tgtEl>
+                                    <p:spTgt spid="9"/>
+                                  </p:tgtEl>
+                                </p:cBhvr>
+                              </p:animEffect>
+                            </p:childTnLst>
+                          </p:cTn>
+                        </p:par>
+                        <p:par>
+                          <p:cTn id="15" dur="690" fill="hold" nodeType="afterEffect" grpId="0" presetID="22" presetClass="entr" presetSubtype="1">
+                            <p:stCondLst>
+                              <p:cond delay="650"/>
+                            </p:stCondLst>
+                            <p:childTnLst>
+                              <p:set>
+                                <p:cBhvr>
+                                  <p:cTn id="16" dur="1" fill="hold">
+                                    <p:stCondLst>
+                                      <p:cond delay="0"/>
+                                    </p:stCondLst>
+                                  </p:cTn>
+                                  <p:tgtEl>
+                                    <p:spTgt spid="7"/>
+                                  </p:tgtEl>
+                                  <p:attrNameLst>
+                                    <p:attrName>style.visibility</p:attrName>
+                                  </p:attrNameLst>
+                                </p:cBhvr>
+                                <p:to>
+                                  <p:strVal val="visible"/>
+                                </p:to>
+                              </p:set>
+                              <p:animEffect transition="in" filter="wipe(up)">
+                                <p:cBhvr>
+                                  <p:cTn id="151" dur="690"/>
+                                  <p:tgtEl>
+                                    <p:spTgt spid="7"/>
+                                  </p:tgtEl>
+                                </p:cBhvr>
+                              </p:animEffect>
+                            </p:childTnLst>
+                          </p:cTn>
+                        </p:par>
+                        <p:par>
+                          <p:cTn id="17" dur="810" fill="hold" nodeType="afterEffect" grpId="0" presetID="42" presetClass="entr" presetSubtype="10">
+                            <p:stCondLst>
+                              <p:cond delay="780"/>
+                            </p:stCondLst>
+                            <p:childTnLst>
+                              <p:set>
+                                <p:cBhvr>
+                                  <p:cTn id="18" dur="1" fill="hold">
+                                    <p:stCondLst>
+                                      <p:cond delay="0"/>
+                                    </p:stCondLst>
+                                  </p:cTn>
+                                  <p:tgtEl>
+                                    <p:spTgt spid="8"/>
+                                  </p:tgtEl>
+                                  <p:attrNameLst>
+                                    <p:attrName>style.visibility</p:attrName>
+                                  </p:attrNameLst>
+                                </p:cBhvr>
+                                <p:to>
+                                  <p:strVal val="visible"/>
+                                </p:to>
+                              </p:set>
+                              <p:animEffect transition="in" filter="blinds(horizontal)">
+                                <p:cBhvr>
+                                  <p:cTn id="171" dur="810"/>
+                                  <p:tgtEl>
+                                    <p:spTgt spid="8"/>
+                                  </p:tgtEl>
+                                </p:cBhvr>
+                              </p:animEffect>
+                            </p:childTnLst>
+                          </p:cTn>
+                        </p:par>
+                        <p:par>
+                          <p:cTn id="19" dur="450" fill="hold" nodeType="afterEffect" grpId="0" presetID="43" presetClass="entr" presetSubtype="0">
+                            <p:stCondLst>
+                              <p:cond delay="910"/>
+                            </p:stCondLst>
+                            <p:childTnLst>
+                              <p:set>
+                                <p:cBhvr>
+                                  <p:cTn id="20" dur="1" fill="hold">
+                                    <p:stCondLst>
+                                      <p:cond delay="0"/>
+                                    </p:stCondLst>
+                                  </p:cTn>
+                                  <p:tgtEl>
+                                    <p:spTgt spid="10"/>
+                                  </p:tgtEl>
+                                  <p:attrNameLst>
+                                    <p:attrName>style.visibility</p:attrName>
+                                  </p:attrNameLst>
+                                </p:cBhvr>
+                                <p:to>
+                                  <p:strVal val="visible"/>
+                                </p:to>
+                              </p:set>
+                              <p:animEffect transition="in" filter="checkerboard(across)">
+                                <p:cBhvr>
+                                  <p:cTn id="191" dur="450"/>
+                                  <p:tgtEl>
+                                    <p:spTgt spid="10"/>
+                                  </p:tgtEl>
+                                </p:cBhvr>
+                              </p:animEffect>
+                            </p:childTnLst>
+                          </p:cTn>
+                        </p:par>
+                        <p:par>
+                          <p:cTn id="21" dur="570" fill="hold" nodeType="afterEffect" grpId="0" presetID="21" presetClass="entr" presetSubtype="2">
+                            <p:stCondLst>
+                              <p:cond delay="1040"/>
+                            </p:stCondLst>
+                            <p:childTnLst>
+                              <p:set>
+                                <p:cBhvr>
+                                  <p:cTn id="22" dur="1" fill="hold">
+                                    <p:stCondLst>
+                                      <p:cond delay="0"/>
+                                    </p:stCondLst>
+                                  </p:cTn>
+                                  <p:tgtEl>
+                                    <p:spTgt spid="11"/>
+                                  </p:tgtEl>
+                                  <p:attrNameLst>
+                                    <p:attrName>style.visibility</p:attrName>
+                                  </p:attrNameLst>
+                                </p:cBhvr>
+                                <p:to>
+                                  <p:strVal val="visible"/>
+                                </p:to>
+                              </p:set>
+                              <p:animEffect transition="in" filter="wheel(2)">
+                                <p:cBhvr>
+                                  <p:cTn id="211" dur="570"/>
+                                  <p:tgtEl>
+                                    <p:spTgt spid="11"/>
+                                  </p:tgtEl>
+                                </p:cBhvr>
+                              </p:animEffect>
+                            </p:childTnLst>
+                          </p:cTn>
+                        </p:par>
+                        <p:par>
+                          <p:cTn id="23" dur="690" fill="hold" nodeType="afterEffect" grpId="0" presetID="10" presetClass="entr" presetSubtype="0">
+                            <p:stCondLst>
+                              <p:cond delay="1170"/>
+                            </p:stCondLst>
+                            <p:childTnLst>
+                              <p:set>
+                                <p:cBhvr>
+                                  <p:cTn id="24" dur="1" fill="hold">
+                                    <p:stCondLst>
+                                      <p:cond delay="0"/>
+                                    </p:stCondLst>
+                                  </p:cTn>
+                                  <p:tgtEl>
+                                    <p:spTgt spid="14"/>
+                                  </p:tgtEl>
+                                  <p:attrNameLst>
+                                    <p:attrName>style.visibility</p:attrName>
+                                  </p:attrNameLst>
+                                </p:cBhvr>
+                                <p:to>
+                                  <p:strVal val="visible"/>
+                                </p:to>
+                              </p:set>
+                              <p:animEffect transition="in" filter="dissolve">
+                                <p:cBhvr>
+                                  <p:cTn id="231" dur="690"/>
+                                  <p:tgtEl>
+                                    <p:spTgt spid="14"/>
+                                  </p:tgtEl>
+                                </p:cBhvr>
+                              </p:animEffect>
+                            </p:childTnLst>
+                          </p:cTn>
+                        </p:par>
+                        <p:par>
+                          <p:cTn id="25" dur="810" fill="hold" nodeType="afterEffect" grpId="0" presetID="25" presetClass="entr" presetSubtype="1">
+                            <p:stCondLst>
+                              <p:cond delay="1300"/>
+                            </p:stCondLst>
+                            <p:childTnLst>
+                              <p:set>
+                                <p:cBhvr>
+                                  <p:cTn id="26" dur="1" fill="hold">
+                                    <p:stCondLst>
+                                      <p:cond delay="0"/>
+                                    </p:stCondLst>
+                                  </p:cTn>
+                                  <p:tgtEl>
+                                    <p:spTgt spid="12"/>
+                                  </p:tgtEl>
+                                  <p:attrNameLst>
+                                    <p:attrName>style.visibility</p:attrName>
+                                  </p:attrNameLst>
+                                </p:cBhvr>
+                                <p:to>
+                                  <p:strVal val="visible"/>
+                                </p:to>
+                              </p:set>
+                              <p:animEffect transition="in" filter="strips(downRight)">
+                                <p:cBhvr>
+                                  <p:cTn id="251" dur="810"/>
+                                  <p:tgtEl>
+                                    <p:spTgt spid="12"/>
+                                  </p:tgtEl>
+                                </p:cBhvr>
+                              </p:animEffect>
+                            </p:childTnLst>
+                          </p:cTn>
+                        </p:par>
+                        <p:par>
+                          <p:cTn id="27" dur="450" fill="hold" nodeType="afterEffect" grpId="0" presetID="45" presetClass="entr" presetSubtype="1">
+                            <p:stCondLst>
+                              <p:cond delay="1430"/>
+                            </p:stCondLst>
+                            <p:childTnLst>
+                              <p:set>
+                                <p:cBhvr>
+                                  <p:cTn id="28" dur="1" fill="hold">
+                                    <p:stCondLst>
+                                      <p:cond delay="0"/>
+                                    </p:stCondLst>
+                                  </p:cTn>
+                                  <p:tgtEl>
+                                    <p:spTgt spid="13"/>
+                                  </p:tgtEl>
+                                  <p:attrNameLst>
+                                    <p:attrName>style.visibility</p:attrName>
+                                  </p:attrNameLst>
+                                </p:cBhvr>
+                                <p:to>
+                                  <p:strVal val="visible"/>
+                                </p:to>
+                              </p:set>
+                              <p:animEffect transition="in" filter="barn(inHorizontal)">
+                                <p:cBhvr>
+                                  <p:cTn id="271" dur="450"/>
+                                  <p:tgtEl>
+                                    <p:spTgt spid="13"/>
+                                  </p:tgtEl>
+                                </p:cBhvr>
+                              </p:animEffect>
+                            </p:childTnLst>
+                          </p:cTn>
+                        </p:par>
+                        <p:par>
+                          <p:cTn id="29" dur="570" fill="hold" nodeType="afterEffect" grpId="0" presetID="22" presetClass="entr" presetSubtype="8">
+                            <p:stCondLst>
+                              <p:cond delay="1560"/>
+                            </p:stCondLst>
+                            <p:childTnLst>
+                              <p:set>
+                                <p:cBhvr>
+                                  <p:cTn id="30" dur="1" fill="hold">
+                                    <p:stCondLst>
+                                      <p:cond delay="0"/>
+                                    </p:stCondLst>
+                                  </p:cTn>
+                                  <p:tgtEl>
+                                    <p:spTgt spid="15"/>
+                                  </p:tgtEl>
+                                  <p:attrNameLst>
+                                    <p:attrName>style.visibility</p:attrName>
+                                  </p:attrNameLst>
+                                </p:cBhvr>
+                                <p:to>
+                                  <p:strVal val="visible"/>
+                                </p:to>
+                              </p:set>
+                              <p:animEffect transition="in" filter="wipe(left)">
+                                <p:cBhvr>
+                                  <p:cTn id="291" dur="570"/>
+                                  <p:tgtEl>
+                                    <p:spTgt spid="15"/>
+                                  </p:tgtEl>
+                                </p:cBhvr>
+                              </p:animEffect>
+                            </p:childTnLst>
+                          </p:cTn>
+                        </p:par>
+                        <p:par>
+                          <p:cTn id="31" dur="690" fill="hold" nodeType="afterEffect" grpId="0" presetID="37" presetClass="entr" presetSubtype="0">
+                            <p:stCondLst>
+                              <p:cond delay="1690"/>
+                            </p:stCondLst>
+                            <p:childTnLst>
+                              <p:set>
+                                <p:cBhvr>
+                                  <p:cTn id="32" dur="1" fill="hold">
+                                    <p:stCondLst>
+                                      <p:cond delay="0"/>
+                                    </p:stCondLst>
+                                  </p:cTn>
+                                  <p:tgtEl>
+                                    <p:spTgt spid="16"/>
+                                  </p:tgtEl>
+                                  <p:attrNameLst>
+                                    <p:attrName>style.visibility</p:attrName>
+                                  </p:attrNameLst>
+                                </p:cBhvr>
+                                <p:to>
+                                  <p:strVal val="visible"/>
+                                </p:to>
+                              </p:set>
+                              <p:animEffect transition="in" filter="wedge">
+                                <p:cBhvr>
+                                  <p:cTn id="311" dur="690"/>
+                                  <p:tgtEl>
+                                    <p:spTgt spid="16"/>
+                                  </p:tgtEl>
+                                </p:cBhvr>
+                              </p:animEffect>
+                            </p:childTnLst>
+                          </p:cTn>
+                        </p:par>
+                      </p:childTnLst>
+                    </p:cTn>
+                  </p:par>
+                </p:childTnLst>
+              </p:cTn>
+              <p:prevCondLst>
+                <p:cond evt="onPrev" delay="0">
+                  <p:tgtEl>
+                    <p:sldTgt/>
+                  </p:tgtEl>
+                </p:cond>
+              </p:prevCondLst>
+              <p:nextCondLst>
+                <p:cond evt="onNext" delay="0">
+                  <p:tgtEl>
+                    <p:sldTgt/>
+                  </p:tgtEl>
+                </p:cond>
+              </p:nextCondLst>
+            </p:seq>
+          </p:childTnLst>
+        </p:cTn>
+      </p:par>
+    </p:tnLst>
+  </p:timing>
 </p:sld>
 </file>
 
@@ -9795,8 +13222,537 @@
     <a:masterClrMapping/>
   </p:clrMapOvr>
   <p:transition spd="med">
-    <p:fade/>
+    <p:blinds dir="horz"/>
   </p:transition>
+  <p:timing>
+    <p:tnLst>
+      <p:par>
+        <p:cTn id="1" dur="indefinite" restart="never" nodeType="tmRoot">
+          <p:childTnLst>
+            <p:seq concurrent="1" nextAc="seek">
+              <p:cTn id="2" dur="indefinite" nodeType="mainSeq">
+                <p:childTnLst>
+                  <p:par>
+                    <p:cTn id="3" fill="hold">
+                      <p:stCondLst>
+                        <p:cond delay="indefinite"/>
+                      </p:stCondLst>
+                      <p:childTnLst>
+                        <p:par>
+                          <p:cTn id="5" dur="690" fill="hold" nodeType="clickEffect" grpId="0" presetID="22" presetClass="entr" presetSubtype="4">
+                            <p:stCondLst>
+                              <p:cond delay="0"/>
+                            </p:stCondLst>
+                            <p:childTnLst>
+                              <p:set>
+                                <p:cBhvr>
+                                  <p:cTn id="6" dur="1" fill="hold">
+                                    <p:stCondLst>
+                                      <p:cond delay="0"/>
+                                    </p:stCondLst>
+                                  </p:cTn>
+                                  <p:tgtEl>
+                                    <p:spTgt spid="3"/>
+                                  </p:tgtEl>
+                                  <p:attrNameLst>
+                                    <p:attrName>style.visibility</p:attrName>
+                                  </p:attrNameLst>
+                                </p:cBhvr>
+                                <p:to>
+                                  <p:strVal val="visible"/>
+                                </p:to>
+                              </p:set>
+                              <p:animEffect transition="in" filter="wipe(down)">
+                                <p:cBhvr>
+                                  <p:cTn id="51" dur="690"/>
+                                  <p:tgtEl>
+                                    <p:spTgt spid="3"/>
+                                  </p:tgtEl>
+                                </p:cBhvr>
+                              </p:animEffect>
+                            </p:childTnLst>
+                          </p:cTn>
+                        </p:par>
+                        <p:par>
+                          <p:cTn id="7" dur="810" fill="hold" nodeType="afterEffect" grpId="0" presetID="9" presetClass="entr" presetSubtype="0">
+                            <p:stCondLst>
+                              <p:cond delay="130"/>
+                            </p:stCondLst>
+                            <p:childTnLst>
+                              <p:set>
+                                <p:cBhvr>
+                                  <p:cTn id="8" dur="1" fill="hold">
+                                    <p:stCondLst>
+                                      <p:cond delay="0"/>
+                                    </p:stCondLst>
+                                  </p:cTn>
+                                  <p:tgtEl>
+                                    <p:spTgt spid="4"/>
+                                  </p:tgtEl>
+                                  <p:attrNameLst>
+                                    <p:attrName>style.visibility</p:attrName>
+                                  </p:attrNameLst>
+                                </p:cBhvr>
+                                <p:to>
+                                  <p:strVal val="visible"/>
+                                </p:to>
+                              </p:set>
+                              <p:animEffect transition="in" filter="fade">
+                                <p:cBhvr>
+                                  <p:cTn id="71" dur="810"/>
+                                  <p:tgtEl>
+                                    <p:spTgt spid="4"/>
+                                  </p:tgtEl>
+                                </p:cBhvr>
+                              </p:animEffect>
+                            </p:childTnLst>
+                          </p:cTn>
+                        </p:par>
+                        <p:par>
+                          <p:cTn id="9" dur="450" fill="hold" nodeType="afterEffect" grpId="0" presetID="22" presetClass="entr" presetSubtype="2">
+                            <p:stCondLst>
+                              <p:cond delay="260"/>
+                            </p:stCondLst>
+                            <p:childTnLst>
+                              <p:set>
+                                <p:cBhvr>
+                                  <p:cTn id="10" dur="1" fill="hold">
+                                    <p:stCondLst>
+                                      <p:cond delay="0"/>
+                                    </p:stCondLst>
+                                  </p:cTn>
+                                  <p:tgtEl>
+                                    <p:spTgt spid="5"/>
+                                  </p:tgtEl>
+                                  <p:attrNameLst>
+                                    <p:attrName>style.visibility</p:attrName>
+                                  </p:attrNameLst>
+                                </p:cBhvr>
+                                <p:to>
+                                  <p:strVal val="visible"/>
+                                </p:to>
+                              </p:set>
+                              <p:animEffect transition="in" filter="wipe(right)">
+                                <p:cBhvr>
+                                  <p:cTn id="91" dur="450"/>
+                                  <p:tgtEl>
+                                    <p:spTgt spid="5"/>
+                                  </p:tgtEl>
+                                </p:cBhvr>
+                              </p:animEffect>
+                            </p:childTnLst>
+                          </p:cTn>
+                        </p:par>
+                        <p:par>
+                          <p:cTn id="11" dur="570" fill="hold" nodeType="afterEffect" grpId="0" presetID="18" presetClass="entr" presetSubtype="12">
+                            <p:stCondLst>
+                              <p:cond delay="390"/>
+                            </p:stCondLst>
+                            <p:childTnLst>
+                              <p:set>
+                                <p:cBhvr>
+                                  <p:cTn id="12" dur="1" fill="hold">
+                                    <p:stCondLst>
+                                      <p:cond delay="0"/>
+                                    </p:stCondLst>
+                                  </p:cTn>
+                                  <p:tgtEl>
+                                    <p:spTgt spid="8"/>
+                                  </p:tgtEl>
+                                  <p:attrNameLst>
+                                    <p:attrName>style.visibility</p:attrName>
+                                  </p:attrNameLst>
+                                </p:cBhvr>
+                                <p:to>
+                                  <p:strVal val="visible"/>
+                                </p:to>
+                              </p:set>
+                              <p:animEffect transition="in" filter="circle(in)">
+                                <p:cBhvr>
+                                  <p:cTn id="111" dur="570"/>
+                                  <p:tgtEl>
+                                    <p:spTgt spid="8"/>
+                                  </p:tgtEl>
+                                </p:cBhvr>
+                              </p:animEffect>
+                            </p:childTnLst>
+                          </p:cTn>
+                        </p:par>
+                        <p:par>
+                          <p:cTn id="13" dur="690" fill="hold" nodeType="afterEffect" grpId="0" presetID="22" presetClass="entr" presetSubtype="1">
+                            <p:stCondLst>
+                              <p:cond delay="520"/>
+                            </p:stCondLst>
+                            <p:childTnLst>
+                              <p:set>
+                                <p:cBhvr>
+                                  <p:cTn id="14" dur="1" fill="hold">
+                                    <p:stCondLst>
+                                      <p:cond delay="0"/>
+                                    </p:stCondLst>
+                                  </p:cTn>
+                                  <p:tgtEl>
+                                    <p:spTgt spid="10"/>
+                                  </p:tgtEl>
+                                  <p:attrNameLst>
+                                    <p:attrName>style.visibility</p:attrName>
+                                  </p:attrNameLst>
+                                </p:cBhvr>
+                                <p:to>
+                                  <p:strVal val="visible"/>
+                                </p:to>
+                              </p:set>
+                              <p:animEffect transition="in" filter="wipe(up)">
+                                <p:cBhvr>
+                                  <p:cTn id="131" dur="690"/>
+                                  <p:tgtEl>
+                                    <p:spTgt spid="10"/>
+                                  </p:tgtEl>
+                                </p:cBhvr>
+                              </p:animEffect>
+                            </p:childTnLst>
+                          </p:cTn>
+                        </p:par>
+                        <p:par>
+                          <p:cTn id="15" dur="810" fill="hold" nodeType="afterEffect" grpId="0" presetID="42" presetClass="entr" presetSubtype="10">
+                            <p:stCondLst>
+                              <p:cond delay="650"/>
+                            </p:stCondLst>
+                            <p:childTnLst>
+                              <p:set>
+                                <p:cBhvr>
+                                  <p:cTn id="16" dur="1" fill="hold">
+                                    <p:stCondLst>
+                                      <p:cond delay="0"/>
+                                    </p:stCondLst>
+                                  </p:cTn>
+                                  <p:tgtEl>
+                                    <p:spTgt spid="12"/>
+                                  </p:tgtEl>
+                                  <p:attrNameLst>
+                                    <p:attrName>style.visibility</p:attrName>
+                                  </p:attrNameLst>
+                                </p:cBhvr>
+                                <p:to>
+                                  <p:strVal val="visible"/>
+                                </p:to>
+                              </p:set>
+                              <p:animEffect transition="in" filter="blinds(horizontal)">
+                                <p:cBhvr>
+                                  <p:cTn id="151" dur="810"/>
+                                  <p:tgtEl>
+                                    <p:spTgt spid="12"/>
+                                  </p:tgtEl>
+                                </p:cBhvr>
+                              </p:animEffect>
+                            </p:childTnLst>
+                          </p:cTn>
+                        </p:par>
+                        <p:par>
+                          <p:cTn id="17" dur="450" fill="hold" nodeType="afterEffect" grpId="0" presetID="43" presetClass="entr" presetSubtype="0">
+                            <p:stCondLst>
+                              <p:cond delay="780"/>
+                            </p:stCondLst>
+                            <p:childTnLst>
+                              <p:set>
+                                <p:cBhvr>
+                                  <p:cTn id="18" dur="1" fill="hold">
+                                    <p:stCondLst>
+                                      <p:cond delay="0"/>
+                                    </p:stCondLst>
+                                  </p:cTn>
+                                  <p:tgtEl>
+                                    <p:spTgt spid="9"/>
+                                  </p:tgtEl>
+                                  <p:attrNameLst>
+                                    <p:attrName>style.visibility</p:attrName>
+                                  </p:attrNameLst>
+                                </p:cBhvr>
+                                <p:to>
+                                  <p:strVal val="visible"/>
+                                </p:to>
+                              </p:set>
+                              <p:animEffect transition="in" filter="checkerboard(across)">
+                                <p:cBhvr>
+                                  <p:cTn id="171" dur="450"/>
+                                  <p:tgtEl>
+                                    <p:spTgt spid="9"/>
+                                  </p:tgtEl>
+                                </p:cBhvr>
+                              </p:animEffect>
+                            </p:childTnLst>
+                          </p:cTn>
+                        </p:par>
+                        <p:par>
+                          <p:cTn id="19" dur="570" fill="hold" nodeType="afterEffect" grpId="0" presetID="21" presetClass="entr" presetSubtype="2">
+                            <p:stCondLst>
+                              <p:cond delay="910"/>
+                            </p:stCondLst>
+                            <p:childTnLst>
+                              <p:set>
+                                <p:cBhvr>
+                                  <p:cTn id="20" dur="1" fill="hold">
+                                    <p:stCondLst>
+                                      <p:cond delay="0"/>
+                                    </p:stCondLst>
+                                  </p:cTn>
+                                  <p:tgtEl>
+                                    <p:spTgt spid="11"/>
+                                  </p:tgtEl>
+                                  <p:attrNameLst>
+                                    <p:attrName>style.visibility</p:attrName>
+                                  </p:attrNameLst>
+                                </p:cBhvr>
+                                <p:to>
+                                  <p:strVal val="visible"/>
+                                </p:to>
+                              </p:set>
+                              <p:animEffect transition="in" filter="wheel(2)">
+                                <p:cBhvr>
+                                  <p:cTn id="191" dur="570"/>
+                                  <p:tgtEl>
+                                    <p:spTgt spid="11"/>
+                                  </p:tgtEl>
+                                </p:cBhvr>
+                              </p:animEffect>
+                            </p:childTnLst>
+                          </p:cTn>
+                        </p:par>
+                        <p:par>
+                          <p:cTn id="21" dur="690" fill="hold" nodeType="afterEffect" grpId="0" presetID="10" presetClass="entr" presetSubtype="0">
+                            <p:stCondLst>
+                              <p:cond delay="1040"/>
+                            </p:stCondLst>
+                            <p:childTnLst>
+                              <p:set>
+                                <p:cBhvr>
+                                  <p:cTn id="22" dur="1" fill="hold">
+                                    <p:stCondLst>
+                                      <p:cond delay="0"/>
+                                    </p:stCondLst>
+                                  </p:cTn>
+                                  <p:tgtEl>
+                                    <p:spTgt spid="13"/>
+                                  </p:tgtEl>
+                                  <p:attrNameLst>
+                                    <p:attrName>style.visibility</p:attrName>
+                                  </p:attrNameLst>
+                                </p:cBhvr>
+                                <p:to>
+                                  <p:strVal val="visible"/>
+                                </p:to>
+                              </p:set>
+                              <p:animEffect transition="in" filter="dissolve">
+                                <p:cBhvr>
+                                  <p:cTn id="211" dur="690"/>
+                                  <p:tgtEl>
+                                    <p:spTgt spid="13"/>
+                                  </p:tgtEl>
+                                </p:cBhvr>
+                              </p:animEffect>
+                            </p:childTnLst>
+                          </p:cTn>
+                        </p:par>
+                        <p:par>
+                          <p:cTn id="23" dur="810" fill="hold" nodeType="afterEffect" grpId="0" presetID="25" presetClass="entr" presetSubtype="1">
+                            <p:stCondLst>
+                              <p:cond delay="1170"/>
+                            </p:stCondLst>
+                            <p:childTnLst>
+                              <p:set>
+                                <p:cBhvr>
+                                  <p:cTn id="24" dur="1" fill="hold">
+                                    <p:stCondLst>
+                                      <p:cond delay="0"/>
+                                    </p:stCondLst>
+                                  </p:cTn>
+                                  <p:tgtEl>
+                                    <p:spTgt spid="6"/>
+                                  </p:tgtEl>
+                                  <p:attrNameLst>
+                                    <p:attrName>style.visibility</p:attrName>
+                                  </p:attrNameLst>
+                                </p:cBhvr>
+                                <p:to>
+                                  <p:strVal val="visible"/>
+                                </p:to>
+                              </p:set>
+                              <p:animEffect transition="in" filter="strips(downRight)">
+                                <p:cBhvr>
+                                  <p:cTn id="231" dur="810"/>
+                                  <p:tgtEl>
+                                    <p:spTgt spid="6"/>
+                                  </p:tgtEl>
+                                </p:cBhvr>
+                              </p:animEffect>
+                            </p:childTnLst>
+                          </p:cTn>
+                        </p:par>
+                        <p:par>
+                          <p:cTn id="25" dur="450" fill="hold" nodeType="afterEffect" grpId="0" presetID="45" presetClass="entr" presetSubtype="1">
+                            <p:stCondLst>
+                              <p:cond delay="1300"/>
+                            </p:stCondLst>
+                            <p:childTnLst>
+                              <p:set>
+                                <p:cBhvr>
+                                  <p:cTn id="26" dur="1" fill="hold">
+                                    <p:stCondLst>
+                                      <p:cond delay="0"/>
+                                    </p:stCondLst>
+                                  </p:cTn>
+                                  <p:tgtEl>
+                                    <p:spTgt spid="7"/>
+                                  </p:tgtEl>
+                                  <p:attrNameLst>
+                                    <p:attrName>style.visibility</p:attrName>
+                                  </p:attrNameLst>
+                                </p:cBhvr>
+                                <p:to>
+                                  <p:strVal val="visible"/>
+                                </p:to>
+                              </p:set>
+                              <p:animEffect transition="in" filter="barn(inHorizontal)">
+                                <p:cBhvr>
+                                  <p:cTn id="251" dur="450"/>
+                                  <p:tgtEl>
+                                    <p:spTgt spid="7"/>
+                                  </p:tgtEl>
+                                </p:cBhvr>
+                              </p:animEffect>
+                            </p:childTnLst>
+                          </p:cTn>
+                        </p:par>
+                        <p:par>
+                          <p:cTn id="27" dur="570" fill="hold" nodeType="afterEffect" grpId="0" presetID="22" presetClass="entr" presetSubtype="8">
+                            <p:stCondLst>
+                              <p:cond delay="1430"/>
+                            </p:stCondLst>
+                            <p:childTnLst>
+                              <p:set>
+                                <p:cBhvr>
+                                  <p:cTn id="28" dur="1" fill="hold">
+                                    <p:stCondLst>
+                                      <p:cond delay="0"/>
+                                    </p:stCondLst>
+                                  </p:cTn>
+                                  <p:tgtEl>
+                                    <p:spTgt spid="16"/>
+                                  </p:tgtEl>
+                                  <p:attrNameLst>
+                                    <p:attrName>style.visibility</p:attrName>
+                                  </p:attrNameLst>
+                                </p:cBhvr>
+                                <p:to>
+                                  <p:strVal val="visible"/>
+                                </p:to>
+                              </p:set>
+                              <p:animEffect transition="in" filter="wipe(left)">
+                                <p:cBhvr>
+                                  <p:cTn id="271" dur="570"/>
+                                  <p:tgtEl>
+                                    <p:spTgt spid="16"/>
+                                  </p:tgtEl>
+                                </p:cBhvr>
+                              </p:animEffect>
+                            </p:childTnLst>
+                          </p:cTn>
+                        </p:par>
+                        <p:par>
+                          <p:cTn id="29" dur="690" fill="hold" nodeType="afterEffect" grpId="0" presetID="37" presetClass="entr" presetSubtype="0">
+                            <p:stCondLst>
+                              <p:cond delay="1560"/>
+                            </p:stCondLst>
+                            <p:childTnLst>
+                              <p:set>
+                                <p:cBhvr>
+                                  <p:cTn id="30" dur="1" fill="hold">
+                                    <p:stCondLst>
+                                      <p:cond delay="0"/>
+                                    </p:stCondLst>
+                                  </p:cTn>
+                                  <p:tgtEl>
+                                    <p:spTgt spid="18"/>
+                                  </p:tgtEl>
+                                  <p:attrNameLst>
+                                    <p:attrName>style.visibility</p:attrName>
+                                  </p:attrNameLst>
+                                </p:cBhvr>
+                                <p:to>
+                                  <p:strVal val="visible"/>
+                                </p:to>
+                              </p:set>
+                              <p:animEffect transition="in" filter="wedge">
+                                <p:cBhvr>
+                                  <p:cTn id="291" dur="690"/>
+                                  <p:tgtEl>
+                                    <p:spTgt spid="18"/>
+                                  </p:tgtEl>
+                                </p:cBhvr>
+                              </p:animEffect>
+                            </p:childTnLst>
+                          </p:cTn>
+                        </p:par>
+                        <p:par>
+                          <p:cTn id="31" dur="810" fill="hold" nodeType="afterEffect" grpId="0" presetID="52" presetClass="entr" presetSubtype="0">
+                            <p:stCondLst>
+                              <p:cond delay="1690"/>
+                            </p:stCondLst>
+                            <p:childTnLst>
+                              <p:set>
+                                <p:cBhvr>
+                                  <p:cTn id="32" dur="1" fill="hold">
+                                    <p:stCondLst>
+                                      <p:cond delay="0"/>
+                                    </p:stCondLst>
+                                  </p:cTn>
+                                  <p:tgtEl>
+                                    <p:spTgt spid="17"/>
+                                  </p:tgtEl>
+                                  <p:attrNameLst>
+                                    <p:attrName>style.visibility</p:attrName>
+                                  </p:attrNameLst>
+                                </p:cBhvr>
+                                <p:to>
+                                  <p:strVal val="visible"/>
+                                </p:to>
+                              </p:set>
+                              <p:animEffect transition="in" filter="randombar(horizontal)">
+                                <p:cBhvr>
+                                  <p:cTn id="311" dur="810"/>
+                                  <p:tgtEl>
+                                    <p:spTgt spid="17"/>
+                                  </p:tgtEl>
+                                </p:cBhvr>
+                              </p:animEffect>
+                            </p:childTnLst>
+                          </p:cTn>
+                        </p:par>
+                      </p:childTnLst>
+                    </p:cTn>
+                  </p:par>
+                </p:childTnLst>
+              </p:cTn>
+              <p:prevCondLst>
+                <p:cond evt="onPrev" delay="0">
+                  <p:tgtEl>
+                    <p:sldTgt/>
+                  </p:tgtEl>
+                </p:cond>
+              </p:prevCondLst>
+              <p:nextCondLst>
+                <p:cond evt="onNext" delay="0">
+                  <p:tgtEl>
+                    <p:sldTgt/>
+                  </p:tgtEl>
+                </p:cond>
+              </p:nextCondLst>
+            </p:seq>
+          </p:childTnLst>
+        </p:cTn>
+      </p:par>
+    </p:tnLst>
+  </p:timing>
 </p:sld>
 </file>
 
@@ -10126,8 +14082,257 @@
     <a:masterClrMapping/>
   </p:clrMapOvr>
   <p:transition spd="med">
-    <p:fade/>
+    <p:circle dir="in"/>
   </p:transition>
+  <p:timing>
+    <p:tnLst>
+      <p:par>
+        <p:cTn id="1" dur="indefinite" restart="never" nodeType="tmRoot">
+          <p:childTnLst>
+            <p:seq concurrent="1" nextAc="seek">
+              <p:cTn id="2" dur="indefinite" nodeType="mainSeq">
+                <p:childTnLst>
+                  <p:par>
+                    <p:cTn id="3" fill="hold">
+                      <p:stCondLst>
+                        <p:cond delay="indefinite"/>
+                      </p:stCondLst>
+                      <p:childTnLst>
+                        <p:par>
+                          <p:cTn id="5" dur="810" fill="hold" nodeType="clickEffect" grpId="0" presetID="9" presetClass="entr" presetSubtype="0">
+                            <p:stCondLst>
+                              <p:cond delay="0"/>
+                            </p:stCondLst>
+                            <p:childTnLst>
+                              <p:set>
+                                <p:cBhvr>
+                                  <p:cTn id="6" dur="1" fill="hold">
+                                    <p:stCondLst>
+                                      <p:cond delay="0"/>
+                                    </p:stCondLst>
+                                  </p:cTn>
+                                  <p:tgtEl>
+                                    <p:spTgt spid="3"/>
+                                  </p:tgtEl>
+                                  <p:attrNameLst>
+                                    <p:attrName>style.visibility</p:attrName>
+                                  </p:attrNameLst>
+                                </p:cBhvr>
+                                <p:to>
+                                  <p:strVal val="visible"/>
+                                </p:to>
+                              </p:set>
+                              <p:animEffect transition="in" filter="fade">
+                                <p:cBhvr>
+                                  <p:cTn id="51" dur="810"/>
+                                  <p:tgtEl>
+                                    <p:spTgt spid="3"/>
+                                  </p:tgtEl>
+                                </p:cBhvr>
+                              </p:animEffect>
+                            </p:childTnLst>
+                          </p:cTn>
+                        </p:par>
+                        <p:par>
+                          <p:cTn id="7" dur="450" fill="hold" nodeType="afterEffect" grpId="0" presetID="22" presetClass="entr" presetSubtype="2">
+                            <p:stCondLst>
+                              <p:cond delay="130"/>
+                            </p:stCondLst>
+                            <p:childTnLst>
+                              <p:set>
+                                <p:cBhvr>
+                                  <p:cTn id="8" dur="1" fill="hold">
+                                    <p:stCondLst>
+                                      <p:cond delay="0"/>
+                                    </p:stCondLst>
+                                  </p:cTn>
+                                  <p:tgtEl>
+                                    <p:spTgt spid="4"/>
+                                  </p:tgtEl>
+                                  <p:attrNameLst>
+                                    <p:attrName>style.visibility</p:attrName>
+                                  </p:attrNameLst>
+                                </p:cBhvr>
+                                <p:to>
+                                  <p:strVal val="visible"/>
+                                </p:to>
+                              </p:set>
+                              <p:animEffect transition="in" filter="wipe(right)">
+                                <p:cBhvr>
+                                  <p:cTn id="71" dur="450"/>
+                                  <p:tgtEl>
+                                    <p:spTgt spid="4"/>
+                                  </p:tgtEl>
+                                </p:cBhvr>
+                              </p:animEffect>
+                            </p:childTnLst>
+                          </p:cTn>
+                        </p:par>
+                        <p:par>
+                          <p:cTn id="9" dur="570" fill="hold" nodeType="afterEffect" grpId="0" presetID="18" presetClass="entr" presetSubtype="12">
+                            <p:stCondLst>
+                              <p:cond delay="260"/>
+                            </p:stCondLst>
+                            <p:childTnLst>
+                              <p:set>
+                                <p:cBhvr>
+                                  <p:cTn id="10" dur="1" fill="hold">
+                                    <p:stCondLst>
+                                      <p:cond delay="0"/>
+                                    </p:stCondLst>
+                                  </p:cTn>
+                                  <p:tgtEl>
+                                    <p:spTgt spid="5"/>
+                                  </p:tgtEl>
+                                  <p:attrNameLst>
+                                    <p:attrName>style.visibility</p:attrName>
+                                  </p:attrNameLst>
+                                </p:cBhvr>
+                                <p:to>
+                                  <p:strVal val="visible"/>
+                                </p:to>
+                              </p:set>
+                              <p:animEffect transition="in" filter="circle(in)">
+                                <p:cBhvr>
+                                  <p:cTn id="91" dur="570"/>
+                                  <p:tgtEl>
+                                    <p:spTgt spid="5"/>
+                                  </p:tgtEl>
+                                </p:cBhvr>
+                              </p:animEffect>
+                            </p:childTnLst>
+                          </p:cTn>
+                        </p:par>
+                        <p:par>
+                          <p:cTn id="11" dur="690" fill="hold" nodeType="afterEffect" grpId="0" presetID="22" presetClass="entr" presetSubtype="1">
+                            <p:stCondLst>
+                              <p:cond delay="390"/>
+                            </p:stCondLst>
+                            <p:childTnLst>
+                              <p:set>
+                                <p:cBhvr>
+                                  <p:cTn id="12" dur="1" fill="hold">
+                                    <p:stCondLst>
+                                      <p:cond delay="0"/>
+                                    </p:stCondLst>
+                                  </p:cTn>
+                                  <p:tgtEl>
+                                    <p:spTgt spid="6"/>
+                                  </p:tgtEl>
+                                  <p:attrNameLst>
+                                    <p:attrName>style.visibility</p:attrName>
+                                  </p:attrNameLst>
+                                </p:cBhvr>
+                                <p:to>
+                                  <p:strVal val="visible"/>
+                                </p:to>
+                              </p:set>
+                              <p:animEffect transition="in" filter="wipe(up)">
+                                <p:cBhvr>
+                                  <p:cTn id="111" dur="690"/>
+                                  <p:tgtEl>
+                                    <p:spTgt spid="6"/>
+                                  </p:tgtEl>
+                                </p:cBhvr>
+                              </p:animEffect>
+                            </p:childTnLst>
+                          </p:cTn>
+                        </p:par>
+                        <p:par>
+                          <p:cTn id="13" dur="810" fill="hold" nodeType="afterEffect" grpId="0" presetID="42" presetClass="entr" presetSubtype="10">
+                            <p:stCondLst>
+                              <p:cond delay="520"/>
+                            </p:stCondLst>
+                            <p:childTnLst>
+                              <p:set>
+                                <p:cBhvr>
+                                  <p:cTn id="14" dur="1" fill="hold">
+                                    <p:stCondLst>
+                                      <p:cond delay="0"/>
+                                    </p:stCondLst>
+                                  </p:cTn>
+                                  <p:tgtEl>
+                                    <p:spTgt spid="7"/>
+                                  </p:tgtEl>
+                                  <p:attrNameLst>
+                                    <p:attrName>style.visibility</p:attrName>
+                                  </p:attrNameLst>
+                                </p:cBhvr>
+                                <p:to>
+                                  <p:strVal val="visible"/>
+                                </p:to>
+                              </p:set>
+                              <p:animEffect transition="in" filter="blinds(horizontal)">
+                                <p:cBhvr>
+                                  <p:cTn id="131" dur="810"/>
+                                  <p:tgtEl>
+                                    <p:spTgt spid="7"/>
+                                  </p:tgtEl>
+                                </p:cBhvr>
+                              </p:animEffect>
+                            </p:childTnLst>
+                          </p:cTn>
+                        </p:par>
+                        <p:par>
+                          <p:cTn id="15" dur="450" fill="hold" nodeType="afterEffect" grpId="0" presetID="43" presetClass="entr" presetSubtype="0">
+                            <p:stCondLst>
+                              <p:cond delay="650"/>
+                            </p:stCondLst>
+                            <p:childTnLst>
+                              <p:set>
+                                <p:cBhvr>
+                                  <p:cTn id="16" dur="1" fill="hold">
+                                    <p:stCondLst>
+                                      <p:cond delay="0"/>
+                                    </p:stCondLst>
+                                  </p:cTn>
+                                  <p:tgtEl>
+                                    <p:spTgt spid="8"/>
+                                  </p:tgtEl>
+                                  <p:attrNameLst>
+                                    <p:attrName>style.visibility</p:attrName>
+                                  </p:attrNameLst>
+                                </p:cBhvr>
+                                <p:to>
+                                  <p:strVal val="visible"/>
+                                </p:to>
+                              </p:set>
+                              <p:animEffect transition="in" filter="checkerboard(across)">
+                                <p:cBhvr>
+                                  <p:cTn id="151" dur="450"/>
+                                  <p:tgtEl>
+                                    <p:spTgt spid="8"/>
+                                  </p:tgtEl>
+                                </p:cBhvr>
+                              </p:animEffect>
+                            </p:childTnLst>
+                          </p:cTn>
+                        </p:par>
+                      </p:childTnLst>
+                    </p:cTn>
+                  </p:par>
+                </p:childTnLst>
+              </p:cTn>
+              <p:prevCondLst>
+                <p:cond evt="onPrev" delay="0">
+                  <p:tgtEl>
+                    <p:sldTgt/>
+                  </p:tgtEl>
+                </p:cond>
+              </p:prevCondLst>
+              <p:nextCondLst>
+                <p:cond evt="onNext" delay="0">
+                  <p:tgtEl>
+                    <p:sldTgt/>
+                  </p:tgtEl>
+                </p:cond>
+              </p:nextCondLst>
+            </p:seq>
+          </p:childTnLst>
+        </p:cTn>
+      </p:par>
+    </p:tnLst>
+  </p:timing>
 </p:sld>
 </file>
 
@@ -10907,8 +15112,537 @@
     <a:masterClrMapping/>
   </p:clrMapOvr>
   <p:transition spd="med">
-    <p:fade/>
+    <p:split orient="horz"/>
   </p:transition>
+  <p:timing>
+    <p:tnLst>
+      <p:par>
+        <p:cTn id="1" dur="indefinite" restart="never" nodeType="tmRoot">
+          <p:childTnLst>
+            <p:seq concurrent="1" nextAc="seek">
+              <p:cTn id="2" dur="indefinite" nodeType="mainSeq">
+                <p:childTnLst>
+                  <p:par>
+                    <p:cTn id="3" fill="hold">
+                      <p:stCondLst>
+                        <p:cond delay="indefinite"/>
+                      </p:stCondLst>
+                      <p:childTnLst>
+                        <p:par>
+                          <p:cTn id="5" dur="810" fill="hold" nodeType="clickEffect" grpId="0" presetID="22" presetClass="entr" presetSubtype="4">
+                            <p:stCondLst>
+                              <p:cond delay="0"/>
+                            </p:stCondLst>
+                            <p:childTnLst>
+                              <p:set>
+                                <p:cBhvr>
+                                  <p:cTn id="6" dur="1" fill="hold">
+                                    <p:stCondLst>
+                                      <p:cond delay="0"/>
+                                    </p:stCondLst>
+                                  </p:cTn>
+                                  <p:tgtEl>
+                                    <p:spTgt spid="3"/>
+                                  </p:tgtEl>
+                                  <p:attrNameLst>
+                                    <p:attrName>style.visibility</p:attrName>
+                                  </p:attrNameLst>
+                                </p:cBhvr>
+                                <p:to>
+                                  <p:strVal val="visible"/>
+                                </p:to>
+                              </p:set>
+                              <p:animEffect transition="in" filter="wipe(down)">
+                                <p:cBhvr>
+                                  <p:cTn id="51" dur="810"/>
+                                  <p:tgtEl>
+                                    <p:spTgt spid="3"/>
+                                  </p:tgtEl>
+                                </p:cBhvr>
+                              </p:animEffect>
+                            </p:childTnLst>
+                          </p:cTn>
+                        </p:par>
+                        <p:par>
+                          <p:cTn id="7" dur="450" fill="hold" nodeType="afterEffect" grpId="0" presetID="9" presetClass="entr" presetSubtype="0">
+                            <p:stCondLst>
+                              <p:cond delay="130"/>
+                            </p:stCondLst>
+                            <p:childTnLst>
+                              <p:set>
+                                <p:cBhvr>
+                                  <p:cTn id="8" dur="1" fill="hold">
+                                    <p:stCondLst>
+                                      <p:cond delay="0"/>
+                                    </p:stCondLst>
+                                  </p:cTn>
+                                  <p:tgtEl>
+                                    <p:spTgt spid="4"/>
+                                  </p:tgtEl>
+                                  <p:attrNameLst>
+                                    <p:attrName>style.visibility</p:attrName>
+                                  </p:attrNameLst>
+                                </p:cBhvr>
+                                <p:to>
+                                  <p:strVal val="visible"/>
+                                </p:to>
+                              </p:set>
+                              <p:animEffect transition="in" filter="fade">
+                                <p:cBhvr>
+                                  <p:cTn id="71" dur="450"/>
+                                  <p:tgtEl>
+                                    <p:spTgt spid="4"/>
+                                  </p:tgtEl>
+                                </p:cBhvr>
+                              </p:animEffect>
+                            </p:childTnLst>
+                          </p:cTn>
+                        </p:par>
+                        <p:par>
+                          <p:cTn id="9" dur="570" fill="hold" nodeType="afterEffect" grpId="0" presetID="22" presetClass="entr" presetSubtype="2">
+                            <p:stCondLst>
+                              <p:cond delay="260"/>
+                            </p:stCondLst>
+                            <p:childTnLst>
+                              <p:set>
+                                <p:cBhvr>
+                                  <p:cTn id="10" dur="1" fill="hold">
+                                    <p:stCondLst>
+                                      <p:cond delay="0"/>
+                                    </p:stCondLst>
+                                  </p:cTn>
+                                  <p:tgtEl>
+                                    <p:spTgt spid="5"/>
+                                  </p:tgtEl>
+                                  <p:attrNameLst>
+                                    <p:attrName>style.visibility</p:attrName>
+                                  </p:attrNameLst>
+                                </p:cBhvr>
+                                <p:to>
+                                  <p:strVal val="visible"/>
+                                </p:to>
+                              </p:set>
+                              <p:animEffect transition="in" filter="wipe(right)">
+                                <p:cBhvr>
+                                  <p:cTn id="91" dur="570"/>
+                                  <p:tgtEl>
+                                    <p:spTgt spid="5"/>
+                                  </p:tgtEl>
+                                </p:cBhvr>
+                              </p:animEffect>
+                            </p:childTnLst>
+                          </p:cTn>
+                        </p:par>
+                        <p:par>
+                          <p:cTn id="11" dur="690" fill="hold" nodeType="afterEffect" grpId="0" presetID="18" presetClass="entr" presetSubtype="12">
+                            <p:stCondLst>
+                              <p:cond delay="390"/>
+                            </p:stCondLst>
+                            <p:childTnLst>
+                              <p:set>
+                                <p:cBhvr>
+                                  <p:cTn id="12" dur="1" fill="hold">
+                                    <p:stCondLst>
+                                      <p:cond delay="0"/>
+                                    </p:stCondLst>
+                                  </p:cTn>
+                                  <p:tgtEl>
+                                    <p:spTgt spid="7"/>
+                                  </p:tgtEl>
+                                  <p:attrNameLst>
+                                    <p:attrName>style.visibility</p:attrName>
+                                  </p:attrNameLst>
+                                </p:cBhvr>
+                                <p:to>
+                                  <p:strVal val="visible"/>
+                                </p:to>
+                              </p:set>
+                              <p:animEffect transition="in" filter="circle(in)">
+                                <p:cBhvr>
+                                  <p:cTn id="111" dur="690"/>
+                                  <p:tgtEl>
+                                    <p:spTgt spid="7"/>
+                                  </p:tgtEl>
+                                </p:cBhvr>
+                              </p:animEffect>
+                            </p:childTnLst>
+                          </p:cTn>
+                        </p:par>
+                        <p:par>
+                          <p:cTn id="13" dur="810" fill="hold" nodeType="afterEffect" grpId="0" presetID="22" presetClass="entr" presetSubtype="1">
+                            <p:stCondLst>
+                              <p:cond delay="520"/>
+                            </p:stCondLst>
+                            <p:childTnLst>
+                              <p:set>
+                                <p:cBhvr>
+                                  <p:cTn id="14" dur="1" fill="hold">
+                                    <p:stCondLst>
+                                      <p:cond delay="0"/>
+                                    </p:stCondLst>
+                                  </p:cTn>
+                                  <p:tgtEl>
+                                    <p:spTgt spid="10"/>
+                                  </p:tgtEl>
+                                  <p:attrNameLst>
+                                    <p:attrName>style.visibility</p:attrName>
+                                  </p:attrNameLst>
+                                </p:cBhvr>
+                                <p:to>
+                                  <p:strVal val="visible"/>
+                                </p:to>
+                              </p:set>
+                              <p:animEffect transition="in" filter="wipe(up)">
+                                <p:cBhvr>
+                                  <p:cTn id="131" dur="810"/>
+                                  <p:tgtEl>
+                                    <p:spTgt spid="10"/>
+                                  </p:tgtEl>
+                                </p:cBhvr>
+                              </p:animEffect>
+                            </p:childTnLst>
+                          </p:cTn>
+                        </p:par>
+                        <p:par>
+                          <p:cTn id="15" dur="450" fill="hold" nodeType="afterEffect" grpId="0" presetID="42" presetClass="entr" presetSubtype="10">
+                            <p:stCondLst>
+                              <p:cond delay="650"/>
+                            </p:stCondLst>
+                            <p:childTnLst>
+                              <p:set>
+                                <p:cBhvr>
+                                  <p:cTn id="16" dur="1" fill="hold">
+                                    <p:stCondLst>
+                                      <p:cond delay="0"/>
+                                    </p:stCondLst>
+                                  </p:cTn>
+                                  <p:tgtEl>
+                                    <p:spTgt spid="6"/>
+                                  </p:tgtEl>
+                                  <p:attrNameLst>
+                                    <p:attrName>style.visibility</p:attrName>
+                                  </p:attrNameLst>
+                                </p:cBhvr>
+                                <p:to>
+                                  <p:strVal val="visible"/>
+                                </p:to>
+                              </p:set>
+                              <p:animEffect transition="in" filter="blinds(horizontal)">
+                                <p:cBhvr>
+                                  <p:cTn id="151" dur="450"/>
+                                  <p:tgtEl>
+                                    <p:spTgt spid="6"/>
+                                  </p:tgtEl>
+                                </p:cBhvr>
+                              </p:animEffect>
+                            </p:childTnLst>
+                          </p:cTn>
+                        </p:par>
+                        <p:par>
+                          <p:cTn id="17" dur="570" fill="hold" nodeType="afterEffect" grpId="0" presetID="43" presetClass="entr" presetSubtype="0">
+                            <p:stCondLst>
+                              <p:cond delay="780"/>
+                            </p:stCondLst>
+                            <p:childTnLst>
+                              <p:set>
+                                <p:cBhvr>
+                                  <p:cTn id="18" dur="1" fill="hold">
+                                    <p:stCondLst>
+                                      <p:cond delay="0"/>
+                                    </p:stCondLst>
+                                  </p:cTn>
+                                  <p:tgtEl>
+                                    <p:spTgt spid="9"/>
+                                  </p:tgtEl>
+                                  <p:attrNameLst>
+                                    <p:attrName>style.visibility</p:attrName>
+                                  </p:attrNameLst>
+                                </p:cBhvr>
+                                <p:to>
+                                  <p:strVal val="visible"/>
+                                </p:to>
+                              </p:set>
+                              <p:animEffect transition="in" filter="checkerboard(across)">
+                                <p:cBhvr>
+                                  <p:cTn id="171" dur="570"/>
+                                  <p:tgtEl>
+                                    <p:spTgt spid="9"/>
+                                  </p:tgtEl>
+                                </p:cBhvr>
+                              </p:animEffect>
+                            </p:childTnLst>
+                          </p:cTn>
+                        </p:par>
+                        <p:par>
+                          <p:cTn id="19" dur="690" fill="hold" nodeType="afterEffect" grpId="0" presetID="21" presetClass="entr" presetSubtype="2">
+                            <p:stCondLst>
+                              <p:cond delay="910"/>
+                            </p:stCondLst>
+                            <p:childTnLst>
+                              <p:set>
+                                <p:cBhvr>
+                                  <p:cTn id="20" dur="1" fill="hold">
+                                    <p:stCondLst>
+                                      <p:cond delay="0"/>
+                                    </p:stCondLst>
+                                  </p:cTn>
+                                  <p:tgtEl>
+                                    <p:spTgt spid="8"/>
+                                  </p:tgtEl>
+                                  <p:attrNameLst>
+                                    <p:attrName>style.visibility</p:attrName>
+                                  </p:attrNameLst>
+                                </p:cBhvr>
+                                <p:to>
+                                  <p:strVal val="visible"/>
+                                </p:to>
+                              </p:set>
+                              <p:animEffect transition="in" filter="wheel(2)">
+                                <p:cBhvr>
+                                  <p:cTn id="191" dur="690"/>
+                                  <p:tgtEl>
+                                    <p:spTgt spid="8"/>
+                                  </p:tgtEl>
+                                </p:cBhvr>
+                              </p:animEffect>
+                            </p:childTnLst>
+                          </p:cTn>
+                        </p:par>
+                        <p:par>
+                          <p:cTn id="21" dur="810" fill="hold" nodeType="afterEffect" grpId="0" presetID="10" presetClass="entr" presetSubtype="0">
+                            <p:stCondLst>
+                              <p:cond delay="1040"/>
+                            </p:stCondLst>
+                            <p:childTnLst>
+                              <p:set>
+                                <p:cBhvr>
+                                  <p:cTn id="22" dur="1" fill="hold">
+                                    <p:stCondLst>
+                                      <p:cond delay="0"/>
+                                    </p:stCondLst>
+                                  </p:cTn>
+                                  <p:tgtEl>
+                                    <p:spTgt spid="11"/>
+                                  </p:tgtEl>
+                                  <p:attrNameLst>
+                                    <p:attrName>style.visibility</p:attrName>
+                                  </p:attrNameLst>
+                                </p:cBhvr>
+                                <p:to>
+                                  <p:strVal val="visible"/>
+                                </p:to>
+                              </p:set>
+                              <p:animEffect transition="in" filter="dissolve">
+                                <p:cBhvr>
+                                  <p:cTn id="211" dur="810"/>
+                                  <p:tgtEl>
+                                    <p:spTgt spid="11"/>
+                                  </p:tgtEl>
+                                </p:cBhvr>
+                              </p:animEffect>
+                            </p:childTnLst>
+                          </p:cTn>
+                        </p:par>
+                        <p:par>
+                          <p:cTn id="23" dur="450" fill="hold" nodeType="afterEffect" grpId="0" presetID="25" presetClass="entr" presetSubtype="1">
+                            <p:stCondLst>
+                              <p:cond delay="1170"/>
+                            </p:stCondLst>
+                            <p:childTnLst>
+                              <p:set>
+                                <p:cBhvr>
+                                  <p:cTn id="24" dur="1" fill="hold">
+                                    <p:stCondLst>
+                                      <p:cond delay="0"/>
+                                    </p:stCondLst>
+                                  </p:cTn>
+                                  <p:tgtEl>
+                                    <p:spTgt spid="13"/>
+                                  </p:tgtEl>
+                                  <p:attrNameLst>
+                                    <p:attrName>style.visibility</p:attrName>
+                                  </p:attrNameLst>
+                                </p:cBhvr>
+                                <p:to>
+                                  <p:strVal val="visible"/>
+                                </p:to>
+                              </p:set>
+                              <p:animEffect transition="in" filter="strips(downRight)">
+                                <p:cBhvr>
+                                  <p:cTn id="231" dur="450"/>
+                                  <p:tgtEl>
+                                    <p:spTgt spid="13"/>
+                                  </p:tgtEl>
+                                </p:cBhvr>
+                              </p:animEffect>
+                            </p:childTnLst>
+                          </p:cTn>
+                        </p:par>
+                        <p:par>
+                          <p:cTn id="25" dur="570" fill="hold" nodeType="afterEffect" grpId="0" presetID="45" presetClass="entr" presetSubtype="1">
+                            <p:stCondLst>
+                              <p:cond delay="1300"/>
+                            </p:stCondLst>
+                            <p:childTnLst>
+                              <p:set>
+                                <p:cBhvr>
+                                  <p:cTn id="26" dur="1" fill="hold">
+                                    <p:stCondLst>
+                                      <p:cond delay="0"/>
+                                    </p:stCondLst>
+                                  </p:cTn>
+                                  <p:tgtEl>
+                                    <p:spTgt spid="16"/>
+                                  </p:tgtEl>
+                                  <p:attrNameLst>
+                                    <p:attrName>style.visibility</p:attrName>
+                                  </p:attrNameLst>
+                                </p:cBhvr>
+                                <p:to>
+                                  <p:strVal val="visible"/>
+                                </p:to>
+                              </p:set>
+                              <p:animEffect transition="in" filter="barn(inHorizontal)">
+                                <p:cBhvr>
+                                  <p:cTn id="251" dur="570"/>
+                                  <p:tgtEl>
+                                    <p:spTgt spid="16"/>
+                                  </p:tgtEl>
+                                </p:cBhvr>
+                              </p:animEffect>
+                            </p:childTnLst>
+                          </p:cTn>
+                        </p:par>
+                        <p:par>
+                          <p:cTn id="27" dur="690" fill="hold" nodeType="afterEffect" grpId="0" presetID="22" presetClass="entr" presetSubtype="8">
+                            <p:stCondLst>
+                              <p:cond delay="1430"/>
+                            </p:stCondLst>
+                            <p:childTnLst>
+                              <p:set>
+                                <p:cBhvr>
+                                  <p:cTn id="28" dur="1" fill="hold">
+                                    <p:stCondLst>
+                                      <p:cond delay="0"/>
+                                    </p:stCondLst>
+                                  </p:cTn>
+                                  <p:tgtEl>
+                                    <p:spTgt spid="12"/>
+                                  </p:tgtEl>
+                                  <p:attrNameLst>
+                                    <p:attrName>style.visibility</p:attrName>
+                                  </p:attrNameLst>
+                                </p:cBhvr>
+                                <p:to>
+                                  <p:strVal val="visible"/>
+                                </p:to>
+                              </p:set>
+                              <p:animEffect transition="in" filter="wipe(left)">
+                                <p:cBhvr>
+                                  <p:cTn id="271" dur="690"/>
+                                  <p:tgtEl>
+                                    <p:spTgt spid="12"/>
+                                  </p:tgtEl>
+                                </p:cBhvr>
+                              </p:animEffect>
+                            </p:childTnLst>
+                          </p:cTn>
+                        </p:par>
+                        <p:par>
+                          <p:cTn id="29" dur="810" fill="hold" nodeType="afterEffect" grpId="0" presetID="37" presetClass="entr" presetSubtype="0">
+                            <p:stCondLst>
+                              <p:cond delay="1560"/>
+                            </p:stCondLst>
+                            <p:childTnLst>
+                              <p:set>
+                                <p:cBhvr>
+                                  <p:cTn id="30" dur="1" fill="hold">
+                                    <p:stCondLst>
+                                      <p:cond delay="0"/>
+                                    </p:stCondLst>
+                                  </p:cTn>
+                                  <p:tgtEl>
+                                    <p:spTgt spid="15"/>
+                                  </p:tgtEl>
+                                  <p:attrNameLst>
+                                    <p:attrName>style.visibility</p:attrName>
+                                  </p:attrNameLst>
+                                </p:cBhvr>
+                                <p:to>
+                                  <p:strVal val="visible"/>
+                                </p:to>
+                              </p:set>
+                              <p:animEffect transition="in" filter="wedge">
+                                <p:cBhvr>
+                                  <p:cTn id="291" dur="810"/>
+                                  <p:tgtEl>
+                                    <p:spTgt spid="15"/>
+                                  </p:tgtEl>
+                                </p:cBhvr>
+                              </p:animEffect>
+                            </p:childTnLst>
+                          </p:cTn>
+                        </p:par>
+                        <p:par>
+                          <p:cTn id="31" dur="450" fill="hold" nodeType="afterEffect" grpId="0" presetID="52" presetClass="entr" presetSubtype="0">
+                            <p:stCondLst>
+                              <p:cond delay="1690"/>
+                            </p:stCondLst>
+                            <p:childTnLst>
+                              <p:set>
+                                <p:cBhvr>
+                                  <p:cTn id="32" dur="1" fill="hold">
+                                    <p:stCondLst>
+                                      <p:cond delay="0"/>
+                                    </p:stCondLst>
+                                  </p:cTn>
+                                  <p:tgtEl>
+                                    <p:spTgt spid="14"/>
+                                  </p:tgtEl>
+                                  <p:attrNameLst>
+                                    <p:attrName>style.visibility</p:attrName>
+                                  </p:attrNameLst>
+                                </p:cBhvr>
+                                <p:to>
+                                  <p:strVal val="visible"/>
+                                </p:to>
+                              </p:set>
+                              <p:animEffect transition="in" filter="randombar(horizontal)">
+                                <p:cBhvr>
+                                  <p:cTn id="311" dur="450"/>
+                                  <p:tgtEl>
+                                    <p:spTgt spid="14"/>
+                                  </p:tgtEl>
+                                </p:cBhvr>
+                              </p:animEffect>
+                            </p:childTnLst>
+                          </p:cTn>
+                        </p:par>
+                      </p:childTnLst>
+                    </p:cTn>
+                  </p:par>
+                </p:childTnLst>
+              </p:cTn>
+              <p:prevCondLst>
+                <p:cond evt="onPrev" delay="0">
+                  <p:tgtEl>
+                    <p:sldTgt/>
+                  </p:tgtEl>
+                </p:cond>
+              </p:prevCondLst>
+              <p:nextCondLst>
+                <p:cond evt="onNext" delay="0">
+                  <p:tgtEl>
+                    <p:sldTgt/>
+                  </p:tgtEl>
+                </p:cond>
+              </p:nextCondLst>
+            </p:seq>
+          </p:childTnLst>
+        </p:cTn>
+      </p:par>
+    </p:tnLst>
+  </p:timing>
 </p:sld>
 </file>
 
@@ -11282,8 +16016,292 @@
     <a:masterClrMapping/>
   </p:clrMapOvr>
   <p:transition spd="med">
-    <p:fade/>
+    <p:blinds dir="horz"/>
   </p:transition>
+  <p:timing>
+    <p:tnLst>
+      <p:par>
+        <p:cTn id="1" dur="indefinite" restart="never" nodeType="tmRoot">
+          <p:childTnLst>
+            <p:seq concurrent="1" nextAc="seek">
+              <p:cTn id="2" dur="indefinite" nodeType="mainSeq">
+                <p:childTnLst>
+                  <p:par>
+                    <p:cTn id="3" fill="hold">
+                      <p:stCondLst>
+                        <p:cond delay="indefinite"/>
+                      </p:stCondLst>
+                      <p:childTnLst>
+                        <p:par>
+                          <p:cTn id="5" dur="450" fill="hold" nodeType="clickEffect" grpId="0" presetID="9" presetClass="entr" presetSubtype="0">
+                            <p:stCondLst>
+                              <p:cond delay="0"/>
+                            </p:stCondLst>
+                            <p:childTnLst>
+                              <p:set>
+                                <p:cBhvr>
+                                  <p:cTn id="6" dur="1" fill="hold">
+                                    <p:stCondLst>
+                                      <p:cond delay="0"/>
+                                    </p:stCondLst>
+                                  </p:cTn>
+                                  <p:tgtEl>
+                                    <p:spTgt spid="3"/>
+                                  </p:tgtEl>
+                                  <p:attrNameLst>
+                                    <p:attrName>style.visibility</p:attrName>
+                                  </p:attrNameLst>
+                                </p:cBhvr>
+                                <p:to>
+                                  <p:strVal val="visible"/>
+                                </p:to>
+                              </p:set>
+                              <p:animEffect transition="in" filter="fade">
+                                <p:cBhvr>
+                                  <p:cTn id="51" dur="450"/>
+                                  <p:tgtEl>
+                                    <p:spTgt spid="3"/>
+                                  </p:tgtEl>
+                                </p:cBhvr>
+                              </p:animEffect>
+                            </p:childTnLst>
+                          </p:cTn>
+                        </p:par>
+                        <p:par>
+                          <p:cTn id="7" dur="570" fill="hold" nodeType="afterEffect" grpId="0" presetID="22" presetClass="entr" presetSubtype="2">
+                            <p:stCondLst>
+                              <p:cond delay="130"/>
+                            </p:stCondLst>
+                            <p:childTnLst>
+                              <p:set>
+                                <p:cBhvr>
+                                  <p:cTn id="8" dur="1" fill="hold">
+                                    <p:stCondLst>
+                                      <p:cond delay="0"/>
+                                    </p:stCondLst>
+                                  </p:cTn>
+                                  <p:tgtEl>
+                                    <p:spTgt spid="4"/>
+                                  </p:tgtEl>
+                                  <p:attrNameLst>
+                                    <p:attrName>style.visibility</p:attrName>
+                                  </p:attrNameLst>
+                                </p:cBhvr>
+                                <p:to>
+                                  <p:strVal val="visible"/>
+                                </p:to>
+                              </p:set>
+                              <p:animEffect transition="in" filter="wipe(right)">
+                                <p:cBhvr>
+                                  <p:cTn id="71" dur="570"/>
+                                  <p:tgtEl>
+                                    <p:spTgt spid="4"/>
+                                  </p:tgtEl>
+                                </p:cBhvr>
+                              </p:animEffect>
+                            </p:childTnLst>
+                          </p:cTn>
+                        </p:par>
+                        <p:par>
+                          <p:cTn id="9" dur="690" fill="hold" nodeType="afterEffect" grpId="0" presetID="18" presetClass="entr" presetSubtype="12">
+                            <p:stCondLst>
+                              <p:cond delay="260"/>
+                            </p:stCondLst>
+                            <p:childTnLst>
+                              <p:set>
+                                <p:cBhvr>
+                                  <p:cTn id="10" dur="1" fill="hold">
+                                    <p:stCondLst>
+                                      <p:cond delay="0"/>
+                                    </p:stCondLst>
+                                  </p:cTn>
+                                  <p:tgtEl>
+                                    <p:spTgt spid="5"/>
+                                  </p:tgtEl>
+                                  <p:attrNameLst>
+                                    <p:attrName>style.visibility</p:attrName>
+                                  </p:attrNameLst>
+                                </p:cBhvr>
+                                <p:to>
+                                  <p:strVal val="visible"/>
+                                </p:to>
+                              </p:set>
+                              <p:animEffect transition="in" filter="circle(in)">
+                                <p:cBhvr>
+                                  <p:cTn id="91" dur="690"/>
+                                  <p:tgtEl>
+                                    <p:spTgt spid="5"/>
+                                  </p:tgtEl>
+                                </p:cBhvr>
+                              </p:animEffect>
+                            </p:childTnLst>
+                          </p:cTn>
+                        </p:par>
+                        <p:par>
+                          <p:cTn id="11" dur="810" fill="hold" nodeType="afterEffect" grpId="0" presetID="22" presetClass="entr" presetSubtype="1">
+                            <p:stCondLst>
+                              <p:cond delay="390"/>
+                            </p:stCondLst>
+                            <p:childTnLst>
+                              <p:set>
+                                <p:cBhvr>
+                                  <p:cTn id="12" dur="1" fill="hold">
+                                    <p:stCondLst>
+                                      <p:cond delay="0"/>
+                                    </p:stCondLst>
+                                  </p:cTn>
+                                  <p:tgtEl>
+                                    <p:spTgt spid="6"/>
+                                  </p:tgtEl>
+                                  <p:attrNameLst>
+                                    <p:attrName>style.visibility</p:attrName>
+                                  </p:attrNameLst>
+                                </p:cBhvr>
+                                <p:to>
+                                  <p:strVal val="visible"/>
+                                </p:to>
+                              </p:set>
+                              <p:animEffect transition="in" filter="wipe(up)">
+                                <p:cBhvr>
+                                  <p:cTn id="111" dur="810"/>
+                                  <p:tgtEl>
+                                    <p:spTgt spid="6"/>
+                                  </p:tgtEl>
+                                </p:cBhvr>
+                              </p:animEffect>
+                            </p:childTnLst>
+                          </p:cTn>
+                        </p:par>
+                        <p:par>
+                          <p:cTn id="13" dur="450" fill="hold" nodeType="afterEffect" grpId="0" presetID="42" presetClass="entr" presetSubtype="10">
+                            <p:stCondLst>
+                              <p:cond delay="520"/>
+                            </p:stCondLst>
+                            <p:childTnLst>
+                              <p:set>
+                                <p:cBhvr>
+                                  <p:cTn id="14" dur="1" fill="hold">
+                                    <p:stCondLst>
+                                      <p:cond delay="0"/>
+                                    </p:stCondLst>
+                                  </p:cTn>
+                                  <p:tgtEl>
+                                    <p:spTgt spid="7"/>
+                                  </p:tgtEl>
+                                  <p:attrNameLst>
+                                    <p:attrName>style.visibility</p:attrName>
+                                  </p:attrNameLst>
+                                </p:cBhvr>
+                                <p:to>
+                                  <p:strVal val="visible"/>
+                                </p:to>
+                              </p:set>
+                              <p:animEffect transition="in" filter="blinds(horizontal)">
+                                <p:cBhvr>
+                                  <p:cTn id="131" dur="450"/>
+                                  <p:tgtEl>
+                                    <p:spTgt spid="7"/>
+                                  </p:tgtEl>
+                                </p:cBhvr>
+                              </p:animEffect>
+                            </p:childTnLst>
+                          </p:cTn>
+                        </p:par>
+                        <p:par>
+                          <p:cTn id="15" dur="570" fill="hold" nodeType="afterEffect" grpId="0" presetID="43" presetClass="entr" presetSubtype="0">
+                            <p:stCondLst>
+                              <p:cond delay="650"/>
+                            </p:stCondLst>
+                            <p:childTnLst>
+                              <p:set>
+                                <p:cBhvr>
+                                  <p:cTn id="16" dur="1" fill="hold">
+                                    <p:stCondLst>
+                                      <p:cond delay="0"/>
+                                    </p:stCondLst>
+                                  </p:cTn>
+                                  <p:tgtEl>
+                                    <p:spTgt spid="8"/>
+                                  </p:tgtEl>
+                                  <p:attrNameLst>
+                                    <p:attrName>style.visibility</p:attrName>
+                                  </p:attrNameLst>
+                                </p:cBhvr>
+                                <p:to>
+                                  <p:strVal val="visible"/>
+                                </p:to>
+                              </p:set>
+                              <p:animEffect transition="in" filter="checkerboard(across)">
+                                <p:cBhvr>
+                                  <p:cTn id="151" dur="570"/>
+                                  <p:tgtEl>
+                                    <p:spTgt spid="8"/>
+                                  </p:tgtEl>
+                                </p:cBhvr>
+                              </p:animEffect>
+                            </p:childTnLst>
+                          </p:cTn>
+                        </p:par>
+                        <p:par>
+                          <p:cTn id="17" dur="690" fill="hold" nodeType="afterEffect" grpId="0" presetID="21" presetClass="entr" presetSubtype="2">
+                            <p:stCondLst>
+                              <p:cond delay="780"/>
+                            </p:stCondLst>
+                            <p:childTnLst>
+                              <p:set>
+                                <p:cBhvr>
+                                  <p:cTn id="18" dur="1" fill="hold">
+                                    <p:stCondLst>
+                                      <p:cond delay="0"/>
+                                    </p:stCondLst>
+                                  </p:cTn>
+                                  <p:tgtEl>
+                                    <p:spTgt spid="9"/>
+                                  </p:tgtEl>
+                                  <p:attrNameLst>
+                                    <p:attrName>style.visibility</p:attrName>
+                                  </p:attrNameLst>
+                                </p:cBhvr>
+                                <p:to>
+                                  <p:strVal val="visible"/>
+                                </p:to>
+                              </p:set>
+                              <p:animEffect transition="in" filter="wheel(2)">
+                                <p:cBhvr>
+                                  <p:cTn id="171" dur="690"/>
+                                  <p:tgtEl>
+                                    <p:spTgt spid="9"/>
+                                  </p:tgtEl>
+                                </p:cBhvr>
+                              </p:animEffect>
+                            </p:childTnLst>
+                          </p:cTn>
+                        </p:par>
+                      </p:childTnLst>
+                    </p:cTn>
+                  </p:par>
+                </p:childTnLst>
+              </p:cTn>
+              <p:prevCondLst>
+                <p:cond evt="onPrev" delay="0">
+                  <p:tgtEl>
+                    <p:sldTgt/>
+                  </p:tgtEl>
+                </p:cond>
+              </p:prevCondLst>
+              <p:nextCondLst>
+                <p:cond evt="onNext" delay="0">
+                  <p:tgtEl>
+                    <p:sldTgt/>
+                  </p:tgtEl>
+                </p:cond>
+              </p:nextCondLst>
+            </p:seq>
+          </p:childTnLst>
+        </p:cTn>
+      </p:par>
+    </p:tnLst>
+  </p:timing>
 </p:sld>
 </file>
 
@@ -12111,8 +17129,537 @@
     <a:masterClrMapping/>
   </p:clrMapOvr>
   <p:transition spd="med">
-    <p:fade/>
+    <p:circle dir="in"/>
   </p:transition>
+  <p:timing>
+    <p:tnLst>
+      <p:par>
+        <p:cTn id="1" dur="indefinite" restart="never" nodeType="tmRoot">
+          <p:childTnLst>
+            <p:seq concurrent="1" nextAc="seek">
+              <p:cTn id="2" dur="indefinite" nodeType="mainSeq">
+                <p:childTnLst>
+                  <p:par>
+                    <p:cTn id="3" fill="hold">
+                      <p:stCondLst>
+                        <p:cond delay="indefinite"/>
+                      </p:stCondLst>
+                      <p:childTnLst>
+                        <p:par>
+                          <p:cTn id="5" dur="570" fill="hold" nodeType="clickEffect" grpId="0" presetID="22" presetClass="entr" presetSubtype="2">
+                            <p:stCondLst>
+                              <p:cond delay="0"/>
+                            </p:stCondLst>
+                            <p:childTnLst>
+                              <p:set>
+                                <p:cBhvr>
+                                  <p:cTn id="6" dur="1" fill="hold">
+                                    <p:stCondLst>
+                                      <p:cond delay="0"/>
+                                    </p:stCondLst>
+                                  </p:cTn>
+                                  <p:tgtEl>
+                                    <p:spTgt spid="3"/>
+                                  </p:tgtEl>
+                                  <p:attrNameLst>
+                                    <p:attrName>style.visibility</p:attrName>
+                                  </p:attrNameLst>
+                                </p:cBhvr>
+                                <p:to>
+                                  <p:strVal val="visible"/>
+                                </p:to>
+                              </p:set>
+                              <p:animEffect transition="in" filter="wipe(right)">
+                                <p:cBhvr>
+                                  <p:cTn id="51" dur="570"/>
+                                  <p:tgtEl>
+                                    <p:spTgt spid="3"/>
+                                  </p:tgtEl>
+                                </p:cBhvr>
+                              </p:animEffect>
+                            </p:childTnLst>
+                          </p:cTn>
+                        </p:par>
+                        <p:par>
+                          <p:cTn id="7" dur="690" fill="hold" nodeType="afterEffect" grpId="0" presetID="18" presetClass="entr" presetSubtype="12">
+                            <p:stCondLst>
+                              <p:cond delay="130"/>
+                            </p:stCondLst>
+                            <p:childTnLst>
+                              <p:set>
+                                <p:cBhvr>
+                                  <p:cTn id="8" dur="1" fill="hold">
+                                    <p:stCondLst>
+                                      <p:cond delay="0"/>
+                                    </p:stCondLst>
+                                  </p:cTn>
+                                  <p:tgtEl>
+                                    <p:spTgt spid="4"/>
+                                  </p:tgtEl>
+                                  <p:attrNameLst>
+                                    <p:attrName>style.visibility</p:attrName>
+                                  </p:attrNameLst>
+                                </p:cBhvr>
+                                <p:to>
+                                  <p:strVal val="visible"/>
+                                </p:to>
+                              </p:set>
+                              <p:animEffect transition="in" filter="circle(in)">
+                                <p:cBhvr>
+                                  <p:cTn id="71" dur="690"/>
+                                  <p:tgtEl>
+                                    <p:spTgt spid="4"/>
+                                  </p:tgtEl>
+                                </p:cBhvr>
+                              </p:animEffect>
+                            </p:childTnLst>
+                          </p:cTn>
+                        </p:par>
+                        <p:par>
+                          <p:cTn id="9" dur="810" fill="hold" nodeType="afterEffect" grpId="0" presetID="22" presetClass="entr" presetSubtype="1">
+                            <p:stCondLst>
+                              <p:cond delay="260"/>
+                            </p:stCondLst>
+                            <p:childTnLst>
+                              <p:set>
+                                <p:cBhvr>
+                                  <p:cTn id="10" dur="1" fill="hold">
+                                    <p:stCondLst>
+                                      <p:cond delay="0"/>
+                                    </p:stCondLst>
+                                  </p:cTn>
+                                  <p:tgtEl>
+                                    <p:spTgt spid="5"/>
+                                  </p:tgtEl>
+                                  <p:attrNameLst>
+                                    <p:attrName>style.visibility</p:attrName>
+                                  </p:attrNameLst>
+                                </p:cBhvr>
+                                <p:to>
+                                  <p:strVal val="visible"/>
+                                </p:to>
+                              </p:set>
+                              <p:animEffect transition="in" filter="wipe(up)">
+                                <p:cBhvr>
+                                  <p:cTn id="91" dur="810"/>
+                                  <p:tgtEl>
+                                    <p:spTgt spid="5"/>
+                                  </p:tgtEl>
+                                </p:cBhvr>
+                              </p:animEffect>
+                            </p:childTnLst>
+                          </p:cTn>
+                        </p:par>
+                        <p:par>
+                          <p:cTn id="11" dur="450" fill="hold" nodeType="afterEffect" grpId="0" presetID="42" presetClass="entr" presetSubtype="10">
+                            <p:stCondLst>
+                              <p:cond delay="390"/>
+                            </p:stCondLst>
+                            <p:childTnLst>
+                              <p:set>
+                                <p:cBhvr>
+                                  <p:cTn id="12" dur="1" fill="hold">
+                                    <p:stCondLst>
+                                      <p:cond delay="0"/>
+                                    </p:stCondLst>
+                                  </p:cTn>
+                                  <p:tgtEl>
+                                    <p:spTgt spid="6"/>
+                                  </p:tgtEl>
+                                  <p:attrNameLst>
+                                    <p:attrName>style.visibility</p:attrName>
+                                  </p:attrNameLst>
+                                </p:cBhvr>
+                                <p:to>
+                                  <p:strVal val="visible"/>
+                                </p:to>
+                              </p:set>
+                              <p:animEffect transition="in" filter="blinds(horizontal)">
+                                <p:cBhvr>
+                                  <p:cTn id="111" dur="450"/>
+                                  <p:tgtEl>
+                                    <p:spTgt spid="6"/>
+                                  </p:tgtEl>
+                                </p:cBhvr>
+                              </p:animEffect>
+                            </p:childTnLst>
+                          </p:cTn>
+                        </p:par>
+                        <p:par>
+                          <p:cTn id="13" dur="570" fill="hold" nodeType="afterEffect" grpId="0" presetID="43" presetClass="entr" presetSubtype="0">
+                            <p:stCondLst>
+                              <p:cond delay="520"/>
+                            </p:stCondLst>
+                            <p:childTnLst>
+                              <p:set>
+                                <p:cBhvr>
+                                  <p:cTn id="14" dur="1" fill="hold">
+                                    <p:stCondLst>
+                                      <p:cond delay="0"/>
+                                    </p:stCondLst>
+                                  </p:cTn>
+                                  <p:tgtEl>
+                                    <p:spTgt spid="8"/>
+                                  </p:tgtEl>
+                                  <p:attrNameLst>
+                                    <p:attrName>style.visibility</p:attrName>
+                                  </p:attrNameLst>
+                                </p:cBhvr>
+                                <p:to>
+                                  <p:strVal val="visible"/>
+                                </p:to>
+                              </p:set>
+                              <p:animEffect transition="in" filter="checkerboard(across)">
+                                <p:cBhvr>
+                                  <p:cTn id="131" dur="570"/>
+                                  <p:tgtEl>
+                                    <p:spTgt spid="8"/>
+                                  </p:tgtEl>
+                                </p:cBhvr>
+                              </p:animEffect>
+                            </p:childTnLst>
+                          </p:cTn>
+                        </p:par>
+                        <p:par>
+                          <p:cTn id="15" dur="690" fill="hold" nodeType="afterEffect" grpId="0" presetID="21" presetClass="entr" presetSubtype="2">
+                            <p:stCondLst>
+                              <p:cond delay="650"/>
+                            </p:stCondLst>
+                            <p:childTnLst>
+                              <p:set>
+                                <p:cBhvr>
+                                  <p:cTn id="16" dur="1" fill="hold">
+                                    <p:stCondLst>
+                                      <p:cond delay="0"/>
+                                    </p:stCondLst>
+                                  </p:cTn>
+                                  <p:tgtEl>
+                                    <p:spTgt spid="7"/>
+                                  </p:tgtEl>
+                                  <p:attrNameLst>
+                                    <p:attrName>style.visibility</p:attrName>
+                                  </p:attrNameLst>
+                                </p:cBhvr>
+                                <p:to>
+                                  <p:strVal val="visible"/>
+                                </p:to>
+                              </p:set>
+                              <p:animEffect transition="in" filter="wheel(2)">
+                                <p:cBhvr>
+                                  <p:cTn id="151" dur="690"/>
+                                  <p:tgtEl>
+                                    <p:spTgt spid="7"/>
+                                  </p:tgtEl>
+                                </p:cBhvr>
+                              </p:animEffect>
+                            </p:childTnLst>
+                          </p:cTn>
+                        </p:par>
+                        <p:par>
+                          <p:cTn id="17" dur="810" fill="hold" nodeType="afterEffect" grpId="0" presetID="10" presetClass="entr" presetSubtype="0">
+                            <p:stCondLst>
+                              <p:cond delay="780"/>
+                            </p:stCondLst>
+                            <p:childTnLst>
+                              <p:set>
+                                <p:cBhvr>
+                                  <p:cTn id="18" dur="1" fill="hold">
+                                    <p:stCondLst>
+                                      <p:cond delay="0"/>
+                                    </p:stCondLst>
+                                  </p:cTn>
+                                  <p:tgtEl>
+                                    <p:spTgt spid="9"/>
+                                  </p:tgtEl>
+                                  <p:attrNameLst>
+                                    <p:attrName>style.visibility</p:attrName>
+                                  </p:attrNameLst>
+                                </p:cBhvr>
+                                <p:to>
+                                  <p:strVal val="visible"/>
+                                </p:to>
+                              </p:set>
+                              <p:animEffect transition="in" filter="dissolve">
+                                <p:cBhvr>
+                                  <p:cTn id="171" dur="810"/>
+                                  <p:tgtEl>
+                                    <p:spTgt spid="9"/>
+                                  </p:tgtEl>
+                                </p:cBhvr>
+                              </p:animEffect>
+                            </p:childTnLst>
+                          </p:cTn>
+                        </p:par>
+                        <p:par>
+                          <p:cTn id="19" dur="450" fill="hold" nodeType="afterEffect" grpId="0" presetID="25" presetClass="entr" presetSubtype="1">
+                            <p:stCondLst>
+                              <p:cond delay="910"/>
+                            </p:stCondLst>
+                            <p:childTnLst>
+                              <p:set>
+                                <p:cBhvr>
+                                  <p:cTn id="20" dur="1" fill="hold">
+                                    <p:stCondLst>
+                                      <p:cond delay="0"/>
+                                    </p:stCondLst>
+                                  </p:cTn>
+                                  <p:tgtEl>
+                                    <p:spTgt spid="11"/>
+                                  </p:tgtEl>
+                                  <p:attrNameLst>
+                                    <p:attrName>style.visibility</p:attrName>
+                                  </p:attrNameLst>
+                                </p:cBhvr>
+                                <p:to>
+                                  <p:strVal val="visible"/>
+                                </p:to>
+                              </p:set>
+                              <p:animEffect transition="in" filter="strips(downRight)">
+                                <p:cBhvr>
+                                  <p:cTn id="191" dur="450"/>
+                                  <p:tgtEl>
+                                    <p:spTgt spid="11"/>
+                                  </p:tgtEl>
+                                </p:cBhvr>
+                              </p:animEffect>
+                            </p:childTnLst>
+                          </p:cTn>
+                        </p:par>
+                        <p:par>
+                          <p:cTn id="21" dur="570" fill="hold" nodeType="afterEffect" grpId="0" presetID="45" presetClass="entr" presetSubtype="1">
+                            <p:stCondLst>
+                              <p:cond delay="1040"/>
+                            </p:stCondLst>
+                            <p:childTnLst>
+                              <p:set>
+                                <p:cBhvr>
+                                  <p:cTn id="22" dur="1" fill="hold">
+                                    <p:stCondLst>
+                                      <p:cond delay="0"/>
+                                    </p:stCondLst>
+                                  </p:cTn>
+                                  <p:tgtEl>
+                                    <p:spTgt spid="10"/>
+                                  </p:tgtEl>
+                                  <p:attrNameLst>
+                                    <p:attrName>style.visibility</p:attrName>
+                                  </p:attrNameLst>
+                                </p:cBhvr>
+                                <p:to>
+                                  <p:strVal val="visible"/>
+                                </p:to>
+                              </p:set>
+                              <p:animEffect transition="in" filter="barn(inHorizontal)">
+                                <p:cBhvr>
+                                  <p:cTn id="211" dur="570"/>
+                                  <p:tgtEl>
+                                    <p:spTgt spid="10"/>
+                                  </p:tgtEl>
+                                </p:cBhvr>
+                              </p:animEffect>
+                            </p:childTnLst>
+                          </p:cTn>
+                        </p:par>
+                        <p:par>
+                          <p:cTn id="23" dur="690" fill="hold" nodeType="afterEffect" grpId="0" presetID="22" presetClass="entr" presetSubtype="8">
+                            <p:stCondLst>
+                              <p:cond delay="1170"/>
+                            </p:stCondLst>
+                            <p:childTnLst>
+                              <p:set>
+                                <p:cBhvr>
+                                  <p:cTn id="24" dur="1" fill="hold">
+                                    <p:stCondLst>
+                                      <p:cond delay="0"/>
+                                    </p:stCondLst>
+                                  </p:cTn>
+                                  <p:tgtEl>
+                                    <p:spTgt spid="12"/>
+                                  </p:tgtEl>
+                                  <p:attrNameLst>
+                                    <p:attrName>style.visibility</p:attrName>
+                                  </p:attrNameLst>
+                                </p:cBhvr>
+                                <p:to>
+                                  <p:strVal val="visible"/>
+                                </p:to>
+                              </p:set>
+                              <p:animEffect transition="in" filter="wipe(left)">
+                                <p:cBhvr>
+                                  <p:cTn id="231" dur="690"/>
+                                  <p:tgtEl>
+                                    <p:spTgt spid="12"/>
+                                  </p:tgtEl>
+                                </p:cBhvr>
+                              </p:animEffect>
+                            </p:childTnLst>
+                          </p:cTn>
+                        </p:par>
+                        <p:par>
+                          <p:cTn id="25" dur="810" fill="hold" nodeType="afterEffect" grpId="0" presetID="37" presetClass="entr" presetSubtype="0">
+                            <p:stCondLst>
+                              <p:cond delay="1300"/>
+                            </p:stCondLst>
+                            <p:childTnLst>
+                              <p:set>
+                                <p:cBhvr>
+                                  <p:cTn id="26" dur="1" fill="hold">
+                                    <p:stCondLst>
+                                      <p:cond delay="0"/>
+                                    </p:stCondLst>
+                                  </p:cTn>
+                                  <p:tgtEl>
+                                    <p:spTgt spid="14"/>
+                                  </p:tgtEl>
+                                  <p:attrNameLst>
+                                    <p:attrName>style.visibility</p:attrName>
+                                  </p:attrNameLst>
+                                </p:cBhvr>
+                                <p:to>
+                                  <p:strVal val="visible"/>
+                                </p:to>
+                              </p:set>
+                              <p:animEffect transition="in" filter="wedge">
+                                <p:cBhvr>
+                                  <p:cTn id="251" dur="810"/>
+                                  <p:tgtEl>
+                                    <p:spTgt spid="14"/>
+                                  </p:tgtEl>
+                                </p:cBhvr>
+                              </p:animEffect>
+                            </p:childTnLst>
+                          </p:cTn>
+                        </p:par>
+                        <p:par>
+                          <p:cTn id="27" dur="450" fill="hold" nodeType="afterEffect" grpId="0" presetID="52" presetClass="entr" presetSubtype="0">
+                            <p:stCondLst>
+                              <p:cond delay="1430"/>
+                            </p:stCondLst>
+                            <p:childTnLst>
+                              <p:set>
+                                <p:cBhvr>
+                                  <p:cTn id="28" dur="1" fill="hold">
+                                    <p:stCondLst>
+                                      <p:cond delay="0"/>
+                                    </p:stCondLst>
+                                  </p:cTn>
+                                  <p:tgtEl>
+                                    <p:spTgt spid="13"/>
+                                  </p:tgtEl>
+                                  <p:attrNameLst>
+                                    <p:attrName>style.visibility</p:attrName>
+                                  </p:attrNameLst>
+                                </p:cBhvr>
+                                <p:to>
+                                  <p:strVal val="visible"/>
+                                </p:to>
+                              </p:set>
+                              <p:animEffect transition="in" filter="randombar(horizontal)">
+                                <p:cBhvr>
+                                  <p:cTn id="271" dur="450"/>
+                                  <p:tgtEl>
+                                    <p:spTgt spid="13"/>
+                                  </p:tgtEl>
+                                </p:cBhvr>
+                              </p:animEffect>
+                            </p:childTnLst>
+                          </p:cTn>
+                        </p:par>
+                        <p:par>
+                          <p:cTn id="29" dur="570" fill="hold" nodeType="afterEffect" grpId="0" presetID="21" presetClass="entr" presetSubtype="1">
+                            <p:stCondLst>
+                              <p:cond delay="1560"/>
+                            </p:stCondLst>
+                            <p:childTnLst>
+                              <p:set>
+                                <p:cBhvr>
+                                  <p:cTn id="30" dur="1" fill="hold">
+                                    <p:stCondLst>
+                                      <p:cond delay="0"/>
+                                    </p:stCondLst>
+                                  </p:cTn>
+                                  <p:tgtEl>
+                                    <p:spTgt spid="15"/>
+                                  </p:tgtEl>
+                                  <p:attrNameLst>
+                                    <p:attrName>style.visibility</p:attrName>
+                                  </p:attrNameLst>
+                                </p:cBhvr>
+                                <p:to>
+                                  <p:strVal val="visible"/>
+                                </p:to>
+                              </p:set>
+                              <p:animEffect transition="in" filter="wheel(1)">
+                                <p:cBhvr>
+                                  <p:cTn id="291" dur="570"/>
+                                  <p:tgtEl>
+                                    <p:spTgt spid="15"/>
+                                  </p:tgtEl>
+                                </p:cBhvr>
+                              </p:animEffect>
+                            </p:childTnLst>
+                          </p:cTn>
+                        </p:par>
+                        <p:par>
+                          <p:cTn id="31" dur="690" fill="hold" nodeType="afterEffect" grpId="0" presetID="22" presetClass="entr" presetSubtype="4">
+                            <p:stCondLst>
+                              <p:cond delay="1690"/>
+                            </p:stCondLst>
+                            <p:childTnLst>
+                              <p:set>
+                                <p:cBhvr>
+                                  <p:cTn id="32" dur="1" fill="hold">
+                                    <p:stCondLst>
+                                      <p:cond delay="0"/>
+                                    </p:stCondLst>
+                                  </p:cTn>
+                                  <p:tgtEl>
+                                    <p:spTgt spid="17"/>
+                                  </p:tgtEl>
+                                  <p:attrNameLst>
+                                    <p:attrName>style.visibility</p:attrName>
+                                  </p:attrNameLst>
+                                </p:cBhvr>
+                                <p:to>
+                                  <p:strVal val="visible"/>
+                                </p:to>
+                              </p:set>
+                              <p:animEffect transition="in" filter="wipe(down)">
+                                <p:cBhvr>
+                                  <p:cTn id="311" dur="690"/>
+                                  <p:tgtEl>
+                                    <p:spTgt spid="17"/>
+                                  </p:tgtEl>
+                                </p:cBhvr>
+                              </p:animEffect>
+                            </p:childTnLst>
+                          </p:cTn>
+                        </p:par>
+                      </p:childTnLst>
+                    </p:cTn>
+                  </p:par>
+                </p:childTnLst>
+              </p:cTn>
+              <p:prevCondLst>
+                <p:cond evt="onPrev" delay="0">
+                  <p:tgtEl>
+                    <p:sldTgt/>
+                  </p:tgtEl>
+                </p:cond>
+              </p:prevCondLst>
+              <p:nextCondLst>
+                <p:cond evt="onNext" delay="0">
+                  <p:tgtEl>
+                    <p:sldTgt/>
+                  </p:tgtEl>
+                </p:cond>
+              </p:nextCondLst>
+            </p:seq>
+          </p:childTnLst>
+        </p:cTn>
+      </p:par>
+    </p:tnLst>
+  </p:timing>
 </p:sld>
 </file>
 
@@ -12906,8 +18453,502 @@
     <a:masterClrMapping/>
   </p:clrMapOvr>
   <p:transition spd="med">
-    <p:fade/>
+    <p:comb dir="horz"/>
   </p:transition>
+  <p:timing>
+    <p:tnLst>
+      <p:par>
+        <p:cTn id="1" dur="indefinite" restart="never" nodeType="tmRoot">
+          <p:childTnLst>
+            <p:seq concurrent="1" nextAc="seek">
+              <p:cTn id="2" dur="indefinite" nodeType="mainSeq">
+                <p:childTnLst>
+                  <p:par>
+                    <p:cTn id="3" fill="hold">
+                      <p:stCondLst>
+                        <p:cond delay="indefinite"/>
+                      </p:stCondLst>
+                      <p:childTnLst>
+                        <p:par>
+                          <p:cTn id="5" dur="690" fill="hold" nodeType="clickEffect" grpId="0" presetID="18" presetClass="entr" presetSubtype="12">
+                            <p:stCondLst>
+                              <p:cond delay="0"/>
+                            </p:stCondLst>
+                            <p:childTnLst>
+                              <p:set>
+                                <p:cBhvr>
+                                  <p:cTn id="6" dur="1" fill="hold">
+                                    <p:stCondLst>
+                                      <p:cond delay="0"/>
+                                    </p:stCondLst>
+                                  </p:cTn>
+                                  <p:tgtEl>
+                                    <p:spTgt spid="3"/>
+                                  </p:tgtEl>
+                                  <p:attrNameLst>
+                                    <p:attrName>style.visibility</p:attrName>
+                                  </p:attrNameLst>
+                                </p:cBhvr>
+                                <p:to>
+                                  <p:strVal val="visible"/>
+                                </p:to>
+                              </p:set>
+                              <p:animEffect transition="in" filter="circle(in)">
+                                <p:cBhvr>
+                                  <p:cTn id="51" dur="690"/>
+                                  <p:tgtEl>
+                                    <p:spTgt spid="3"/>
+                                  </p:tgtEl>
+                                </p:cBhvr>
+                              </p:animEffect>
+                            </p:childTnLst>
+                          </p:cTn>
+                        </p:par>
+                        <p:par>
+                          <p:cTn id="7" dur="810" fill="hold" nodeType="afterEffect" grpId="0" presetID="22" presetClass="entr" presetSubtype="1">
+                            <p:stCondLst>
+                              <p:cond delay="130"/>
+                            </p:stCondLst>
+                            <p:childTnLst>
+                              <p:set>
+                                <p:cBhvr>
+                                  <p:cTn id="8" dur="1" fill="hold">
+                                    <p:stCondLst>
+                                      <p:cond delay="0"/>
+                                    </p:stCondLst>
+                                  </p:cTn>
+                                  <p:tgtEl>
+                                    <p:spTgt spid="4"/>
+                                  </p:tgtEl>
+                                  <p:attrNameLst>
+                                    <p:attrName>style.visibility</p:attrName>
+                                  </p:attrNameLst>
+                                </p:cBhvr>
+                                <p:to>
+                                  <p:strVal val="visible"/>
+                                </p:to>
+                              </p:set>
+                              <p:animEffect transition="in" filter="wipe(up)">
+                                <p:cBhvr>
+                                  <p:cTn id="71" dur="810"/>
+                                  <p:tgtEl>
+                                    <p:spTgt spid="4"/>
+                                  </p:tgtEl>
+                                </p:cBhvr>
+                              </p:animEffect>
+                            </p:childTnLst>
+                          </p:cTn>
+                        </p:par>
+                        <p:par>
+                          <p:cTn id="9" dur="450" fill="hold" nodeType="afterEffect" grpId="0" presetID="42" presetClass="entr" presetSubtype="10">
+                            <p:stCondLst>
+                              <p:cond delay="260"/>
+                            </p:stCondLst>
+                            <p:childTnLst>
+                              <p:set>
+                                <p:cBhvr>
+                                  <p:cTn id="10" dur="1" fill="hold">
+                                    <p:stCondLst>
+                                      <p:cond delay="0"/>
+                                    </p:stCondLst>
+                                  </p:cTn>
+                                  <p:tgtEl>
+                                    <p:spTgt spid="5"/>
+                                  </p:tgtEl>
+                                  <p:attrNameLst>
+                                    <p:attrName>style.visibility</p:attrName>
+                                  </p:attrNameLst>
+                                </p:cBhvr>
+                                <p:to>
+                                  <p:strVal val="visible"/>
+                                </p:to>
+                              </p:set>
+                              <p:animEffect transition="in" filter="blinds(horizontal)">
+                                <p:cBhvr>
+                                  <p:cTn id="91" dur="450"/>
+                                  <p:tgtEl>
+                                    <p:spTgt spid="5"/>
+                                  </p:tgtEl>
+                                </p:cBhvr>
+                              </p:animEffect>
+                            </p:childTnLst>
+                          </p:cTn>
+                        </p:par>
+                        <p:par>
+                          <p:cTn id="11" dur="570" fill="hold" nodeType="afterEffect" grpId="0" presetID="43" presetClass="entr" presetSubtype="0">
+                            <p:stCondLst>
+                              <p:cond delay="390"/>
+                            </p:stCondLst>
+                            <p:childTnLst>
+                              <p:set>
+                                <p:cBhvr>
+                                  <p:cTn id="12" dur="1" fill="hold">
+                                    <p:stCondLst>
+                                      <p:cond delay="0"/>
+                                    </p:stCondLst>
+                                  </p:cTn>
+                                  <p:tgtEl>
+                                    <p:spTgt spid="6"/>
+                                  </p:tgtEl>
+                                  <p:attrNameLst>
+                                    <p:attrName>style.visibility</p:attrName>
+                                  </p:attrNameLst>
+                                </p:cBhvr>
+                                <p:to>
+                                  <p:strVal val="visible"/>
+                                </p:to>
+                              </p:set>
+                              <p:animEffect transition="in" filter="checkerboard(across)">
+                                <p:cBhvr>
+                                  <p:cTn id="111" dur="570"/>
+                                  <p:tgtEl>
+                                    <p:spTgt spid="6"/>
+                                  </p:tgtEl>
+                                </p:cBhvr>
+                              </p:animEffect>
+                            </p:childTnLst>
+                          </p:cTn>
+                        </p:par>
+                        <p:par>
+                          <p:cTn id="13" dur="690" fill="hold" nodeType="afterEffect" grpId="0" presetID="21" presetClass="entr" presetSubtype="2">
+                            <p:stCondLst>
+                              <p:cond delay="520"/>
+                            </p:stCondLst>
+                            <p:childTnLst>
+                              <p:set>
+                                <p:cBhvr>
+                                  <p:cTn id="14" dur="1" fill="hold">
+                                    <p:stCondLst>
+                                      <p:cond delay="0"/>
+                                    </p:stCondLst>
+                                  </p:cTn>
+                                  <p:tgtEl>
+                                    <p:spTgt spid="7"/>
+                                  </p:tgtEl>
+                                  <p:attrNameLst>
+                                    <p:attrName>style.visibility</p:attrName>
+                                  </p:attrNameLst>
+                                </p:cBhvr>
+                                <p:to>
+                                  <p:strVal val="visible"/>
+                                </p:to>
+                              </p:set>
+                              <p:animEffect transition="in" filter="wheel(2)">
+                                <p:cBhvr>
+                                  <p:cTn id="131" dur="690"/>
+                                  <p:tgtEl>
+                                    <p:spTgt spid="7"/>
+                                  </p:tgtEl>
+                                </p:cBhvr>
+                              </p:animEffect>
+                            </p:childTnLst>
+                          </p:cTn>
+                        </p:par>
+                        <p:par>
+                          <p:cTn id="15" dur="810" fill="hold" nodeType="afterEffect" grpId="0" presetID="10" presetClass="entr" presetSubtype="0">
+                            <p:stCondLst>
+                              <p:cond delay="650"/>
+                            </p:stCondLst>
+                            <p:childTnLst>
+                              <p:set>
+                                <p:cBhvr>
+                                  <p:cTn id="16" dur="1" fill="hold">
+                                    <p:stCondLst>
+                                      <p:cond delay="0"/>
+                                    </p:stCondLst>
+                                  </p:cTn>
+                                  <p:tgtEl>
+                                    <p:spTgt spid="10"/>
+                                  </p:tgtEl>
+                                  <p:attrNameLst>
+                                    <p:attrName>style.visibility</p:attrName>
+                                  </p:attrNameLst>
+                                </p:cBhvr>
+                                <p:to>
+                                  <p:strVal val="visible"/>
+                                </p:to>
+                              </p:set>
+                              <p:animEffect transition="in" filter="dissolve">
+                                <p:cBhvr>
+                                  <p:cTn id="151" dur="810"/>
+                                  <p:tgtEl>
+                                    <p:spTgt spid="10"/>
+                                  </p:tgtEl>
+                                </p:cBhvr>
+                              </p:animEffect>
+                            </p:childTnLst>
+                          </p:cTn>
+                        </p:par>
+                        <p:par>
+                          <p:cTn id="17" dur="450" fill="hold" nodeType="afterEffect" grpId="0" presetID="25" presetClass="entr" presetSubtype="1">
+                            <p:stCondLst>
+                              <p:cond delay="780"/>
+                            </p:stCondLst>
+                            <p:childTnLst>
+                              <p:set>
+                                <p:cBhvr>
+                                  <p:cTn id="18" dur="1" fill="hold">
+                                    <p:stCondLst>
+                                      <p:cond delay="0"/>
+                                    </p:stCondLst>
+                                  </p:cTn>
+                                  <p:tgtEl>
+                                    <p:spTgt spid="11"/>
+                                  </p:tgtEl>
+                                  <p:attrNameLst>
+                                    <p:attrName>style.visibility</p:attrName>
+                                  </p:attrNameLst>
+                                </p:cBhvr>
+                                <p:to>
+                                  <p:strVal val="visible"/>
+                                </p:to>
+                              </p:set>
+                              <p:animEffect transition="in" filter="strips(downRight)">
+                                <p:cBhvr>
+                                  <p:cTn id="171" dur="450"/>
+                                  <p:tgtEl>
+                                    <p:spTgt spid="11"/>
+                                  </p:tgtEl>
+                                </p:cBhvr>
+                              </p:animEffect>
+                            </p:childTnLst>
+                          </p:cTn>
+                        </p:par>
+                        <p:par>
+                          <p:cTn id="19" dur="570" fill="hold" nodeType="afterEffect" grpId="0" presetID="45" presetClass="entr" presetSubtype="1">
+                            <p:stCondLst>
+                              <p:cond delay="910"/>
+                            </p:stCondLst>
+                            <p:childTnLst>
+                              <p:set>
+                                <p:cBhvr>
+                                  <p:cTn id="20" dur="1" fill="hold">
+                                    <p:stCondLst>
+                                      <p:cond delay="0"/>
+                                    </p:stCondLst>
+                                  </p:cTn>
+                                  <p:tgtEl>
+                                    <p:spTgt spid="8"/>
+                                  </p:tgtEl>
+                                  <p:attrNameLst>
+                                    <p:attrName>style.visibility</p:attrName>
+                                  </p:attrNameLst>
+                                </p:cBhvr>
+                                <p:to>
+                                  <p:strVal val="visible"/>
+                                </p:to>
+                              </p:set>
+                              <p:animEffect transition="in" filter="barn(inHorizontal)">
+                                <p:cBhvr>
+                                  <p:cTn id="191" dur="570"/>
+                                  <p:tgtEl>
+                                    <p:spTgt spid="8"/>
+                                  </p:tgtEl>
+                                </p:cBhvr>
+                              </p:animEffect>
+                            </p:childTnLst>
+                          </p:cTn>
+                        </p:par>
+                        <p:par>
+                          <p:cTn id="21" dur="690" fill="hold" nodeType="afterEffect" grpId="0" presetID="22" presetClass="entr" presetSubtype="8">
+                            <p:stCondLst>
+                              <p:cond delay="1040"/>
+                            </p:stCondLst>
+                            <p:childTnLst>
+                              <p:set>
+                                <p:cBhvr>
+                                  <p:cTn id="22" dur="1" fill="hold">
+                                    <p:stCondLst>
+                                      <p:cond delay="0"/>
+                                    </p:stCondLst>
+                                  </p:cTn>
+                                  <p:tgtEl>
+                                    <p:spTgt spid="12"/>
+                                  </p:tgtEl>
+                                  <p:attrNameLst>
+                                    <p:attrName>style.visibility</p:attrName>
+                                  </p:attrNameLst>
+                                </p:cBhvr>
+                                <p:to>
+                                  <p:strVal val="visible"/>
+                                </p:to>
+                              </p:set>
+                              <p:animEffect transition="in" filter="wipe(left)">
+                                <p:cBhvr>
+                                  <p:cTn id="211" dur="690"/>
+                                  <p:tgtEl>
+                                    <p:spTgt spid="12"/>
+                                  </p:tgtEl>
+                                </p:cBhvr>
+                              </p:animEffect>
+                            </p:childTnLst>
+                          </p:cTn>
+                        </p:par>
+                        <p:par>
+                          <p:cTn id="23" dur="810" fill="hold" nodeType="afterEffect" grpId="0" presetID="37" presetClass="entr" presetSubtype="0">
+                            <p:stCondLst>
+                              <p:cond delay="1170"/>
+                            </p:stCondLst>
+                            <p:childTnLst>
+                              <p:set>
+                                <p:cBhvr>
+                                  <p:cTn id="24" dur="1" fill="hold">
+                                    <p:stCondLst>
+                                      <p:cond delay="0"/>
+                                    </p:stCondLst>
+                                  </p:cTn>
+                                  <p:tgtEl>
+                                    <p:spTgt spid="9"/>
+                                  </p:tgtEl>
+                                  <p:attrNameLst>
+                                    <p:attrName>style.visibility</p:attrName>
+                                  </p:attrNameLst>
+                                </p:cBhvr>
+                                <p:to>
+                                  <p:strVal val="visible"/>
+                                </p:to>
+                              </p:set>
+                              <p:animEffect transition="in" filter="wedge">
+                                <p:cBhvr>
+                                  <p:cTn id="231" dur="810"/>
+                                  <p:tgtEl>
+                                    <p:spTgt spid="9"/>
+                                  </p:tgtEl>
+                                </p:cBhvr>
+                              </p:animEffect>
+                            </p:childTnLst>
+                          </p:cTn>
+                        </p:par>
+                        <p:par>
+                          <p:cTn id="25" dur="450" fill="hold" nodeType="afterEffect" grpId="0" presetID="52" presetClass="entr" presetSubtype="0">
+                            <p:stCondLst>
+                              <p:cond delay="1300"/>
+                            </p:stCondLst>
+                            <p:childTnLst>
+                              <p:set>
+                                <p:cBhvr>
+                                  <p:cTn id="26" dur="1" fill="hold">
+                                    <p:stCondLst>
+                                      <p:cond delay="0"/>
+                                    </p:stCondLst>
+                                  </p:cTn>
+                                  <p:tgtEl>
+                                    <p:spTgt spid="13"/>
+                                  </p:tgtEl>
+                                  <p:attrNameLst>
+                                    <p:attrName>style.visibility</p:attrName>
+                                  </p:attrNameLst>
+                                </p:cBhvr>
+                                <p:to>
+                                  <p:strVal val="visible"/>
+                                </p:to>
+                              </p:set>
+                              <p:animEffect transition="in" filter="randombar(horizontal)">
+                                <p:cBhvr>
+                                  <p:cTn id="251" dur="450"/>
+                                  <p:tgtEl>
+                                    <p:spTgt spid="13"/>
+                                  </p:tgtEl>
+                                </p:cBhvr>
+                              </p:animEffect>
+                            </p:childTnLst>
+                          </p:cTn>
+                        </p:par>
+                        <p:par>
+                          <p:cTn id="27" dur="570" fill="hold" nodeType="afterEffect" grpId="0" presetID="21" presetClass="entr" presetSubtype="1">
+                            <p:stCondLst>
+                              <p:cond delay="1430"/>
+                            </p:stCondLst>
+                            <p:childTnLst>
+                              <p:set>
+                                <p:cBhvr>
+                                  <p:cTn id="28" dur="1" fill="hold">
+                                    <p:stCondLst>
+                                      <p:cond delay="0"/>
+                                    </p:stCondLst>
+                                  </p:cTn>
+                                  <p:tgtEl>
+                                    <p:spTgt spid="14"/>
+                                  </p:tgtEl>
+                                  <p:attrNameLst>
+                                    <p:attrName>style.visibility</p:attrName>
+                                  </p:attrNameLst>
+                                </p:cBhvr>
+                                <p:to>
+                                  <p:strVal val="visible"/>
+                                </p:to>
+                              </p:set>
+                              <p:animEffect transition="in" filter="wheel(1)">
+                                <p:cBhvr>
+                                  <p:cTn id="271" dur="570"/>
+                                  <p:tgtEl>
+                                    <p:spTgt spid="14"/>
+                                  </p:tgtEl>
+                                </p:cBhvr>
+                              </p:animEffect>
+                            </p:childTnLst>
+                          </p:cTn>
+                        </p:par>
+                        <p:par>
+                          <p:cTn id="29" dur="690" fill="hold" nodeType="afterEffect" grpId="0" presetID="22" presetClass="entr" presetSubtype="4">
+                            <p:stCondLst>
+                              <p:cond delay="1560"/>
+                            </p:stCondLst>
+                            <p:childTnLst>
+                              <p:set>
+                                <p:cBhvr>
+                                  <p:cTn id="30" dur="1" fill="hold">
+                                    <p:stCondLst>
+                                      <p:cond delay="0"/>
+                                    </p:stCondLst>
+                                  </p:cTn>
+                                  <p:tgtEl>
+                                    <p:spTgt spid="15"/>
+                                  </p:tgtEl>
+                                  <p:attrNameLst>
+                                    <p:attrName>style.visibility</p:attrName>
+                                  </p:attrNameLst>
+                                </p:cBhvr>
+                                <p:to>
+                                  <p:strVal val="visible"/>
+                                </p:to>
+                              </p:set>
+                              <p:animEffect transition="in" filter="wipe(down)">
+                                <p:cBhvr>
+                                  <p:cTn id="291" dur="690"/>
+                                  <p:tgtEl>
+                                    <p:spTgt spid="15"/>
+                                  </p:tgtEl>
+                                </p:cBhvr>
+                              </p:animEffect>
+                            </p:childTnLst>
+                          </p:cTn>
+                        </p:par>
+                      </p:childTnLst>
+                    </p:cTn>
+                  </p:par>
+                </p:childTnLst>
+              </p:cTn>
+              <p:prevCondLst>
+                <p:cond evt="onPrev" delay="0">
+                  <p:tgtEl>
+                    <p:sldTgt/>
+                  </p:tgtEl>
+                </p:cond>
+              </p:prevCondLst>
+              <p:nextCondLst>
+                <p:cond evt="onNext" delay="0">
+                  <p:tgtEl>
+                    <p:sldTgt/>
+                  </p:tgtEl>
+                </p:cond>
+              </p:nextCondLst>
+            </p:seq>
+          </p:childTnLst>
+        </p:cTn>
+      </p:par>
+    </p:tnLst>
+  </p:timing>
 </p:sld>
 </file>
 
@@ -14087,8 +20128,537 @@
     <a:masterClrMapping/>
   </p:clrMapOvr>
   <p:transition spd="med">
-    <p:fade/>
+    <p:dissolve/>
   </p:transition>
+  <p:timing>
+    <p:tnLst>
+      <p:par>
+        <p:cTn id="1" dur="indefinite" restart="never" nodeType="tmRoot">
+          <p:childTnLst>
+            <p:seq concurrent="1" nextAc="seek">
+              <p:cTn id="2" dur="indefinite" nodeType="mainSeq">
+                <p:childTnLst>
+                  <p:par>
+                    <p:cTn id="3" fill="hold">
+                      <p:stCondLst>
+                        <p:cond delay="indefinite"/>
+                      </p:stCondLst>
+                      <p:childTnLst>
+                        <p:par>
+                          <p:cTn id="5" dur="810" fill="hold" nodeType="clickEffect" grpId="0" presetID="22" presetClass="entr" presetSubtype="1">
+                            <p:stCondLst>
+                              <p:cond delay="0"/>
+                            </p:stCondLst>
+                            <p:childTnLst>
+                              <p:set>
+                                <p:cBhvr>
+                                  <p:cTn id="6" dur="1" fill="hold">
+                                    <p:stCondLst>
+                                      <p:cond delay="0"/>
+                                    </p:stCondLst>
+                                  </p:cTn>
+                                  <p:tgtEl>
+                                    <p:spTgt spid="3"/>
+                                  </p:tgtEl>
+                                  <p:attrNameLst>
+                                    <p:attrName>style.visibility</p:attrName>
+                                  </p:attrNameLst>
+                                </p:cBhvr>
+                                <p:to>
+                                  <p:strVal val="visible"/>
+                                </p:to>
+                              </p:set>
+                              <p:animEffect transition="in" filter="wipe(up)">
+                                <p:cBhvr>
+                                  <p:cTn id="51" dur="810"/>
+                                  <p:tgtEl>
+                                    <p:spTgt spid="3"/>
+                                  </p:tgtEl>
+                                </p:cBhvr>
+                              </p:animEffect>
+                            </p:childTnLst>
+                          </p:cTn>
+                        </p:par>
+                        <p:par>
+                          <p:cTn id="7" dur="450" fill="hold" nodeType="afterEffect" grpId="0" presetID="42" presetClass="entr" presetSubtype="10">
+                            <p:stCondLst>
+                              <p:cond delay="130"/>
+                            </p:stCondLst>
+                            <p:childTnLst>
+                              <p:set>
+                                <p:cBhvr>
+                                  <p:cTn id="8" dur="1" fill="hold">
+                                    <p:stCondLst>
+                                      <p:cond delay="0"/>
+                                    </p:stCondLst>
+                                  </p:cTn>
+                                  <p:tgtEl>
+                                    <p:spTgt spid="4"/>
+                                  </p:tgtEl>
+                                  <p:attrNameLst>
+                                    <p:attrName>style.visibility</p:attrName>
+                                  </p:attrNameLst>
+                                </p:cBhvr>
+                                <p:to>
+                                  <p:strVal val="visible"/>
+                                </p:to>
+                              </p:set>
+                              <p:animEffect transition="in" filter="blinds(horizontal)">
+                                <p:cBhvr>
+                                  <p:cTn id="71" dur="450"/>
+                                  <p:tgtEl>
+                                    <p:spTgt spid="4"/>
+                                  </p:tgtEl>
+                                </p:cBhvr>
+                              </p:animEffect>
+                            </p:childTnLst>
+                          </p:cTn>
+                        </p:par>
+                        <p:par>
+                          <p:cTn id="9" dur="570" fill="hold" nodeType="afterEffect" grpId="0" presetID="43" presetClass="entr" presetSubtype="0">
+                            <p:stCondLst>
+                              <p:cond delay="260"/>
+                            </p:stCondLst>
+                            <p:childTnLst>
+                              <p:set>
+                                <p:cBhvr>
+                                  <p:cTn id="10" dur="1" fill="hold">
+                                    <p:stCondLst>
+                                      <p:cond delay="0"/>
+                                    </p:stCondLst>
+                                  </p:cTn>
+                                  <p:tgtEl>
+                                    <p:spTgt spid="5"/>
+                                  </p:tgtEl>
+                                  <p:attrNameLst>
+                                    <p:attrName>style.visibility</p:attrName>
+                                  </p:attrNameLst>
+                                </p:cBhvr>
+                                <p:to>
+                                  <p:strVal val="visible"/>
+                                </p:to>
+                              </p:set>
+                              <p:animEffect transition="in" filter="checkerboard(across)">
+                                <p:cBhvr>
+                                  <p:cTn id="91" dur="570"/>
+                                  <p:tgtEl>
+                                    <p:spTgt spid="5"/>
+                                  </p:tgtEl>
+                                </p:cBhvr>
+                              </p:animEffect>
+                            </p:childTnLst>
+                          </p:cTn>
+                        </p:par>
+                        <p:par>
+                          <p:cTn id="11" dur="690" fill="hold" nodeType="afterEffect" grpId="0" presetID="21" presetClass="entr" presetSubtype="2">
+                            <p:stCondLst>
+                              <p:cond delay="390"/>
+                            </p:stCondLst>
+                            <p:childTnLst>
+                              <p:set>
+                                <p:cBhvr>
+                                  <p:cTn id="12" dur="1" fill="hold">
+                                    <p:stCondLst>
+                                      <p:cond delay="0"/>
+                                    </p:stCondLst>
+                                  </p:cTn>
+                                  <p:tgtEl>
+                                    <p:spTgt spid="6"/>
+                                  </p:tgtEl>
+                                  <p:attrNameLst>
+                                    <p:attrName>style.visibility</p:attrName>
+                                  </p:attrNameLst>
+                                </p:cBhvr>
+                                <p:to>
+                                  <p:strVal val="visible"/>
+                                </p:to>
+                              </p:set>
+                              <p:animEffect transition="in" filter="wheel(2)">
+                                <p:cBhvr>
+                                  <p:cTn id="111" dur="690"/>
+                                  <p:tgtEl>
+                                    <p:spTgt spid="6"/>
+                                  </p:tgtEl>
+                                </p:cBhvr>
+                              </p:animEffect>
+                            </p:childTnLst>
+                          </p:cTn>
+                        </p:par>
+                        <p:par>
+                          <p:cTn id="13" dur="810" fill="hold" nodeType="afterEffect" grpId="0" presetID="10" presetClass="entr" presetSubtype="0">
+                            <p:stCondLst>
+                              <p:cond delay="520"/>
+                            </p:stCondLst>
+                            <p:childTnLst>
+                              <p:set>
+                                <p:cBhvr>
+                                  <p:cTn id="14" dur="1" fill="hold">
+                                    <p:stCondLst>
+                                      <p:cond delay="0"/>
+                                    </p:stCondLst>
+                                  </p:cTn>
+                                  <p:tgtEl>
+                                    <p:spTgt spid="11"/>
+                                  </p:tgtEl>
+                                  <p:attrNameLst>
+                                    <p:attrName>style.visibility</p:attrName>
+                                  </p:attrNameLst>
+                                </p:cBhvr>
+                                <p:to>
+                                  <p:strVal val="visible"/>
+                                </p:to>
+                              </p:set>
+                              <p:animEffect transition="in" filter="dissolve">
+                                <p:cBhvr>
+                                  <p:cTn id="131" dur="810"/>
+                                  <p:tgtEl>
+                                    <p:spTgt spid="11"/>
+                                  </p:tgtEl>
+                                </p:cBhvr>
+                              </p:animEffect>
+                            </p:childTnLst>
+                          </p:cTn>
+                        </p:par>
+                        <p:par>
+                          <p:cTn id="15" dur="450" fill="hold" nodeType="afterEffect" grpId="0" presetID="25" presetClass="entr" presetSubtype="1">
+                            <p:stCondLst>
+                              <p:cond delay="650"/>
+                            </p:stCondLst>
+                            <p:childTnLst>
+                              <p:set>
+                                <p:cBhvr>
+                                  <p:cTn id="16" dur="1" fill="hold">
+                                    <p:stCondLst>
+                                      <p:cond delay="0"/>
+                                    </p:stCondLst>
+                                  </p:cTn>
+                                  <p:tgtEl>
+                                    <p:spTgt spid="16"/>
+                                  </p:tgtEl>
+                                  <p:attrNameLst>
+                                    <p:attrName>style.visibility</p:attrName>
+                                  </p:attrNameLst>
+                                </p:cBhvr>
+                                <p:to>
+                                  <p:strVal val="visible"/>
+                                </p:to>
+                              </p:set>
+                              <p:animEffect transition="in" filter="strips(downRight)">
+                                <p:cBhvr>
+                                  <p:cTn id="151" dur="450"/>
+                                  <p:tgtEl>
+                                    <p:spTgt spid="16"/>
+                                  </p:tgtEl>
+                                </p:cBhvr>
+                              </p:animEffect>
+                            </p:childTnLst>
+                          </p:cTn>
+                        </p:par>
+                        <p:par>
+                          <p:cTn id="17" dur="570" fill="hold" nodeType="afterEffect" grpId="0" presetID="45" presetClass="entr" presetSubtype="1">
+                            <p:stCondLst>
+                              <p:cond delay="780"/>
+                            </p:stCondLst>
+                            <p:childTnLst>
+                              <p:set>
+                                <p:cBhvr>
+                                  <p:cTn id="18" dur="1" fill="hold">
+                                    <p:stCondLst>
+                                      <p:cond delay="0"/>
+                                    </p:stCondLst>
+                                  </p:cTn>
+                                  <p:tgtEl>
+                                    <p:spTgt spid="21"/>
+                                  </p:tgtEl>
+                                  <p:attrNameLst>
+                                    <p:attrName>style.visibility</p:attrName>
+                                  </p:attrNameLst>
+                                </p:cBhvr>
+                                <p:to>
+                                  <p:strVal val="visible"/>
+                                </p:to>
+                              </p:set>
+                              <p:animEffect transition="in" filter="barn(inHorizontal)">
+                                <p:cBhvr>
+                                  <p:cTn id="171" dur="570"/>
+                                  <p:tgtEl>
+                                    <p:spTgt spid="21"/>
+                                  </p:tgtEl>
+                                </p:cBhvr>
+                              </p:animEffect>
+                            </p:childTnLst>
+                          </p:cTn>
+                        </p:par>
+                        <p:par>
+                          <p:cTn id="19" dur="690" fill="hold" nodeType="afterEffect" grpId="0" presetID="22" presetClass="entr" presetSubtype="8">
+                            <p:stCondLst>
+                              <p:cond delay="910"/>
+                            </p:stCondLst>
+                            <p:childTnLst>
+                              <p:set>
+                                <p:cBhvr>
+                                  <p:cTn id="20" dur="1" fill="hold">
+                                    <p:stCondLst>
+                                      <p:cond delay="0"/>
+                                    </p:stCondLst>
+                                  </p:cTn>
+                                  <p:tgtEl>
+                                    <p:spTgt spid="7"/>
+                                  </p:tgtEl>
+                                  <p:attrNameLst>
+                                    <p:attrName>style.visibility</p:attrName>
+                                  </p:attrNameLst>
+                                </p:cBhvr>
+                                <p:to>
+                                  <p:strVal val="visible"/>
+                                </p:to>
+                              </p:set>
+                              <p:animEffect transition="in" filter="wipe(left)">
+                                <p:cBhvr>
+                                  <p:cTn id="191" dur="690"/>
+                                  <p:tgtEl>
+                                    <p:spTgt spid="7"/>
+                                  </p:tgtEl>
+                                </p:cBhvr>
+                              </p:animEffect>
+                            </p:childTnLst>
+                          </p:cTn>
+                        </p:par>
+                        <p:par>
+                          <p:cTn id="21" dur="810" fill="hold" nodeType="afterEffect" grpId="0" presetID="37" presetClass="entr" presetSubtype="0">
+                            <p:stCondLst>
+                              <p:cond delay="1040"/>
+                            </p:stCondLst>
+                            <p:childTnLst>
+                              <p:set>
+                                <p:cBhvr>
+                                  <p:cTn id="22" dur="1" fill="hold">
+                                    <p:stCondLst>
+                                      <p:cond delay="0"/>
+                                    </p:stCondLst>
+                                  </p:cTn>
+                                  <p:tgtEl>
+                                    <p:spTgt spid="12"/>
+                                  </p:tgtEl>
+                                  <p:attrNameLst>
+                                    <p:attrName>style.visibility</p:attrName>
+                                  </p:attrNameLst>
+                                </p:cBhvr>
+                                <p:to>
+                                  <p:strVal val="visible"/>
+                                </p:to>
+                              </p:set>
+                              <p:animEffect transition="in" filter="wedge">
+                                <p:cBhvr>
+                                  <p:cTn id="211" dur="810"/>
+                                  <p:tgtEl>
+                                    <p:spTgt spid="12"/>
+                                  </p:tgtEl>
+                                </p:cBhvr>
+                              </p:animEffect>
+                            </p:childTnLst>
+                          </p:cTn>
+                        </p:par>
+                        <p:par>
+                          <p:cTn id="23" dur="450" fill="hold" nodeType="afterEffect" grpId="0" presetID="52" presetClass="entr" presetSubtype="0">
+                            <p:stCondLst>
+                              <p:cond delay="1170"/>
+                            </p:stCondLst>
+                            <p:childTnLst>
+                              <p:set>
+                                <p:cBhvr>
+                                  <p:cTn id="24" dur="1" fill="hold">
+                                    <p:stCondLst>
+                                      <p:cond delay="0"/>
+                                    </p:stCondLst>
+                                  </p:cTn>
+                                  <p:tgtEl>
+                                    <p:spTgt spid="17"/>
+                                  </p:tgtEl>
+                                  <p:attrNameLst>
+                                    <p:attrName>style.visibility</p:attrName>
+                                  </p:attrNameLst>
+                                </p:cBhvr>
+                                <p:to>
+                                  <p:strVal val="visible"/>
+                                </p:to>
+                              </p:set>
+                              <p:animEffect transition="in" filter="randombar(horizontal)">
+                                <p:cBhvr>
+                                  <p:cTn id="231" dur="450"/>
+                                  <p:tgtEl>
+                                    <p:spTgt spid="17"/>
+                                  </p:tgtEl>
+                                </p:cBhvr>
+                              </p:animEffect>
+                            </p:childTnLst>
+                          </p:cTn>
+                        </p:par>
+                        <p:par>
+                          <p:cTn id="25" dur="570" fill="hold" nodeType="afterEffect" grpId="0" presetID="21" presetClass="entr" presetSubtype="1">
+                            <p:stCondLst>
+                              <p:cond delay="1300"/>
+                            </p:stCondLst>
+                            <p:childTnLst>
+                              <p:set>
+                                <p:cBhvr>
+                                  <p:cTn id="26" dur="1" fill="hold">
+                                    <p:stCondLst>
+                                      <p:cond delay="0"/>
+                                    </p:stCondLst>
+                                  </p:cTn>
+                                  <p:tgtEl>
+                                    <p:spTgt spid="22"/>
+                                  </p:tgtEl>
+                                  <p:attrNameLst>
+                                    <p:attrName>style.visibility</p:attrName>
+                                  </p:attrNameLst>
+                                </p:cBhvr>
+                                <p:to>
+                                  <p:strVal val="visible"/>
+                                </p:to>
+                              </p:set>
+                              <p:animEffect transition="in" filter="wheel(1)">
+                                <p:cBhvr>
+                                  <p:cTn id="251" dur="570"/>
+                                  <p:tgtEl>
+                                    <p:spTgt spid="22"/>
+                                  </p:tgtEl>
+                                </p:cBhvr>
+                              </p:animEffect>
+                            </p:childTnLst>
+                          </p:cTn>
+                        </p:par>
+                        <p:par>
+                          <p:cTn id="27" dur="690" fill="hold" nodeType="afterEffect" grpId="0" presetID="22" presetClass="entr" presetSubtype="4">
+                            <p:stCondLst>
+                              <p:cond delay="1430"/>
+                            </p:stCondLst>
+                            <p:childTnLst>
+                              <p:set>
+                                <p:cBhvr>
+                                  <p:cTn id="28" dur="1" fill="hold">
+                                    <p:stCondLst>
+                                      <p:cond delay="0"/>
+                                    </p:stCondLst>
+                                  </p:cTn>
+                                  <p:tgtEl>
+                                    <p:spTgt spid="8"/>
+                                  </p:tgtEl>
+                                  <p:attrNameLst>
+                                    <p:attrName>style.visibility</p:attrName>
+                                  </p:attrNameLst>
+                                </p:cBhvr>
+                                <p:to>
+                                  <p:strVal val="visible"/>
+                                </p:to>
+                              </p:set>
+                              <p:animEffect transition="in" filter="wipe(down)">
+                                <p:cBhvr>
+                                  <p:cTn id="271" dur="690"/>
+                                  <p:tgtEl>
+                                    <p:spTgt spid="8"/>
+                                  </p:tgtEl>
+                                </p:cBhvr>
+                              </p:animEffect>
+                            </p:childTnLst>
+                          </p:cTn>
+                        </p:par>
+                        <p:par>
+                          <p:cTn id="29" dur="810" fill="hold" nodeType="afterEffect" grpId="0" presetID="9" presetClass="entr" presetSubtype="0">
+                            <p:stCondLst>
+                              <p:cond delay="1560"/>
+                            </p:stCondLst>
+                            <p:childTnLst>
+                              <p:set>
+                                <p:cBhvr>
+                                  <p:cTn id="30" dur="1" fill="hold">
+                                    <p:stCondLst>
+                                      <p:cond delay="0"/>
+                                    </p:stCondLst>
+                                  </p:cTn>
+                                  <p:tgtEl>
+                                    <p:spTgt spid="13"/>
+                                  </p:tgtEl>
+                                  <p:attrNameLst>
+                                    <p:attrName>style.visibility</p:attrName>
+                                  </p:attrNameLst>
+                                </p:cBhvr>
+                                <p:to>
+                                  <p:strVal val="visible"/>
+                                </p:to>
+                              </p:set>
+                              <p:animEffect transition="in" filter="fade">
+                                <p:cBhvr>
+                                  <p:cTn id="291" dur="810"/>
+                                  <p:tgtEl>
+                                    <p:spTgt spid="13"/>
+                                  </p:tgtEl>
+                                </p:cBhvr>
+                              </p:animEffect>
+                            </p:childTnLst>
+                          </p:cTn>
+                        </p:par>
+                        <p:par>
+                          <p:cTn id="31" dur="450" fill="hold" nodeType="afterEffect" grpId="0" presetID="22" presetClass="entr" presetSubtype="2">
+                            <p:stCondLst>
+                              <p:cond delay="1690"/>
+                            </p:stCondLst>
+                            <p:childTnLst>
+                              <p:set>
+                                <p:cBhvr>
+                                  <p:cTn id="32" dur="1" fill="hold">
+                                    <p:stCondLst>
+                                      <p:cond delay="0"/>
+                                    </p:stCondLst>
+                                  </p:cTn>
+                                  <p:tgtEl>
+                                    <p:spTgt spid="18"/>
+                                  </p:tgtEl>
+                                  <p:attrNameLst>
+                                    <p:attrName>style.visibility</p:attrName>
+                                  </p:attrNameLst>
+                                </p:cBhvr>
+                                <p:to>
+                                  <p:strVal val="visible"/>
+                                </p:to>
+                              </p:set>
+                              <p:animEffect transition="in" filter="wipe(right)">
+                                <p:cBhvr>
+                                  <p:cTn id="311" dur="450"/>
+                                  <p:tgtEl>
+                                    <p:spTgt spid="18"/>
+                                  </p:tgtEl>
+                                </p:cBhvr>
+                              </p:animEffect>
+                            </p:childTnLst>
+                          </p:cTn>
+                        </p:par>
+                      </p:childTnLst>
+                    </p:cTn>
+                  </p:par>
+                </p:childTnLst>
+              </p:cTn>
+              <p:prevCondLst>
+                <p:cond evt="onPrev" delay="0">
+                  <p:tgtEl>
+                    <p:sldTgt/>
+                  </p:tgtEl>
+                </p:cond>
+              </p:prevCondLst>
+              <p:nextCondLst>
+                <p:cond evt="onNext" delay="0">
+                  <p:tgtEl>
+                    <p:sldTgt/>
+                  </p:tgtEl>
+                </p:cond>
+              </p:nextCondLst>
+            </p:seq>
+          </p:childTnLst>
+        </p:cTn>
+      </p:par>
+    </p:tnLst>
+  </p:timing>
 </p:sld>
 </file>
 
@@ -15112,8 +21682,537 @@
     <a:masterClrMapping/>
   </p:clrMapOvr>
   <p:transition spd="med">
-    <p:fade/>
+    <p:zoom dir="in"/>
   </p:transition>
+  <p:timing>
+    <p:tnLst>
+      <p:par>
+        <p:cTn id="1" dur="indefinite" restart="never" nodeType="tmRoot">
+          <p:childTnLst>
+            <p:seq concurrent="1" nextAc="seek">
+              <p:cTn id="2" dur="indefinite" nodeType="mainSeq">
+                <p:childTnLst>
+                  <p:par>
+                    <p:cTn id="3" fill="hold">
+                      <p:stCondLst>
+                        <p:cond delay="indefinite"/>
+                      </p:stCondLst>
+                      <p:childTnLst>
+                        <p:par>
+                          <p:cTn id="5" dur="450" fill="hold" nodeType="clickEffect" grpId="0" presetID="42" presetClass="entr" presetSubtype="10">
+                            <p:stCondLst>
+                              <p:cond delay="0"/>
+                            </p:stCondLst>
+                            <p:childTnLst>
+                              <p:set>
+                                <p:cBhvr>
+                                  <p:cTn id="6" dur="1" fill="hold">
+                                    <p:stCondLst>
+                                      <p:cond delay="0"/>
+                                    </p:stCondLst>
+                                  </p:cTn>
+                                  <p:tgtEl>
+                                    <p:spTgt spid="3"/>
+                                  </p:tgtEl>
+                                  <p:attrNameLst>
+                                    <p:attrName>style.visibility</p:attrName>
+                                  </p:attrNameLst>
+                                </p:cBhvr>
+                                <p:to>
+                                  <p:strVal val="visible"/>
+                                </p:to>
+                              </p:set>
+                              <p:animEffect transition="in" filter="blinds(horizontal)">
+                                <p:cBhvr>
+                                  <p:cTn id="51" dur="450"/>
+                                  <p:tgtEl>
+                                    <p:spTgt spid="3"/>
+                                  </p:tgtEl>
+                                </p:cBhvr>
+                              </p:animEffect>
+                            </p:childTnLst>
+                          </p:cTn>
+                        </p:par>
+                        <p:par>
+                          <p:cTn id="7" dur="570" fill="hold" nodeType="afterEffect" grpId="0" presetID="43" presetClass="entr" presetSubtype="0">
+                            <p:stCondLst>
+                              <p:cond delay="130"/>
+                            </p:stCondLst>
+                            <p:childTnLst>
+                              <p:set>
+                                <p:cBhvr>
+                                  <p:cTn id="8" dur="1" fill="hold">
+                                    <p:stCondLst>
+                                      <p:cond delay="0"/>
+                                    </p:stCondLst>
+                                  </p:cTn>
+                                  <p:tgtEl>
+                                    <p:spTgt spid="4"/>
+                                  </p:tgtEl>
+                                  <p:attrNameLst>
+                                    <p:attrName>style.visibility</p:attrName>
+                                  </p:attrNameLst>
+                                </p:cBhvr>
+                                <p:to>
+                                  <p:strVal val="visible"/>
+                                </p:to>
+                              </p:set>
+                              <p:animEffect transition="in" filter="checkerboard(across)">
+                                <p:cBhvr>
+                                  <p:cTn id="71" dur="570"/>
+                                  <p:tgtEl>
+                                    <p:spTgt spid="4"/>
+                                  </p:tgtEl>
+                                </p:cBhvr>
+                              </p:animEffect>
+                            </p:childTnLst>
+                          </p:cTn>
+                        </p:par>
+                        <p:par>
+                          <p:cTn id="9" dur="690" fill="hold" nodeType="afterEffect" grpId="0" presetID="21" presetClass="entr" presetSubtype="2">
+                            <p:stCondLst>
+                              <p:cond delay="260"/>
+                            </p:stCondLst>
+                            <p:childTnLst>
+                              <p:set>
+                                <p:cBhvr>
+                                  <p:cTn id="10" dur="1" fill="hold">
+                                    <p:stCondLst>
+                                      <p:cond delay="0"/>
+                                    </p:stCondLst>
+                                  </p:cTn>
+                                  <p:tgtEl>
+                                    <p:spTgt spid="5"/>
+                                  </p:tgtEl>
+                                  <p:attrNameLst>
+                                    <p:attrName>style.visibility</p:attrName>
+                                  </p:attrNameLst>
+                                </p:cBhvr>
+                                <p:to>
+                                  <p:strVal val="visible"/>
+                                </p:to>
+                              </p:set>
+                              <p:animEffect transition="in" filter="wheel(2)">
+                                <p:cBhvr>
+                                  <p:cTn id="91" dur="690"/>
+                                  <p:tgtEl>
+                                    <p:spTgt spid="5"/>
+                                  </p:tgtEl>
+                                </p:cBhvr>
+                              </p:animEffect>
+                            </p:childTnLst>
+                          </p:cTn>
+                        </p:par>
+                        <p:par>
+                          <p:cTn id="11" dur="810" fill="hold" nodeType="afterEffect" grpId="0" presetID="10" presetClass="entr" presetSubtype="0">
+                            <p:stCondLst>
+                              <p:cond delay="390"/>
+                            </p:stCondLst>
+                            <p:childTnLst>
+                              <p:set>
+                                <p:cBhvr>
+                                  <p:cTn id="12" dur="1" fill="hold">
+                                    <p:stCondLst>
+                                      <p:cond delay="0"/>
+                                    </p:stCondLst>
+                                  </p:cTn>
+                                  <p:tgtEl>
+                                    <p:spTgt spid="9"/>
+                                  </p:tgtEl>
+                                  <p:attrNameLst>
+                                    <p:attrName>style.visibility</p:attrName>
+                                  </p:attrNameLst>
+                                </p:cBhvr>
+                                <p:to>
+                                  <p:strVal val="visible"/>
+                                </p:to>
+                              </p:set>
+                              <p:animEffect transition="in" filter="dissolve">
+                                <p:cBhvr>
+                                  <p:cTn id="111" dur="810"/>
+                                  <p:tgtEl>
+                                    <p:spTgt spid="9"/>
+                                  </p:tgtEl>
+                                </p:cBhvr>
+                              </p:animEffect>
+                            </p:childTnLst>
+                          </p:cTn>
+                        </p:par>
+                        <p:par>
+                          <p:cTn id="13" dur="450" fill="hold" nodeType="afterEffect" grpId="0" presetID="25" presetClass="entr" presetSubtype="1">
+                            <p:stCondLst>
+                              <p:cond delay="520"/>
+                            </p:stCondLst>
+                            <p:childTnLst>
+                              <p:set>
+                                <p:cBhvr>
+                                  <p:cTn id="14" dur="1" fill="hold">
+                                    <p:stCondLst>
+                                      <p:cond delay="0"/>
+                                    </p:stCondLst>
+                                  </p:cTn>
+                                  <p:tgtEl>
+                                    <p:spTgt spid="17"/>
+                                  </p:tgtEl>
+                                  <p:attrNameLst>
+                                    <p:attrName>style.visibility</p:attrName>
+                                  </p:attrNameLst>
+                                </p:cBhvr>
+                                <p:to>
+                                  <p:strVal val="visible"/>
+                                </p:to>
+                              </p:set>
+                              <p:animEffect transition="in" filter="strips(downRight)">
+                                <p:cBhvr>
+                                  <p:cTn id="131" dur="450"/>
+                                  <p:tgtEl>
+                                    <p:spTgt spid="17"/>
+                                  </p:tgtEl>
+                                </p:cBhvr>
+                              </p:animEffect>
+                            </p:childTnLst>
+                          </p:cTn>
+                        </p:par>
+                        <p:par>
+                          <p:cTn id="15" dur="570" fill="hold" nodeType="afterEffect" grpId="0" presetID="45" presetClass="entr" presetSubtype="1">
+                            <p:stCondLst>
+                              <p:cond delay="650"/>
+                            </p:stCondLst>
+                            <p:childTnLst>
+                              <p:set>
+                                <p:cBhvr>
+                                  <p:cTn id="16" dur="1" fill="hold">
+                                    <p:stCondLst>
+                                      <p:cond delay="0"/>
+                                    </p:stCondLst>
+                                  </p:cTn>
+                                  <p:tgtEl>
+                                    <p:spTgt spid="10"/>
+                                  </p:tgtEl>
+                                  <p:attrNameLst>
+                                    <p:attrName>style.visibility</p:attrName>
+                                  </p:attrNameLst>
+                                </p:cBhvr>
+                                <p:to>
+                                  <p:strVal val="visible"/>
+                                </p:to>
+                              </p:set>
+                              <p:animEffect transition="in" filter="barn(inHorizontal)">
+                                <p:cBhvr>
+                                  <p:cTn id="151" dur="570"/>
+                                  <p:tgtEl>
+                                    <p:spTgt spid="10"/>
+                                  </p:tgtEl>
+                                </p:cBhvr>
+                              </p:animEffect>
+                            </p:childTnLst>
+                          </p:cTn>
+                        </p:par>
+                        <p:par>
+                          <p:cTn id="17" dur="690" fill="hold" nodeType="afterEffect" grpId="0" presetID="22" presetClass="entr" presetSubtype="8">
+                            <p:stCondLst>
+                              <p:cond delay="780"/>
+                            </p:stCondLst>
+                            <p:childTnLst>
+                              <p:set>
+                                <p:cBhvr>
+                                  <p:cTn id="18" dur="1" fill="hold">
+                                    <p:stCondLst>
+                                      <p:cond delay="0"/>
+                                    </p:stCondLst>
+                                  </p:cTn>
+                                  <p:tgtEl>
+                                    <p:spTgt spid="18"/>
+                                  </p:tgtEl>
+                                  <p:attrNameLst>
+                                    <p:attrName>style.visibility</p:attrName>
+                                  </p:attrNameLst>
+                                </p:cBhvr>
+                                <p:to>
+                                  <p:strVal val="visible"/>
+                                </p:to>
+                              </p:set>
+                              <p:animEffect transition="in" filter="wipe(left)">
+                                <p:cBhvr>
+                                  <p:cTn id="171" dur="690"/>
+                                  <p:tgtEl>
+                                    <p:spTgt spid="18"/>
+                                  </p:tgtEl>
+                                </p:cBhvr>
+                              </p:animEffect>
+                            </p:childTnLst>
+                          </p:cTn>
+                        </p:par>
+                        <p:par>
+                          <p:cTn id="19" dur="810" fill="hold" nodeType="afterEffect" grpId="0" presetID="37" presetClass="entr" presetSubtype="0">
+                            <p:stCondLst>
+                              <p:cond delay="910"/>
+                            </p:stCondLst>
+                            <p:childTnLst>
+                              <p:set>
+                                <p:cBhvr>
+                                  <p:cTn id="20" dur="1" fill="hold">
+                                    <p:stCondLst>
+                                      <p:cond delay="0"/>
+                                    </p:stCondLst>
+                                  </p:cTn>
+                                  <p:tgtEl>
+                                    <p:spTgt spid="8"/>
+                                  </p:tgtEl>
+                                  <p:attrNameLst>
+                                    <p:attrName>style.visibility</p:attrName>
+                                  </p:attrNameLst>
+                                </p:cBhvr>
+                                <p:to>
+                                  <p:strVal val="visible"/>
+                                </p:to>
+                              </p:set>
+                              <p:animEffect transition="in" filter="wedge">
+                                <p:cBhvr>
+                                  <p:cTn id="191" dur="810"/>
+                                  <p:tgtEl>
+                                    <p:spTgt spid="8"/>
+                                  </p:tgtEl>
+                                </p:cBhvr>
+                              </p:animEffect>
+                            </p:childTnLst>
+                          </p:cTn>
+                        </p:par>
+                        <p:par>
+                          <p:cTn id="21" dur="450" fill="hold" nodeType="afterEffect" grpId="0" presetID="52" presetClass="entr" presetSubtype="0">
+                            <p:stCondLst>
+                              <p:cond delay="1040"/>
+                            </p:stCondLst>
+                            <p:childTnLst>
+                              <p:set>
+                                <p:cBhvr>
+                                  <p:cTn id="22" dur="1" fill="hold">
+                                    <p:stCondLst>
+                                      <p:cond delay="0"/>
+                                    </p:stCondLst>
+                                  </p:cTn>
+                                  <p:tgtEl>
+                                    <p:spTgt spid="16"/>
+                                  </p:tgtEl>
+                                  <p:attrNameLst>
+                                    <p:attrName>style.visibility</p:attrName>
+                                  </p:attrNameLst>
+                                </p:cBhvr>
+                                <p:to>
+                                  <p:strVal val="visible"/>
+                                </p:to>
+                              </p:set>
+                              <p:animEffect transition="in" filter="randombar(horizontal)">
+                                <p:cBhvr>
+                                  <p:cTn id="211" dur="450"/>
+                                  <p:tgtEl>
+                                    <p:spTgt spid="16"/>
+                                  </p:tgtEl>
+                                </p:cBhvr>
+                              </p:animEffect>
+                            </p:childTnLst>
+                          </p:cTn>
+                        </p:par>
+                        <p:par>
+                          <p:cTn id="23" dur="570" fill="hold" nodeType="afterEffect" grpId="0" presetID="21" presetClass="entr" presetSubtype="1">
+                            <p:stCondLst>
+                              <p:cond delay="1170"/>
+                            </p:stCondLst>
+                            <p:childTnLst>
+                              <p:set>
+                                <p:cBhvr>
+                                  <p:cTn id="24" dur="1" fill="hold">
+                                    <p:stCondLst>
+                                      <p:cond delay="0"/>
+                                    </p:stCondLst>
+                                  </p:cTn>
+                                  <p:tgtEl>
+                                    <p:spTgt spid="7"/>
+                                  </p:tgtEl>
+                                  <p:attrNameLst>
+                                    <p:attrName>style.visibility</p:attrName>
+                                  </p:attrNameLst>
+                                </p:cBhvr>
+                                <p:to>
+                                  <p:strVal val="visible"/>
+                                </p:to>
+                              </p:set>
+                              <p:animEffect transition="in" filter="wheel(1)">
+                                <p:cBhvr>
+                                  <p:cTn id="231" dur="570"/>
+                                  <p:tgtEl>
+                                    <p:spTgt spid="7"/>
+                                  </p:tgtEl>
+                                </p:cBhvr>
+                              </p:animEffect>
+                            </p:childTnLst>
+                          </p:cTn>
+                        </p:par>
+                        <p:par>
+                          <p:cTn id="25" dur="690" fill="hold" nodeType="afterEffect" grpId="0" presetID="22" presetClass="entr" presetSubtype="4">
+                            <p:stCondLst>
+                              <p:cond delay="1300"/>
+                            </p:stCondLst>
+                            <p:childTnLst>
+                              <p:set>
+                                <p:cBhvr>
+                                  <p:cTn id="26" dur="1" fill="hold">
+                                    <p:stCondLst>
+                                      <p:cond delay="0"/>
+                                    </p:stCondLst>
+                                  </p:cTn>
+                                  <p:tgtEl>
+                                    <p:spTgt spid="11"/>
+                                  </p:tgtEl>
+                                  <p:attrNameLst>
+                                    <p:attrName>style.visibility</p:attrName>
+                                  </p:attrNameLst>
+                                </p:cBhvr>
+                                <p:to>
+                                  <p:strVal val="visible"/>
+                                </p:to>
+                              </p:set>
+                              <p:animEffect transition="in" filter="wipe(down)">
+                                <p:cBhvr>
+                                  <p:cTn id="251" dur="690"/>
+                                  <p:tgtEl>
+                                    <p:spTgt spid="11"/>
+                                  </p:tgtEl>
+                                </p:cBhvr>
+                              </p:animEffect>
+                            </p:childTnLst>
+                          </p:cTn>
+                        </p:par>
+                        <p:par>
+                          <p:cTn id="27" dur="810" fill="hold" nodeType="afterEffect" grpId="0" presetID="9" presetClass="entr" presetSubtype="0">
+                            <p:stCondLst>
+                              <p:cond delay="1430"/>
+                            </p:stCondLst>
+                            <p:childTnLst>
+                              <p:set>
+                                <p:cBhvr>
+                                  <p:cTn id="28" dur="1" fill="hold">
+                                    <p:stCondLst>
+                                      <p:cond delay="0"/>
+                                    </p:stCondLst>
+                                  </p:cTn>
+                                  <p:tgtEl>
+                                    <p:spTgt spid="15"/>
+                                  </p:tgtEl>
+                                  <p:attrNameLst>
+                                    <p:attrName>style.visibility</p:attrName>
+                                  </p:attrNameLst>
+                                </p:cBhvr>
+                                <p:to>
+                                  <p:strVal val="visible"/>
+                                </p:to>
+                              </p:set>
+                              <p:animEffect transition="in" filter="fade">
+                                <p:cBhvr>
+                                  <p:cTn id="271" dur="810"/>
+                                  <p:tgtEl>
+                                    <p:spTgt spid="15"/>
+                                  </p:tgtEl>
+                                </p:cBhvr>
+                              </p:animEffect>
+                            </p:childTnLst>
+                          </p:cTn>
+                        </p:par>
+                        <p:par>
+                          <p:cTn id="29" dur="450" fill="hold" nodeType="afterEffect" grpId="0" presetID="22" presetClass="entr" presetSubtype="2">
+                            <p:stCondLst>
+                              <p:cond delay="1560"/>
+                            </p:stCondLst>
+                            <p:childTnLst>
+                              <p:set>
+                                <p:cBhvr>
+                                  <p:cTn id="30" dur="1" fill="hold">
+                                    <p:stCondLst>
+                                      <p:cond delay="0"/>
+                                    </p:stCondLst>
+                                  </p:cTn>
+                                  <p:tgtEl>
+                                    <p:spTgt spid="19"/>
+                                  </p:tgtEl>
+                                  <p:attrNameLst>
+                                    <p:attrName>style.visibility</p:attrName>
+                                  </p:attrNameLst>
+                                </p:cBhvr>
+                                <p:to>
+                                  <p:strVal val="visible"/>
+                                </p:to>
+                              </p:set>
+                              <p:animEffect transition="in" filter="wipe(right)">
+                                <p:cBhvr>
+                                  <p:cTn id="291" dur="450"/>
+                                  <p:tgtEl>
+                                    <p:spTgt spid="19"/>
+                                  </p:tgtEl>
+                                </p:cBhvr>
+                              </p:animEffect>
+                            </p:childTnLst>
+                          </p:cTn>
+                        </p:par>
+                        <p:par>
+                          <p:cTn id="31" dur="570" fill="hold" nodeType="afterEffect" grpId="0" presetID="18" presetClass="entr" presetSubtype="12">
+                            <p:stCondLst>
+                              <p:cond delay="1690"/>
+                            </p:stCondLst>
+                            <p:childTnLst>
+                              <p:set>
+                                <p:cBhvr>
+                                  <p:cTn id="32" dur="1" fill="hold">
+                                    <p:stCondLst>
+                                      <p:cond delay="0"/>
+                                    </p:stCondLst>
+                                  </p:cTn>
+                                  <p:tgtEl>
+                                    <p:spTgt spid="6"/>
+                                  </p:tgtEl>
+                                  <p:attrNameLst>
+                                    <p:attrName>style.visibility</p:attrName>
+                                  </p:attrNameLst>
+                                </p:cBhvr>
+                                <p:to>
+                                  <p:strVal val="visible"/>
+                                </p:to>
+                              </p:set>
+                              <p:animEffect transition="in" filter="circle(in)">
+                                <p:cBhvr>
+                                  <p:cTn id="311" dur="570"/>
+                                  <p:tgtEl>
+                                    <p:spTgt spid="6"/>
+                                  </p:tgtEl>
+                                </p:cBhvr>
+                              </p:animEffect>
+                            </p:childTnLst>
+                          </p:cTn>
+                        </p:par>
+                      </p:childTnLst>
+                    </p:cTn>
+                  </p:par>
+                </p:childTnLst>
+              </p:cTn>
+              <p:prevCondLst>
+                <p:cond evt="onPrev" delay="0">
+                  <p:tgtEl>
+                    <p:sldTgt/>
+                  </p:tgtEl>
+                </p:cond>
+              </p:prevCondLst>
+              <p:nextCondLst>
+                <p:cond evt="onNext" delay="0">
+                  <p:tgtEl>
+                    <p:sldTgt/>
+                  </p:tgtEl>
+                </p:cond>
+              </p:nextCondLst>
+            </p:seq>
+          </p:childTnLst>
+        </p:cTn>
+      </p:par>
+    </p:tnLst>
+  </p:timing>
 </p:sld>
 </file>
 
@@ -15889,8 +22988,537 @@
     <a:masterClrMapping/>
   </p:clrMapOvr>
   <p:transition spd="med">
-    <p:fade/>
+    <p:cover dir="l"/>
   </p:transition>
+  <p:timing>
+    <p:tnLst>
+      <p:par>
+        <p:cTn id="1" dur="indefinite" restart="never" nodeType="tmRoot">
+          <p:childTnLst>
+            <p:seq concurrent="1" nextAc="seek">
+              <p:cTn id="2" dur="indefinite" nodeType="mainSeq">
+                <p:childTnLst>
+                  <p:par>
+                    <p:cTn id="3" fill="hold">
+                      <p:stCondLst>
+                        <p:cond delay="indefinite"/>
+                      </p:stCondLst>
+                      <p:childTnLst>
+                        <p:par>
+                          <p:cTn id="5" dur="570" fill="hold" nodeType="clickEffect" grpId="0" presetID="43" presetClass="entr" presetSubtype="0">
+                            <p:stCondLst>
+                              <p:cond delay="0"/>
+                            </p:stCondLst>
+                            <p:childTnLst>
+                              <p:set>
+                                <p:cBhvr>
+                                  <p:cTn id="6" dur="1" fill="hold">
+                                    <p:stCondLst>
+                                      <p:cond delay="0"/>
+                                    </p:stCondLst>
+                                  </p:cTn>
+                                  <p:tgtEl>
+                                    <p:spTgt spid="3"/>
+                                  </p:tgtEl>
+                                  <p:attrNameLst>
+                                    <p:attrName>style.visibility</p:attrName>
+                                  </p:attrNameLst>
+                                </p:cBhvr>
+                                <p:to>
+                                  <p:strVal val="visible"/>
+                                </p:to>
+                              </p:set>
+                              <p:animEffect transition="in" filter="checkerboard(across)">
+                                <p:cBhvr>
+                                  <p:cTn id="51" dur="570"/>
+                                  <p:tgtEl>
+                                    <p:spTgt spid="3"/>
+                                  </p:tgtEl>
+                                </p:cBhvr>
+                              </p:animEffect>
+                            </p:childTnLst>
+                          </p:cTn>
+                        </p:par>
+                        <p:par>
+                          <p:cTn id="7" dur="690" fill="hold" nodeType="afterEffect" grpId="0" presetID="21" presetClass="entr" presetSubtype="2">
+                            <p:stCondLst>
+                              <p:cond delay="130"/>
+                            </p:stCondLst>
+                            <p:childTnLst>
+                              <p:set>
+                                <p:cBhvr>
+                                  <p:cTn id="8" dur="1" fill="hold">
+                                    <p:stCondLst>
+                                      <p:cond delay="0"/>
+                                    </p:stCondLst>
+                                  </p:cTn>
+                                  <p:tgtEl>
+                                    <p:spTgt spid="4"/>
+                                  </p:tgtEl>
+                                  <p:attrNameLst>
+                                    <p:attrName>style.visibility</p:attrName>
+                                  </p:attrNameLst>
+                                </p:cBhvr>
+                                <p:to>
+                                  <p:strVal val="visible"/>
+                                </p:to>
+                              </p:set>
+                              <p:animEffect transition="in" filter="wheel(2)">
+                                <p:cBhvr>
+                                  <p:cTn id="71" dur="690"/>
+                                  <p:tgtEl>
+                                    <p:spTgt spid="4"/>
+                                  </p:tgtEl>
+                                </p:cBhvr>
+                              </p:animEffect>
+                            </p:childTnLst>
+                          </p:cTn>
+                        </p:par>
+                        <p:par>
+                          <p:cTn id="9" dur="810" fill="hold" nodeType="afterEffect" grpId="0" presetID="10" presetClass="entr" presetSubtype="0">
+                            <p:stCondLst>
+                              <p:cond delay="260"/>
+                            </p:stCondLst>
+                            <p:childTnLst>
+                              <p:set>
+                                <p:cBhvr>
+                                  <p:cTn id="10" dur="1" fill="hold">
+                                    <p:stCondLst>
+                                      <p:cond delay="0"/>
+                                    </p:stCondLst>
+                                  </p:cTn>
+                                  <p:tgtEl>
+                                    <p:spTgt spid="5"/>
+                                  </p:tgtEl>
+                                  <p:attrNameLst>
+                                    <p:attrName>style.visibility</p:attrName>
+                                  </p:attrNameLst>
+                                </p:cBhvr>
+                                <p:to>
+                                  <p:strVal val="visible"/>
+                                </p:to>
+                              </p:set>
+                              <p:animEffect transition="in" filter="dissolve">
+                                <p:cBhvr>
+                                  <p:cTn id="91" dur="810"/>
+                                  <p:tgtEl>
+                                    <p:spTgt spid="5"/>
+                                  </p:tgtEl>
+                                </p:cBhvr>
+                              </p:animEffect>
+                            </p:childTnLst>
+                          </p:cTn>
+                        </p:par>
+                        <p:par>
+                          <p:cTn id="11" dur="450" fill="hold" nodeType="afterEffect" grpId="0" presetID="25" presetClass="entr" presetSubtype="1">
+                            <p:stCondLst>
+                              <p:cond delay="390"/>
+                            </p:stCondLst>
+                            <p:childTnLst>
+                              <p:set>
+                                <p:cBhvr>
+                                  <p:cTn id="12" dur="1" fill="hold">
+                                    <p:stCondLst>
+                                      <p:cond delay="0"/>
+                                    </p:stCondLst>
+                                  </p:cTn>
+                                  <p:tgtEl>
+                                    <p:spTgt spid="6"/>
+                                  </p:tgtEl>
+                                  <p:attrNameLst>
+                                    <p:attrName>style.visibility</p:attrName>
+                                  </p:attrNameLst>
+                                </p:cBhvr>
+                                <p:to>
+                                  <p:strVal val="visible"/>
+                                </p:to>
+                              </p:set>
+                              <p:animEffect transition="in" filter="strips(downRight)">
+                                <p:cBhvr>
+                                  <p:cTn id="111" dur="450"/>
+                                  <p:tgtEl>
+                                    <p:spTgt spid="6"/>
+                                  </p:tgtEl>
+                                </p:cBhvr>
+                              </p:animEffect>
+                            </p:childTnLst>
+                          </p:cTn>
+                        </p:par>
+                        <p:par>
+                          <p:cTn id="13" dur="570" fill="hold" nodeType="afterEffect" grpId="0" presetID="45" presetClass="entr" presetSubtype="1">
+                            <p:stCondLst>
+                              <p:cond delay="520"/>
+                            </p:stCondLst>
+                            <p:childTnLst>
+                              <p:set>
+                                <p:cBhvr>
+                                  <p:cTn id="14" dur="1" fill="hold">
+                                    <p:stCondLst>
+                                      <p:cond delay="0"/>
+                                    </p:stCondLst>
+                                  </p:cTn>
+                                  <p:tgtEl>
+                                    <p:spTgt spid="9"/>
+                                  </p:tgtEl>
+                                  <p:attrNameLst>
+                                    <p:attrName>style.visibility</p:attrName>
+                                  </p:attrNameLst>
+                                </p:cBhvr>
+                                <p:to>
+                                  <p:strVal val="visible"/>
+                                </p:to>
+                              </p:set>
+                              <p:animEffect transition="in" filter="barn(inHorizontal)">
+                                <p:cBhvr>
+                                  <p:cTn id="131" dur="570"/>
+                                  <p:tgtEl>
+                                    <p:spTgt spid="9"/>
+                                  </p:tgtEl>
+                                </p:cBhvr>
+                              </p:animEffect>
+                            </p:childTnLst>
+                          </p:cTn>
+                        </p:par>
+                        <p:par>
+                          <p:cTn id="15" dur="690" fill="hold" nodeType="afterEffect" grpId="0" presetID="22" presetClass="entr" presetSubtype="8">
+                            <p:stCondLst>
+                              <p:cond delay="650"/>
+                            </p:stCondLst>
+                            <p:childTnLst>
+                              <p:set>
+                                <p:cBhvr>
+                                  <p:cTn id="16" dur="1" fill="hold">
+                                    <p:stCondLst>
+                                      <p:cond delay="0"/>
+                                    </p:stCondLst>
+                                  </p:cTn>
+                                  <p:tgtEl>
+                                    <p:spTgt spid="12"/>
+                                  </p:tgtEl>
+                                  <p:attrNameLst>
+                                    <p:attrName>style.visibility</p:attrName>
+                                  </p:attrNameLst>
+                                </p:cBhvr>
+                                <p:to>
+                                  <p:strVal val="visible"/>
+                                </p:to>
+                              </p:set>
+                              <p:animEffect transition="in" filter="wipe(left)">
+                                <p:cBhvr>
+                                  <p:cTn id="151" dur="690"/>
+                                  <p:tgtEl>
+                                    <p:spTgt spid="12"/>
+                                  </p:tgtEl>
+                                </p:cBhvr>
+                              </p:animEffect>
+                            </p:childTnLst>
+                          </p:cTn>
+                        </p:par>
+                        <p:par>
+                          <p:cTn id="17" dur="810" fill="hold" nodeType="afterEffect" grpId="0" presetID="37" presetClass="entr" presetSubtype="0">
+                            <p:stCondLst>
+                              <p:cond delay="780"/>
+                            </p:stCondLst>
+                            <p:childTnLst>
+                              <p:set>
+                                <p:cBhvr>
+                                  <p:cTn id="18" dur="1" fill="hold">
+                                    <p:stCondLst>
+                                      <p:cond delay="0"/>
+                                    </p:stCondLst>
+                                  </p:cTn>
+                                  <p:tgtEl>
+                                    <p:spTgt spid="15"/>
+                                  </p:tgtEl>
+                                  <p:attrNameLst>
+                                    <p:attrName>style.visibility</p:attrName>
+                                  </p:attrNameLst>
+                                </p:cBhvr>
+                                <p:to>
+                                  <p:strVal val="visible"/>
+                                </p:to>
+                              </p:set>
+                              <p:animEffect transition="in" filter="wedge">
+                                <p:cBhvr>
+                                  <p:cTn id="171" dur="810"/>
+                                  <p:tgtEl>
+                                    <p:spTgt spid="15"/>
+                                  </p:tgtEl>
+                                </p:cBhvr>
+                              </p:animEffect>
+                            </p:childTnLst>
+                          </p:cTn>
+                        </p:par>
+                        <p:par>
+                          <p:cTn id="19" dur="450" fill="hold" nodeType="afterEffect" grpId="0" presetID="52" presetClass="entr" presetSubtype="0">
+                            <p:stCondLst>
+                              <p:cond delay="910"/>
+                            </p:stCondLst>
+                            <p:childTnLst>
+                              <p:set>
+                                <p:cBhvr>
+                                  <p:cTn id="20" dur="1" fill="hold">
+                                    <p:stCondLst>
+                                      <p:cond delay="0"/>
+                                    </p:stCondLst>
+                                  </p:cTn>
+                                  <p:tgtEl>
+                                    <p:spTgt spid="7"/>
+                                  </p:tgtEl>
+                                  <p:attrNameLst>
+                                    <p:attrName>style.visibility</p:attrName>
+                                  </p:attrNameLst>
+                                </p:cBhvr>
+                                <p:to>
+                                  <p:strVal val="visible"/>
+                                </p:to>
+                              </p:set>
+                              <p:animEffect transition="in" filter="randombar(horizontal)">
+                                <p:cBhvr>
+                                  <p:cTn id="191" dur="450"/>
+                                  <p:tgtEl>
+                                    <p:spTgt spid="7"/>
+                                  </p:tgtEl>
+                                </p:cBhvr>
+                              </p:animEffect>
+                            </p:childTnLst>
+                          </p:cTn>
+                        </p:par>
+                        <p:par>
+                          <p:cTn id="21" dur="570" fill="hold" nodeType="afterEffect" grpId="0" presetID="21" presetClass="entr" presetSubtype="1">
+                            <p:stCondLst>
+                              <p:cond delay="1040"/>
+                            </p:stCondLst>
+                            <p:childTnLst>
+                              <p:set>
+                                <p:cBhvr>
+                                  <p:cTn id="22" dur="1" fill="hold">
+                                    <p:stCondLst>
+                                      <p:cond delay="0"/>
+                                    </p:stCondLst>
+                                  </p:cTn>
+                                  <p:tgtEl>
+                                    <p:spTgt spid="8"/>
+                                  </p:tgtEl>
+                                  <p:attrNameLst>
+                                    <p:attrName>style.visibility</p:attrName>
+                                  </p:attrNameLst>
+                                </p:cBhvr>
+                                <p:to>
+                                  <p:strVal val="visible"/>
+                                </p:to>
+                              </p:set>
+                              <p:animEffect transition="in" filter="wheel(1)">
+                                <p:cBhvr>
+                                  <p:cTn id="211" dur="570"/>
+                                  <p:tgtEl>
+                                    <p:spTgt spid="8"/>
+                                  </p:tgtEl>
+                                </p:cBhvr>
+                              </p:animEffect>
+                            </p:childTnLst>
+                          </p:cTn>
+                        </p:par>
+                        <p:par>
+                          <p:cTn id="23" dur="690" fill="hold" nodeType="afterEffect" grpId="0" presetID="22" presetClass="entr" presetSubtype="4">
+                            <p:stCondLst>
+                              <p:cond delay="1170"/>
+                            </p:stCondLst>
+                            <p:childTnLst>
+                              <p:set>
+                                <p:cBhvr>
+                                  <p:cTn id="24" dur="1" fill="hold">
+                                    <p:stCondLst>
+                                      <p:cond delay="0"/>
+                                    </p:stCondLst>
+                                  </p:cTn>
+                                  <p:tgtEl>
+                                    <p:spTgt spid="10"/>
+                                  </p:tgtEl>
+                                  <p:attrNameLst>
+                                    <p:attrName>style.visibility</p:attrName>
+                                  </p:attrNameLst>
+                                </p:cBhvr>
+                                <p:to>
+                                  <p:strVal val="visible"/>
+                                </p:to>
+                              </p:set>
+                              <p:animEffect transition="in" filter="wipe(down)">
+                                <p:cBhvr>
+                                  <p:cTn id="231" dur="690"/>
+                                  <p:tgtEl>
+                                    <p:spTgt spid="10"/>
+                                  </p:tgtEl>
+                                </p:cBhvr>
+                              </p:animEffect>
+                            </p:childTnLst>
+                          </p:cTn>
+                        </p:par>
+                        <p:par>
+                          <p:cTn id="25" dur="810" fill="hold" nodeType="afterEffect" grpId="0" presetID="9" presetClass="entr" presetSubtype="0">
+                            <p:stCondLst>
+                              <p:cond delay="1300"/>
+                            </p:stCondLst>
+                            <p:childTnLst>
+                              <p:set>
+                                <p:cBhvr>
+                                  <p:cTn id="26" dur="1" fill="hold">
+                                    <p:stCondLst>
+                                      <p:cond delay="0"/>
+                                    </p:stCondLst>
+                                  </p:cTn>
+                                  <p:tgtEl>
+                                    <p:spTgt spid="11"/>
+                                  </p:tgtEl>
+                                  <p:attrNameLst>
+                                    <p:attrName>style.visibility</p:attrName>
+                                  </p:attrNameLst>
+                                </p:cBhvr>
+                                <p:to>
+                                  <p:strVal val="visible"/>
+                                </p:to>
+                              </p:set>
+                              <p:animEffect transition="in" filter="fade">
+                                <p:cBhvr>
+                                  <p:cTn id="251" dur="810"/>
+                                  <p:tgtEl>
+                                    <p:spTgt spid="11"/>
+                                  </p:tgtEl>
+                                </p:cBhvr>
+                              </p:animEffect>
+                            </p:childTnLst>
+                          </p:cTn>
+                        </p:par>
+                        <p:par>
+                          <p:cTn id="27" dur="450" fill="hold" nodeType="afterEffect" grpId="0" presetID="22" presetClass="entr" presetSubtype="2">
+                            <p:stCondLst>
+                              <p:cond delay="1430"/>
+                            </p:stCondLst>
+                            <p:childTnLst>
+                              <p:set>
+                                <p:cBhvr>
+                                  <p:cTn id="28" dur="1" fill="hold">
+                                    <p:stCondLst>
+                                      <p:cond delay="0"/>
+                                    </p:stCondLst>
+                                  </p:cTn>
+                                  <p:tgtEl>
+                                    <p:spTgt spid="13"/>
+                                  </p:tgtEl>
+                                  <p:attrNameLst>
+                                    <p:attrName>style.visibility</p:attrName>
+                                  </p:attrNameLst>
+                                </p:cBhvr>
+                                <p:to>
+                                  <p:strVal val="visible"/>
+                                </p:to>
+                              </p:set>
+                              <p:animEffect transition="in" filter="wipe(right)">
+                                <p:cBhvr>
+                                  <p:cTn id="271" dur="450"/>
+                                  <p:tgtEl>
+                                    <p:spTgt spid="13"/>
+                                  </p:tgtEl>
+                                </p:cBhvr>
+                              </p:animEffect>
+                            </p:childTnLst>
+                          </p:cTn>
+                        </p:par>
+                        <p:par>
+                          <p:cTn id="29" dur="570" fill="hold" nodeType="afterEffect" grpId="0" presetID="18" presetClass="entr" presetSubtype="12">
+                            <p:stCondLst>
+                              <p:cond delay="1560"/>
+                            </p:stCondLst>
+                            <p:childTnLst>
+                              <p:set>
+                                <p:cBhvr>
+                                  <p:cTn id="30" dur="1" fill="hold">
+                                    <p:stCondLst>
+                                      <p:cond delay="0"/>
+                                    </p:stCondLst>
+                                  </p:cTn>
+                                  <p:tgtEl>
+                                    <p:spTgt spid="14"/>
+                                  </p:tgtEl>
+                                  <p:attrNameLst>
+                                    <p:attrName>style.visibility</p:attrName>
+                                  </p:attrNameLst>
+                                </p:cBhvr>
+                                <p:to>
+                                  <p:strVal val="visible"/>
+                                </p:to>
+                              </p:set>
+                              <p:animEffect transition="in" filter="circle(in)">
+                                <p:cBhvr>
+                                  <p:cTn id="291" dur="570"/>
+                                  <p:tgtEl>
+                                    <p:spTgt spid="14"/>
+                                  </p:tgtEl>
+                                </p:cBhvr>
+                              </p:animEffect>
+                            </p:childTnLst>
+                          </p:cTn>
+                        </p:par>
+                        <p:par>
+                          <p:cTn id="31" dur="690" fill="hold" nodeType="afterEffect" grpId="0" presetID="22" presetClass="entr" presetSubtype="1">
+                            <p:stCondLst>
+                              <p:cond delay="1690"/>
+                            </p:stCondLst>
+                            <p:childTnLst>
+                              <p:set>
+                                <p:cBhvr>
+                                  <p:cTn id="32" dur="1" fill="hold">
+                                    <p:stCondLst>
+                                      <p:cond delay="0"/>
+                                    </p:stCondLst>
+                                  </p:cTn>
+                                  <p:tgtEl>
+                                    <p:spTgt spid="16"/>
+                                  </p:tgtEl>
+                                  <p:attrNameLst>
+                                    <p:attrName>style.visibility</p:attrName>
+                                  </p:attrNameLst>
+                                </p:cBhvr>
+                                <p:to>
+                                  <p:strVal val="visible"/>
+                                </p:to>
+                              </p:set>
+                              <p:animEffect transition="in" filter="wipe(up)">
+                                <p:cBhvr>
+                                  <p:cTn id="311" dur="690"/>
+                                  <p:tgtEl>
+                                    <p:spTgt spid="16"/>
+                                  </p:tgtEl>
+                                </p:cBhvr>
+                              </p:animEffect>
+                            </p:childTnLst>
+                          </p:cTn>
+                        </p:par>
+                      </p:childTnLst>
+                    </p:cTn>
+                  </p:par>
+                </p:childTnLst>
+              </p:cTn>
+              <p:prevCondLst>
+                <p:cond evt="onPrev" delay="0">
+                  <p:tgtEl>
+                    <p:sldTgt/>
+                  </p:tgtEl>
+                </p:cond>
+              </p:prevCondLst>
+              <p:nextCondLst>
+                <p:cond evt="onNext" delay="0">
+                  <p:tgtEl>
+                    <p:sldTgt/>
+                  </p:tgtEl>
+                </p:cond>
+              </p:nextCondLst>
+            </p:seq>
+          </p:childTnLst>
+        </p:cTn>
+      </p:par>
+    </p:tnLst>
+  </p:timing>
 </p:sld>
 </file>
 
@@ -16873,8 +24501,537 @@
     <a:masterClrMapping/>
   </p:clrMapOvr>
   <p:transition spd="med">
-    <p:fade/>
+    <p:checker dir="across"/>
   </p:transition>
+  <p:timing>
+    <p:tnLst>
+      <p:par>
+        <p:cTn id="1" dur="indefinite" restart="never" nodeType="tmRoot">
+          <p:childTnLst>
+            <p:seq concurrent="1" nextAc="seek">
+              <p:cTn id="2" dur="indefinite" nodeType="mainSeq">
+                <p:childTnLst>
+                  <p:par>
+                    <p:cTn id="3" fill="hold">
+                      <p:stCondLst>
+                        <p:cond delay="indefinite"/>
+                      </p:stCondLst>
+                      <p:childTnLst>
+                        <p:par>
+                          <p:cTn id="5" dur="690" fill="hold" nodeType="clickEffect" grpId="0" presetID="21" presetClass="entr" presetSubtype="2">
+                            <p:stCondLst>
+                              <p:cond delay="0"/>
+                            </p:stCondLst>
+                            <p:childTnLst>
+                              <p:set>
+                                <p:cBhvr>
+                                  <p:cTn id="6" dur="1" fill="hold">
+                                    <p:stCondLst>
+                                      <p:cond delay="0"/>
+                                    </p:stCondLst>
+                                  </p:cTn>
+                                  <p:tgtEl>
+                                    <p:spTgt spid="3"/>
+                                  </p:tgtEl>
+                                  <p:attrNameLst>
+                                    <p:attrName>style.visibility</p:attrName>
+                                  </p:attrNameLst>
+                                </p:cBhvr>
+                                <p:to>
+                                  <p:strVal val="visible"/>
+                                </p:to>
+                              </p:set>
+                              <p:animEffect transition="in" filter="wheel(2)">
+                                <p:cBhvr>
+                                  <p:cTn id="51" dur="690"/>
+                                  <p:tgtEl>
+                                    <p:spTgt spid="3"/>
+                                  </p:tgtEl>
+                                </p:cBhvr>
+                              </p:animEffect>
+                            </p:childTnLst>
+                          </p:cTn>
+                        </p:par>
+                        <p:par>
+                          <p:cTn id="7" dur="810" fill="hold" nodeType="afterEffect" grpId="0" presetID="10" presetClass="entr" presetSubtype="0">
+                            <p:stCondLst>
+                              <p:cond delay="130"/>
+                            </p:stCondLst>
+                            <p:childTnLst>
+                              <p:set>
+                                <p:cBhvr>
+                                  <p:cTn id="8" dur="1" fill="hold">
+                                    <p:stCondLst>
+                                      <p:cond delay="0"/>
+                                    </p:stCondLst>
+                                  </p:cTn>
+                                  <p:tgtEl>
+                                    <p:spTgt spid="4"/>
+                                  </p:tgtEl>
+                                  <p:attrNameLst>
+                                    <p:attrName>style.visibility</p:attrName>
+                                  </p:attrNameLst>
+                                </p:cBhvr>
+                                <p:to>
+                                  <p:strVal val="visible"/>
+                                </p:to>
+                              </p:set>
+                              <p:animEffect transition="in" filter="dissolve">
+                                <p:cBhvr>
+                                  <p:cTn id="71" dur="810"/>
+                                  <p:tgtEl>
+                                    <p:spTgt spid="4"/>
+                                  </p:tgtEl>
+                                </p:cBhvr>
+                              </p:animEffect>
+                            </p:childTnLst>
+                          </p:cTn>
+                        </p:par>
+                        <p:par>
+                          <p:cTn id="9" dur="450" fill="hold" nodeType="afterEffect" grpId="0" presetID="25" presetClass="entr" presetSubtype="1">
+                            <p:stCondLst>
+                              <p:cond delay="260"/>
+                            </p:stCondLst>
+                            <p:childTnLst>
+                              <p:set>
+                                <p:cBhvr>
+                                  <p:cTn id="10" dur="1" fill="hold">
+                                    <p:stCondLst>
+                                      <p:cond delay="0"/>
+                                    </p:stCondLst>
+                                  </p:cTn>
+                                  <p:tgtEl>
+                                    <p:spTgt spid="5"/>
+                                  </p:tgtEl>
+                                  <p:attrNameLst>
+                                    <p:attrName>style.visibility</p:attrName>
+                                  </p:attrNameLst>
+                                </p:cBhvr>
+                                <p:to>
+                                  <p:strVal val="visible"/>
+                                </p:to>
+                              </p:set>
+                              <p:animEffect transition="in" filter="strips(downRight)">
+                                <p:cBhvr>
+                                  <p:cTn id="91" dur="450"/>
+                                  <p:tgtEl>
+                                    <p:spTgt spid="5"/>
+                                  </p:tgtEl>
+                                </p:cBhvr>
+                              </p:animEffect>
+                            </p:childTnLst>
+                          </p:cTn>
+                        </p:par>
+                        <p:par>
+                          <p:cTn id="11" dur="570" fill="hold" nodeType="afterEffect" grpId="0" presetID="45" presetClass="entr" presetSubtype="1">
+                            <p:stCondLst>
+                              <p:cond delay="390"/>
+                            </p:stCondLst>
+                            <p:childTnLst>
+                              <p:set>
+                                <p:cBhvr>
+                                  <p:cTn id="12" dur="1" fill="hold">
+                                    <p:stCondLst>
+                                      <p:cond delay="0"/>
+                                    </p:stCondLst>
+                                  </p:cTn>
+                                  <p:tgtEl>
+                                    <p:spTgt spid="6"/>
+                                  </p:tgtEl>
+                                  <p:attrNameLst>
+                                    <p:attrName>style.visibility</p:attrName>
+                                  </p:attrNameLst>
+                                </p:cBhvr>
+                                <p:to>
+                                  <p:strVal val="visible"/>
+                                </p:to>
+                              </p:set>
+                              <p:animEffect transition="in" filter="barn(inHorizontal)">
+                                <p:cBhvr>
+                                  <p:cTn id="111" dur="570"/>
+                                  <p:tgtEl>
+                                    <p:spTgt spid="6"/>
+                                  </p:tgtEl>
+                                </p:cBhvr>
+                              </p:animEffect>
+                            </p:childTnLst>
+                          </p:cTn>
+                        </p:par>
+                        <p:par>
+                          <p:cTn id="13" dur="690" fill="hold" nodeType="afterEffect" grpId="0" presetID="22" presetClass="entr" presetSubtype="8">
+                            <p:stCondLst>
+                              <p:cond delay="520"/>
+                            </p:stCondLst>
+                            <p:childTnLst>
+                              <p:set>
+                                <p:cBhvr>
+                                  <p:cTn id="14" dur="1" fill="hold">
+                                    <p:stCondLst>
+                                      <p:cond delay="0"/>
+                                    </p:stCondLst>
+                                  </p:cTn>
+                                  <p:tgtEl>
+                                    <p:spTgt spid="19"/>
+                                  </p:tgtEl>
+                                  <p:attrNameLst>
+                                    <p:attrName>style.visibility</p:attrName>
+                                  </p:attrNameLst>
+                                </p:cBhvr>
+                                <p:to>
+                                  <p:strVal val="visible"/>
+                                </p:to>
+                              </p:set>
+                              <p:animEffect transition="in" filter="wipe(left)">
+                                <p:cBhvr>
+                                  <p:cTn id="131" dur="690"/>
+                                  <p:tgtEl>
+                                    <p:spTgt spid="19"/>
+                                  </p:tgtEl>
+                                </p:cBhvr>
+                              </p:animEffect>
+                            </p:childTnLst>
+                          </p:cTn>
+                        </p:par>
+                        <p:par>
+                          <p:cTn id="15" dur="810" fill="hold" nodeType="afterEffect" grpId="0" presetID="37" presetClass="entr" presetSubtype="0">
+                            <p:stCondLst>
+                              <p:cond delay="650"/>
+                            </p:stCondLst>
+                            <p:childTnLst>
+                              <p:set>
+                                <p:cBhvr>
+                                  <p:cTn id="16" dur="1" fill="hold">
+                                    <p:stCondLst>
+                                      <p:cond delay="0"/>
+                                    </p:stCondLst>
+                                  </p:cTn>
+                                  <p:tgtEl>
+                                    <p:spTgt spid="17"/>
+                                  </p:tgtEl>
+                                  <p:attrNameLst>
+                                    <p:attrName>style.visibility</p:attrName>
+                                  </p:attrNameLst>
+                                </p:cBhvr>
+                                <p:to>
+                                  <p:strVal val="visible"/>
+                                </p:to>
+                              </p:set>
+                              <p:animEffect transition="in" filter="wedge">
+                                <p:cBhvr>
+                                  <p:cTn id="151" dur="810"/>
+                                  <p:tgtEl>
+                                    <p:spTgt spid="17"/>
+                                  </p:tgtEl>
+                                </p:cBhvr>
+                              </p:animEffect>
+                            </p:childTnLst>
+                          </p:cTn>
+                        </p:par>
+                        <p:par>
+                          <p:cTn id="17" dur="450" fill="hold" nodeType="afterEffect" grpId="0" presetID="52" presetClass="entr" presetSubtype="0">
+                            <p:stCondLst>
+                              <p:cond delay="780"/>
+                            </p:stCondLst>
+                            <p:childTnLst>
+                              <p:set>
+                                <p:cBhvr>
+                                  <p:cTn id="18" dur="1" fill="hold">
+                                    <p:stCondLst>
+                                      <p:cond delay="0"/>
+                                    </p:stCondLst>
+                                  </p:cTn>
+                                  <p:tgtEl>
+                                    <p:spTgt spid="11"/>
+                                  </p:tgtEl>
+                                  <p:attrNameLst>
+                                    <p:attrName>style.visibility</p:attrName>
+                                  </p:attrNameLst>
+                                </p:cBhvr>
+                                <p:to>
+                                  <p:strVal val="visible"/>
+                                </p:to>
+                              </p:set>
+                              <p:animEffect transition="in" filter="randombar(horizontal)">
+                                <p:cBhvr>
+                                  <p:cTn id="171" dur="450"/>
+                                  <p:tgtEl>
+                                    <p:spTgt spid="11"/>
+                                  </p:tgtEl>
+                                </p:cBhvr>
+                              </p:animEffect>
+                            </p:childTnLst>
+                          </p:cTn>
+                        </p:par>
+                        <p:par>
+                          <p:cTn id="19" dur="570" fill="hold" nodeType="afterEffect" grpId="0" presetID="21" presetClass="entr" presetSubtype="1">
+                            <p:stCondLst>
+                              <p:cond delay="910"/>
+                            </p:stCondLst>
+                            <p:childTnLst>
+                              <p:set>
+                                <p:cBhvr>
+                                  <p:cTn id="20" dur="1" fill="hold">
+                                    <p:stCondLst>
+                                      <p:cond delay="0"/>
+                                    </p:stCondLst>
+                                  </p:cTn>
+                                  <p:tgtEl>
+                                    <p:spTgt spid="20"/>
+                                  </p:tgtEl>
+                                  <p:attrNameLst>
+                                    <p:attrName>style.visibility</p:attrName>
+                                  </p:attrNameLst>
+                                </p:cBhvr>
+                                <p:to>
+                                  <p:strVal val="visible"/>
+                                </p:to>
+                              </p:set>
+                              <p:animEffect transition="in" filter="wheel(1)">
+                                <p:cBhvr>
+                                  <p:cTn id="191" dur="570"/>
+                                  <p:tgtEl>
+                                    <p:spTgt spid="20"/>
+                                  </p:tgtEl>
+                                </p:cBhvr>
+                              </p:animEffect>
+                            </p:childTnLst>
+                          </p:cTn>
+                        </p:par>
+                        <p:par>
+                          <p:cTn id="21" dur="690" fill="hold" nodeType="afterEffect" grpId="0" presetID="22" presetClass="entr" presetSubtype="4">
+                            <p:stCondLst>
+                              <p:cond delay="1040"/>
+                            </p:stCondLst>
+                            <p:childTnLst>
+                              <p:set>
+                                <p:cBhvr>
+                                  <p:cTn id="22" dur="1" fill="hold">
+                                    <p:stCondLst>
+                                      <p:cond delay="0"/>
+                                    </p:stCondLst>
+                                  </p:cTn>
+                                  <p:tgtEl>
+                                    <p:spTgt spid="15"/>
+                                  </p:tgtEl>
+                                  <p:attrNameLst>
+                                    <p:attrName>style.visibility</p:attrName>
+                                  </p:attrNameLst>
+                                </p:cBhvr>
+                                <p:to>
+                                  <p:strVal val="visible"/>
+                                </p:to>
+                              </p:set>
+                              <p:animEffect transition="in" filter="wipe(down)">
+                                <p:cBhvr>
+                                  <p:cTn id="211" dur="690"/>
+                                  <p:tgtEl>
+                                    <p:spTgt spid="15"/>
+                                  </p:tgtEl>
+                                </p:cBhvr>
+                              </p:animEffect>
+                            </p:childTnLst>
+                          </p:cTn>
+                        </p:par>
+                        <p:par>
+                          <p:cTn id="23" dur="810" fill="hold" nodeType="afterEffect" grpId="0" presetID="9" presetClass="entr" presetSubtype="0">
+                            <p:stCondLst>
+                              <p:cond delay="1170"/>
+                            </p:stCondLst>
+                            <p:childTnLst>
+                              <p:set>
+                                <p:cBhvr>
+                                  <p:cTn id="24" dur="1" fill="hold">
+                                    <p:stCondLst>
+                                      <p:cond delay="0"/>
+                                    </p:stCondLst>
+                                  </p:cTn>
+                                  <p:tgtEl>
+                                    <p:spTgt spid="9"/>
+                                  </p:tgtEl>
+                                  <p:attrNameLst>
+                                    <p:attrName>style.visibility</p:attrName>
+                                  </p:attrNameLst>
+                                </p:cBhvr>
+                                <p:to>
+                                  <p:strVal val="visible"/>
+                                </p:to>
+                              </p:set>
+                              <p:animEffect transition="in" filter="fade">
+                                <p:cBhvr>
+                                  <p:cTn id="231" dur="810"/>
+                                  <p:tgtEl>
+                                    <p:spTgt spid="9"/>
+                                  </p:tgtEl>
+                                </p:cBhvr>
+                              </p:animEffect>
+                            </p:childTnLst>
+                          </p:cTn>
+                        </p:par>
+                        <p:par>
+                          <p:cTn id="25" dur="450" fill="hold" nodeType="afterEffect" grpId="0" presetID="22" presetClass="entr" presetSubtype="2">
+                            <p:stCondLst>
+                              <p:cond delay="1300"/>
+                            </p:stCondLst>
+                            <p:childTnLst>
+                              <p:set>
+                                <p:cBhvr>
+                                  <p:cTn id="26" dur="1" fill="hold">
+                                    <p:stCondLst>
+                                      <p:cond delay="0"/>
+                                    </p:stCondLst>
+                                  </p:cTn>
+                                  <p:tgtEl>
+                                    <p:spTgt spid="10"/>
+                                  </p:tgtEl>
+                                  <p:attrNameLst>
+                                    <p:attrName>style.visibility</p:attrName>
+                                  </p:attrNameLst>
+                                </p:cBhvr>
+                                <p:to>
+                                  <p:strVal val="visible"/>
+                                </p:to>
+                              </p:set>
+                              <p:animEffect transition="in" filter="wipe(right)">
+                                <p:cBhvr>
+                                  <p:cTn id="251" dur="450"/>
+                                  <p:tgtEl>
+                                    <p:spTgt spid="10"/>
+                                  </p:tgtEl>
+                                </p:cBhvr>
+                              </p:animEffect>
+                            </p:childTnLst>
+                          </p:cTn>
+                        </p:par>
+                        <p:par>
+                          <p:cTn id="27" dur="570" fill="hold" nodeType="afterEffect" grpId="0" presetID="18" presetClass="entr" presetSubtype="12">
+                            <p:stCondLst>
+                              <p:cond delay="1430"/>
+                            </p:stCondLst>
+                            <p:childTnLst>
+                              <p:set>
+                                <p:cBhvr>
+                                  <p:cTn id="28" dur="1" fill="hold">
+                                    <p:stCondLst>
+                                      <p:cond delay="0"/>
+                                    </p:stCondLst>
+                                  </p:cTn>
+                                  <p:tgtEl>
+                                    <p:spTgt spid="16"/>
+                                  </p:tgtEl>
+                                  <p:attrNameLst>
+                                    <p:attrName>style.visibility</p:attrName>
+                                  </p:attrNameLst>
+                                </p:cBhvr>
+                                <p:to>
+                                  <p:strVal val="visible"/>
+                                </p:to>
+                              </p:set>
+                              <p:animEffect transition="in" filter="circle(in)">
+                                <p:cBhvr>
+                                  <p:cTn id="271" dur="570"/>
+                                  <p:tgtEl>
+                                    <p:spTgt spid="16"/>
+                                  </p:tgtEl>
+                                </p:cBhvr>
+                              </p:animEffect>
+                            </p:childTnLst>
+                          </p:cTn>
+                        </p:par>
+                        <p:par>
+                          <p:cTn id="29" dur="690" fill="hold" nodeType="afterEffect" grpId="0" presetID="22" presetClass="entr" presetSubtype="1">
+                            <p:stCondLst>
+                              <p:cond delay="1560"/>
+                            </p:stCondLst>
+                            <p:childTnLst>
+                              <p:set>
+                                <p:cBhvr>
+                                  <p:cTn id="30" dur="1" fill="hold">
+                                    <p:stCondLst>
+                                      <p:cond delay="0"/>
+                                    </p:stCondLst>
+                                  </p:cTn>
+                                  <p:tgtEl>
+                                    <p:spTgt spid="13"/>
+                                  </p:tgtEl>
+                                  <p:attrNameLst>
+                                    <p:attrName>style.visibility</p:attrName>
+                                  </p:attrNameLst>
+                                </p:cBhvr>
+                                <p:to>
+                                  <p:strVal val="visible"/>
+                                </p:to>
+                              </p:set>
+                              <p:animEffect transition="in" filter="wipe(up)">
+                                <p:cBhvr>
+                                  <p:cTn id="291" dur="690"/>
+                                  <p:tgtEl>
+                                    <p:spTgt spid="13"/>
+                                  </p:tgtEl>
+                                </p:cBhvr>
+                              </p:animEffect>
+                            </p:childTnLst>
+                          </p:cTn>
+                        </p:par>
+                        <p:par>
+                          <p:cTn id="31" dur="810" fill="hold" nodeType="afterEffect" grpId="0" presetID="42" presetClass="entr" presetSubtype="10">
+                            <p:stCondLst>
+                              <p:cond delay="1690"/>
+                            </p:stCondLst>
+                            <p:childTnLst>
+                              <p:set>
+                                <p:cBhvr>
+                                  <p:cTn id="32" dur="1" fill="hold">
+                                    <p:stCondLst>
+                                      <p:cond delay="0"/>
+                                    </p:stCondLst>
+                                  </p:cTn>
+                                  <p:tgtEl>
+                                    <p:spTgt spid="7"/>
+                                  </p:tgtEl>
+                                  <p:attrNameLst>
+                                    <p:attrName>style.visibility</p:attrName>
+                                  </p:attrNameLst>
+                                </p:cBhvr>
+                                <p:to>
+                                  <p:strVal val="visible"/>
+                                </p:to>
+                              </p:set>
+                              <p:animEffect transition="in" filter="blinds(horizontal)">
+                                <p:cBhvr>
+                                  <p:cTn id="311" dur="810"/>
+                                  <p:tgtEl>
+                                    <p:spTgt spid="7"/>
+                                  </p:tgtEl>
+                                </p:cBhvr>
+                              </p:animEffect>
+                            </p:childTnLst>
+                          </p:cTn>
+                        </p:par>
+                      </p:childTnLst>
+                    </p:cTn>
+                  </p:par>
+                </p:childTnLst>
+              </p:cTn>
+              <p:prevCondLst>
+                <p:cond evt="onPrev" delay="0">
+                  <p:tgtEl>
+                    <p:sldTgt/>
+                  </p:tgtEl>
+                </p:cond>
+              </p:prevCondLst>
+              <p:nextCondLst>
+                <p:cond evt="onNext" delay="0">
+                  <p:tgtEl>
+                    <p:sldTgt/>
+                  </p:tgtEl>
+                </p:cond>
+              </p:nextCondLst>
+            </p:seq>
+          </p:childTnLst>
+        </p:cTn>
+      </p:par>
+    </p:tnLst>
+  </p:timing>
 </p:sld>
 </file>
 

--- a/templates/09-dashboard-data-dashboard/09__takram.pptx
+++ b/templates/09-dashboard-data-dashboard/09__takram.pptx
@@ -122,6 +122,1886 @@
     </a:lvl9pPr>
   </p:defaultTextStyle>
 </p:presentation>
+</file>
+
+<file path=ppt/notesMasters/notesMaster1.xml><?xml version="1.0" encoding="utf-8"?>
+<p:notesMaster xmlns:a="http://schemas.openxmlformats.org/drawingml/2006/main" xmlns:p="http://schemas.openxmlformats.org/presentationml/2006/main" xmlns:r="http://schemas.openxmlformats.org/officeDocument/2006/relationships">
+  <p:cSld>
+    <p:bg>
+      <p:bgRef idx="1001">
+        <a:schemeClr val="bg1"/>
+      </p:bgRef>
+    </p:bg>
+    <p:spTree>
+      <p:nvGrpSpPr>
+        <p:cNvPr id="1" name=""/>
+        <p:cNvGrpSpPr/>
+        <p:nvPr/>
+      </p:nvGrpSpPr>
+      <p:grpSpPr>
+        <a:xfrm>
+          <a:off x="0" y="0"/>
+          <a:ext cx="0" cy="0"/>
+          <a:chOff x="0" y="0"/>
+          <a:chExt cx="0" cy="0"/>
+        </a:xfrm>
+      </p:grpSpPr>
+      <p:sp>
+        <p:nvSpPr>
+          <p:cNvPr id="2" name="Header Placeholder 1"/>
+          <p:cNvSpPr>
+            <a:spLocks noGrp="1"/>
+          </p:cNvSpPr>
+          <p:nvPr>
+            <p:ph type="hdr" sz="quarter"/>
+          </p:nvPr>
+        </p:nvSpPr>
+        <p:spPr>
+          <a:xfrm>
+            <a:off x="0" y="0"/>
+            <a:ext cx="2971800" cy="457200"/>
+          </a:xfrm>
+          <a:prstGeom prst="rect">
+            <a:avLst/>
+          </a:prstGeom>
+        </p:spPr>
+        <p:txBody>
+          <a:bodyPr vert="horz" lIns="91440" tIns="45720" rIns="91440" bIns="45720" rtlCol="0"/>
+          <a:lstStyle>
+            <a:lvl1pPr algn="l">
+              <a:defRPr sz="1200"/>
+            </a:lvl1pPr>
+          </a:lstStyle>
+          <a:p>
+            <a:endParaRPr lang="en-US"/>
+          </a:p>
+        </p:txBody>
+      </p:sp>
+      <p:sp>
+        <p:nvSpPr>
+          <p:cNvPr id="3" name="Date Placeholder 2"/>
+          <p:cNvSpPr>
+            <a:spLocks noGrp="1"/>
+          </p:cNvSpPr>
+          <p:nvPr>
+            <p:ph type="dt" idx="1"/>
+          </p:nvPr>
+        </p:nvSpPr>
+        <p:spPr>
+          <a:xfrm>
+            <a:off x="3884613" y="0"/>
+            <a:ext cx="2971800" cy="457200"/>
+          </a:xfrm>
+          <a:prstGeom prst="rect">
+            <a:avLst/>
+          </a:prstGeom>
+        </p:spPr>
+        <p:txBody>
+          <a:bodyPr vert="horz" lIns="91440" tIns="45720" rIns="91440" bIns="45720" rtlCol="0"/>
+          <a:lstStyle>
+            <a:lvl1pPr algn="r">
+              <a:defRPr sz="1200"/>
+            </a:lvl1pPr>
+          </a:lstStyle>
+          <a:p>
+            <a:fld id="{0F89C1C7-3DCD-1040-A9CF-14679D8B5DDD}" type="datetimeFigureOut">
+              <a:rPr lang="en-US" smtClean="0"/>
+              <a:t>10/17/16</a:t>
+            </a:fld>
+            <a:endParaRPr lang="en-US"/>
+          </a:p>
+        </p:txBody>
+      </p:sp>
+      <p:sp>
+        <p:nvSpPr>
+          <p:cNvPr id="4" name="Slide Image Placeholder 3"/>
+          <p:cNvSpPr>
+            <a:spLocks noGrp="1" noRot="1" noChangeAspect="1"/>
+          </p:cNvSpPr>
+          <p:nvPr>
+            <p:ph type="sldImg" idx="2"/>
+          </p:nvPr>
+        </p:nvSpPr>
+        <p:spPr>
+          <a:xfrm>
+            <a:off x="1143000" y="685800"/>
+            <a:ext cx="4572000" cy="3429000"/>
+          </a:xfrm>
+          <a:prstGeom prst="rect">
+            <a:avLst/>
+          </a:prstGeom>
+          <a:noFill/>
+          <a:ln w="12700">
+            <a:solidFill>
+              <a:prstClr val="black"/>
+            </a:solidFill>
+          </a:ln>
+        </p:spPr>
+        <p:txBody>
+          <a:bodyPr vert="horz" lIns="91440" tIns="45720" rIns="91440" bIns="45720" rtlCol="0" anchor="ctr"/>
+          <a:lstStyle/>
+          <a:p>
+            <a:endParaRPr lang="en-US"/>
+          </a:p>
+        </p:txBody>
+      </p:sp>
+      <p:sp>
+        <p:nvSpPr>
+          <p:cNvPr id="5" name="Notes Placeholder 4"/>
+          <p:cNvSpPr>
+            <a:spLocks noGrp="1"/>
+          </p:cNvSpPr>
+          <p:nvPr>
+            <p:ph type="body" sz="quarter" idx="3"/>
+          </p:nvPr>
+        </p:nvSpPr>
+        <p:spPr>
+          <a:xfrm>
+            <a:off x="685800" y="4343400"/>
+            <a:ext cx="5486400" cy="4114800"/>
+          </a:xfrm>
+          <a:prstGeom prst="rect">
+            <a:avLst/>
+          </a:prstGeom>
+        </p:spPr>
+        <p:txBody>
+          <a:bodyPr vert="horz" lIns="91440" tIns="45720" rIns="91440" bIns="45720" rtlCol="0"/>
+          <a:lstStyle/>
+          <a:p>
+            <a:pPr lvl="0"/>
+            <a:r>
+              <a:rPr lang="en-US" smtClean="0"/>
+              <a:t>Click to edit Master text styles</a:t>
+            </a:r>
+          </a:p>
+          <a:p>
+            <a:pPr lvl="1"/>
+            <a:r>
+              <a:rPr lang="en-US" smtClean="0"/>
+              <a:t>Second level</a:t>
+            </a:r>
+          </a:p>
+          <a:p>
+            <a:pPr lvl="2"/>
+            <a:r>
+              <a:rPr lang="en-US" smtClean="0"/>
+              <a:t>Third level</a:t>
+            </a:r>
+          </a:p>
+          <a:p>
+            <a:pPr lvl="3"/>
+            <a:r>
+              <a:rPr lang="en-US" smtClean="0"/>
+              <a:t>Fourth level</a:t>
+            </a:r>
+          </a:p>
+          <a:p>
+            <a:pPr lvl="4"/>
+            <a:r>
+              <a:rPr lang="en-US" smtClean="0"/>
+              <a:t>Fifth level</a:t>
+            </a:r>
+            <a:endParaRPr lang="en-US"/>
+          </a:p>
+        </p:txBody>
+      </p:sp>
+      <p:sp>
+        <p:nvSpPr>
+          <p:cNvPr id="6" name="Footer Placeholder 5"/>
+          <p:cNvSpPr>
+            <a:spLocks noGrp="1"/>
+          </p:cNvSpPr>
+          <p:nvPr>
+            <p:ph type="ftr" sz="quarter" idx="4"/>
+          </p:nvPr>
+        </p:nvSpPr>
+        <p:spPr>
+          <a:xfrm>
+            <a:off x="0" y="8685213"/>
+            <a:ext cx="2971800" cy="457200"/>
+          </a:xfrm>
+          <a:prstGeom prst="rect">
+            <a:avLst/>
+          </a:prstGeom>
+        </p:spPr>
+        <p:txBody>
+          <a:bodyPr vert="horz" lIns="91440" tIns="45720" rIns="91440" bIns="45720" rtlCol="0" anchor="b"/>
+          <a:lstStyle>
+            <a:lvl1pPr algn="l">
+              <a:defRPr sz="1200"/>
+            </a:lvl1pPr>
+          </a:lstStyle>
+          <a:p>
+            <a:endParaRPr lang="en-US"/>
+          </a:p>
+        </p:txBody>
+      </p:sp>
+      <p:sp>
+        <p:nvSpPr>
+          <p:cNvPr id="7" name="Slide Number Placeholder 6"/>
+          <p:cNvSpPr>
+            <a:spLocks noGrp="1"/>
+          </p:cNvSpPr>
+          <p:nvPr>
+            <p:ph type="sldNum" sz="quarter" idx="5"/>
+          </p:nvPr>
+        </p:nvSpPr>
+        <p:spPr>
+          <a:xfrm>
+            <a:off x="3884613" y="8685213"/>
+            <a:ext cx="2971800" cy="457200"/>
+          </a:xfrm>
+          <a:prstGeom prst="rect">
+            <a:avLst/>
+          </a:prstGeom>
+        </p:spPr>
+        <p:txBody>
+          <a:bodyPr vert="horz" lIns="91440" tIns="45720" rIns="91440" bIns="45720" rtlCol="0" anchor="b"/>
+          <a:lstStyle>
+            <a:lvl1pPr algn="r">
+              <a:defRPr sz="1200"/>
+            </a:lvl1pPr>
+          </a:lstStyle>
+          <a:p>
+            <a:fld id="{BB5E49A5-4136-284D-997B-48E1D791AD67}" type="slidenum">
+              <a:rPr lang="en-US" smtClean="0"/>
+              <a:t>‹#›</a:t>
+            </a:fld>
+            <a:endParaRPr lang="en-US"/>
+          </a:p>
+        </p:txBody>
+      </p:sp>
+    </p:spTree>
+    <p:extLst>
+      <p:ext uri="{BB962C8B-B14F-4D97-AF65-F5344CB8AC3E}">
+        <p14:creationId xmlns:p14="http://schemas.microsoft.com/office/powerpoint/2010/main" val="2623252185"/>
+      </p:ext>
+    </p:extLst>
+  </p:cSld>
+  <p:clrMap bg1="lt1" tx1="dk1" bg2="lt2" tx2="dk2" accent1="accent1" accent2="accent2" accent3="accent3" accent4="accent4" accent5="accent5" accent6="accent6" hlink="hlink" folHlink="folHlink"/>
+  <p:notesStyle>
+    <a:lvl1pPr marL="0" algn="l" defTabSz="457200" rtl="0" eaLnBrk="1" latinLnBrk="0" hangingPunct="1">
+      <a:defRPr sz="1200" kern="1200">
+        <a:solidFill>
+          <a:schemeClr val="tx1"/>
+        </a:solidFill>
+        <a:latin typeface="+mn-lt"/>
+        <a:ea typeface="+mn-ea"/>
+        <a:cs typeface="+mn-cs"/>
+      </a:defRPr>
+    </a:lvl1pPr>
+    <a:lvl2pPr marL="457200" algn="l" defTabSz="457200" rtl="0" eaLnBrk="1" latinLnBrk="0" hangingPunct="1">
+      <a:defRPr sz="1200" kern="1200">
+        <a:solidFill>
+          <a:schemeClr val="tx1"/>
+        </a:solidFill>
+        <a:latin typeface="+mn-lt"/>
+        <a:ea typeface="+mn-ea"/>
+        <a:cs typeface="+mn-cs"/>
+      </a:defRPr>
+    </a:lvl2pPr>
+    <a:lvl3pPr marL="914400" algn="l" defTabSz="457200" rtl="0" eaLnBrk="1" latinLnBrk="0" hangingPunct="1">
+      <a:defRPr sz="1200" kern="1200">
+        <a:solidFill>
+          <a:schemeClr val="tx1"/>
+        </a:solidFill>
+        <a:latin typeface="+mn-lt"/>
+        <a:ea typeface="+mn-ea"/>
+        <a:cs typeface="+mn-cs"/>
+      </a:defRPr>
+    </a:lvl3pPr>
+    <a:lvl4pPr marL="1371600" algn="l" defTabSz="457200" rtl="0" eaLnBrk="1" latinLnBrk="0" hangingPunct="1">
+      <a:defRPr sz="1200" kern="1200">
+        <a:solidFill>
+          <a:schemeClr val="tx1"/>
+        </a:solidFill>
+        <a:latin typeface="+mn-lt"/>
+        <a:ea typeface="+mn-ea"/>
+        <a:cs typeface="+mn-cs"/>
+      </a:defRPr>
+    </a:lvl4pPr>
+    <a:lvl5pPr marL="1828800" algn="l" defTabSz="457200" rtl="0" eaLnBrk="1" latinLnBrk="0" hangingPunct="1">
+      <a:defRPr sz="1200" kern="1200">
+        <a:solidFill>
+          <a:schemeClr val="tx1"/>
+        </a:solidFill>
+        <a:latin typeface="+mn-lt"/>
+        <a:ea typeface="+mn-ea"/>
+        <a:cs typeface="+mn-cs"/>
+      </a:defRPr>
+    </a:lvl5pPr>
+    <a:lvl6pPr marL="2286000" algn="l" defTabSz="457200" rtl="0" eaLnBrk="1" latinLnBrk="0" hangingPunct="1">
+      <a:defRPr sz="1200" kern="1200">
+        <a:solidFill>
+          <a:schemeClr val="tx1"/>
+        </a:solidFill>
+        <a:latin typeface="+mn-lt"/>
+        <a:ea typeface="+mn-ea"/>
+        <a:cs typeface="+mn-cs"/>
+      </a:defRPr>
+    </a:lvl6pPr>
+    <a:lvl7pPr marL="2743200" algn="l" defTabSz="457200" rtl="0" eaLnBrk="1" latinLnBrk="0" hangingPunct="1">
+      <a:defRPr sz="1200" kern="1200">
+        <a:solidFill>
+          <a:schemeClr val="tx1"/>
+        </a:solidFill>
+        <a:latin typeface="+mn-lt"/>
+        <a:ea typeface="+mn-ea"/>
+        <a:cs typeface="+mn-cs"/>
+      </a:defRPr>
+    </a:lvl7pPr>
+    <a:lvl8pPr marL="3200400" algn="l" defTabSz="457200" rtl="0" eaLnBrk="1" latinLnBrk="0" hangingPunct="1">
+      <a:defRPr sz="1200" kern="1200">
+        <a:solidFill>
+          <a:schemeClr val="tx1"/>
+        </a:solidFill>
+        <a:latin typeface="+mn-lt"/>
+        <a:ea typeface="+mn-ea"/>
+        <a:cs typeface="+mn-cs"/>
+      </a:defRPr>
+    </a:lvl8pPr>
+    <a:lvl9pPr marL="3657600" algn="l" defTabSz="457200" rtl="0" eaLnBrk="1" latinLnBrk="0" hangingPunct="1">
+      <a:defRPr sz="1200" kern="1200">
+        <a:solidFill>
+          <a:schemeClr val="tx1"/>
+        </a:solidFill>
+        <a:latin typeface="+mn-lt"/>
+        <a:ea typeface="+mn-ea"/>
+        <a:cs typeface="+mn-cs"/>
+      </a:defRPr>
+    </a:lvl9pPr>
+  </p:notesStyle>
+</p:notesMaster>
+</file>
+
+<file path=ppt/notesSlides/notesSlide1.xml><?xml version="1.0" encoding="utf-8"?>
+<p:notes xmlns:a="http://schemas.openxmlformats.org/drawingml/2006/main" xmlns:p="http://schemas.openxmlformats.org/presentationml/2006/main" xmlns:r="http://schemas.openxmlformats.org/officeDocument/2006/relationships">
+  <p:cSld>
+    <p:spTree>
+      <p:nvGrpSpPr>
+        <p:cNvPr id="1" name=""/>
+        <p:cNvGrpSpPr/>
+        <p:nvPr/>
+      </p:nvGrpSpPr>
+      <p:grpSpPr>
+        <a:xfrm>
+          <a:off x="0" y="0"/>
+          <a:ext cx="0" cy="0"/>
+          <a:chOff x="0" y="0"/>
+          <a:chExt cx="0" cy="0"/>
+        </a:xfrm>
+      </p:grpSpPr>
+      <p:sp>
+        <p:nvSpPr>
+          <p:cNvPr id="2" name="Slide Image Placeholder 1"/>
+          <p:cNvSpPr>
+            <a:spLocks noGrp="1"/>
+          </p:cNvSpPr>
+          <p:nvPr>
+            <p:ph type="sldImg" idx="2"/>
+          </p:nvPr>
+        </p:nvSpPr>
+        <p:spPr/>
+      </p:sp>
+      <p:sp>
+        <p:nvSpPr>
+          <p:cNvPr id="3" name="Notes Placeholder 2"/>
+          <p:cNvSpPr>
+            <a:spLocks noGrp="1"/>
+          </p:cNvSpPr>
+          <p:nvPr>
+            <p:ph type="body" idx="3" sz="quarter"/>
+          </p:nvPr>
+        </p:nvSpPr>
+        <p:spPr/>
+        <p:txBody>
+          <a:bodyPr/>
+          <a:lstStyle/>
+          <a:p>
+            <a:r>
+              <a:t>【页面定位】数据看板与指标 —— 开场页：自我介绍或破题，停留时间可稍长。</a:t>
+            </a:r>
+          </a:p>
+          <a:p>
+            <a:r>
+              <a:t>【放映】本页元素按“背景→主体→标注”顺序错峰入场（约 2 秒完成）；开启“使用计时器”后本页停留 8 秒自动翻页。</a:t>
+            </a:r>
+          </a:p>
+          <a:p>
+            <a:r>
+              <a:t>【编辑】直接点击文本框替换占位文字；在“设计→变体”中一键换配色；图片占位框右键“更改图片”即可替换。</a:t>
+            </a:r>
+          </a:p>
+          <a:p>
+            <a:r>
+              <a:t>【联动】图表为原生可编辑图表：右键“编辑数据”即可替换数值。</a:t>
+            </a:r>
+          </a:p>
+        </p:txBody>
+      </p:sp>
+      <p:sp>
+        <p:nvSpPr>
+          <p:cNvPr id="4" name="Slide Number Placeholder 3"/>
+          <p:cNvSpPr>
+            <a:spLocks noGrp="1"/>
+          </p:cNvSpPr>
+          <p:nvPr>
+            <p:ph type="sldNum" idx="5" sz="quarter"/>
+          </p:nvPr>
+        </p:nvSpPr>
+        <p:spPr/>
+      </p:sp>
+    </p:spTree>
+  </p:cSld>
+  <p:clrMapOvr>
+    <a:masterClrMapping/>
+  </p:clrMapOvr>
+</p:notes>
+</file>
+
+<file path=ppt/notesSlides/notesSlide10.xml><?xml version="1.0" encoding="utf-8"?>
+<p:notes xmlns:a="http://schemas.openxmlformats.org/drawingml/2006/main" xmlns:p="http://schemas.openxmlformats.org/presentationml/2006/main" xmlns:r="http://schemas.openxmlformats.org/officeDocument/2006/relationships">
+  <p:cSld>
+    <p:spTree>
+      <p:nvGrpSpPr>
+        <p:cNvPr id="1" name=""/>
+        <p:cNvGrpSpPr/>
+        <p:nvPr/>
+      </p:nvGrpSpPr>
+      <p:grpSpPr>
+        <a:xfrm>
+          <a:off x="0" y="0"/>
+          <a:ext cx="0" cy="0"/>
+          <a:chOff x="0" y="0"/>
+          <a:chExt cx="0" cy="0"/>
+        </a:xfrm>
+      </p:grpSpPr>
+      <p:sp>
+        <p:nvSpPr>
+          <p:cNvPr id="2" name="Slide Image Placeholder 1"/>
+          <p:cNvSpPr>
+            <a:spLocks noGrp="1"/>
+          </p:cNvSpPr>
+          <p:nvPr>
+            <p:ph type="sldImg" idx="2"/>
+          </p:nvPr>
+        </p:nvSpPr>
+        <p:spPr/>
+      </p:sp>
+      <p:sp>
+        <p:nvSpPr>
+          <p:cNvPr id="3" name="Notes Placeholder 2"/>
+          <p:cNvSpPr>
+            <a:spLocks noGrp="1"/>
+          </p:cNvSpPr>
+          <p:nvPr>
+            <p:ph type="body" idx="3" sz="quarter"/>
+          </p:nvPr>
+        </p:nvSpPr>
+        <p:spPr/>
+        <p:txBody>
+          <a:bodyPr/>
+          <a:lstStyle/>
+          <a:p>
+            <a:r>
+              <a:t>【页面定位】DATA —— 收尾页：总结要点并给出行动号召或联系方式。</a:t>
+            </a:r>
+          </a:p>
+          <a:p>
+            <a:r>
+              <a:t>【放映】本页元素按“背景→主体→标注”顺序错峰入场（约 2 秒完成）；开启“使用计时器”后本页停留 8 秒自动翻页。</a:t>
+            </a:r>
+          </a:p>
+          <a:p>
+            <a:r>
+              <a:t>【编辑】直接点击文本框替换占位文字；在“设计→变体”中一键换配色；图片占位框右键“更改图片”即可替换。</a:t>
+            </a:r>
+          </a:p>
+          <a:p>
+            <a:r>
+              <a:t>【联动】图表为原生可编辑图表：右键“编辑数据”即可替换数值。</a:t>
+            </a:r>
+          </a:p>
+        </p:txBody>
+      </p:sp>
+      <p:sp>
+        <p:nvSpPr>
+          <p:cNvPr id="4" name="Slide Number Placeholder 3"/>
+          <p:cNvSpPr>
+            <a:spLocks noGrp="1"/>
+          </p:cNvSpPr>
+          <p:nvPr>
+            <p:ph type="sldNum" idx="5" sz="quarter"/>
+          </p:nvPr>
+        </p:nvSpPr>
+        <p:spPr/>
+      </p:sp>
+    </p:spTree>
+  </p:cSld>
+  <p:clrMapOvr>
+    <a:masterClrMapping/>
+  </p:clrMapOvr>
+</p:notes>
+</file>
+
+<file path=ppt/notesSlides/notesSlide11.xml><?xml version="1.0" encoding="utf-8"?>
+<p:notes xmlns:a="http://schemas.openxmlformats.org/drawingml/2006/main" xmlns:p="http://schemas.openxmlformats.org/presentationml/2006/main" xmlns:r="http://schemas.openxmlformats.org/officeDocument/2006/relationships">
+  <p:cSld>
+    <p:spTree>
+      <p:nvGrpSpPr>
+        <p:cNvPr id="1" name=""/>
+        <p:cNvGrpSpPr/>
+        <p:nvPr/>
+      </p:nvGrpSpPr>
+      <p:grpSpPr>
+        <a:xfrm>
+          <a:off x="0" y="0"/>
+          <a:ext cx="0" cy="0"/>
+          <a:chOff x="0" y="0"/>
+          <a:chExt cx="0" cy="0"/>
+        </a:xfrm>
+      </p:grpSpPr>
+      <p:sp>
+        <p:nvSpPr>
+          <p:cNvPr id="2" name="Slide Image Placeholder 1"/>
+          <p:cNvSpPr>
+            <a:spLocks noGrp="1"/>
+          </p:cNvSpPr>
+          <p:nvPr>
+            <p:ph type="sldImg" idx="2"/>
+          </p:nvPr>
+        </p:nvSpPr>
+        <p:spPr/>
+      </p:sp>
+      <p:sp>
+        <p:nvSpPr>
+          <p:cNvPr id="3" name="Notes Placeholder 2"/>
+          <p:cNvSpPr>
+            <a:spLocks noGrp="1"/>
+          </p:cNvSpPr>
+          <p:nvPr>
+            <p:ph type="body" idx="3" sz="quarter"/>
+          </p:nvPr>
+        </p:nvSpPr>
+        <p:spPr/>
+        <p:txBody>
+          <a:bodyPr/>
+          <a:lstStyle/>
+          <a:p>
+            <a:r>
+              <a:t>【页面定位】KEY POINTS —— 开场页：自我介绍或破题，停留时间可稍长。</a:t>
+            </a:r>
+          </a:p>
+          <a:p>
+            <a:r>
+              <a:t>【放映】本页元素按“背景→主体→标注”顺序错峰入场（约 2 秒完成）；开启“使用计时器”后本页停留 8 秒自动翻页。</a:t>
+            </a:r>
+          </a:p>
+          <a:p>
+            <a:r>
+              <a:t>【编辑】直接点击文本框替换占位文字；在“设计→变体”中一键换配色；图片占位框右键“更改图片”即可替换。</a:t>
+            </a:r>
+          </a:p>
+          <a:p>
+            <a:r>
+              <a:t>【联动】图表为原生可编辑图表：右键“编辑数据”即可替换数值。</a:t>
+            </a:r>
+          </a:p>
+        </p:txBody>
+      </p:sp>
+      <p:sp>
+        <p:nvSpPr>
+          <p:cNvPr id="4" name="Slide Number Placeholder 3"/>
+          <p:cNvSpPr>
+            <a:spLocks noGrp="1"/>
+          </p:cNvSpPr>
+          <p:nvPr>
+            <p:ph type="sldNum" idx="5" sz="quarter"/>
+          </p:nvPr>
+        </p:nvSpPr>
+        <p:spPr/>
+      </p:sp>
+    </p:spTree>
+  </p:cSld>
+  <p:clrMapOvr>
+    <a:masterClrMapping/>
+  </p:clrMapOvr>
+</p:notes>
+</file>
+
+<file path=ppt/notesSlides/notesSlide12.xml><?xml version="1.0" encoding="utf-8"?>
+<p:notes xmlns:a="http://schemas.openxmlformats.org/drawingml/2006/main" xmlns:p="http://schemas.openxmlformats.org/presentationml/2006/main" xmlns:r="http://schemas.openxmlformats.org/officeDocument/2006/relationships">
+  <p:cSld>
+    <p:spTree>
+      <p:nvGrpSpPr>
+        <p:cNvPr id="1" name=""/>
+        <p:cNvGrpSpPr/>
+        <p:nvPr/>
+      </p:nvGrpSpPr>
+      <p:grpSpPr>
+        <a:xfrm>
+          <a:off x="0" y="0"/>
+          <a:ext cx="0" cy="0"/>
+          <a:chOff x="0" y="0"/>
+          <a:chExt cx="0" cy="0"/>
+        </a:xfrm>
+      </p:grpSpPr>
+      <p:sp>
+        <p:nvSpPr>
+          <p:cNvPr id="2" name="Slide Image Placeholder 1"/>
+          <p:cNvSpPr>
+            <a:spLocks noGrp="1"/>
+          </p:cNvSpPr>
+          <p:nvPr>
+            <p:ph type="sldImg" idx="2"/>
+          </p:nvPr>
+        </p:nvSpPr>
+        <p:spPr/>
+      </p:sp>
+      <p:sp>
+        <p:nvSpPr>
+          <p:cNvPr id="3" name="Notes Placeholder 2"/>
+          <p:cNvSpPr>
+            <a:spLocks noGrp="1"/>
+          </p:cNvSpPr>
+          <p:nvPr>
+            <p:ph type="body" idx="3" sz="quarter"/>
+          </p:nvPr>
+        </p:nvSpPr>
+        <p:spPr/>
+        <p:txBody>
+          <a:bodyPr/>
+          <a:lstStyle/>
+          <a:p>
+            <a:r>
+              <a:t>【页面定位】02 —— 概览页：快速带过结构，告诉听众接下来讲什么。</a:t>
+            </a:r>
+          </a:p>
+          <a:p>
+            <a:r>
+              <a:t>【放映】本页元素按“背景→主体→标注”顺序错峰入场（约 2 秒完成）；开启“使用计时器”后本页停留 8 秒自动翻页。</a:t>
+            </a:r>
+          </a:p>
+          <a:p>
+            <a:r>
+              <a:t>【编辑】直接点击文本框替换占位文字；在“设计→变体”中一键换配色；图片占位框右键“更改图片”即可替换。</a:t>
+            </a:r>
+          </a:p>
+          <a:p>
+            <a:r>
+              <a:t>【联动】图表为原生可编辑图表：右键“编辑数据”即可替换数值。</a:t>
+            </a:r>
+          </a:p>
+        </p:txBody>
+      </p:sp>
+      <p:sp>
+        <p:nvSpPr>
+          <p:cNvPr id="4" name="Slide Number Placeholder 3"/>
+          <p:cNvSpPr>
+            <a:spLocks noGrp="1"/>
+          </p:cNvSpPr>
+          <p:nvPr>
+            <p:ph type="sldNum" idx="5" sz="quarter"/>
+          </p:nvPr>
+        </p:nvSpPr>
+        <p:spPr/>
+      </p:sp>
+    </p:spTree>
+  </p:cSld>
+  <p:clrMapOvr>
+    <a:masterClrMapping/>
+  </p:clrMapOvr>
+</p:notes>
+</file>
+
+<file path=ppt/notesSlides/notesSlide13.xml><?xml version="1.0" encoding="utf-8"?>
+<p:notes xmlns:a="http://schemas.openxmlformats.org/drawingml/2006/main" xmlns:p="http://schemas.openxmlformats.org/presentationml/2006/main" xmlns:r="http://schemas.openxmlformats.org/officeDocument/2006/relationships">
+  <p:cSld>
+    <p:spTree>
+      <p:nvGrpSpPr>
+        <p:cNvPr id="1" name=""/>
+        <p:cNvGrpSpPr/>
+        <p:nvPr/>
+      </p:nvGrpSpPr>
+      <p:grpSpPr>
+        <a:xfrm>
+          <a:off x="0" y="0"/>
+          <a:ext cx="0" cy="0"/>
+          <a:chOff x="0" y="0"/>
+          <a:chExt cx="0" cy="0"/>
+        </a:xfrm>
+      </p:grpSpPr>
+      <p:sp>
+        <p:nvSpPr>
+          <p:cNvPr id="2" name="Slide Image Placeholder 1"/>
+          <p:cNvSpPr>
+            <a:spLocks noGrp="1"/>
+          </p:cNvSpPr>
+          <p:nvPr>
+            <p:ph type="sldImg" idx="2"/>
+          </p:nvPr>
+        </p:nvSpPr>
+        <p:spPr/>
+      </p:sp>
+      <p:sp>
+        <p:nvSpPr>
+          <p:cNvPr id="3" name="Notes Placeholder 2"/>
+          <p:cNvSpPr>
+            <a:spLocks noGrp="1"/>
+          </p:cNvSpPr>
+          <p:nvPr>
+            <p:ph type="body" idx="3" sz="quarter"/>
+          </p:nvPr>
+        </p:nvSpPr>
+        <p:spPr/>
+        <p:txBody>
+          <a:bodyPr/>
+          <a:lstStyle/>
+          <a:p>
+            <a:r>
+              <a:t>【页面定位】在此输入一条数据洞察。 —— 内容页：逐条展开，配合动画节奏点击推进。</a:t>
+            </a:r>
+          </a:p>
+          <a:p>
+            <a:r>
+              <a:t>【放映】本页元素按“背景→主体→标注”顺序错峰入场（约 2 秒完成）；开启“使用计时器”后本页停留 8 秒自动翻页。</a:t>
+            </a:r>
+          </a:p>
+          <a:p>
+            <a:r>
+              <a:t>【编辑】直接点击文本框替换占位文字；在“设计→变体”中一键换配色；图片占位框右键“更改图片”即可替换。</a:t>
+            </a:r>
+          </a:p>
+          <a:p>
+            <a:r>
+              <a:t>【联动】图表为原生可编辑图表：右键“编辑数据”即可替换数值。</a:t>
+            </a:r>
+          </a:p>
+        </p:txBody>
+      </p:sp>
+      <p:sp>
+        <p:nvSpPr>
+          <p:cNvPr id="4" name="Slide Number Placeholder 3"/>
+          <p:cNvSpPr>
+            <a:spLocks noGrp="1"/>
+          </p:cNvSpPr>
+          <p:nvPr>
+            <p:ph type="sldNum" idx="5" sz="quarter"/>
+          </p:nvPr>
+        </p:nvSpPr>
+        <p:spPr/>
+      </p:sp>
+    </p:spTree>
+  </p:cSld>
+  <p:clrMapOvr>
+    <a:masterClrMapping/>
+  </p:clrMapOvr>
+</p:notes>
+</file>
+
+<file path=ppt/notesSlides/notesSlide14.xml><?xml version="1.0" encoding="utf-8"?>
+<p:notes xmlns:a="http://schemas.openxmlformats.org/drawingml/2006/main" xmlns:p="http://schemas.openxmlformats.org/presentationml/2006/main" xmlns:r="http://schemas.openxmlformats.org/officeDocument/2006/relationships">
+  <p:cSld>
+    <p:spTree>
+      <p:nvGrpSpPr>
+        <p:cNvPr id="1" name=""/>
+        <p:cNvGrpSpPr/>
+        <p:nvPr/>
+      </p:nvGrpSpPr>
+      <p:grpSpPr>
+        <a:xfrm>
+          <a:off x="0" y="0"/>
+          <a:ext cx="0" cy="0"/>
+          <a:chOff x="0" y="0"/>
+          <a:chExt cx="0" cy="0"/>
+        </a:xfrm>
+      </p:grpSpPr>
+      <p:sp>
+        <p:nvSpPr>
+          <p:cNvPr id="2" name="Slide Image Placeholder 1"/>
+          <p:cNvSpPr>
+            <a:spLocks noGrp="1"/>
+          </p:cNvSpPr>
+          <p:nvPr>
+            <p:ph type="sldImg" idx="2"/>
+          </p:nvPr>
+        </p:nvSpPr>
+        <p:spPr/>
+      </p:sp>
+      <p:sp>
+        <p:nvSpPr>
+          <p:cNvPr id="3" name="Notes Placeholder 2"/>
+          <p:cNvSpPr>
+            <a:spLocks noGrp="1"/>
+          </p:cNvSpPr>
+          <p:nvPr>
+            <p:ph type="body" idx="3" sz="quarter"/>
+          </p:nvPr>
+        </p:nvSpPr>
+        <p:spPr/>
+        <p:txBody>
+          <a:bodyPr/>
+          <a:lstStyle/>
+          <a:p>
+            <a:r>
+              <a:t>【页面定位】TEAM —— 数据页：先说结论，再用图表佐证。</a:t>
+            </a:r>
+          </a:p>
+          <a:p>
+            <a:r>
+              <a:t>【放映】本页元素按“背景→主体→标注”顺序错峰入场（约 2 秒完成）；开启“使用计时器”后本页停留 8 秒自动翻页。</a:t>
+            </a:r>
+          </a:p>
+          <a:p>
+            <a:r>
+              <a:t>【编辑】直接点击文本框替换占位文字；在“设计→变体”中一键换配色；图片占位框右键“更改图片”即可替换。</a:t>
+            </a:r>
+          </a:p>
+          <a:p>
+            <a:r>
+              <a:t>【联动】图表为原生可编辑图表：右键“编辑数据”即可替换数值。</a:t>
+            </a:r>
+          </a:p>
+        </p:txBody>
+      </p:sp>
+      <p:sp>
+        <p:nvSpPr>
+          <p:cNvPr id="4" name="Slide Number Placeholder 3"/>
+          <p:cNvSpPr>
+            <a:spLocks noGrp="1"/>
+          </p:cNvSpPr>
+          <p:nvPr>
+            <p:ph type="sldNum" idx="5" sz="quarter"/>
+          </p:nvPr>
+        </p:nvSpPr>
+        <p:spPr/>
+      </p:sp>
+    </p:spTree>
+  </p:cSld>
+  <p:clrMapOvr>
+    <a:masterClrMapping/>
+  </p:clrMapOvr>
+</p:notes>
+</file>
+
+<file path=ppt/notesSlides/notesSlide15.xml><?xml version="1.0" encoding="utf-8"?>
+<p:notes xmlns:a="http://schemas.openxmlformats.org/drawingml/2006/main" xmlns:p="http://schemas.openxmlformats.org/presentationml/2006/main" xmlns:r="http://schemas.openxmlformats.org/officeDocument/2006/relationships">
+  <p:cSld>
+    <p:spTree>
+      <p:nvGrpSpPr>
+        <p:cNvPr id="1" name=""/>
+        <p:cNvGrpSpPr/>
+        <p:nvPr/>
+      </p:nvGrpSpPr>
+      <p:grpSpPr>
+        <a:xfrm>
+          <a:off x="0" y="0"/>
+          <a:ext cx="0" cy="0"/>
+          <a:chOff x="0" y="0"/>
+          <a:chExt cx="0" cy="0"/>
+        </a:xfrm>
+      </p:grpSpPr>
+      <p:sp>
+        <p:nvSpPr>
+          <p:cNvPr id="2" name="Slide Image Placeholder 1"/>
+          <p:cNvSpPr>
+            <a:spLocks noGrp="1"/>
+          </p:cNvSpPr>
+          <p:nvPr>
+            <p:ph type="sldImg" idx="2"/>
+          </p:nvPr>
+        </p:nvSpPr>
+        <p:spPr/>
+      </p:sp>
+      <p:sp>
+        <p:nvSpPr>
+          <p:cNvPr id="3" name="Notes Placeholder 2"/>
+          <p:cNvSpPr>
+            <a:spLocks noGrp="1"/>
+          </p:cNvSpPr>
+          <p:nvPr>
+            <p:ph type="body" idx="3" sz="quarter"/>
+          </p:nvPr>
+        </p:nvSpPr>
+        <p:spPr/>
+        <p:txBody>
+          <a:bodyPr/>
+          <a:lstStyle/>
+          <a:p>
+            <a:r>
+              <a:t>【页面定位】QUOTES —— 收尾页：总结要点并给出行动号召或联系方式。</a:t>
+            </a:r>
+          </a:p>
+          <a:p>
+            <a:r>
+              <a:t>【放映】本页元素按“背景→主体→标注”顺序错峰入场（约 2 秒完成）；开启“使用计时器”后本页停留 8 秒自动翻页。</a:t>
+            </a:r>
+          </a:p>
+          <a:p>
+            <a:r>
+              <a:t>【编辑】直接点击文本框替换占位文字；在“设计→变体”中一键换配色；图片占位框右键“更改图片”即可替换。</a:t>
+            </a:r>
+          </a:p>
+          <a:p>
+            <a:r>
+              <a:t>【联动】图表为原生可编辑图表：右键“编辑数据”即可替换数值。</a:t>
+            </a:r>
+          </a:p>
+        </p:txBody>
+      </p:sp>
+      <p:sp>
+        <p:nvSpPr>
+          <p:cNvPr id="4" name="Slide Number Placeholder 3"/>
+          <p:cNvSpPr>
+            <a:spLocks noGrp="1"/>
+          </p:cNvSpPr>
+          <p:nvPr>
+            <p:ph type="sldNum" idx="5" sz="quarter"/>
+          </p:nvPr>
+        </p:nvSpPr>
+        <p:spPr/>
+      </p:sp>
+    </p:spTree>
+  </p:cSld>
+  <p:clrMapOvr>
+    <a:masterClrMapping/>
+  </p:clrMapOvr>
+</p:notes>
+</file>
+
+<file path=ppt/notesSlides/notesSlide16.xml><?xml version="1.0" encoding="utf-8"?>
+<p:notes xmlns:a="http://schemas.openxmlformats.org/drawingml/2006/main" xmlns:p="http://schemas.openxmlformats.org/presentationml/2006/main" xmlns:r="http://schemas.openxmlformats.org/officeDocument/2006/relationships">
+  <p:cSld>
+    <p:spTree>
+      <p:nvGrpSpPr>
+        <p:cNvPr id="1" name=""/>
+        <p:cNvGrpSpPr/>
+        <p:nvPr/>
+      </p:nvGrpSpPr>
+      <p:grpSpPr>
+        <a:xfrm>
+          <a:off x="0" y="0"/>
+          <a:ext cx="0" cy="0"/>
+          <a:chOff x="0" y="0"/>
+          <a:chExt cx="0" cy="0"/>
+        </a:xfrm>
+      </p:grpSpPr>
+      <p:sp>
+        <p:nvSpPr>
+          <p:cNvPr id="2" name="Slide Image Placeholder 1"/>
+          <p:cNvSpPr>
+            <a:spLocks noGrp="1"/>
+          </p:cNvSpPr>
+          <p:nvPr>
+            <p:ph type="sldImg" idx="2"/>
+          </p:nvPr>
+        </p:nvSpPr>
+        <p:spPr/>
+      </p:sp>
+      <p:sp>
+        <p:nvSpPr>
+          <p:cNvPr id="3" name="Notes Placeholder 2"/>
+          <p:cNvSpPr>
+            <a:spLocks noGrp="1"/>
+          </p:cNvSpPr>
+          <p:nvPr>
+            <p:ph type="body" idx="3" sz="quarter"/>
+          </p:nvPr>
+        </p:nvSpPr>
+        <p:spPr/>
+        <p:txBody>
+          <a:bodyPr/>
+          <a:lstStyle/>
+          <a:p>
+            <a:r>
+              <a:t>【页面定位】FAQ —— 开场页：自我介绍或破题，停留时间可稍长。</a:t>
+            </a:r>
+          </a:p>
+          <a:p>
+            <a:r>
+              <a:t>【放映】本页元素按“背景→主体→标注”顺序错峰入场（约 2 秒完成）；开启“使用计时器”后本页停留 8 秒自动翻页。</a:t>
+            </a:r>
+          </a:p>
+          <a:p>
+            <a:r>
+              <a:t>【编辑】直接点击文本框替换占位文字；在“设计→变体”中一键换配色；图片占位框右键“更改图片”即可替换。</a:t>
+            </a:r>
+          </a:p>
+          <a:p>
+            <a:r>
+              <a:t>【联动】图表为原生可编辑图表：右键“编辑数据”即可替换数值。</a:t>
+            </a:r>
+          </a:p>
+        </p:txBody>
+      </p:sp>
+      <p:sp>
+        <p:nvSpPr>
+          <p:cNvPr id="4" name="Slide Number Placeholder 3"/>
+          <p:cNvSpPr>
+            <a:spLocks noGrp="1"/>
+          </p:cNvSpPr>
+          <p:nvPr>
+            <p:ph type="sldNum" idx="5" sz="quarter"/>
+          </p:nvPr>
+        </p:nvSpPr>
+        <p:spPr/>
+      </p:sp>
+    </p:spTree>
+  </p:cSld>
+  <p:clrMapOvr>
+    <a:masterClrMapping/>
+  </p:clrMapOvr>
+</p:notes>
+</file>
+
+<file path=ppt/notesSlides/notesSlide17.xml><?xml version="1.0" encoding="utf-8"?>
+<p:notes xmlns:a="http://schemas.openxmlformats.org/drawingml/2006/main" xmlns:p="http://schemas.openxmlformats.org/presentationml/2006/main" xmlns:r="http://schemas.openxmlformats.org/officeDocument/2006/relationships">
+  <p:cSld>
+    <p:spTree>
+      <p:nvGrpSpPr>
+        <p:cNvPr id="1" name=""/>
+        <p:cNvGrpSpPr/>
+        <p:nvPr/>
+      </p:nvGrpSpPr>
+      <p:grpSpPr>
+        <a:xfrm>
+          <a:off x="0" y="0"/>
+          <a:ext cx="0" cy="0"/>
+          <a:chOff x="0" y="0"/>
+          <a:chExt cx="0" cy="0"/>
+        </a:xfrm>
+      </p:grpSpPr>
+      <p:sp>
+        <p:nvSpPr>
+          <p:cNvPr id="2" name="Slide Image Placeholder 1"/>
+          <p:cNvSpPr>
+            <a:spLocks noGrp="1"/>
+          </p:cNvSpPr>
+          <p:nvPr>
+            <p:ph type="sldImg" idx="2"/>
+          </p:nvPr>
+        </p:nvSpPr>
+        <p:spPr/>
+      </p:sp>
+      <p:sp>
+        <p:nvSpPr>
+          <p:cNvPr id="3" name="Notes Placeholder 2"/>
+          <p:cNvSpPr>
+            <a:spLocks noGrp="1"/>
+          </p:cNvSpPr>
+          <p:nvPr>
+            <p:ph type="body" idx="3" sz="quarter"/>
+          </p:nvPr>
+        </p:nvSpPr>
+        <p:spPr/>
+        <p:txBody>
+          <a:bodyPr/>
+          <a:lstStyle/>
+          <a:p>
+            <a:r>
+              <a:t>【页面定位】ROADMAP —— 概览页：快速带过结构，告诉听众接下来讲什么。</a:t>
+            </a:r>
+          </a:p>
+          <a:p>
+            <a:r>
+              <a:t>【放映】本页元素按“背景→主体→标注”顺序错峰入场（约 2 秒完成）；开启“使用计时器”后本页停留 8 秒自动翻页。</a:t>
+            </a:r>
+          </a:p>
+          <a:p>
+            <a:r>
+              <a:t>【编辑】直接点击文本框替换占位文字；在“设计→变体”中一键换配色；图片占位框右键“更改图片”即可替换。</a:t>
+            </a:r>
+          </a:p>
+          <a:p>
+            <a:r>
+              <a:t>【联动】图表为原生可编辑图表：右键“编辑数据”即可替换数值。</a:t>
+            </a:r>
+          </a:p>
+        </p:txBody>
+      </p:sp>
+      <p:sp>
+        <p:nvSpPr>
+          <p:cNvPr id="4" name="Slide Number Placeholder 3"/>
+          <p:cNvSpPr>
+            <a:spLocks noGrp="1"/>
+          </p:cNvSpPr>
+          <p:nvPr>
+            <p:ph type="sldNum" idx="5" sz="quarter"/>
+          </p:nvPr>
+        </p:nvSpPr>
+        <p:spPr/>
+      </p:sp>
+    </p:spTree>
+  </p:cSld>
+  <p:clrMapOvr>
+    <a:masterClrMapping/>
+  </p:clrMapOvr>
+</p:notes>
+</file>
+
+<file path=ppt/notesSlides/notesSlide18.xml><?xml version="1.0" encoding="utf-8"?>
+<p:notes xmlns:a="http://schemas.openxmlformats.org/drawingml/2006/main" xmlns:p="http://schemas.openxmlformats.org/presentationml/2006/main" xmlns:r="http://schemas.openxmlformats.org/officeDocument/2006/relationships">
+  <p:cSld>
+    <p:spTree>
+      <p:nvGrpSpPr>
+        <p:cNvPr id="1" name=""/>
+        <p:cNvGrpSpPr/>
+        <p:nvPr/>
+      </p:nvGrpSpPr>
+      <p:grpSpPr>
+        <a:xfrm>
+          <a:off x="0" y="0"/>
+          <a:ext cx="0" cy="0"/>
+          <a:chOff x="0" y="0"/>
+          <a:chExt cx="0" cy="0"/>
+        </a:xfrm>
+      </p:grpSpPr>
+      <p:sp>
+        <p:nvSpPr>
+          <p:cNvPr id="2" name="Slide Image Placeholder 1"/>
+          <p:cNvSpPr>
+            <a:spLocks noGrp="1"/>
+          </p:cNvSpPr>
+          <p:nvPr>
+            <p:ph type="sldImg" idx="2"/>
+          </p:nvPr>
+        </p:nvSpPr>
+        <p:spPr/>
+      </p:sp>
+      <p:sp>
+        <p:nvSpPr>
+          <p:cNvPr id="3" name="Notes Placeholder 2"/>
+          <p:cNvSpPr>
+            <a:spLocks noGrp="1"/>
+          </p:cNvSpPr>
+          <p:nvPr>
+            <p:ph type="body" idx="3" sz="quarter"/>
+          </p:nvPr>
+        </p:nvSpPr>
+        <p:spPr/>
+        <p:txBody>
+          <a:bodyPr/>
+          <a:lstStyle/>
+          <a:p>
+            <a:r>
+              <a:t>【页面定位】谢谢观看 —— 内容页：逐条展开，配合动画节奏点击推进。</a:t>
+            </a:r>
+          </a:p>
+          <a:p>
+            <a:r>
+              <a:t>【放映】本页元素按“背景→主体→标注”顺序错峰入场（约 2 秒完成）；开启“使用计时器”后本页停留 8 秒自动翻页。</a:t>
+            </a:r>
+          </a:p>
+          <a:p>
+            <a:r>
+              <a:t>【编辑】直接点击文本框替换占位文字；在“设计→变体”中一键换配色；图片占位框右键“更改图片”即可替换。</a:t>
+            </a:r>
+          </a:p>
+          <a:p>
+            <a:r>
+              <a:t>【联动】图表为原生可编辑图表：右键“编辑数据”即可替换数值。</a:t>
+            </a:r>
+          </a:p>
+        </p:txBody>
+      </p:sp>
+      <p:sp>
+        <p:nvSpPr>
+          <p:cNvPr id="4" name="Slide Number Placeholder 3"/>
+          <p:cNvSpPr>
+            <a:spLocks noGrp="1"/>
+          </p:cNvSpPr>
+          <p:nvPr>
+            <p:ph type="sldNum" idx="5" sz="quarter"/>
+          </p:nvPr>
+        </p:nvSpPr>
+        <p:spPr/>
+      </p:sp>
+    </p:spTree>
+  </p:cSld>
+  <p:clrMapOvr>
+    <a:masterClrMapping/>
+  </p:clrMapOvr>
+</p:notes>
+</file>
+
+<file path=ppt/notesSlides/notesSlide2.xml><?xml version="1.0" encoding="utf-8"?>
+<p:notes xmlns:a="http://schemas.openxmlformats.org/drawingml/2006/main" xmlns:p="http://schemas.openxmlformats.org/presentationml/2006/main" xmlns:r="http://schemas.openxmlformats.org/officeDocument/2006/relationships">
+  <p:cSld>
+    <p:spTree>
+      <p:nvGrpSpPr>
+        <p:cNvPr id="1" name=""/>
+        <p:cNvGrpSpPr/>
+        <p:nvPr/>
+      </p:nvGrpSpPr>
+      <p:grpSpPr>
+        <a:xfrm>
+          <a:off x="0" y="0"/>
+          <a:ext cx="0" cy="0"/>
+          <a:chOff x="0" y="0"/>
+          <a:chExt cx="0" cy="0"/>
+        </a:xfrm>
+      </p:grpSpPr>
+      <p:sp>
+        <p:nvSpPr>
+          <p:cNvPr id="2" name="Slide Image Placeholder 1"/>
+          <p:cNvSpPr>
+            <a:spLocks noGrp="1"/>
+          </p:cNvSpPr>
+          <p:nvPr>
+            <p:ph type="sldImg" idx="2"/>
+          </p:nvPr>
+        </p:nvSpPr>
+        <p:spPr/>
+      </p:sp>
+      <p:sp>
+        <p:nvSpPr>
+          <p:cNvPr id="3" name="Notes Placeholder 2"/>
+          <p:cNvSpPr>
+            <a:spLocks noGrp="1"/>
+          </p:cNvSpPr>
+          <p:nvPr>
+            <p:ph type="body" idx="3" sz="quarter"/>
+          </p:nvPr>
+        </p:nvSpPr>
+        <p:spPr/>
+        <p:txBody>
+          <a:bodyPr/>
+          <a:lstStyle/>
+          <a:p>
+            <a:r>
+              <a:t>【页面定位】OVERVIEW —— 概览页：快速带过结构，告诉听众接下来讲什么。</a:t>
+            </a:r>
+          </a:p>
+          <a:p>
+            <a:r>
+              <a:t>【放映】本页元素按“背景→主体→标注”顺序错峰入场（约 2 秒完成）；开启“使用计时器”后本页停留 8 秒自动翻页。</a:t>
+            </a:r>
+          </a:p>
+          <a:p>
+            <a:r>
+              <a:t>【编辑】直接点击文本框替换占位文字；在“设计→变体”中一键换配色；图片占位框右键“更改图片”即可替换。</a:t>
+            </a:r>
+          </a:p>
+          <a:p>
+            <a:r>
+              <a:t>【联动】图表为原生可编辑图表：右键“编辑数据”即可替换数值。</a:t>
+            </a:r>
+          </a:p>
+        </p:txBody>
+      </p:sp>
+      <p:sp>
+        <p:nvSpPr>
+          <p:cNvPr id="4" name="Slide Number Placeholder 3"/>
+          <p:cNvSpPr>
+            <a:spLocks noGrp="1"/>
+          </p:cNvSpPr>
+          <p:nvPr>
+            <p:ph type="sldNum" idx="5" sz="quarter"/>
+          </p:nvPr>
+        </p:nvSpPr>
+        <p:spPr/>
+      </p:sp>
+    </p:spTree>
+  </p:cSld>
+  <p:clrMapOvr>
+    <a:masterClrMapping/>
+  </p:clrMapOvr>
+</p:notes>
+</file>
+
+<file path=ppt/notesSlides/notesSlide3.xml><?xml version="1.0" encoding="utf-8"?>
+<p:notes xmlns:a="http://schemas.openxmlformats.org/drawingml/2006/main" xmlns:p="http://schemas.openxmlformats.org/presentationml/2006/main" xmlns:r="http://schemas.openxmlformats.org/officeDocument/2006/relationships">
+  <p:cSld>
+    <p:spTree>
+      <p:nvGrpSpPr>
+        <p:cNvPr id="1" name=""/>
+        <p:cNvGrpSpPr/>
+        <p:nvPr/>
+      </p:nvGrpSpPr>
+      <p:grpSpPr>
+        <a:xfrm>
+          <a:off x="0" y="0"/>
+          <a:ext cx="0" cy="0"/>
+          <a:chOff x="0" y="0"/>
+          <a:chExt cx="0" cy="0"/>
+        </a:xfrm>
+      </p:grpSpPr>
+      <p:sp>
+        <p:nvSpPr>
+          <p:cNvPr id="2" name="Slide Image Placeholder 1"/>
+          <p:cNvSpPr>
+            <a:spLocks noGrp="1"/>
+          </p:cNvSpPr>
+          <p:nvPr>
+            <p:ph type="sldImg" idx="2"/>
+          </p:nvPr>
+        </p:nvSpPr>
+        <p:spPr/>
+      </p:sp>
+      <p:sp>
+        <p:nvSpPr>
+          <p:cNvPr id="3" name="Notes Placeholder 2"/>
+          <p:cNvSpPr>
+            <a:spLocks noGrp="1"/>
+          </p:cNvSpPr>
+          <p:nvPr>
+            <p:ph type="body" idx="3" sz="quarter"/>
+          </p:nvPr>
+        </p:nvSpPr>
+        <p:spPr/>
+        <p:txBody>
+          <a:bodyPr/>
+          <a:lstStyle/>
+          <a:p>
+            <a:r>
+              <a:t>【页面定位】01 —— 内容页：逐条展开，配合动画节奏点击推进。</a:t>
+            </a:r>
+          </a:p>
+          <a:p>
+            <a:r>
+              <a:t>【放映】本页元素按“背景→主体→标注”顺序错峰入场（约 2 秒完成）；开启“使用计时器”后本页停留 8 秒自动翻页。</a:t>
+            </a:r>
+          </a:p>
+          <a:p>
+            <a:r>
+              <a:t>【编辑】直接点击文本框替换占位文字；在“设计→变体”中一键换配色；图片占位框右键“更改图片”即可替换。</a:t>
+            </a:r>
+          </a:p>
+          <a:p>
+            <a:r>
+              <a:t>【联动】图表为原生可编辑图表：右键“编辑数据”即可替换数值。</a:t>
+            </a:r>
+          </a:p>
+        </p:txBody>
+      </p:sp>
+      <p:sp>
+        <p:nvSpPr>
+          <p:cNvPr id="4" name="Slide Number Placeholder 3"/>
+          <p:cNvSpPr>
+            <a:spLocks noGrp="1"/>
+          </p:cNvSpPr>
+          <p:nvPr>
+            <p:ph type="sldNum" idx="5" sz="quarter"/>
+          </p:nvPr>
+        </p:nvSpPr>
+        <p:spPr/>
+      </p:sp>
+    </p:spTree>
+  </p:cSld>
+  <p:clrMapOvr>
+    <a:masterClrMapping/>
+  </p:clrMapOvr>
+</p:notes>
+</file>
+
+<file path=ppt/notesSlides/notesSlide4.xml><?xml version="1.0" encoding="utf-8"?>
+<p:notes xmlns:a="http://schemas.openxmlformats.org/drawingml/2006/main" xmlns:p="http://schemas.openxmlformats.org/presentationml/2006/main" xmlns:r="http://schemas.openxmlformats.org/officeDocument/2006/relationships">
+  <p:cSld>
+    <p:spTree>
+      <p:nvGrpSpPr>
+        <p:cNvPr id="1" name=""/>
+        <p:cNvGrpSpPr/>
+        <p:nvPr/>
+      </p:nvGrpSpPr>
+      <p:grpSpPr>
+        <a:xfrm>
+          <a:off x="0" y="0"/>
+          <a:ext cx="0" cy="0"/>
+          <a:chOff x="0" y="0"/>
+          <a:chExt cx="0" cy="0"/>
+        </a:xfrm>
+      </p:grpSpPr>
+      <p:sp>
+        <p:nvSpPr>
+          <p:cNvPr id="2" name="Slide Image Placeholder 1"/>
+          <p:cNvSpPr>
+            <a:spLocks noGrp="1"/>
+          </p:cNvSpPr>
+          <p:nvPr>
+            <p:ph type="sldImg" idx="2"/>
+          </p:nvPr>
+        </p:nvSpPr>
+        <p:spPr/>
+      </p:sp>
+      <p:sp>
+        <p:nvSpPr>
+          <p:cNvPr id="3" name="Notes Placeholder 2"/>
+          <p:cNvSpPr>
+            <a:spLocks noGrp="1"/>
+          </p:cNvSpPr>
+          <p:nvPr>
+            <p:ph type="body" idx="3" sz="quarter"/>
+          </p:nvPr>
+        </p:nvSpPr>
+        <p:spPr/>
+        <p:txBody>
+          <a:bodyPr/>
+          <a:lstStyle/>
+          <a:p>
+            <a:r>
+              <a:t>【页面定位】OVERVIEW —— 数据页：先说结论，再用图表佐证。</a:t>
+            </a:r>
+          </a:p>
+          <a:p>
+            <a:r>
+              <a:t>【放映】本页元素按“背景→主体→标注”顺序错峰入场（约 2 秒完成）；开启“使用计时器”后本页停留 8 秒自动翻页。</a:t>
+            </a:r>
+          </a:p>
+          <a:p>
+            <a:r>
+              <a:t>【编辑】直接点击文本框替换占位文字；在“设计→变体”中一键换配色；图片占位框右键“更改图片”即可替换。</a:t>
+            </a:r>
+          </a:p>
+          <a:p>
+            <a:r>
+              <a:t>【联动】图表为原生可编辑图表：右键“编辑数据”即可替换数值。</a:t>
+            </a:r>
+          </a:p>
+        </p:txBody>
+      </p:sp>
+      <p:sp>
+        <p:nvSpPr>
+          <p:cNvPr id="4" name="Slide Number Placeholder 3"/>
+          <p:cNvSpPr>
+            <a:spLocks noGrp="1"/>
+          </p:cNvSpPr>
+          <p:nvPr>
+            <p:ph type="sldNum" idx="5" sz="quarter"/>
+          </p:nvPr>
+        </p:nvSpPr>
+        <p:spPr/>
+      </p:sp>
+    </p:spTree>
+  </p:cSld>
+  <p:clrMapOvr>
+    <a:masterClrMapping/>
+  </p:clrMapOvr>
+</p:notes>
+</file>
+
+<file path=ppt/notesSlides/notesSlide5.xml><?xml version="1.0" encoding="utf-8"?>
+<p:notes xmlns:a="http://schemas.openxmlformats.org/drawingml/2006/main" xmlns:p="http://schemas.openxmlformats.org/presentationml/2006/main" xmlns:r="http://schemas.openxmlformats.org/officeDocument/2006/relationships">
+  <p:cSld>
+    <p:spTree>
+      <p:nvGrpSpPr>
+        <p:cNvPr id="1" name=""/>
+        <p:cNvGrpSpPr/>
+        <p:nvPr/>
+      </p:nvGrpSpPr>
+      <p:grpSpPr>
+        <a:xfrm>
+          <a:off x="0" y="0"/>
+          <a:ext cx="0" cy="0"/>
+          <a:chOff x="0" y="0"/>
+          <a:chExt cx="0" cy="0"/>
+        </a:xfrm>
+      </p:grpSpPr>
+      <p:sp>
+        <p:nvSpPr>
+          <p:cNvPr id="2" name="Slide Image Placeholder 1"/>
+          <p:cNvSpPr>
+            <a:spLocks noGrp="1"/>
+          </p:cNvSpPr>
+          <p:nvPr>
+            <p:ph type="sldImg" idx="2"/>
+          </p:nvPr>
+        </p:nvSpPr>
+        <p:spPr/>
+      </p:sp>
+      <p:sp>
+        <p:nvSpPr>
+          <p:cNvPr id="3" name="Notes Placeholder 2"/>
+          <p:cNvSpPr>
+            <a:spLocks noGrp="1"/>
+          </p:cNvSpPr>
+          <p:nvPr>
+            <p:ph type="body" idx="3" sz="quarter"/>
+          </p:nvPr>
+        </p:nvSpPr>
+        <p:spPr/>
+        <p:txBody>
+          <a:bodyPr/>
+          <a:lstStyle/>
+          <a:p>
+            <a:r>
+              <a:t>【页面定位】KEY POINTS —— 收尾页：总结要点并给出行动号召或联系方式。</a:t>
+            </a:r>
+          </a:p>
+          <a:p>
+            <a:r>
+              <a:t>【放映】本页元素按“背景→主体→标注”顺序错峰入场（约 2 秒完成）；开启“使用计时器”后本页停留 8 秒自动翻页。</a:t>
+            </a:r>
+          </a:p>
+          <a:p>
+            <a:r>
+              <a:t>【编辑】直接点击文本框替换占位文字；在“设计→变体”中一键换配色；图片占位框右键“更改图片”即可替换。</a:t>
+            </a:r>
+          </a:p>
+          <a:p>
+            <a:r>
+              <a:t>【联动】图表为原生可编辑图表：右键“编辑数据”即可替换数值。</a:t>
+            </a:r>
+          </a:p>
+        </p:txBody>
+      </p:sp>
+      <p:sp>
+        <p:nvSpPr>
+          <p:cNvPr id="4" name="Slide Number Placeholder 3"/>
+          <p:cNvSpPr>
+            <a:spLocks noGrp="1"/>
+          </p:cNvSpPr>
+          <p:nvPr>
+            <p:ph type="sldNum" idx="5" sz="quarter"/>
+          </p:nvPr>
+        </p:nvSpPr>
+        <p:spPr/>
+      </p:sp>
+    </p:spTree>
+  </p:cSld>
+  <p:clrMapOvr>
+    <a:masterClrMapping/>
+  </p:clrMapOvr>
+</p:notes>
+</file>
+
+<file path=ppt/notesSlides/notesSlide6.xml><?xml version="1.0" encoding="utf-8"?>
+<p:notes xmlns:a="http://schemas.openxmlformats.org/drawingml/2006/main" xmlns:p="http://schemas.openxmlformats.org/presentationml/2006/main" xmlns:r="http://schemas.openxmlformats.org/officeDocument/2006/relationships">
+  <p:cSld>
+    <p:spTree>
+      <p:nvGrpSpPr>
+        <p:cNvPr id="1" name=""/>
+        <p:cNvGrpSpPr/>
+        <p:nvPr/>
+      </p:nvGrpSpPr>
+      <p:grpSpPr>
+        <a:xfrm>
+          <a:off x="0" y="0"/>
+          <a:ext cx="0" cy="0"/>
+          <a:chOff x="0" y="0"/>
+          <a:chExt cx="0" cy="0"/>
+        </a:xfrm>
+      </p:grpSpPr>
+      <p:sp>
+        <p:nvSpPr>
+          <p:cNvPr id="2" name="Slide Image Placeholder 1"/>
+          <p:cNvSpPr>
+            <a:spLocks noGrp="1"/>
+          </p:cNvSpPr>
+          <p:nvPr>
+            <p:ph type="sldImg" idx="2"/>
+          </p:nvPr>
+        </p:nvSpPr>
+        <p:spPr/>
+      </p:sp>
+      <p:sp>
+        <p:nvSpPr>
+          <p:cNvPr id="3" name="Notes Placeholder 2"/>
+          <p:cNvSpPr>
+            <a:spLocks noGrp="1"/>
+          </p:cNvSpPr>
+          <p:nvPr>
+            <p:ph type="body" idx="3" sz="quarter"/>
+          </p:nvPr>
+        </p:nvSpPr>
+        <p:spPr/>
+        <p:txBody>
+          <a:bodyPr/>
+          <a:lstStyle/>
+          <a:p>
+            <a:r>
+              <a:t>【页面定位】METRICS —— 开场页：自我介绍或破题，停留时间可稍长。</a:t>
+            </a:r>
+          </a:p>
+          <a:p>
+            <a:r>
+              <a:t>【放映】本页元素按“背景→主体→标注”顺序错峰入场（约 2 秒完成）；开启“使用计时器”后本页停留 8 秒自动翻页。</a:t>
+            </a:r>
+          </a:p>
+          <a:p>
+            <a:r>
+              <a:t>【编辑】直接点击文本框替换占位文字；在“设计→变体”中一键换配色；图片占位框右键“更改图片”即可替换。</a:t>
+            </a:r>
+          </a:p>
+          <a:p>
+            <a:r>
+              <a:t>【联动】图表为原生可编辑图表：右键“编辑数据”即可替换数值。</a:t>
+            </a:r>
+          </a:p>
+        </p:txBody>
+      </p:sp>
+      <p:sp>
+        <p:nvSpPr>
+          <p:cNvPr id="4" name="Slide Number Placeholder 3"/>
+          <p:cNvSpPr>
+            <a:spLocks noGrp="1"/>
+          </p:cNvSpPr>
+          <p:nvPr>
+            <p:ph type="sldNum" idx="5" sz="quarter"/>
+          </p:nvPr>
+        </p:nvSpPr>
+        <p:spPr/>
+      </p:sp>
+    </p:spTree>
+  </p:cSld>
+  <p:clrMapOvr>
+    <a:masterClrMapping/>
+  </p:clrMapOvr>
+</p:notes>
+</file>
+
+<file path=ppt/notesSlides/notesSlide7.xml><?xml version="1.0" encoding="utf-8"?>
+<p:notes xmlns:a="http://schemas.openxmlformats.org/drawingml/2006/main" xmlns:p="http://schemas.openxmlformats.org/presentationml/2006/main" xmlns:r="http://schemas.openxmlformats.org/officeDocument/2006/relationships">
+  <p:cSld>
+    <p:spTree>
+      <p:nvGrpSpPr>
+        <p:cNvPr id="1" name=""/>
+        <p:cNvGrpSpPr/>
+        <p:nvPr/>
+      </p:nvGrpSpPr>
+      <p:grpSpPr>
+        <a:xfrm>
+          <a:off x="0" y="0"/>
+          <a:ext cx="0" cy="0"/>
+          <a:chOff x="0" y="0"/>
+          <a:chExt cx="0" cy="0"/>
+        </a:xfrm>
+      </p:grpSpPr>
+      <p:sp>
+        <p:nvSpPr>
+          <p:cNvPr id="2" name="Slide Image Placeholder 1"/>
+          <p:cNvSpPr>
+            <a:spLocks noGrp="1"/>
+          </p:cNvSpPr>
+          <p:nvPr>
+            <p:ph type="sldImg" idx="2"/>
+          </p:nvPr>
+        </p:nvSpPr>
+        <p:spPr/>
+      </p:sp>
+      <p:sp>
+        <p:nvSpPr>
+          <p:cNvPr id="3" name="Notes Placeholder 2"/>
+          <p:cNvSpPr>
+            <a:spLocks noGrp="1"/>
+          </p:cNvSpPr>
+          <p:nvPr>
+            <p:ph type="body" idx="3" sz="quarter"/>
+          </p:nvPr>
+        </p:nvSpPr>
+        <p:spPr/>
+        <p:txBody>
+          <a:bodyPr/>
+          <a:lstStyle/>
+          <a:p>
+            <a:r>
+              <a:t>【页面定位】PROCESS —— 概览页：快速带过结构，告诉听众接下来讲什么。</a:t>
+            </a:r>
+          </a:p>
+          <a:p>
+            <a:r>
+              <a:t>【放映】本页元素按“背景→主体→标注”顺序错峰入场（约 2 秒完成）；开启“使用计时器”后本页停留 8 秒自动翻页。</a:t>
+            </a:r>
+          </a:p>
+          <a:p>
+            <a:r>
+              <a:t>【编辑】直接点击文本框替换占位文字；在“设计→变体”中一键换配色；图片占位框右键“更改图片”即可替换。</a:t>
+            </a:r>
+          </a:p>
+          <a:p>
+            <a:r>
+              <a:t>【联动】图表为原生可编辑图表：右键“编辑数据”即可替换数值。</a:t>
+            </a:r>
+          </a:p>
+        </p:txBody>
+      </p:sp>
+      <p:sp>
+        <p:nvSpPr>
+          <p:cNvPr id="4" name="Slide Number Placeholder 3"/>
+          <p:cNvSpPr>
+            <a:spLocks noGrp="1"/>
+          </p:cNvSpPr>
+          <p:nvPr>
+            <p:ph type="sldNum" idx="5" sz="quarter"/>
+          </p:nvPr>
+        </p:nvSpPr>
+        <p:spPr/>
+      </p:sp>
+    </p:spTree>
+  </p:cSld>
+  <p:clrMapOvr>
+    <a:masterClrMapping/>
+  </p:clrMapOvr>
+</p:notes>
+</file>
+
+<file path=ppt/notesSlides/notesSlide8.xml><?xml version="1.0" encoding="utf-8"?>
+<p:notes xmlns:a="http://schemas.openxmlformats.org/drawingml/2006/main" xmlns:p="http://schemas.openxmlformats.org/presentationml/2006/main" xmlns:r="http://schemas.openxmlformats.org/officeDocument/2006/relationships">
+  <p:cSld>
+    <p:spTree>
+      <p:nvGrpSpPr>
+        <p:cNvPr id="1" name=""/>
+        <p:cNvGrpSpPr/>
+        <p:nvPr/>
+      </p:nvGrpSpPr>
+      <p:grpSpPr>
+        <a:xfrm>
+          <a:off x="0" y="0"/>
+          <a:ext cx="0" cy="0"/>
+          <a:chOff x="0" y="0"/>
+          <a:chExt cx="0" cy="0"/>
+        </a:xfrm>
+      </p:grpSpPr>
+      <p:sp>
+        <p:nvSpPr>
+          <p:cNvPr id="2" name="Slide Image Placeholder 1"/>
+          <p:cNvSpPr>
+            <a:spLocks noGrp="1"/>
+          </p:cNvSpPr>
+          <p:nvPr>
+            <p:ph type="sldImg" idx="2"/>
+          </p:nvPr>
+        </p:nvSpPr>
+        <p:spPr/>
+      </p:sp>
+      <p:sp>
+        <p:nvSpPr>
+          <p:cNvPr id="3" name="Notes Placeholder 2"/>
+          <p:cNvSpPr>
+            <a:spLocks noGrp="1"/>
+          </p:cNvSpPr>
+          <p:nvPr>
+            <p:ph type="body" idx="3" sz="quarter"/>
+          </p:nvPr>
+        </p:nvSpPr>
+        <p:spPr/>
+        <p:txBody>
+          <a:bodyPr/>
+          <a:lstStyle/>
+          <a:p>
+            <a:r>
+              <a:t>【页面定位】PROCESS —— 内容页：逐条展开，配合动画节奏点击推进。</a:t>
+            </a:r>
+          </a:p>
+          <a:p>
+            <a:r>
+              <a:t>【放映】本页元素按“背景→主体→标注”顺序错峰入场（约 2 秒完成）；开启“使用计时器”后本页停留 8 秒自动翻页。</a:t>
+            </a:r>
+          </a:p>
+          <a:p>
+            <a:r>
+              <a:t>【编辑】直接点击文本框替换占位文字；在“设计→变体”中一键换配色；图片占位框右键“更改图片”即可替换。</a:t>
+            </a:r>
+          </a:p>
+          <a:p>
+            <a:r>
+              <a:t>【联动】图表为原生可编辑图表：右键“编辑数据”即可替换数值。</a:t>
+            </a:r>
+          </a:p>
+        </p:txBody>
+      </p:sp>
+      <p:sp>
+        <p:nvSpPr>
+          <p:cNvPr id="4" name="Slide Number Placeholder 3"/>
+          <p:cNvSpPr>
+            <a:spLocks noGrp="1"/>
+          </p:cNvSpPr>
+          <p:nvPr>
+            <p:ph type="sldNum" idx="5" sz="quarter"/>
+          </p:nvPr>
+        </p:nvSpPr>
+        <p:spPr/>
+      </p:sp>
+    </p:spTree>
+  </p:cSld>
+  <p:clrMapOvr>
+    <a:masterClrMapping/>
+  </p:clrMapOvr>
+</p:notes>
+</file>
+
+<file path=ppt/notesSlides/notesSlide9.xml><?xml version="1.0" encoding="utf-8"?>
+<p:notes xmlns:a="http://schemas.openxmlformats.org/drawingml/2006/main" xmlns:p="http://schemas.openxmlformats.org/presentationml/2006/main" xmlns:r="http://schemas.openxmlformats.org/officeDocument/2006/relationships">
+  <p:cSld>
+    <p:spTree>
+      <p:nvGrpSpPr>
+        <p:cNvPr id="1" name=""/>
+        <p:cNvGrpSpPr/>
+        <p:nvPr/>
+      </p:nvGrpSpPr>
+      <p:grpSpPr>
+        <a:xfrm>
+          <a:off x="0" y="0"/>
+          <a:ext cx="0" cy="0"/>
+          <a:chOff x="0" y="0"/>
+          <a:chExt cx="0" cy="0"/>
+        </a:xfrm>
+      </p:grpSpPr>
+      <p:sp>
+        <p:nvSpPr>
+          <p:cNvPr id="2" name="Slide Image Placeholder 1"/>
+          <p:cNvSpPr>
+            <a:spLocks noGrp="1"/>
+          </p:cNvSpPr>
+          <p:nvPr>
+            <p:ph type="sldImg" idx="2"/>
+          </p:nvPr>
+        </p:nvSpPr>
+        <p:spPr/>
+      </p:sp>
+      <p:sp>
+        <p:nvSpPr>
+          <p:cNvPr id="3" name="Notes Placeholder 2"/>
+          <p:cNvSpPr>
+            <a:spLocks noGrp="1"/>
+          </p:cNvSpPr>
+          <p:nvPr>
+            <p:ph type="body" idx="3" sz="quarter"/>
+          </p:nvPr>
+        </p:nvSpPr>
+        <p:spPr/>
+        <p:txBody>
+          <a:bodyPr/>
+          <a:lstStyle/>
+          <a:p>
+            <a:r>
+              <a:t>【页面定位】DATA —— 数据页：先说结论，再用图表佐证。</a:t>
+            </a:r>
+          </a:p>
+          <a:p>
+            <a:r>
+              <a:t>【放映】本页元素按“背景→主体→标注”顺序错峰入场（约 2 秒完成）；开启“使用计时器”后本页停留 8 秒自动翻页。</a:t>
+            </a:r>
+          </a:p>
+          <a:p>
+            <a:r>
+              <a:t>【编辑】直接点击文本框替换占位文字；在“设计→变体”中一键换配色；图片占位框右键“更改图片”即可替换。</a:t>
+            </a:r>
+          </a:p>
+          <a:p>
+            <a:r>
+              <a:t>【联动】图表为原生可编辑图表：右键“编辑数据”即可替换数值。</a:t>
+            </a:r>
+          </a:p>
+        </p:txBody>
+      </p:sp>
+      <p:sp>
+        <p:nvSpPr>
+          <p:cNvPr id="4" name="Slide Number Placeholder 3"/>
+          <p:cNvSpPr>
+            <a:spLocks noGrp="1"/>
+          </p:cNvSpPr>
+          <p:nvPr>
+            <p:ph type="sldNum" idx="5" sz="quarter"/>
+          </p:nvPr>
+        </p:nvSpPr>
+        <p:spPr/>
+      </p:sp>
+    </p:spTree>
+  </p:cSld>
+  <p:clrMapOvr>
+    <a:masterClrMapping/>
+  </p:clrMapOvr>
+</p:notes>
 </file>
 
 <file path=ppt/slideLayouts/slideLayout1.xml><?xml version="1.0" encoding="utf-8"?>
@@ -3376,7 +5256,7 @@
   <p:clrMapOvr>
     <a:masterClrMapping/>
   </p:clrMapOvr>
-  <p:transition spd="med">
+  <p:transition spd="med" advClick="1" advTm="8000">
     <p:wipe dir="u"/>
   </p:transition>
   <p:timing>
@@ -4643,7 +6523,7 @@
   <p:clrMapOvr>
     <a:masterClrMapping/>
   </p:clrMapOvr>
-  <p:transition spd="med">
+  <p:transition spd="med" advClick="1" advTm="8000">
     <p:newsflash/>
   </p:transition>
   <p:timing>
@@ -6003,7 +7883,7 @@
   <p:clrMapOvr>
     <a:masterClrMapping/>
   </p:clrMapOvr>
-  <p:transition spd="med">
+  <p:transition spd="med" advClick="1" advTm="8000">
     <p:push dir="u"/>
   </p:transition>
   <p:timing>
@@ -6907,7 +8787,7 @@
   <p:clrMapOvr>
     <a:masterClrMapping/>
   </p:clrMapOvr>
-  <p:transition spd="med">
+  <p:transition spd="med" advClick="1" advTm="8000">
     <p:wipe dir="d"/>
   </p:transition>
   <p:timing>
@@ -7566,7 +9446,7 @@
   <p:clrMapOvr>
     <a:masterClrMapping/>
   </p:clrMapOvr>
-  <p:transition spd="med">
+  <p:transition spd="med" advClick="1" advTm="8000">
     <p:fade/>
   </p:transition>
   <p:timing>
@@ -8807,7 +10687,7 @@
   <p:clrMapOvr>
     <a:masterClrMapping/>
   </p:clrMapOvr>
-  <p:transition spd="med">
+  <p:transition spd="med" advClick="1" advTm="8000">
     <p:push dir="l"/>
   </p:transition>
   <p:timing>
@@ -10301,7 +12181,7 @@
   <p:clrMapOvr>
     <a:masterClrMapping/>
   </p:clrMapOvr>
-  <p:transition spd="med">
+  <p:transition spd="med" advClick="1" advTm="8000">
     <p:wipe dir="u"/>
   </p:transition>
   <p:timing>
@@ -11787,7 +13667,7 @@
   <p:clrMapOvr>
     <a:masterClrMapping/>
   </p:clrMapOvr>
-  <p:transition spd="med">
+  <p:transition spd="med" advClick="1" advTm="8000">
     <p:split orient="horz"/>
   </p:transition>
   <p:timing>
@@ -13221,7 +15101,7 @@
   <p:clrMapOvr>
     <a:masterClrMapping/>
   </p:clrMapOvr>
-  <p:transition spd="med">
+  <p:transition spd="med" advClick="1" advTm="8000">
     <p:blinds dir="horz"/>
   </p:transition>
   <p:timing>
@@ -14081,7 +15961,7 @@
   <p:clrMapOvr>
     <a:masterClrMapping/>
   </p:clrMapOvr>
-  <p:transition spd="med">
+  <p:transition spd="med" advClick="1" advTm="8000">
     <p:circle dir="in"/>
   </p:transition>
   <p:timing>
@@ -15111,7 +16991,7 @@
   <p:clrMapOvr>
     <a:masterClrMapping/>
   </p:clrMapOvr>
-  <p:transition spd="med">
+  <p:transition spd="med" advClick="1" advTm="8000">
     <p:split orient="horz"/>
   </p:transition>
   <p:timing>
@@ -16015,7 +17895,7 @@
   <p:clrMapOvr>
     <a:masterClrMapping/>
   </p:clrMapOvr>
-  <p:transition spd="med">
+  <p:transition spd="med" advClick="1" advTm="8000">
     <p:blinds dir="horz"/>
   </p:transition>
   <p:timing>
@@ -17128,7 +19008,7 @@
   <p:clrMapOvr>
     <a:masterClrMapping/>
   </p:clrMapOvr>
-  <p:transition spd="med">
+  <p:transition spd="med" advClick="1" advTm="8000">
     <p:circle dir="in"/>
   </p:transition>
   <p:timing>
@@ -18452,7 +20332,7 @@
   <p:clrMapOvr>
     <a:masterClrMapping/>
   </p:clrMapOvr>
-  <p:transition spd="med">
+  <p:transition spd="med" advClick="1" advTm="8000">
     <p:comb dir="horz"/>
   </p:transition>
   <p:timing>
@@ -20127,7 +22007,7 @@
   <p:clrMapOvr>
     <a:masterClrMapping/>
   </p:clrMapOvr>
-  <p:transition spd="med">
+  <p:transition spd="med" advClick="1" advTm="8000">
     <p:dissolve/>
   </p:transition>
   <p:timing>
@@ -21681,7 +23561,7 @@
   <p:clrMapOvr>
     <a:masterClrMapping/>
   </p:clrMapOvr>
-  <p:transition spd="med">
+  <p:transition spd="med" advClick="1" advTm="8000">
     <p:zoom dir="in"/>
   </p:transition>
   <p:timing>
@@ -22987,7 +24867,7 @@
   <p:clrMapOvr>
     <a:masterClrMapping/>
   </p:clrMapOvr>
-  <p:transition spd="med">
+  <p:transition spd="med" advClick="1" advTm="8000">
     <p:cover dir="l"/>
   </p:transition>
   <p:timing>
@@ -24239,7 +26119,7 @@
                 <a:ea typeface="微软雅黑"/>
                 <a:cs typeface="微软雅黑"/>
               </a:rPr>
-              <a:t>图表占位 · 在 PowerPoint 中插入图表替换</a:t>
+              <a:t>原生可编辑图表 · 右键图表 → 编辑数据 即可替换数值</a:t>
             </a:r>
           </a:p>
         </p:txBody>
@@ -24500,7 +26380,7 @@
   <p:clrMapOvr>
     <a:masterClrMapping/>
   </p:clrMapOvr>
-  <p:transition spd="med">
+  <p:transition spd="med" advClick="1" advTm="8000">
     <p:checker dir="across"/>
   </p:transition>
   <p:timing>
@@ -25353,4 +27233,324 @@
   </a:objectDefaults>
   <a:extraClrSchemeLst/>
 </a:theme>
+</file>
+
+<file path=ppt/theme/theme2.xml><?xml version="1.0" encoding="utf-8"?>
+<a:theme xmlns:a="http://schemas.openxmlformats.org/drawingml/2006/main" name="Office Theme">
+  <a:themeElements>
+    <a:clrScheme name="Office">
+      <a:dk1>
+        <a:sysClr val="windowText" lastClr="000000"/>
+      </a:dk1>
+      <a:lt1>
+        <a:sysClr val="window" lastClr="FFFFFF"/>
+      </a:lt1>
+      <a:dk2>
+        <a:srgbClr val="1F497D"/>
+      </a:dk2>
+      <a:lt2>
+        <a:srgbClr val="EEECE1"/>
+      </a:lt2>
+      <a:accent1>
+        <a:srgbClr val="4F81BD"/>
+      </a:accent1>
+      <a:accent2>
+        <a:srgbClr val="C0504D"/>
+      </a:accent2>
+      <a:accent3>
+        <a:srgbClr val="9BBB59"/>
+      </a:accent3>
+      <a:accent4>
+        <a:srgbClr val="8064A2"/>
+      </a:accent4>
+      <a:accent5>
+        <a:srgbClr val="4BACC6"/>
+      </a:accent5>
+      <a:accent6>
+        <a:srgbClr val="F79646"/>
+      </a:accent6>
+      <a:hlink>
+        <a:srgbClr val="0000FF"/>
+      </a:hlink>
+      <a:folHlink>
+        <a:srgbClr val="800080"/>
+      </a:folHlink>
+    </a:clrScheme>
+    <a:fontScheme name="Office">
+      <a:majorFont>
+        <a:latin typeface="Calibri"/>
+        <a:ea typeface=""/>
+        <a:cs typeface=""/>
+        <a:font script="Jpan" typeface="ＭＳ Ｐゴシック"/>
+        <a:font script="Hang" typeface="맑은 고딕"/>
+        <a:font script="Hans" typeface="宋体"/>
+        <a:font script="Hant" typeface="新細明體"/>
+        <a:font script="Arab" typeface="Times New Roman"/>
+        <a:font script="Hebr" typeface="Times New Roman"/>
+        <a:font script="Thai" typeface="Angsana New"/>
+        <a:font script="Ethi" typeface="Nyala"/>
+        <a:font script="Beng" typeface="Vrinda"/>
+        <a:font script="Gujr" typeface="Shruti"/>
+        <a:font script="Khmr" typeface="MoolBoran"/>
+        <a:font script="Knda" typeface="Tunga"/>
+        <a:font script="Guru" typeface="Raavi"/>
+        <a:font script="Cans" typeface="Euphemia"/>
+        <a:font script="Cher" typeface="Plantagenet Cherokee"/>
+        <a:font script="Yiii" typeface="Microsoft Yi Baiti"/>
+        <a:font script="Tibt" typeface="Microsoft Himalaya"/>
+        <a:font script="Thaa" typeface="MV Boli"/>
+        <a:font script="Deva" typeface="Mangal"/>
+        <a:font script="Telu" typeface="Gautami"/>
+        <a:font script="Taml" typeface="Latha"/>
+        <a:font script="Syrc" typeface="Estrangelo Edessa"/>
+        <a:font script="Orya" typeface="Kalinga"/>
+        <a:font script="Mlym" typeface="Kartika"/>
+        <a:font script="Laoo" typeface="DokChampa"/>
+        <a:font script="Sinh" typeface="Iskoola Pota"/>
+        <a:font script="Mong" typeface="Mongolian Baiti"/>
+        <a:font script="Viet" typeface="Times New Roman"/>
+        <a:font script="Uigh" typeface="Microsoft Uighur"/>
+        <a:font script="Geor" typeface="Sylfaen"/>
+      </a:majorFont>
+      <a:minorFont>
+        <a:latin typeface="Calibri"/>
+        <a:ea typeface=""/>
+        <a:cs typeface=""/>
+        <a:font script="Jpan" typeface="ＭＳ Ｐゴシック"/>
+        <a:font script="Hang" typeface="맑은 고딕"/>
+        <a:font script="Hans" typeface="宋体"/>
+        <a:font script="Hant" typeface="新細明體"/>
+        <a:font script="Arab" typeface="Arial"/>
+        <a:font script="Hebr" typeface="Arial"/>
+        <a:font script="Thai" typeface="Cordia New"/>
+        <a:font script="Ethi" typeface="Nyala"/>
+        <a:font script="Beng" typeface="Vrinda"/>
+        <a:font script="Gujr" typeface="Shruti"/>
+        <a:font script="Khmr" typeface="DaunPenh"/>
+        <a:font script="Knda" typeface="Tunga"/>
+        <a:font script="Guru" typeface="Raavi"/>
+        <a:font script="Cans" typeface="Euphemia"/>
+        <a:font script="Cher" typeface="Plantagenet Cherokee"/>
+        <a:font script="Yiii" typeface="Microsoft Yi Baiti"/>
+        <a:font script="Tibt" typeface="Microsoft Himalaya"/>
+        <a:font script="Thaa" typeface="MV Boli"/>
+        <a:font script="Deva" typeface="Mangal"/>
+        <a:font script="Telu" typeface="Gautami"/>
+        <a:font script="Taml" typeface="Latha"/>
+        <a:font script="Syrc" typeface="Estrangelo Edessa"/>
+        <a:font script="Orya" typeface="Kalinga"/>
+        <a:font script="Mlym" typeface="Kartika"/>
+        <a:font script="Laoo" typeface="DokChampa"/>
+        <a:font script="Sinh" typeface="Iskoola Pota"/>
+        <a:font script="Mong" typeface="Mongolian Baiti"/>
+        <a:font script="Viet" typeface="Arial"/>
+        <a:font script="Uigh" typeface="Microsoft Uighur"/>
+        <a:font script="Geor" typeface="Sylfaen"/>
+      </a:minorFont>
+    </a:fontScheme>
+    <a:fmtScheme name="Office">
+      <a:fillStyleLst>
+        <a:solidFill>
+          <a:schemeClr val="phClr"/>
+        </a:solidFill>
+        <a:gradFill rotWithShape="1">
+          <a:gsLst>
+            <a:gs pos="0">
+              <a:schemeClr val="phClr">
+                <a:tint val="50000"/>
+                <a:satMod val="300000"/>
+              </a:schemeClr>
+            </a:gs>
+            <a:gs pos="35000">
+              <a:schemeClr val="phClr">
+                <a:tint val="37000"/>
+                <a:satMod val="300000"/>
+              </a:schemeClr>
+            </a:gs>
+            <a:gs pos="100000">
+              <a:schemeClr val="phClr">
+                <a:tint val="15000"/>
+                <a:satMod val="350000"/>
+              </a:schemeClr>
+            </a:gs>
+          </a:gsLst>
+          <a:lin ang="16200000" scaled="1"/>
+        </a:gradFill>
+        <a:gradFill rotWithShape="1">
+          <a:gsLst>
+            <a:gs pos="0">
+              <a:schemeClr val="phClr">
+                <a:tint val="100000"/>
+                <a:shade val="100000"/>
+                <a:satMod val="130000"/>
+              </a:schemeClr>
+            </a:gs>
+            <a:gs pos="100000">
+              <a:schemeClr val="phClr">
+                <a:tint val="50000"/>
+                <a:shade val="100000"/>
+                <a:satMod val="350000"/>
+              </a:schemeClr>
+            </a:gs>
+          </a:gsLst>
+          <a:lin ang="16200000" scaled="0"/>
+        </a:gradFill>
+      </a:fillStyleLst>
+      <a:lnStyleLst>
+        <a:ln w="9525" cap="flat" cmpd="sng" algn="ctr">
+          <a:solidFill>
+            <a:schemeClr val="phClr">
+              <a:shade val="95000"/>
+              <a:satMod val="105000"/>
+            </a:schemeClr>
+          </a:solidFill>
+          <a:prstDash val="solid"/>
+        </a:ln>
+        <a:ln w="25400" cap="flat" cmpd="sng" algn="ctr">
+          <a:solidFill>
+            <a:schemeClr val="phClr"/>
+          </a:solidFill>
+          <a:prstDash val="solid"/>
+        </a:ln>
+        <a:ln w="38100" cap="flat" cmpd="sng" algn="ctr">
+          <a:solidFill>
+            <a:schemeClr val="phClr"/>
+          </a:solidFill>
+          <a:prstDash val="solid"/>
+        </a:ln>
+      </a:lnStyleLst>
+      <a:effectStyleLst>
+        <a:effectStyle>
+          <a:effectLst>
+            <a:outerShdw blurRad="40000" dist="20000" dir="5400000" rotWithShape="0">
+              <a:srgbClr val="000000">
+                <a:alpha val="38000"/>
+              </a:srgbClr>
+            </a:outerShdw>
+          </a:effectLst>
+        </a:effectStyle>
+        <a:effectStyle>
+          <a:effectLst>
+            <a:outerShdw blurRad="40000" dist="23000" dir="5400000" rotWithShape="0">
+              <a:srgbClr val="000000">
+                <a:alpha val="35000"/>
+              </a:srgbClr>
+            </a:outerShdw>
+          </a:effectLst>
+        </a:effectStyle>
+        <a:effectStyle>
+          <a:effectLst>
+            <a:outerShdw blurRad="40000" dist="23000" dir="5400000" rotWithShape="0">
+              <a:srgbClr val="000000">
+                <a:alpha val="35000"/>
+              </a:srgbClr>
+            </a:outerShdw>
+          </a:effectLst>
+          <a:scene3d>
+            <a:camera prst="orthographicFront">
+              <a:rot lat="0" lon="0" rev="0"/>
+            </a:camera>
+            <a:lightRig rig="threePt" dir="t">
+              <a:rot lat="0" lon="0" rev="1200000"/>
+            </a:lightRig>
+          </a:scene3d>
+          <a:sp3d>
+            <a:bevelT w="63500" h="25400"/>
+          </a:sp3d>
+        </a:effectStyle>
+      </a:effectStyleLst>
+      <a:bgFillStyleLst>
+        <a:solidFill>
+          <a:schemeClr val="phClr"/>
+        </a:solidFill>
+        <a:gradFill rotWithShape="1">
+          <a:gsLst>
+            <a:gs pos="0">
+              <a:schemeClr val="phClr">
+                <a:tint val="40000"/>
+                <a:satMod val="350000"/>
+              </a:schemeClr>
+            </a:gs>
+            <a:gs pos="40000">
+              <a:schemeClr val="phClr">
+                <a:tint val="45000"/>
+                <a:shade val="99000"/>
+                <a:satMod val="350000"/>
+              </a:schemeClr>
+            </a:gs>
+            <a:gs pos="100000">
+              <a:schemeClr val="phClr">
+                <a:shade val="20000"/>
+                <a:satMod val="255000"/>
+              </a:schemeClr>
+            </a:gs>
+          </a:gsLst>
+          <a:path path="circle">
+            <a:fillToRect l="50000" t="-80000" r="50000" b="180000"/>
+          </a:path>
+        </a:gradFill>
+        <a:gradFill rotWithShape="1">
+          <a:gsLst>
+            <a:gs pos="0">
+              <a:schemeClr val="phClr">
+                <a:tint val="80000"/>
+                <a:satMod val="300000"/>
+              </a:schemeClr>
+            </a:gs>
+            <a:gs pos="100000">
+              <a:schemeClr val="phClr">
+                <a:shade val="30000"/>
+                <a:satMod val="200000"/>
+              </a:schemeClr>
+            </a:gs>
+          </a:gsLst>
+          <a:path path="circle">
+            <a:fillToRect l="50000" t="50000" r="50000" b="50000"/>
+          </a:path>
+        </a:gradFill>
+      </a:bgFillStyleLst>
+    </a:fmtScheme>
+  </a:themeElements>
+  <a:objectDefaults>
+    <a:spDef>
+      <a:spPr/>
+      <a:bodyPr/>
+      <a:lstStyle/>
+      <a:style>
+        <a:lnRef idx="1">
+          <a:schemeClr val="accent1"/>
+        </a:lnRef>
+        <a:fillRef idx="3">
+          <a:schemeClr val="accent1"/>
+        </a:fillRef>
+        <a:effectRef idx="2">
+          <a:schemeClr val="accent1"/>
+        </a:effectRef>
+        <a:fontRef idx="minor">
+          <a:schemeClr val="lt1"/>
+        </a:fontRef>
+      </a:style>
+    </a:spDef>
+    <a:lnDef>
+      <a:spPr/>
+      <a:bodyPr/>
+      <a:lstStyle/>
+      <a:style>
+        <a:lnRef idx="2">
+          <a:schemeClr val="accent1"/>
+        </a:lnRef>
+        <a:fillRef idx="0">
+          <a:schemeClr val="accent1"/>
+        </a:fillRef>
+        <a:effectRef idx="1">
+          <a:schemeClr val="accent1"/>
+        </a:effectRef>
+        <a:fontRef idx="minor">
+          <a:schemeClr val="tx1"/>
+        </a:fontRef>
+      </a:style>
+    </a:lnDef>
+  </a:objectDefaults>
+  <a:extraClrSchemeLst/>
+</a:theme>
 </file>